--- a/Презентация.pptx
+++ b/Презентация.pptx
@@ -1,11 +1,11 @@
 
 <file path=ppt/presentation.xml><?xml version="1.0" encoding="utf-8"?>
-<p:presentation xmlns:a="http://schemas.openxmlformats.org/drawingml/2006/main" xmlns:r="http://schemas.openxmlformats.org/officeDocument/2006/relationships" xmlns:p="http://schemas.openxmlformats.org/presentationml/2006/main" strictFirstAndLastChars="0" saveSubsetFonts="1" autoCompressPictures="0">
+<p:presentation xmlns:a="http://schemas.openxmlformats.org/drawingml/2006/main" xmlns:r="http://schemas.openxmlformats.org/officeDocument/2006/relationships" xmlns:p="http://schemas.openxmlformats.org/presentationml/2006/main" showSpecialPlsOnTitleSld="0" strictFirstAndLastChars="0" saveSubsetFonts="1" autoCompressPictures="0">
   <p:sldMasterIdLst>
     <p:sldMasterId id="2147483659" r:id="rId1"/>
   </p:sldMasterIdLst>
   <p:notesMasterIdLst>
-    <p:notesMasterId r:id="rId12"/>
+    <p:notesMasterId r:id="rId14"/>
   </p:notesMasterIdLst>
   <p:sldIdLst>
     <p:sldId id="256" r:id="rId2"/>
@@ -14,10 +14,12 @@
     <p:sldId id="259" r:id="rId5"/>
     <p:sldId id="260" r:id="rId6"/>
     <p:sldId id="261" r:id="rId7"/>
-    <p:sldId id="262" r:id="rId8"/>
-    <p:sldId id="263" r:id="rId9"/>
-    <p:sldId id="264" r:id="rId10"/>
-    <p:sldId id="265" r:id="rId11"/>
+    <p:sldId id="267" r:id="rId8"/>
+    <p:sldId id="266" r:id="rId9"/>
+    <p:sldId id="263" r:id="rId10"/>
+    <p:sldId id="268" r:id="rId11"/>
+    <p:sldId id="264" r:id="rId12"/>
+    <p:sldId id="265" r:id="rId13"/>
   </p:sldIdLst>
   <p:sldSz cx="9144000" cy="5143500" type="screen16x9"/>
   <p:notesSz cx="6858000" cy="9144000"/>
@@ -807,6 +809,25 @@
           </a:bodyPr>
           <a:lstStyle/>
           <a:p>
+            <a:r>
+              <a:rPr lang="ru-RU" dirty="0"/>
+              <a:t>Здравствуйте, уважаемые члены комиссии.</a:t>
+            </a:r>
+            <a:br>
+              <a:rPr lang="ru-RU" dirty="0"/>
+            </a:br>
+            <a:r>
+              <a:rPr lang="ru-RU" dirty="0"/>
+              <a:t>Тема моей выпускной квалификационной работы — «Алгоритмический онлайн-трейдинг с использованием технологий искусственного интеллекта».</a:t>
+            </a:r>
+          </a:p>
+          <a:p>
+            <a:r>
+              <a:rPr lang="ru-RU" dirty="0"/>
+              <a:t>В работе рассматривается программный прототип системы, которая обрабатывает минутные данные акций Московской биржи, строит краткосрочные прогнозы доходности и на их основе формирует торговые решения.</a:t>
+            </a:r>
+          </a:p>
+          <a:p>
             <a:pPr marL="0" lvl="0" indent="0" algn="l" rtl="0">
               <a:spcBef>
                 <a:spcPts val="0"/>
@@ -816,7 +837,7 @@
               </a:spcAft>
               <a:buNone/>
             </a:pPr>
-            <a:endParaRPr/>
+            <a:endParaRPr dirty="0"/>
           </a:p>
         </p:txBody>
       </p:sp>
@@ -833,7 +854,13 @@
   <p:cSld>
     <p:spTree>
       <p:nvGrpSpPr>
-        <p:cNvPr id="1" name="Shape 105"/>
+        <p:cNvPr id="1" name="Shape 93">
+          <a:extLst>
+            <a:ext uri="{FF2B5EF4-FFF2-40B4-BE49-F238E27FC236}">
+              <a16:creationId xmlns:a16="http://schemas.microsoft.com/office/drawing/2014/main" id="{242D896F-8F5A-6E6B-9193-2507ABC2E03C}"/>
+            </a:ext>
+          </a:extLst>
+        </p:cNvPr>
         <p:cNvGrpSpPr/>
         <p:nvPr/>
       </p:nvGrpSpPr>
@@ -847,7 +874,13 @@
       </p:grpSpPr>
       <p:sp>
         <p:nvSpPr>
-          <p:cNvPr id="106" name="Google Shape;106;g3552527e0a1_1_15:notes"/>
+          <p:cNvPr id="94" name="Google Shape;94;gdabd55fb20_0_25:notes">
+            <a:extLst>
+              <a:ext uri="{FF2B5EF4-FFF2-40B4-BE49-F238E27FC236}">
+                <a16:creationId xmlns:a16="http://schemas.microsoft.com/office/drawing/2014/main" id="{77A05370-6C6D-BCAC-C83C-3C0546533612}"/>
+              </a:ext>
+            </a:extLst>
+          </p:cNvPr>
           <p:cNvSpPr>
             <a:spLocks noGrp="1" noRot="1" noChangeAspect="1"/>
           </p:cNvSpPr>
@@ -857,7 +890,7 @@
         </p:nvSpPr>
         <p:spPr>
           <a:xfrm>
-            <a:off x="381300" y="685800"/>
+            <a:off x="381000" y="685800"/>
             <a:ext cx="6096000" cy="3429000"/>
           </a:xfrm>
           <a:custGeom>
@@ -895,6 +928,275 @@
       </p:sp>
       <p:sp>
         <p:nvSpPr>
+          <p:cNvPr id="95" name="Google Shape;95;gdabd55fb20_0_25:notes">
+            <a:extLst>
+              <a:ext uri="{FF2B5EF4-FFF2-40B4-BE49-F238E27FC236}">
+                <a16:creationId xmlns:a16="http://schemas.microsoft.com/office/drawing/2014/main" id="{E155E6AB-440C-6B77-3ED8-CE126B273B0A}"/>
+              </a:ext>
+            </a:extLst>
+          </p:cNvPr>
+          <p:cNvSpPr txBox="1">
+            <a:spLocks noGrp="1"/>
+          </p:cNvSpPr>
+          <p:nvPr>
+            <p:ph type="body" idx="1"/>
+          </p:nvPr>
+        </p:nvSpPr>
+        <p:spPr>
+          <a:xfrm>
+            <a:off x="685800" y="4343400"/>
+            <a:ext cx="5486400" cy="4114800"/>
+          </a:xfrm>
+          <a:prstGeom prst="rect">
+            <a:avLst/>
+          </a:prstGeom>
+        </p:spPr>
+        <p:txBody>
+          <a:bodyPr spcFirstLastPara="1" wrap="square" lIns="91425" tIns="91425" rIns="91425" bIns="91425" anchor="t" anchorCtr="0">
+            <a:noAutofit/>
+          </a:bodyPr>
+          <a:lstStyle/>
+          <a:p>
+            <a:r>
+              <a:rPr lang="ru-RU" dirty="0"/>
+              <a:t>Этот слайд объясняет, почему стратегия чувствительна к издержкам.</a:t>
+            </a:r>
+          </a:p>
+          <a:p>
+            <a:r>
+              <a:rPr lang="ru-RU" dirty="0"/>
+              <a:t>При низких издержках модели активно открывают позиции и совершают много сделок. За счёт этого достигается положительная доходность.</a:t>
+            </a:r>
+          </a:p>
+          <a:p>
+            <a:r>
+              <a:rPr lang="ru-RU" dirty="0"/>
+              <a:t>Но большое число сделок приводит к большим суммарным комиссиям и потерям на спреде. Поэтому при увеличении издержек преимущество быстро исчезает.</a:t>
+            </a:r>
+          </a:p>
+          <a:p>
+            <a:r>
+              <a:rPr lang="ru-RU" dirty="0"/>
+              <a:t>Средняя длительность удержания и доля времени в рынке показывают, что поведение стратегии зависит не только от прогноза модели, но и от правил торгового модуля.</a:t>
+            </a:r>
+          </a:p>
+          <a:p>
+            <a:r>
+              <a:rPr lang="ru-RU"/>
+              <a:t>Главный вывод: высокая доходность достигается за счёт активной торговли, но именно это делает стратегию уязвимой к росту издержек.</a:t>
+            </a:r>
+          </a:p>
+        </p:txBody>
+      </p:sp>
+    </p:spTree>
+    <p:extLst>
+      <p:ext uri="{BB962C8B-B14F-4D97-AF65-F5344CB8AC3E}">
+        <p14:creationId xmlns:p14="http://schemas.microsoft.com/office/powerpoint/2010/main" val="893137459"/>
+      </p:ext>
+    </p:extLst>
+  </p:cSld>
+  <p:clrMapOvr>
+    <a:masterClrMapping/>
+  </p:clrMapOvr>
+</p:notes>
+</file>
+
+<file path=ppt/notesSlides/notesSlide11.xml><?xml version="1.0" encoding="utf-8"?>
+<p:notes xmlns:a="http://schemas.openxmlformats.org/drawingml/2006/main" xmlns:r="http://schemas.openxmlformats.org/officeDocument/2006/relationships" xmlns:p="http://schemas.openxmlformats.org/presentationml/2006/main" showMasterSp="0" showMasterPhAnim="0">
+  <p:cSld>
+    <p:spTree>
+      <p:nvGrpSpPr>
+        <p:cNvPr id="1" name="Shape 99"/>
+        <p:cNvGrpSpPr/>
+        <p:nvPr/>
+      </p:nvGrpSpPr>
+      <p:grpSpPr>
+        <a:xfrm>
+          <a:off x="0" y="0"/>
+          <a:ext cx="0" cy="0"/>
+          <a:chOff x="0" y="0"/>
+          <a:chExt cx="0" cy="0"/>
+        </a:xfrm>
+      </p:grpSpPr>
+      <p:sp>
+        <p:nvSpPr>
+          <p:cNvPr id="100" name="Google Shape;100;gdabd55fb20_0_30:notes"/>
+          <p:cNvSpPr>
+            <a:spLocks noGrp="1" noRot="1" noChangeAspect="1"/>
+          </p:cNvSpPr>
+          <p:nvPr>
+            <p:ph type="sldImg" idx="2"/>
+          </p:nvPr>
+        </p:nvSpPr>
+        <p:spPr>
+          <a:xfrm>
+            <a:off x="381000" y="685800"/>
+            <a:ext cx="6096000" cy="3429000"/>
+          </a:xfrm>
+          <a:custGeom>
+            <a:avLst/>
+            <a:gdLst/>
+            <a:ahLst/>
+            <a:cxnLst/>
+            <a:rect l="l" t="t" r="r" b="b"/>
+            <a:pathLst>
+              <a:path w="120000" h="120000" extrusionOk="0">
+                <a:moveTo>
+                  <a:pt x="0" y="0"/>
+                </a:moveTo>
+                <a:lnTo>
+                  <a:pt x="120000" y="0"/>
+                </a:lnTo>
+                <a:lnTo>
+                  <a:pt x="120000" y="120000"/>
+                </a:lnTo>
+                <a:lnTo>
+                  <a:pt x="0" y="120000"/>
+                </a:lnTo>
+                <a:close/>
+              </a:path>
+            </a:pathLst>
+          </a:custGeom>
+        </p:spPr>
+        <p:txBody>
+          <a:bodyPr/>
+          <a:lstStyle/>
+          <a:p>
+            <a:endParaRPr lang="ru-RU"/>
+          </a:p>
+        </p:txBody>
+      </p:sp>
+      <p:sp>
+        <p:nvSpPr>
+          <p:cNvPr id="101" name="Google Shape;101;gdabd55fb20_0_30:notes"/>
+          <p:cNvSpPr txBox="1">
+            <a:spLocks noGrp="1"/>
+          </p:cNvSpPr>
+          <p:nvPr>
+            <p:ph type="body" idx="1"/>
+          </p:nvPr>
+        </p:nvSpPr>
+        <p:spPr>
+          <a:xfrm>
+            <a:off x="685800" y="4343400"/>
+            <a:ext cx="5486400" cy="4114800"/>
+          </a:xfrm>
+          <a:prstGeom prst="rect">
+            <a:avLst/>
+          </a:prstGeom>
+        </p:spPr>
+        <p:txBody>
+          <a:bodyPr spcFirstLastPara="1" wrap="square" lIns="91425" tIns="91425" rIns="91425" bIns="91425" anchor="t" anchorCtr="0">
+            <a:noAutofit/>
+          </a:bodyPr>
+          <a:lstStyle/>
+          <a:p>
+            <a:r>
+              <a:rPr lang="ru-RU" dirty="0"/>
+              <a:t>В результате работы был выполнен анализ предметной области, подготовлен набор минутных данных Московской биржи и реализован конвейер их обработки.</a:t>
+            </a:r>
+          </a:p>
+          <a:p>
+            <a:r>
+              <a:rPr lang="ru-RU" dirty="0"/>
+              <a:t>Также были разработаны модели прогнозирования краткосрочной доходности, реализован модуль принятия торговых решений и контур исторического тестирования.</a:t>
+            </a:r>
+          </a:p>
+          <a:p>
+            <a:r>
+              <a:rPr lang="ru-RU" dirty="0"/>
+              <a:t>Таким образом, поставленные задачи выполнены, а итогом работы стал программный прототип системы алгоритмического онлайн-трейдинга с использованием технологий искусственного интеллекта.</a:t>
+            </a:r>
+          </a:p>
+          <a:p>
+            <a:pPr marL="0" lvl="0" indent="0" algn="l" rtl="0">
+              <a:spcBef>
+                <a:spcPts val="0"/>
+              </a:spcBef>
+              <a:spcAft>
+                <a:spcPts val="0"/>
+              </a:spcAft>
+              <a:buNone/>
+            </a:pPr>
+            <a:endParaRPr dirty="0"/>
+          </a:p>
+        </p:txBody>
+      </p:sp>
+    </p:spTree>
+  </p:cSld>
+  <p:clrMapOvr>
+    <a:masterClrMapping/>
+  </p:clrMapOvr>
+</p:notes>
+</file>
+
+<file path=ppt/notesSlides/notesSlide12.xml><?xml version="1.0" encoding="utf-8"?>
+<p:notes xmlns:a="http://schemas.openxmlformats.org/drawingml/2006/main" xmlns:r="http://schemas.openxmlformats.org/officeDocument/2006/relationships" xmlns:p="http://schemas.openxmlformats.org/presentationml/2006/main" showMasterSp="0" showMasterPhAnim="0">
+  <p:cSld>
+    <p:spTree>
+      <p:nvGrpSpPr>
+        <p:cNvPr id="1" name="Shape 105"/>
+        <p:cNvGrpSpPr/>
+        <p:nvPr/>
+      </p:nvGrpSpPr>
+      <p:grpSpPr>
+        <a:xfrm>
+          <a:off x="0" y="0"/>
+          <a:ext cx="0" cy="0"/>
+          <a:chOff x="0" y="0"/>
+          <a:chExt cx="0" cy="0"/>
+        </a:xfrm>
+      </p:grpSpPr>
+      <p:sp>
+        <p:nvSpPr>
+          <p:cNvPr id="106" name="Google Shape;106;g3552527e0a1_1_15:notes"/>
+          <p:cNvSpPr>
+            <a:spLocks noGrp="1" noRot="1" noChangeAspect="1"/>
+          </p:cNvSpPr>
+          <p:nvPr>
+            <p:ph type="sldImg" idx="2"/>
+          </p:nvPr>
+        </p:nvSpPr>
+        <p:spPr>
+          <a:xfrm>
+            <a:off x="381000" y="685800"/>
+            <a:ext cx="6096000" cy="3429000"/>
+          </a:xfrm>
+          <a:custGeom>
+            <a:avLst/>
+            <a:gdLst/>
+            <a:ahLst/>
+            <a:cxnLst/>
+            <a:rect l="l" t="t" r="r" b="b"/>
+            <a:pathLst>
+              <a:path w="120000" h="120000" extrusionOk="0">
+                <a:moveTo>
+                  <a:pt x="0" y="0"/>
+                </a:moveTo>
+                <a:lnTo>
+                  <a:pt x="120000" y="0"/>
+                </a:lnTo>
+                <a:lnTo>
+                  <a:pt x="120000" y="120000"/>
+                </a:lnTo>
+                <a:lnTo>
+                  <a:pt x="0" y="120000"/>
+                </a:lnTo>
+                <a:close/>
+              </a:path>
+            </a:pathLst>
+          </a:custGeom>
+        </p:spPr>
+        <p:txBody>
+          <a:bodyPr/>
+          <a:lstStyle/>
+          <a:p>
+            <a:endParaRPr lang="ru-RU"/>
+          </a:p>
+        </p:txBody>
+      </p:sp>
+      <p:sp>
+        <p:nvSpPr>
           <p:cNvPr id="107" name="Google Shape;107;g3552527e0a1_1_15:notes"/>
           <p:cNvSpPr txBox="1">
             <a:spLocks noGrp="1"/>
@@ -927,7 +1229,7 @@
               </a:spcAft>
               <a:buNone/>
             </a:pPr>
-            <a:endParaRPr/>
+            <a:endParaRPr dirty="0"/>
           </a:p>
         </p:txBody>
       </p:sp>
@@ -1029,16 +1331,22 @@
           </a:bodyPr>
           <a:lstStyle/>
           <a:p>
-            <a:pPr marL="0" lvl="0" indent="0" algn="l" rtl="0">
-              <a:spcBef>
-                <a:spcPts val="0"/>
-              </a:spcBef>
-              <a:spcAft>
-                <a:spcPts val="0"/>
-              </a:spcAft>
-              <a:buNone/>
-            </a:pPr>
-            <a:endParaRPr/>
+            <a:r>
+              <a:rPr lang="ru-RU" dirty="0"/>
+              <a:t>Актуальность работы связана с тем, что краткосрочная торговля требует быстрой обработки рыночных данных и принятия решений с учётом реальных ограничений рынка.</a:t>
+            </a:r>
+          </a:p>
+          <a:p>
+            <a:r>
+              <a:rPr lang="ru-RU" dirty="0"/>
+              <a:t>На минутных горизонтах одного прогноза цены недостаточно. Даже если модель ожидает рост, сделка может оказаться невыгодной из-за комиссии, биржевого спреда или слишком малого ожидаемого движения цены.</a:t>
+            </a:r>
+          </a:p>
+          <a:p>
+            <a:r>
+              <a:rPr lang="ru-RU" dirty="0"/>
+              <a:t>Поэтому в работе рассматривается не только прогнозирующая модель, но и полный контур: подготовка данных, прогнозирование, принятие торгового решения и историческое тестирование стратегии.</a:t>
+            </a:r>
           </a:p>
         </p:txBody>
       </p:sp>
@@ -1140,6 +1448,24 @@
           </a:bodyPr>
           <a:lstStyle/>
           <a:p>
+            <a:r>
+              <a:rPr lang="ru-RU" dirty="0"/>
+              <a:t>Цель работы — повышение эффективности алгоритмического трейдинга.</a:t>
+            </a:r>
+          </a:p>
+          <a:p>
+            <a:r>
+              <a:rPr lang="ru-RU" dirty="0"/>
+              <a:t>Для достижения этой цели были поставлены несколько задач: проанализировать предметную область и существующие подходы, подготовить минутные данные по ликвидным акциям Московской биржи, разработать модели прогнозирования доходности, спроектировать модуль принятия торговых решений и реализовать историческое тестирование стратегии.</a:t>
+            </a:r>
+          </a:p>
+          <a:p>
+            <a:r>
+              <a:rPr lang="ru-RU" dirty="0"/>
+              <a:t>Таким образом, работа охватывает не только обучение моделей, но и проверку того, как их прогнозы могут использоваться в торговой системе.</a:t>
+            </a:r>
+          </a:p>
+          <a:p>
             <a:pPr marL="0" lvl="0" indent="0" algn="l" rtl="0">
               <a:spcBef>
                 <a:spcPts val="0"/>
@@ -1149,7 +1475,7 @@
               </a:spcAft>
               <a:buNone/>
             </a:pPr>
-            <a:endParaRPr/>
+            <a:endParaRPr dirty="0"/>
           </a:p>
         </p:txBody>
       </p:sp>
@@ -1251,6 +1577,40 @@
           </a:bodyPr>
           <a:lstStyle/>
           <a:p>
+            <a:r>
+              <a:rPr lang="ru-RU" dirty="0"/>
+              <a:t>На этом слайде приведено сравнение средств исторического тестирования торговых алгоритмов.</a:t>
+            </a:r>
+          </a:p>
+          <a:p>
+            <a:r>
+              <a:rPr lang="ru-RU" dirty="0"/>
+              <a:t>Рассматривались Backtrader, </a:t>
+            </a:r>
+            <a:r>
+              <a:rPr lang="ru-RU" dirty="0" err="1"/>
+              <a:t>Zipline</a:t>
+            </a:r>
+            <a:r>
+              <a:rPr lang="ru-RU" dirty="0"/>
+              <a:t> и LEAN / QuantConnect. Эти инструменты позволяют проводить </a:t>
+            </a:r>
+            <a:r>
+              <a:rPr lang="ru-RU" dirty="0" err="1"/>
+              <a:t>backtesting</a:t>
+            </a:r>
+            <a:r>
+              <a:rPr lang="ru-RU" dirty="0"/>
+              <a:t>, но для данной работы было важно гибко работать с минутными данными Московской биржи, сравнивать разные модели искусственного интеллекта и контролировать временную валидацию.</a:t>
+            </a:r>
+          </a:p>
+          <a:p>
+            <a:r>
+              <a:rPr lang="ru-RU" dirty="0"/>
+              <a:t>Поэтому было принято решение реализовать собственный контур исторического тестирования. Это позволило явно учитывать комиссии, ограничения по позициям, число сделок и другие метрики.</a:t>
+            </a:r>
+          </a:p>
+          <a:p>
             <a:pPr marL="0" lvl="0" indent="0" algn="l" rtl="0">
               <a:spcBef>
                 <a:spcPts val="0"/>
@@ -1260,7 +1620,7 @@
               </a:spcAft>
               <a:buNone/>
             </a:pPr>
-            <a:endParaRPr/>
+            <a:endParaRPr dirty="0"/>
           </a:p>
         </p:txBody>
       </p:sp>
@@ -1362,16 +1722,28 @@
           </a:bodyPr>
           <a:lstStyle/>
           <a:p>
-            <a:pPr marL="0" lvl="0" indent="0" algn="l" rtl="0">
-              <a:spcBef>
-                <a:spcPts val="0"/>
-              </a:spcBef>
-              <a:spcAft>
-                <a:spcPts val="0"/>
-              </a:spcAft>
-              <a:buNone/>
-            </a:pPr>
-            <a:endParaRPr/>
+            <a:r>
+              <a:rPr lang="ru-RU" dirty="0"/>
+              <a:t>Исходные данные получались через MOEX ISS API. Использовались минутные данные по акциям: цена открытия, максимум, минимум, цена закрытия, объём и денежный оборот.</a:t>
+            </a:r>
+          </a:p>
+          <a:p>
+            <a:r>
+              <a:rPr lang="ru-RU" dirty="0"/>
+              <a:t>Далее данные проходили очистку и синхронизацию: выполнялась сортировка по времени, удаление дубликатов и обработка пропусков.</a:t>
+            </a:r>
+          </a:p>
+          <a:p>
+            <a:r>
+              <a:rPr lang="ru-RU" dirty="0"/>
+              <a:t>После этого формировались признаки: доходности за предыдущие минуты, признаки объёма и оборота, волатильность, временные признаки и окна прошлых наблюдений. На основе этих данных формировались целевые переменные для обучения моделей.</a:t>
+            </a:r>
+          </a:p>
+          <a:p>
+            <a:r>
+              <a:rPr lang="ru-RU" dirty="0"/>
+              <a:t>После подготовки данных эти признаки использовались для обучения моделей и дальнейшего исторического тестирования стратегии.</a:t>
+            </a:r>
           </a:p>
         </p:txBody>
       </p:sp>
@@ -1473,6 +1845,24 @@
           </a:bodyPr>
           <a:lstStyle/>
           <a:p>
+            <a:r>
+              <a:rPr lang="ru-RU" dirty="0"/>
+              <a:t>Основное архитектурное решение работы — разделить прогнозирование и принятие торговых решений.</a:t>
+            </a:r>
+          </a:p>
+          <a:p>
+            <a:r>
+              <a:rPr lang="ru-RU" dirty="0"/>
+              <a:t>Модель не выдаёт напрямую команду «купить» или «продать». Она только предсказывает ожидаемую доходность. Затем отдельный модуль решает, можно ли использовать этот прогноз для открытия, удержания или закрытия позиции.</a:t>
+            </a:r>
+          </a:p>
+          <a:p>
+            <a:r>
+              <a:rPr lang="ru-RU" dirty="0"/>
+              <a:t>Такое разделение позволяет отдельно сравнивать качество моделей и отдельно задавать торговые ограничения: комиссии, лимиты по капиталу, максимальное число позиций и время удержания.</a:t>
+            </a:r>
+          </a:p>
+          <a:p>
             <a:pPr marL="0" lvl="0" indent="0" algn="l" rtl="0">
               <a:spcBef>
                 <a:spcPts val="0"/>
@@ -1482,7 +1872,7 @@
               </a:spcAft>
               <a:buNone/>
             </a:pPr>
-            <a:endParaRPr/>
+            <a:endParaRPr dirty="0"/>
           </a:p>
         </p:txBody>
       </p:sp>
@@ -1499,7 +1889,13 @@
   <p:cSld>
     <p:spTree>
       <p:nvGrpSpPr>
-        <p:cNvPr id="1" name="Shape 87"/>
+        <p:cNvPr id="1" name="Shape 87">
+          <a:extLst>
+            <a:ext uri="{FF2B5EF4-FFF2-40B4-BE49-F238E27FC236}">
+              <a16:creationId xmlns:a16="http://schemas.microsoft.com/office/drawing/2014/main" id="{61BD3947-C1E8-DC48-8F67-C6EA98F8B9DA}"/>
+            </a:ext>
+          </a:extLst>
+        </p:cNvPr>
         <p:cNvGrpSpPr/>
         <p:nvPr/>
       </p:nvGrpSpPr>
@@ -1513,7 +1909,13 @@
       </p:grpSpPr>
       <p:sp>
         <p:nvSpPr>
-          <p:cNvPr id="88" name="Google Shape;88;g3552527e0a1_1_0:notes"/>
+          <p:cNvPr id="88" name="Google Shape;88;g3552527e0a1_1_0:notes">
+            <a:extLst>
+              <a:ext uri="{FF2B5EF4-FFF2-40B4-BE49-F238E27FC236}">
+                <a16:creationId xmlns:a16="http://schemas.microsoft.com/office/drawing/2014/main" id="{B5AEF8AC-09B0-0057-12A9-F9FC8E8B4B61}"/>
+              </a:ext>
+            </a:extLst>
+          </p:cNvPr>
           <p:cNvSpPr>
             <a:spLocks noGrp="1" noRot="1" noChangeAspect="1"/>
           </p:cNvSpPr>
@@ -1561,7 +1963,13 @@
       </p:sp>
       <p:sp>
         <p:nvSpPr>
-          <p:cNvPr id="89" name="Google Shape;89;g3552527e0a1_1_0:notes"/>
+          <p:cNvPr id="89" name="Google Shape;89;g3552527e0a1_1_0:notes">
+            <a:extLst>
+              <a:ext uri="{FF2B5EF4-FFF2-40B4-BE49-F238E27FC236}">
+                <a16:creationId xmlns:a16="http://schemas.microsoft.com/office/drawing/2014/main" id="{5682DA1C-92D4-F969-3AC6-CC70A57A4270}"/>
+              </a:ext>
+            </a:extLst>
+          </p:cNvPr>
           <p:cNvSpPr txBox="1">
             <a:spLocks noGrp="1"/>
           </p:cNvSpPr>
@@ -1584,20 +1992,37 @@
           </a:bodyPr>
           <a:lstStyle/>
           <a:p>
-            <a:pPr marL="0" lvl="0" indent="0" algn="l" rtl="0">
-              <a:spcBef>
-                <a:spcPts val="0"/>
-              </a:spcBef>
-              <a:spcAft>
-                <a:spcPts val="0"/>
-              </a:spcAft>
-              <a:buNone/>
-            </a:pPr>
-            <a:endParaRPr/>
+            <a:r>
+              <a:rPr lang="ru-RU" dirty="0"/>
+              <a:t>Алгоритм работает на каждой торговой минуте.</a:t>
+            </a:r>
+          </a:p>
+          <a:p>
+            <a:r>
+              <a:rPr lang="ru-RU" dirty="0"/>
+              <a:t>Сначала проверяются уже открытые позиции. Позиция закрывается, если она удерживается дольше заданного лимита или если прогноз удержания становится недостаточным. В противном случае позиция продолжает удерживаться.</a:t>
+            </a:r>
+          </a:p>
+          <a:p>
+            <a:r>
+              <a:rPr lang="ru-RU" dirty="0"/>
+              <a:t>После этого проверяется возможность покупки новых бумаг. Для открытия позиции прогноз входа должен быть выше порога, а ожидаемая чистая доходность после учёта издержек должна оставаться положительной.</a:t>
+            </a:r>
+          </a:p>
+          <a:p>
+            <a:r>
+              <a:rPr lang="ru-RU" dirty="0"/>
+              <a:t>Если кандидатов несколько, выбираются лучшие бумаги, а капитал распределяется с учётом ограничений стратегии.</a:t>
+            </a:r>
           </a:p>
         </p:txBody>
       </p:sp>
     </p:spTree>
+    <p:extLst>
+      <p:ext uri="{BB962C8B-B14F-4D97-AF65-F5344CB8AC3E}">
+        <p14:creationId xmlns:p14="http://schemas.microsoft.com/office/powerpoint/2010/main" val="1704705553"/>
+      </p:ext>
+    </p:extLst>
   </p:cSld>
   <p:clrMapOvr>
     <a:masterClrMapping/>
@@ -1610,7 +2035,13 @@
   <p:cSld>
     <p:spTree>
       <p:nvGrpSpPr>
-        <p:cNvPr id="1" name="Shape 93"/>
+        <p:cNvPr id="1" name="Shape 87">
+          <a:extLst>
+            <a:ext uri="{FF2B5EF4-FFF2-40B4-BE49-F238E27FC236}">
+              <a16:creationId xmlns:a16="http://schemas.microsoft.com/office/drawing/2014/main" id="{C24D11D5-909D-B567-263B-CD2E591E3FF1}"/>
+            </a:ext>
+          </a:extLst>
+        </p:cNvPr>
         <p:cNvGrpSpPr/>
         <p:nvPr/>
       </p:nvGrpSpPr>
@@ -1624,7 +2055,13 @@
       </p:grpSpPr>
       <p:sp>
         <p:nvSpPr>
-          <p:cNvPr id="94" name="Google Shape;94;gdabd55fb20_0_25:notes"/>
+          <p:cNvPr id="88" name="Google Shape;88;g3552527e0a1_1_0:notes">
+            <a:extLst>
+              <a:ext uri="{FF2B5EF4-FFF2-40B4-BE49-F238E27FC236}">
+                <a16:creationId xmlns:a16="http://schemas.microsoft.com/office/drawing/2014/main" id="{AFB76F5B-A748-39B3-4316-DE2A7F2C6145}"/>
+              </a:ext>
+            </a:extLst>
+          </p:cNvPr>
           <p:cNvSpPr>
             <a:spLocks noGrp="1" noRot="1" noChangeAspect="1"/>
           </p:cNvSpPr>
@@ -1634,7 +2071,7 @@
         </p:nvSpPr>
         <p:spPr>
           <a:xfrm>
-            <a:off x="381300" y="685800"/>
+            <a:off x="381000" y="685800"/>
             <a:ext cx="6096000" cy="3429000"/>
           </a:xfrm>
           <a:custGeom>
@@ -1672,7 +2109,13 @@
       </p:sp>
       <p:sp>
         <p:nvSpPr>
-          <p:cNvPr id="95" name="Google Shape;95;gdabd55fb20_0_25:notes"/>
+          <p:cNvPr id="89" name="Google Shape;89;g3552527e0a1_1_0:notes">
+            <a:extLst>
+              <a:ext uri="{FF2B5EF4-FFF2-40B4-BE49-F238E27FC236}">
+                <a16:creationId xmlns:a16="http://schemas.microsoft.com/office/drawing/2014/main" id="{CF982FC0-9EF7-485D-C1F7-9E2FED0C693A}"/>
+              </a:ext>
+            </a:extLst>
+          </p:cNvPr>
           <p:cNvSpPr txBox="1">
             <a:spLocks noGrp="1"/>
           </p:cNvSpPr>
@@ -1695,6 +2138,27 @@
           </a:bodyPr>
           <a:lstStyle/>
           <a:p>
+            <a:r>
+              <a:rPr lang="ru-RU" dirty="0"/>
+              <a:t>Модели получают на вход окно последних минутных наблюдений и предсказывают ожидаемую доходность на нескольких горизонтах: от 1 до 15 минут.</a:t>
+            </a:r>
+          </a:p>
+          <a:p>
+            <a:r>
+              <a:rPr lang="ru-RU" dirty="0"/>
+              <a:t>Отдельно используются прогнозы для входа в позицию и для удержания уже открытой позиции. Это важно, потому что покупка новой бумаги и продолжение удержания текущей позиции — это разные торговые ситуации.</a:t>
+            </a:r>
+          </a:p>
+          <a:p>
+            <a:r>
+              <a:rPr lang="ru-RU" dirty="0"/>
+              <a:t>Далее прогнозы передаются в модуль принятия решений, где дополнительно учитываются порог входа, максимальное количество позиций, издержки покупки и продажи, а также лимит удержания.</a:t>
+            </a:r>
+          </a:p>
+          <a:p>
+            <a:endParaRPr lang="ru-RU" dirty="0"/>
+          </a:p>
+          <a:p>
             <a:pPr marL="0" lvl="0" indent="0" algn="l" rtl="0">
               <a:spcBef>
                 <a:spcPts val="0"/>
@@ -1704,11 +2168,16 @@
               </a:spcAft>
               <a:buNone/>
             </a:pPr>
-            <a:endParaRPr/>
+            <a:endParaRPr dirty="0"/>
           </a:p>
         </p:txBody>
       </p:sp>
     </p:spTree>
+    <p:extLst>
+      <p:ext uri="{BB962C8B-B14F-4D97-AF65-F5344CB8AC3E}">
+        <p14:creationId xmlns:p14="http://schemas.microsoft.com/office/powerpoint/2010/main" val="455272231"/>
+      </p:ext>
+    </p:extLst>
   </p:cSld>
   <p:clrMapOvr>
     <a:masterClrMapping/>
@@ -1721,7 +2190,7 @@
   <p:cSld>
     <p:spTree>
       <p:nvGrpSpPr>
-        <p:cNvPr id="1" name="Shape 99"/>
+        <p:cNvPr id="1" name="Shape 93"/>
         <p:cNvGrpSpPr/>
         <p:nvPr/>
       </p:nvGrpSpPr>
@@ -1735,7 +2204,7 @@
       </p:grpSpPr>
       <p:sp>
         <p:nvSpPr>
-          <p:cNvPr id="100" name="Google Shape;100;gdabd55fb20_0_30:notes"/>
+          <p:cNvPr id="94" name="Google Shape;94;gdabd55fb20_0_25:notes"/>
           <p:cNvSpPr>
             <a:spLocks noGrp="1" noRot="1" noChangeAspect="1"/>
           </p:cNvSpPr>
@@ -1745,7 +2214,7 @@
         </p:nvSpPr>
         <p:spPr>
           <a:xfrm>
-            <a:off x="381300" y="685800"/>
+            <a:off x="381000" y="685800"/>
             <a:ext cx="6096000" cy="3429000"/>
           </a:xfrm>
           <a:custGeom>
@@ -1783,7 +2252,7 @@
       </p:sp>
       <p:sp>
         <p:nvSpPr>
-          <p:cNvPr id="101" name="Google Shape;101;gdabd55fb20_0_30:notes"/>
+          <p:cNvPr id="95" name="Google Shape;95;gdabd55fb20_0_25:notes"/>
           <p:cNvSpPr txBox="1">
             <a:spLocks noGrp="1"/>
           </p:cNvSpPr>
@@ -1806,16 +2275,36 @@
           </a:bodyPr>
           <a:lstStyle/>
           <a:p>
-            <a:pPr marL="0" lvl="0" indent="0" algn="l" rtl="0">
-              <a:spcBef>
-                <a:spcPts val="0"/>
-              </a:spcBef>
-              <a:spcAft>
-                <a:spcPts val="0"/>
-              </a:spcAft>
-              <a:buNone/>
-            </a:pPr>
-            <a:endParaRPr/>
+            <a:r>
+              <a:rPr lang="ru-RU" dirty="0"/>
+              <a:t>На этом слайде показаны результаты тестирования стратегии на горизонте 15 минут при издержках 0,01%, 0,03% и 0,05%.</a:t>
+            </a:r>
+          </a:p>
+          <a:p>
+            <a:r>
+              <a:rPr lang="ru-RU" dirty="0"/>
+              <a:t>При минимальных издержках почти все модели дают положительную доходность. Лучший результат показывает гребневая регрессия, далее идут </a:t>
+            </a:r>
+            <a:r>
+              <a:rPr lang="ru-RU" dirty="0" err="1"/>
+              <a:t>Transformer</a:t>
+            </a:r>
+            <a:r>
+              <a:rPr lang="ru-RU" dirty="0"/>
+              <a:t>, LSTM и GRU. ARIMA почти не даёт прибыли и выступает как простое сравнение.</a:t>
+            </a:r>
+          </a:p>
+          <a:p>
+            <a:r>
+              <a:rPr lang="ru-RU" dirty="0"/>
+              <a:t>При росте издержек доходность резко падает, а фактор прибыльности часто становится ниже 1.</a:t>
+            </a:r>
+          </a:p>
+          <a:p>
+            <a:r>
+              <a:rPr lang="ru-RU"/>
+              <a:t>Главный вывод: модели находят торговый сигнал, но результат стратегии сильно зависит от комиссий и биржевого спреда.</a:t>
+            </a:r>
           </a:p>
         </p:txBody>
       </p:sp>
@@ -5883,7 +6372,7 @@
     <p:sldLayoutId id="2147483657" r:id="rId10"/>
     <p:sldLayoutId id="2147483658" r:id="rId11"/>
   </p:sldLayoutIdLst>
-  <p:hf sldNum="0" hdr="0" ftr="0" dt="0"/>
+  <p:hf hdr="0" ftr="0" dt="0"/>
   <p:txStyles>
     <p:titleStyle>
       <a:defPPr marR="0" lvl="0" algn="l" rtl="0">
@@ -6628,10 +7117,16 @@
               <a:buNone/>
             </a:pPr>
             <a:r>
-              <a:rPr lang="ru" sz="3200" dirty="0"/>
+              <a:rPr lang="ru" sz="3200" dirty="0">
+                <a:latin typeface="Times New Roman" panose="02020603050405020304" pitchFamily="18" charset="0"/>
+                <a:cs typeface="Times New Roman" panose="02020603050405020304" pitchFamily="18" charset="0"/>
+              </a:rPr>
               <a:t>Тема: Алгоритмический онлайн-трейдинг с использованием технологий искусственного интеллекта</a:t>
             </a:r>
-            <a:endParaRPr sz="3200" dirty="0"/>
+            <a:endParaRPr sz="3200" dirty="0">
+              <a:latin typeface="Times New Roman" panose="02020603050405020304" pitchFamily="18" charset="0"/>
+              <a:cs typeface="Times New Roman" panose="02020603050405020304" pitchFamily="18" charset="0"/>
+            </a:endParaRPr>
           </a:p>
         </p:txBody>
       </p:sp>
@@ -6670,10 +7165,16 @@
               <a:buNone/>
             </a:pPr>
             <a:r>
-              <a:rPr lang="ru" dirty="0"/>
+              <a:rPr lang="ru" dirty="0">
+                <a:latin typeface="Times New Roman" panose="02020603050405020304" pitchFamily="18" charset="0"/>
+                <a:cs typeface="Times New Roman" panose="02020603050405020304" pitchFamily="18" charset="0"/>
+              </a:rPr>
               <a:t>Студент: Петров К.Ю.</a:t>
             </a:r>
-            <a:endParaRPr dirty="0"/>
+            <a:endParaRPr dirty="0">
+              <a:latin typeface="Times New Roman" panose="02020603050405020304" pitchFamily="18" charset="0"/>
+              <a:cs typeface="Times New Roman" panose="02020603050405020304" pitchFamily="18" charset="0"/>
+            </a:endParaRPr>
           </a:p>
           <a:p>
             <a:pPr marL="0" lvl="0" indent="0" algn="r" rtl="0">
@@ -6686,10 +7187,16 @@
               <a:buNone/>
             </a:pPr>
             <a:r>
-              <a:rPr lang="ru" dirty="0"/>
+              <a:rPr lang="ru" dirty="0">
+                <a:latin typeface="Times New Roman" panose="02020603050405020304" pitchFamily="18" charset="0"/>
+                <a:cs typeface="Times New Roman" panose="02020603050405020304" pitchFamily="18" charset="0"/>
+              </a:rPr>
               <a:t>Группа: БСБО-06-22</a:t>
             </a:r>
-            <a:endParaRPr dirty="0"/>
+            <a:endParaRPr dirty="0">
+              <a:latin typeface="Times New Roman" panose="02020603050405020304" pitchFamily="18" charset="0"/>
+              <a:cs typeface="Times New Roman" panose="02020603050405020304" pitchFamily="18" charset="0"/>
+            </a:endParaRPr>
           </a:p>
           <a:p>
             <a:pPr marL="0" lvl="0" indent="0" algn="r" rtl="0">
@@ -6702,10 +7209,16 @@
               <a:buNone/>
             </a:pPr>
             <a:r>
-              <a:rPr lang="ru" dirty="0"/>
+              <a:rPr lang="ru" dirty="0">
+                <a:latin typeface="Times New Roman" panose="02020603050405020304" pitchFamily="18" charset="0"/>
+                <a:cs typeface="Times New Roman" panose="02020603050405020304" pitchFamily="18" charset="0"/>
+              </a:rPr>
               <a:t>Руководитель: Романец А.В. </a:t>
             </a:r>
-            <a:endParaRPr dirty="0"/>
+            <a:endParaRPr dirty="0">
+              <a:latin typeface="Times New Roman" panose="02020603050405020304" pitchFamily="18" charset="0"/>
+              <a:cs typeface="Times New Roman" panose="02020603050405020304" pitchFamily="18" charset="0"/>
+            </a:endParaRPr>
           </a:p>
         </p:txBody>
       </p:sp>
@@ -6738,17 +7251,29 @@
               <a:buSzPts val="990"/>
             </a:pPr>
             <a:r>
-              <a:rPr lang="ru-RU" sz="2000" dirty="0"/>
+              <a:rPr lang="ru-RU" sz="2000" dirty="0">
+                <a:latin typeface="Times New Roman" panose="02020603050405020304" pitchFamily="18" charset="0"/>
+                <a:cs typeface="Times New Roman" panose="02020603050405020304" pitchFamily="18" charset="0"/>
+              </a:rPr>
               <a:t>Институт кибербезопасности и цифровых технологий</a:t>
             </a:r>
             <a:br>
-              <a:rPr lang="ru-RU" sz="2000" dirty="0"/>
+              <a:rPr lang="ru-RU" sz="2000" dirty="0">
+                <a:latin typeface="Times New Roman" panose="02020603050405020304" pitchFamily="18" charset="0"/>
+                <a:cs typeface="Times New Roman" panose="02020603050405020304" pitchFamily="18" charset="0"/>
+              </a:rPr>
             </a:br>
             <a:r>
-              <a:rPr lang="ru-RU" sz="2000" dirty="0"/>
+              <a:rPr lang="ru-RU" sz="2000" dirty="0">
+                <a:latin typeface="Times New Roman" panose="02020603050405020304" pitchFamily="18" charset="0"/>
+                <a:cs typeface="Times New Roman" panose="02020603050405020304" pitchFamily="18" charset="0"/>
+              </a:rPr>
               <a:t>Кафедра КБ-14 «Цифровые технологии обработки данных»</a:t>
             </a:r>
-            <a:endParaRPr sz="2000" dirty="0"/>
+            <a:endParaRPr sz="2000" dirty="0">
+              <a:latin typeface="Times New Roman" panose="02020603050405020304" pitchFamily="18" charset="0"/>
+              <a:cs typeface="Times New Roman" panose="02020603050405020304" pitchFamily="18" charset="0"/>
+            </a:endParaRPr>
           </a:p>
         </p:txBody>
       </p:sp>
@@ -6795,6 +7320,485 @@
   <p:cSld>
     <p:spTree>
       <p:nvGrpSpPr>
+        <p:cNvPr id="1" name="Shape 96">
+          <a:extLst>
+            <a:ext uri="{FF2B5EF4-FFF2-40B4-BE49-F238E27FC236}">
+              <a16:creationId xmlns:a16="http://schemas.microsoft.com/office/drawing/2014/main" id="{97080246-6243-FAA7-F4E7-F5799C5B8A88}"/>
+            </a:ext>
+          </a:extLst>
+        </p:cNvPr>
+        <p:cNvGrpSpPr/>
+        <p:nvPr/>
+      </p:nvGrpSpPr>
+      <p:grpSpPr>
+        <a:xfrm>
+          <a:off x="0" y="0"/>
+          <a:ext cx="0" cy="0"/>
+          <a:chOff x="0" y="0"/>
+          <a:chExt cx="0" cy="0"/>
+        </a:xfrm>
+      </p:grpSpPr>
+      <p:sp>
+        <p:nvSpPr>
+          <p:cNvPr id="97" name="Google Shape;97;p20">
+            <a:extLst>
+              <a:ext uri="{FF2B5EF4-FFF2-40B4-BE49-F238E27FC236}">
+                <a16:creationId xmlns:a16="http://schemas.microsoft.com/office/drawing/2014/main" id="{98F9EA79-B61B-DD90-2167-3B904E0AAE17}"/>
+              </a:ext>
+            </a:extLst>
+          </p:cNvPr>
+          <p:cNvSpPr txBox="1">
+            <a:spLocks noGrp="1"/>
+          </p:cNvSpPr>
+          <p:nvPr>
+            <p:ph type="title"/>
+          </p:nvPr>
+        </p:nvSpPr>
+        <p:spPr>
+          <a:xfrm>
+            <a:off x="311700" y="445025"/>
+            <a:ext cx="8520600" cy="572700"/>
+          </a:xfrm>
+          <a:prstGeom prst="rect">
+            <a:avLst/>
+          </a:prstGeom>
+        </p:spPr>
+        <p:txBody>
+          <a:bodyPr spcFirstLastPara="1" wrap="square" lIns="91425" tIns="91425" rIns="91425" bIns="91425" anchor="t" anchorCtr="0">
+            <a:normAutofit fontScale="90000"/>
+          </a:bodyPr>
+          <a:lstStyle/>
+          <a:p>
+            <a:pPr marL="0" lvl="0" indent="0" algn="ctr" rtl="0">
+              <a:spcBef>
+                <a:spcPts val="0"/>
+              </a:spcBef>
+              <a:spcAft>
+                <a:spcPts val="0"/>
+              </a:spcAft>
+              <a:buNone/>
+            </a:pPr>
+            <a:r>
+              <a:rPr lang="ru-RU" dirty="0">
+                <a:solidFill>
+                  <a:schemeClr val="tx1"/>
+                </a:solidFill>
+                <a:latin typeface="Times New Roman" panose="02020603050405020304" pitchFamily="18" charset="0"/>
+                <a:cs typeface="Times New Roman" panose="02020603050405020304" pitchFamily="18" charset="0"/>
+              </a:rPr>
+              <a:t>Объяснение поведения стратегии</a:t>
+            </a:r>
+            <a:endParaRPr dirty="0">
+              <a:solidFill>
+                <a:schemeClr val="tx1"/>
+              </a:solidFill>
+              <a:latin typeface="Times New Roman" panose="02020603050405020304" pitchFamily="18" charset="0"/>
+              <a:cs typeface="Times New Roman" panose="02020603050405020304" pitchFamily="18" charset="0"/>
+            </a:endParaRPr>
+          </a:p>
+        </p:txBody>
+      </p:sp>
+      <p:sp>
+        <p:nvSpPr>
+          <p:cNvPr id="98" name="Google Shape;98;p20">
+            <a:extLst>
+              <a:ext uri="{FF2B5EF4-FFF2-40B4-BE49-F238E27FC236}">
+                <a16:creationId xmlns:a16="http://schemas.microsoft.com/office/drawing/2014/main" id="{25620591-936A-8886-5FD1-24E84285996B}"/>
+              </a:ext>
+            </a:extLst>
+          </p:cNvPr>
+          <p:cNvSpPr txBox="1">
+            <a:spLocks noGrp="1"/>
+          </p:cNvSpPr>
+          <p:nvPr>
+            <p:ph type="body" idx="1"/>
+          </p:nvPr>
+        </p:nvSpPr>
+        <p:spPr>
+          <a:xfrm>
+            <a:off x="311700" y="1152475"/>
+            <a:ext cx="8520600" cy="3416400"/>
+          </a:xfrm>
+          <a:prstGeom prst="rect">
+            <a:avLst/>
+          </a:prstGeom>
+        </p:spPr>
+        <p:txBody>
+          <a:bodyPr spcFirstLastPara="1" wrap="square" lIns="91425" tIns="91425" rIns="91425" bIns="91425" anchor="t" anchorCtr="0">
+            <a:normAutofit/>
+          </a:bodyPr>
+          <a:lstStyle/>
+          <a:p>
+            <a:pPr marL="0" lvl="0" indent="0" algn="l" rtl="0">
+              <a:spcBef>
+                <a:spcPts val="1200"/>
+              </a:spcBef>
+              <a:spcAft>
+                <a:spcPts val="1200"/>
+              </a:spcAft>
+              <a:buNone/>
+            </a:pPr>
+            <a:r>
+              <a:rPr lang="ru-RU" dirty="0"/>
+              <a:t> </a:t>
+            </a:r>
+            <a:endParaRPr dirty="0"/>
+          </a:p>
+        </p:txBody>
+      </p:sp>
+      <p:pic>
+        <p:nvPicPr>
+          <p:cNvPr id="3" name="Рисунок 2">
+            <a:extLst>
+              <a:ext uri="{FF2B5EF4-FFF2-40B4-BE49-F238E27FC236}">
+                <a16:creationId xmlns:a16="http://schemas.microsoft.com/office/drawing/2014/main" id="{0191E914-1929-1446-2525-F6209DA055A0}"/>
+              </a:ext>
+            </a:extLst>
+          </p:cNvPr>
+          <p:cNvPicPr>
+            <a:picLocks noChangeAspect="1"/>
+          </p:cNvPicPr>
+          <p:nvPr/>
+        </p:nvPicPr>
+        <p:blipFill>
+          <a:blip r:embed="rId3"/>
+          <a:stretch>
+            <a:fillRect/>
+          </a:stretch>
+        </p:blipFill>
+        <p:spPr>
+          <a:xfrm>
+            <a:off x="904644" y="1017725"/>
+            <a:ext cx="7334711" cy="4125775"/>
+          </a:xfrm>
+          <a:prstGeom prst="rect">
+            <a:avLst/>
+          </a:prstGeom>
+        </p:spPr>
+      </p:pic>
+      <p:sp>
+        <p:nvSpPr>
+          <p:cNvPr id="2" name="Номер слайда 1">
+            <a:extLst>
+              <a:ext uri="{FF2B5EF4-FFF2-40B4-BE49-F238E27FC236}">
+                <a16:creationId xmlns:a16="http://schemas.microsoft.com/office/drawing/2014/main" id="{81DF3C31-67DA-0BA5-A8D5-B0895E8A735E}"/>
+              </a:ext>
+            </a:extLst>
+          </p:cNvPr>
+          <p:cNvSpPr>
+            <a:spLocks noGrp="1"/>
+          </p:cNvSpPr>
+          <p:nvPr>
+            <p:ph type="sldNum" idx="12"/>
+          </p:nvPr>
+        </p:nvSpPr>
+        <p:spPr/>
+        <p:txBody>
+          <a:bodyPr/>
+          <a:lstStyle/>
+          <a:p>
+            <a:pPr marL="0" lvl="0" indent="0" algn="r" rtl="0">
+              <a:spcBef>
+                <a:spcPts val="0"/>
+              </a:spcBef>
+              <a:spcAft>
+                <a:spcPts val="0"/>
+              </a:spcAft>
+              <a:buNone/>
+            </a:pPr>
+            <a:fld id="{00000000-1234-1234-1234-123412341234}" type="slidenum">
+              <a:rPr lang="ru" smtClean="0"/>
+              <a:t>10</a:t>
+            </a:fld>
+            <a:endParaRPr lang="ru"/>
+          </a:p>
+        </p:txBody>
+      </p:sp>
+    </p:spTree>
+    <p:extLst>
+      <p:ext uri="{BB962C8B-B14F-4D97-AF65-F5344CB8AC3E}">
+        <p14:creationId xmlns:p14="http://schemas.microsoft.com/office/powerpoint/2010/main" val="579448256"/>
+      </p:ext>
+    </p:extLst>
+  </p:cSld>
+  <p:clrMapOvr>
+    <a:masterClrMapping/>
+  </p:clrMapOvr>
+</p:sld>
+</file>
+
+<file path=ppt/slides/slide11.xml><?xml version="1.0" encoding="utf-8"?>
+<p:sld xmlns:a="http://schemas.openxmlformats.org/drawingml/2006/main" xmlns:r="http://schemas.openxmlformats.org/officeDocument/2006/relationships" xmlns:p="http://schemas.openxmlformats.org/presentationml/2006/main">
+  <p:cSld>
+    <p:spTree>
+      <p:nvGrpSpPr>
+        <p:cNvPr id="1" name="Shape 102"/>
+        <p:cNvGrpSpPr/>
+        <p:nvPr/>
+      </p:nvGrpSpPr>
+      <p:grpSpPr>
+        <a:xfrm>
+          <a:off x="0" y="0"/>
+          <a:ext cx="0" cy="0"/>
+          <a:chOff x="0" y="0"/>
+          <a:chExt cx="0" cy="0"/>
+        </a:xfrm>
+      </p:grpSpPr>
+      <p:sp>
+        <p:nvSpPr>
+          <p:cNvPr id="103" name="Google Shape;103;p21"/>
+          <p:cNvSpPr txBox="1">
+            <a:spLocks noGrp="1"/>
+          </p:cNvSpPr>
+          <p:nvPr>
+            <p:ph type="title"/>
+          </p:nvPr>
+        </p:nvSpPr>
+        <p:spPr>
+          <a:xfrm>
+            <a:off x="311700" y="445025"/>
+            <a:ext cx="8520600" cy="572700"/>
+          </a:xfrm>
+          <a:prstGeom prst="rect">
+            <a:avLst/>
+          </a:prstGeom>
+        </p:spPr>
+        <p:txBody>
+          <a:bodyPr spcFirstLastPara="1" wrap="square" lIns="91425" tIns="91425" rIns="91425" bIns="91425" anchor="t" anchorCtr="0">
+            <a:normAutofit fontScale="90000"/>
+          </a:bodyPr>
+          <a:lstStyle/>
+          <a:p>
+            <a:pPr marL="0" lvl="0" indent="0" algn="ctr" rtl="0">
+              <a:spcBef>
+                <a:spcPts val="0"/>
+              </a:spcBef>
+              <a:spcAft>
+                <a:spcPts val="0"/>
+              </a:spcAft>
+              <a:buNone/>
+            </a:pPr>
+            <a:r>
+              <a:rPr lang="ru" dirty="0">
+                <a:latin typeface="Times New Roman" panose="02020603050405020304" pitchFamily="18" charset="0"/>
+                <a:cs typeface="Times New Roman" panose="02020603050405020304" pitchFamily="18" charset="0"/>
+              </a:rPr>
+              <a:t>Результаты работы</a:t>
+            </a:r>
+            <a:endParaRPr dirty="0">
+              <a:latin typeface="Times New Roman" panose="02020603050405020304" pitchFamily="18" charset="0"/>
+              <a:cs typeface="Times New Roman" panose="02020603050405020304" pitchFamily="18" charset="0"/>
+            </a:endParaRPr>
+          </a:p>
+        </p:txBody>
+      </p:sp>
+      <p:sp>
+        <p:nvSpPr>
+          <p:cNvPr id="104" name="Google Shape;104;p21"/>
+          <p:cNvSpPr txBox="1">
+            <a:spLocks noGrp="1"/>
+          </p:cNvSpPr>
+          <p:nvPr>
+            <p:ph type="body" idx="1"/>
+          </p:nvPr>
+        </p:nvSpPr>
+        <p:spPr>
+          <a:xfrm>
+            <a:off x="311700" y="1051200"/>
+            <a:ext cx="8520600" cy="3915350"/>
+          </a:xfrm>
+          <a:prstGeom prst="rect">
+            <a:avLst/>
+          </a:prstGeom>
+        </p:spPr>
+        <p:txBody>
+          <a:bodyPr spcFirstLastPara="1" wrap="square" lIns="91425" tIns="91425" rIns="91425" bIns="91425" anchor="t" anchorCtr="0">
+            <a:normAutofit/>
+          </a:bodyPr>
+          <a:lstStyle/>
+          <a:p>
+            <a:pPr marL="285750" indent="-285750"/>
+            <a:r>
+              <a:rPr lang="ru-RU" dirty="0">
+                <a:solidFill>
+                  <a:schemeClr val="tx1"/>
+                </a:solidFill>
+                <a:latin typeface="Times New Roman" panose="02020603050405020304" pitchFamily="18" charset="0"/>
+                <a:cs typeface="Times New Roman" panose="02020603050405020304" pitchFamily="18" charset="0"/>
+              </a:rPr>
+              <a:t>Проведён анализ предметной области и существующих подходов;</a:t>
+            </a:r>
+          </a:p>
+          <a:p>
+            <a:pPr marL="285750" indent="-285750"/>
+            <a:r>
+              <a:rPr lang="ru-RU" dirty="0">
+                <a:solidFill>
+                  <a:schemeClr val="tx1"/>
+                </a:solidFill>
+                <a:latin typeface="Times New Roman" panose="02020603050405020304" pitchFamily="18" charset="0"/>
+                <a:cs typeface="Times New Roman" panose="02020603050405020304" pitchFamily="18" charset="0"/>
+              </a:rPr>
+              <a:t>Подготовлен набор минутных данных Московской биржи;</a:t>
+            </a:r>
+          </a:p>
+          <a:p>
+            <a:pPr marL="285750" indent="-285750"/>
+            <a:r>
+              <a:rPr lang="ru-RU" dirty="0">
+                <a:solidFill>
+                  <a:schemeClr val="tx1"/>
+                </a:solidFill>
+                <a:latin typeface="Times New Roman" panose="02020603050405020304" pitchFamily="18" charset="0"/>
+                <a:cs typeface="Times New Roman" panose="02020603050405020304" pitchFamily="18" charset="0"/>
+              </a:rPr>
+              <a:t>Реализован конвейер обработки данных и формирования признаков;</a:t>
+            </a:r>
+          </a:p>
+          <a:p>
+            <a:pPr marL="285750" indent="-285750"/>
+            <a:r>
+              <a:rPr lang="ru-RU" dirty="0">
+                <a:solidFill>
+                  <a:schemeClr val="tx1"/>
+                </a:solidFill>
+                <a:latin typeface="Times New Roman" panose="02020603050405020304" pitchFamily="18" charset="0"/>
+                <a:cs typeface="Times New Roman" panose="02020603050405020304" pitchFamily="18" charset="0"/>
+              </a:rPr>
+              <a:t>Разработаны модели прогнозирования краткосрочной доходности;</a:t>
+            </a:r>
+          </a:p>
+          <a:p>
+            <a:pPr marL="285750" indent="-285750"/>
+            <a:r>
+              <a:rPr lang="ru-RU" dirty="0">
+                <a:solidFill>
+                  <a:schemeClr val="tx1"/>
+                </a:solidFill>
+                <a:latin typeface="Times New Roman" panose="02020603050405020304" pitchFamily="18" charset="0"/>
+                <a:cs typeface="Times New Roman" panose="02020603050405020304" pitchFamily="18" charset="0"/>
+              </a:rPr>
+              <a:t>Реализован модуль принятия торговых решений;</a:t>
+            </a:r>
+          </a:p>
+          <a:p>
+            <a:pPr marL="285750" indent="-285750"/>
+            <a:r>
+              <a:rPr lang="ru-RU" dirty="0">
+                <a:solidFill>
+                  <a:schemeClr val="tx1"/>
+                </a:solidFill>
+                <a:latin typeface="Times New Roman" panose="02020603050405020304" pitchFamily="18" charset="0"/>
+                <a:cs typeface="Times New Roman" panose="02020603050405020304" pitchFamily="18" charset="0"/>
+              </a:rPr>
+              <a:t>Проведено историческое тестирование и оценены результаты по прибыли, просадке, обороту и числу сделок.</a:t>
+            </a:r>
+          </a:p>
+          <a:p>
+            <a:pPr marL="0" indent="0">
+              <a:buNone/>
+            </a:pPr>
+            <a:endParaRPr lang="ru-RU" dirty="0">
+              <a:solidFill>
+                <a:schemeClr val="tx1"/>
+              </a:solidFill>
+              <a:latin typeface="Times New Roman" panose="02020603050405020304" pitchFamily="18" charset="0"/>
+              <a:cs typeface="Times New Roman" panose="02020603050405020304" pitchFamily="18" charset="0"/>
+            </a:endParaRPr>
+          </a:p>
+          <a:p>
+            <a:pPr marL="0" indent="0">
+              <a:buNone/>
+            </a:pPr>
+            <a:endParaRPr lang="ru-RU" dirty="0">
+              <a:solidFill>
+                <a:schemeClr val="tx1"/>
+              </a:solidFill>
+              <a:latin typeface="Times New Roman" panose="02020603050405020304" pitchFamily="18" charset="0"/>
+              <a:cs typeface="Times New Roman" panose="02020603050405020304" pitchFamily="18" charset="0"/>
+            </a:endParaRPr>
+          </a:p>
+          <a:p>
+            <a:pPr marL="0" lvl="0" indent="0">
+              <a:buNone/>
+            </a:pPr>
+            <a:r>
+              <a:rPr lang="ru-RU" dirty="0">
+                <a:solidFill>
+                  <a:schemeClr val="tx1"/>
+                </a:solidFill>
+                <a:latin typeface="Times New Roman" panose="02020603050405020304" pitchFamily="18" charset="0"/>
+                <a:cs typeface="Times New Roman" panose="02020603050405020304" pitchFamily="18" charset="0"/>
+              </a:rPr>
+              <a:t>Итог: разработан программный прототип системы алгоритмического онлайн-трейдинга.</a:t>
+            </a:r>
+            <a:endParaRPr dirty="0">
+              <a:solidFill>
+                <a:schemeClr val="tx1"/>
+              </a:solidFill>
+              <a:latin typeface="Times New Roman" panose="02020603050405020304" pitchFamily="18" charset="0"/>
+              <a:cs typeface="Times New Roman" panose="02020603050405020304" pitchFamily="18" charset="0"/>
+            </a:endParaRPr>
+          </a:p>
+        </p:txBody>
+      </p:sp>
+      <p:sp>
+        <p:nvSpPr>
+          <p:cNvPr id="2" name="Номер слайда 1">
+            <a:extLst>
+              <a:ext uri="{FF2B5EF4-FFF2-40B4-BE49-F238E27FC236}">
+                <a16:creationId xmlns:a16="http://schemas.microsoft.com/office/drawing/2014/main" id="{48426328-83D2-0A5E-400A-64C200238F8E}"/>
+              </a:ext>
+            </a:extLst>
+          </p:cNvPr>
+          <p:cNvSpPr>
+            <a:spLocks noGrp="1"/>
+          </p:cNvSpPr>
+          <p:nvPr>
+            <p:ph type="sldNum" idx="12"/>
+          </p:nvPr>
+        </p:nvSpPr>
+        <p:spPr/>
+        <p:txBody>
+          <a:bodyPr/>
+          <a:lstStyle/>
+          <a:p>
+            <a:pPr marL="0" lvl="0" indent="0" algn="r" rtl="0">
+              <a:spcBef>
+                <a:spcPts val="0"/>
+              </a:spcBef>
+              <a:spcAft>
+                <a:spcPts val="0"/>
+              </a:spcAft>
+              <a:buNone/>
+            </a:pPr>
+            <a:fld id="{00000000-1234-1234-1234-123412341234}" type="slidenum">
+              <a:rPr lang="ru" smtClean="0">
+                <a:latin typeface="Times New Roman" panose="02020603050405020304" pitchFamily="18" charset="0"/>
+                <a:cs typeface="Times New Roman" panose="02020603050405020304" pitchFamily="18" charset="0"/>
+              </a:rPr>
+              <a:t>11</a:t>
+            </a:fld>
+            <a:endParaRPr lang="ru">
+              <a:latin typeface="Times New Roman" panose="02020603050405020304" pitchFamily="18" charset="0"/>
+              <a:cs typeface="Times New Roman" panose="02020603050405020304" pitchFamily="18" charset="0"/>
+            </a:endParaRPr>
+          </a:p>
+        </p:txBody>
+      </p:sp>
+    </p:spTree>
+  </p:cSld>
+  <p:clrMapOvr>
+    <a:masterClrMapping/>
+  </p:clrMapOvr>
+</p:sld>
+</file>
+
+<file path=ppt/slides/slide12.xml><?xml version="1.0" encoding="utf-8"?>
+<p:sld xmlns:a="http://schemas.openxmlformats.org/drawingml/2006/main" xmlns:r="http://schemas.openxmlformats.org/officeDocument/2006/relationships" xmlns:p="http://schemas.openxmlformats.org/presentationml/2006/main">
+  <p:cSld>
+    <p:spTree>
+      <p:nvGrpSpPr>
         <p:cNvPr id="1" name="Shape 108"/>
         <p:cNvGrpSpPr/>
         <p:nvPr/>
@@ -6832,7 +7836,7 @@
           </a:bodyPr>
           <a:lstStyle/>
           <a:p>
-            <a:pPr marL="0" lvl="0" indent="0" algn="l" rtl="0">
+            <a:pPr marL="0" lvl="0" indent="0" algn="ctr" rtl="0">
               <a:spcBef>
                 <a:spcPts val="0"/>
               </a:spcBef>
@@ -6841,7 +7845,17 @@
               </a:spcAft>
               <a:buNone/>
             </a:pPr>
-            <a:endParaRPr/>
+            <a:r>
+              <a:rPr lang="ru-RU" dirty="0">
+                <a:latin typeface="Times New Roman" panose="02020603050405020304" pitchFamily="18" charset="0"/>
+                <a:cs typeface="Times New Roman" panose="02020603050405020304" pitchFamily="18" charset="0"/>
+              </a:rPr>
+              <a:t>Спасибо за внимание!</a:t>
+            </a:r>
+            <a:endParaRPr dirty="0">
+              <a:latin typeface="Times New Roman" panose="02020603050405020304" pitchFamily="18" charset="0"/>
+              <a:cs typeface="Times New Roman" panose="02020603050405020304" pitchFamily="18" charset="0"/>
+            </a:endParaRPr>
           </a:p>
         </p:txBody>
       </p:sp>
@@ -6872,78 +7886,68 @@
           <a:p>
             <a:pPr marL="0" lvl="0" indent="0" algn="l" rtl="0">
               <a:spcBef>
-                <a:spcPts val="0"/>
-              </a:spcBef>
-              <a:spcAft>
-                <a:spcPts val="0"/>
+                <a:spcPts val="1200"/>
+              </a:spcBef>
+              <a:spcAft>
+                <a:spcPts val="1200"/>
               </a:spcAft>
               <a:buNone/>
             </a:pPr>
             <a:r>
-              <a:rPr lang="ru"/>
-              <a:t>Обычно благодарят за внимание.</a:t>
+              <a:rPr lang="ru-RU" dirty="0">
+                <a:latin typeface="Times New Roman" panose="02020603050405020304" pitchFamily="18" charset="0"/>
+                <a:cs typeface="Times New Roman" panose="02020603050405020304" pitchFamily="18" charset="0"/>
+              </a:rPr>
+              <a:t> </a:t>
             </a:r>
-            <a:endParaRPr/>
-          </a:p>
-          <a:p>
-            <a:pPr marL="0" lvl="0" indent="0" algn="l" rtl="0">
-              <a:spcBef>
-                <a:spcPts val="1200"/>
+            <a:endParaRPr dirty="0">
+              <a:latin typeface="Times New Roman" panose="02020603050405020304" pitchFamily="18" charset="0"/>
+              <a:cs typeface="Times New Roman" panose="02020603050405020304" pitchFamily="18" charset="0"/>
+            </a:endParaRPr>
+          </a:p>
+        </p:txBody>
+      </p:sp>
+      <p:sp>
+        <p:nvSpPr>
+          <p:cNvPr id="2" name="Номер слайда 1">
+            <a:extLst>
+              <a:ext uri="{FF2B5EF4-FFF2-40B4-BE49-F238E27FC236}">
+                <a16:creationId xmlns:a16="http://schemas.microsoft.com/office/drawing/2014/main" id="{60119EA9-20BB-05BC-28FA-2558451948BF}"/>
+              </a:ext>
+            </a:extLst>
+          </p:cNvPr>
+          <p:cNvSpPr>
+            <a:spLocks noGrp="1"/>
+          </p:cNvSpPr>
+          <p:nvPr>
+            <p:ph type="sldNum" idx="12"/>
+          </p:nvPr>
+        </p:nvSpPr>
+        <p:spPr/>
+        <p:txBody>
+          <a:bodyPr/>
+          <a:lstStyle/>
+          <a:p>
+            <a:pPr marL="0" lvl="0" indent="0" algn="r" rtl="0">
+              <a:spcBef>
+                <a:spcPts val="0"/>
               </a:spcBef>
               <a:spcAft>
                 <a:spcPts val="0"/>
               </a:spcAft>
               <a:buNone/>
             </a:pPr>
-            <a:r>
-              <a:rPr lang="ru"/>
-              <a:t>Постарайтесь уложиться в 15 слайдов и 7 минут.</a:t>
-            </a:r>
-            <a:endParaRPr/>
-          </a:p>
-          <a:p>
-            <a:pPr marL="0" lvl="0" indent="0" algn="l" rtl="0">
-              <a:spcBef>
-                <a:spcPts val="1200"/>
-              </a:spcBef>
-              <a:spcAft>
-                <a:spcPts val="0"/>
-              </a:spcAft>
-              <a:buNone/>
-            </a:pPr>
-            <a:r>
-              <a:rPr lang="ru"/>
-              <a:t>Заготовьте речь и впишите в примечания к слайдам.</a:t>
-            </a:r>
-            <a:endParaRPr/>
-          </a:p>
-          <a:p>
-            <a:pPr marL="0" lvl="0" indent="0" algn="l" rtl="0">
-              <a:spcBef>
-                <a:spcPts val="1200"/>
-              </a:spcBef>
-              <a:spcAft>
-                <a:spcPts val="0"/>
-              </a:spcAft>
-              <a:buNone/>
-            </a:pPr>
-            <a:r>
-              <a:rPr lang="ru"/>
-              <a:t>Отрепетируйте с секундомером.</a:t>
-            </a:r>
-            <a:endParaRPr/>
-          </a:p>
-          <a:p>
-            <a:pPr marL="0" lvl="0" indent="0" algn="l" rtl="0">
-              <a:spcBef>
-                <a:spcPts val="1200"/>
-              </a:spcBef>
-              <a:spcAft>
-                <a:spcPts val="1200"/>
-              </a:spcAft>
-              <a:buNone/>
-            </a:pPr>
-            <a:endParaRPr/>
+            <a:fld id="{00000000-1234-1234-1234-123412341234}" type="slidenum">
+              <a:rPr lang="ru" smtClean="0">
+                <a:latin typeface="Times New Roman" panose="02020603050405020304" pitchFamily="18" charset="0"/>
+                <a:cs typeface="Times New Roman" panose="02020603050405020304" pitchFamily="18" charset="0"/>
+              </a:rPr>
+              <a:t>12</a:t>
+            </a:fld>
+            <a:endParaRPr lang="ru">
+              <a:latin typeface="Times New Roman" panose="02020603050405020304" pitchFamily="18" charset="0"/>
+              <a:cs typeface="Times New Roman" panose="02020603050405020304" pitchFamily="18" charset="0"/>
+            </a:endParaRPr>
           </a:p>
         </p:txBody>
       </p:sp>
@@ -6984,7 +7988,7 @@
         </p:nvSpPr>
         <p:spPr>
           <a:xfrm>
-            <a:off x="311700" y="445025"/>
+            <a:off x="311700" y="440794"/>
             <a:ext cx="8520600" cy="572700"/>
           </a:xfrm>
           <a:prstGeom prst="rect">
@@ -7007,10 +8011,16 @@
               <a:buNone/>
             </a:pPr>
             <a:r>
-              <a:rPr lang="ru" dirty="0"/>
+              <a:rPr lang="ru" dirty="0">
+                <a:latin typeface="Times New Roman" panose="02020603050405020304" pitchFamily="18" charset="0"/>
+                <a:cs typeface="Times New Roman" panose="02020603050405020304" pitchFamily="18" charset="0"/>
+              </a:rPr>
               <a:t>Актуальность:</a:t>
             </a:r>
-            <a:endParaRPr dirty="0"/>
+            <a:endParaRPr dirty="0">
+              <a:latin typeface="Times New Roman" panose="02020603050405020304" pitchFamily="18" charset="0"/>
+              <a:cs typeface="Times New Roman" panose="02020603050405020304" pitchFamily="18" charset="0"/>
+            </a:endParaRPr>
           </a:p>
         </p:txBody>
       </p:sp>
@@ -7026,7 +8036,7 @@
         </p:nvSpPr>
         <p:spPr>
           <a:xfrm>
-            <a:off x="311700" y="941494"/>
+            <a:off x="450554" y="933031"/>
             <a:ext cx="8520600" cy="778934"/>
           </a:xfrm>
           <a:prstGeom prst="rect">
@@ -7035,7 +8045,7 @@
         </p:spPr>
         <p:txBody>
           <a:bodyPr spcFirstLastPara="1" wrap="square" lIns="91425" tIns="91425" rIns="91425" bIns="91425" anchor="t" anchorCtr="0">
-            <a:normAutofit lnSpcReduction="10000"/>
+            <a:noAutofit/>
           </a:bodyPr>
           <a:lstStyle/>
           <a:p>
@@ -7049,299 +8059,12 @@
               <a:buNone/>
             </a:pPr>
             <a:r>
-              <a:rPr lang="ru-RU" dirty="0"/>
+              <a:rPr lang="ru-RU" dirty="0">
+                <a:latin typeface="Times New Roman" panose="02020603050405020304" pitchFamily="18" charset="0"/>
+                <a:cs typeface="Times New Roman" panose="02020603050405020304" pitchFamily="18" charset="0"/>
+              </a:rPr>
               <a:t>Краткосрочная торговля на финансовом рынке требует быстрой обработки рыночных данных и принятия решений с учётом комиссий, спреда и риска.</a:t>
             </a:r>
-          </a:p>
-        </p:txBody>
-      </p:sp>
-      <p:sp>
-        <p:nvSpPr>
-          <p:cNvPr id="2" name="Google Shape;61;p14">
-            <a:extLst>
-              <a:ext uri="{FF2B5EF4-FFF2-40B4-BE49-F238E27FC236}">
-                <a16:creationId xmlns:a16="http://schemas.microsoft.com/office/drawing/2014/main" id="{607B879A-9393-449F-05FD-D0BF85AAD57E}"/>
-              </a:ext>
-            </a:extLst>
-          </p:cNvPr>
-          <p:cNvSpPr txBox="1">
-            <a:spLocks/>
-          </p:cNvSpPr>
-          <p:nvPr/>
-        </p:nvSpPr>
-        <p:spPr>
-          <a:xfrm>
-            <a:off x="450554" y="1017724"/>
-            <a:ext cx="8520600" cy="612087"/>
-          </a:xfrm>
-          <a:prstGeom prst="rect">
-            <a:avLst/>
-          </a:prstGeom>
-          <a:noFill/>
-          <a:ln>
-            <a:noFill/>
-          </a:ln>
-        </p:spPr>
-        <p:txBody>
-          <a:bodyPr spcFirstLastPara="1" wrap="square" lIns="91425" tIns="91425" rIns="91425" bIns="91425" anchor="t" anchorCtr="0">
-            <a:normAutofit fontScale="97500"/>
-          </a:bodyPr>
-          <a:lstStyle>
-            <a:defPPr marR="0" lvl="0" algn="l" rtl="0">
-              <a:lnSpc>
-                <a:spcPct val="100000"/>
-              </a:lnSpc>
-              <a:spcBef>
-                <a:spcPts val="0"/>
-              </a:spcBef>
-              <a:spcAft>
-                <a:spcPts val="0"/>
-              </a:spcAft>
-            </a:defPPr>
-            <a:lvl1pPr marR="0" lvl="0" algn="l" rtl="0">
-              <a:lnSpc>
-                <a:spcPct val="100000"/>
-              </a:lnSpc>
-              <a:spcBef>
-                <a:spcPts val="0"/>
-              </a:spcBef>
-              <a:spcAft>
-                <a:spcPts val="0"/>
-              </a:spcAft>
-              <a:buClr>
-                <a:schemeClr val="dk1"/>
-              </a:buClr>
-              <a:buSzPts val="2800"/>
-              <a:buFont typeface="Arial"/>
-              <a:buNone/>
-              <a:defRPr sz="2800" b="0" i="0" u="none" strike="noStrike" cap="none">
-                <a:solidFill>
-                  <a:schemeClr val="dk1"/>
-                </a:solidFill>
-                <a:latin typeface="Arial"/>
-                <a:ea typeface="Arial"/>
-                <a:cs typeface="Arial"/>
-                <a:sym typeface="Arial"/>
-              </a:defRPr>
-            </a:lvl1pPr>
-            <a:lvl2pPr marR="0" lvl="1" algn="l" rtl="0">
-              <a:lnSpc>
-                <a:spcPct val="100000"/>
-              </a:lnSpc>
-              <a:spcBef>
-                <a:spcPts val="0"/>
-              </a:spcBef>
-              <a:spcAft>
-                <a:spcPts val="0"/>
-              </a:spcAft>
-              <a:buClr>
-                <a:schemeClr val="dk1"/>
-              </a:buClr>
-              <a:buSzPts val="2800"/>
-              <a:buFont typeface="Arial"/>
-              <a:buNone/>
-              <a:defRPr sz="2800" b="0" i="0" u="none" strike="noStrike" cap="none">
-                <a:solidFill>
-                  <a:schemeClr val="dk1"/>
-                </a:solidFill>
-                <a:latin typeface="Arial"/>
-                <a:ea typeface="Arial"/>
-                <a:cs typeface="Arial"/>
-                <a:sym typeface="Arial"/>
-              </a:defRPr>
-            </a:lvl2pPr>
-            <a:lvl3pPr marR="0" lvl="2" algn="l" rtl="0">
-              <a:lnSpc>
-                <a:spcPct val="100000"/>
-              </a:lnSpc>
-              <a:spcBef>
-                <a:spcPts val="0"/>
-              </a:spcBef>
-              <a:spcAft>
-                <a:spcPts val="0"/>
-              </a:spcAft>
-              <a:buClr>
-                <a:schemeClr val="dk1"/>
-              </a:buClr>
-              <a:buSzPts val="2800"/>
-              <a:buFont typeface="Arial"/>
-              <a:buNone/>
-              <a:defRPr sz="2800" b="0" i="0" u="none" strike="noStrike" cap="none">
-                <a:solidFill>
-                  <a:schemeClr val="dk1"/>
-                </a:solidFill>
-                <a:latin typeface="Arial"/>
-                <a:ea typeface="Arial"/>
-                <a:cs typeface="Arial"/>
-                <a:sym typeface="Arial"/>
-              </a:defRPr>
-            </a:lvl3pPr>
-            <a:lvl4pPr marR="0" lvl="3" algn="l" rtl="0">
-              <a:lnSpc>
-                <a:spcPct val="100000"/>
-              </a:lnSpc>
-              <a:spcBef>
-                <a:spcPts val="0"/>
-              </a:spcBef>
-              <a:spcAft>
-                <a:spcPts val="0"/>
-              </a:spcAft>
-              <a:buClr>
-                <a:schemeClr val="dk1"/>
-              </a:buClr>
-              <a:buSzPts val="2800"/>
-              <a:buFont typeface="Arial"/>
-              <a:buNone/>
-              <a:defRPr sz="2800" b="0" i="0" u="none" strike="noStrike" cap="none">
-                <a:solidFill>
-                  <a:schemeClr val="dk1"/>
-                </a:solidFill>
-                <a:latin typeface="Arial"/>
-                <a:ea typeface="Arial"/>
-                <a:cs typeface="Arial"/>
-                <a:sym typeface="Arial"/>
-              </a:defRPr>
-            </a:lvl4pPr>
-            <a:lvl5pPr marR="0" lvl="4" algn="l" rtl="0">
-              <a:lnSpc>
-                <a:spcPct val="100000"/>
-              </a:lnSpc>
-              <a:spcBef>
-                <a:spcPts val="0"/>
-              </a:spcBef>
-              <a:spcAft>
-                <a:spcPts val="0"/>
-              </a:spcAft>
-              <a:buClr>
-                <a:schemeClr val="dk1"/>
-              </a:buClr>
-              <a:buSzPts val="2800"/>
-              <a:buFont typeface="Arial"/>
-              <a:buNone/>
-              <a:defRPr sz="2800" b="0" i="0" u="none" strike="noStrike" cap="none">
-                <a:solidFill>
-                  <a:schemeClr val="dk1"/>
-                </a:solidFill>
-                <a:latin typeface="Arial"/>
-                <a:ea typeface="Arial"/>
-                <a:cs typeface="Arial"/>
-                <a:sym typeface="Arial"/>
-              </a:defRPr>
-            </a:lvl5pPr>
-            <a:lvl6pPr marR="0" lvl="5" algn="l" rtl="0">
-              <a:lnSpc>
-                <a:spcPct val="100000"/>
-              </a:lnSpc>
-              <a:spcBef>
-                <a:spcPts val="0"/>
-              </a:spcBef>
-              <a:spcAft>
-                <a:spcPts val="0"/>
-              </a:spcAft>
-              <a:buClr>
-                <a:schemeClr val="dk1"/>
-              </a:buClr>
-              <a:buSzPts val="2800"/>
-              <a:buFont typeface="Arial"/>
-              <a:buNone/>
-              <a:defRPr sz="2800" b="0" i="0" u="none" strike="noStrike" cap="none">
-                <a:solidFill>
-                  <a:schemeClr val="dk1"/>
-                </a:solidFill>
-                <a:latin typeface="Arial"/>
-                <a:ea typeface="Arial"/>
-                <a:cs typeface="Arial"/>
-                <a:sym typeface="Arial"/>
-              </a:defRPr>
-            </a:lvl6pPr>
-            <a:lvl7pPr marR="0" lvl="6" algn="l" rtl="0">
-              <a:lnSpc>
-                <a:spcPct val="100000"/>
-              </a:lnSpc>
-              <a:spcBef>
-                <a:spcPts val="0"/>
-              </a:spcBef>
-              <a:spcAft>
-                <a:spcPts val="0"/>
-              </a:spcAft>
-              <a:buClr>
-                <a:schemeClr val="dk1"/>
-              </a:buClr>
-              <a:buSzPts val="2800"/>
-              <a:buFont typeface="Arial"/>
-              <a:buNone/>
-              <a:defRPr sz="2800" b="0" i="0" u="none" strike="noStrike" cap="none">
-                <a:solidFill>
-                  <a:schemeClr val="dk1"/>
-                </a:solidFill>
-                <a:latin typeface="Arial"/>
-                <a:ea typeface="Arial"/>
-                <a:cs typeface="Arial"/>
-                <a:sym typeface="Arial"/>
-              </a:defRPr>
-            </a:lvl7pPr>
-            <a:lvl8pPr marR="0" lvl="7" algn="l" rtl="0">
-              <a:lnSpc>
-                <a:spcPct val="100000"/>
-              </a:lnSpc>
-              <a:spcBef>
-                <a:spcPts val="0"/>
-              </a:spcBef>
-              <a:spcAft>
-                <a:spcPts val="0"/>
-              </a:spcAft>
-              <a:buClr>
-                <a:schemeClr val="dk1"/>
-              </a:buClr>
-              <a:buSzPts val="2800"/>
-              <a:buFont typeface="Arial"/>
-              <a:buNone/>
-              <a:defRPr sz="2800" b="0" i="0" u="none" strike="noStrike" cap="none">
-                <a:solidFill>
-                  <a:schemeClr val="dk1"/>
-                </a:solidFill>
-                <a:latin typeface="Arial"/>
-                <a:ea typeface="Arial"/>
-                <a:cs typeface="Arial"/>
-                <a:sym typeface="Arial"/>
-              </a:defRPr>
-            </a:lvl8pPr>
-            <a:lvl9pPr marR="0" lvl="8" algn="l" rtl="0">
-              <a:lnSpc>
-                <a:spcPct val="100000"/>
-              </a:lnSpc>
-              <a:spcBef>
-                <a:spcPts val="0"/>
-              </a:spcBef>
-              <a:spcAft>
-                <a:spcPts val="0"/>
-              </a:spcAft>
-              <a:buClr>
-                <a:schemeClr val="dk1"/>
-              </a:buClr>
-              <a:buSzPts val="2800"/>
-              <a:buFont typeface="Arial"/>
-              <a:buNone/>
-              <a:defRPr sz="2800" b="0" i="0" u="none" strike="noStrike" cap="none">
-                <a:solidFill>
-                  <a:schemeClr val="dk1"/>
-                </a:solidFill>
-                <a:latin typeface="Arial"/>
-                <a:ea typeface="Arial"/>
-                <a:cs typeface="Arial"/>
-                <a:sym typeface="Arial"/>
-              </a:defRPr>
-            </a:lvl9pPr>
-          </a:lstStyle>
-          <a:p>
-            <a:endParaRPr lang="ru-RU" dirty="0">
-              <a:solidFill>
-                <a:schemeClr val="tx1">
-                  <a:lumMod val="50000"/>
-                  <a:lumOff val="50000"/>
-                </a:schemeClr>
-              </a:solidFill>
-            </a:endParaRPr>
           </a:p>
         </p:txBody>
       </p:sp>
@@ -7625,8 +8348,18 @@
           </a:lstStyle>
           <a:p>
             <a:r>
-              <a:rPr lang="ru-RU" sz="2500" dirty="0"/>
-              <a:t>Предметная область:</a:t>
+              <a:rPr lang="ru-RU" sz="2600" dirty="0">
+                <a:latin typeface="Times New Roman" panose="02020603050405020304" pitchFamily="18" charset="0"/>
+                <a:cs typeface="Times New Roman" panose="02020603050405020304" pitchFamily="18" charset="0"/>
+              </a:rPr>
+              <a:t>Предметная</a:t>
+            </a:r>
+            <a:r>
+              <a:rPr lang="ru-RU" sz="2500" dirty="0">
+                <a:latin typeface="Times New Roman" panose="02020603050405020304" pitchFamily="18" charset="0"/>
+                <a:cs typeface="Times New Roman" panose="02020603050405020304" pitchFamily="18" charset="0"/>
+              </a:rPr>
+              <a:t> область:</a:t>
             </a:r>
           </a:p>
         </p:txBody>
@@ -7660,7 +8393,7 @@
         </p:spPr>
         <p:txBody>
           <a:bodyPr spcFirstLastPara="1" wrap="square" lIns="91425" tIns="91425" rIns="91425" bIns="91425" anchor="t" anchorCtr="0">
-            <a:normAutofit fontScale="60000" lnSpcReduction="20000"/>
+            <a:noAutofit/>
           </a:bodyPr>
           <a:lstStyle>
             <a:defPPr marR="0" lvl="0" algn="l" rtl="0">
@@ -7911,34 +8644,40 @@
           </a:lstStyle>
           <a:p>
             <a:r>
-              <a:rPr lang="ru-RU" dirty="0">
+              <a:rPr lang="ru-RU" sz="1800" dirty="0">
                 <a:solidFill>
                   <a:schemeClr val="tx1">
                     <a:lumMod val="50000"/>
                     <a:lumOff val="50000"/>
                   </a:schemeClr>
                 </a:solidFill>
+                <a:latin typeface="Times New Roman" panose="02020603050405020304" pitchFamily="18" charset="0"/>
+                <a:cs typeface="Times New Roman" panose="02020603050405020304" pitchFamily="18" charset="0"/>
               </a:rPr>
               <a:t>Алгоритмический онлайн-трейдинг ликвидных акций Московской биржи на основе минутных данных </a:t>
             </a:r>
             <a:r>
-              <a:rPr lang="en-US" dirty="0">
+              <a:rPr lang="en-US" sz="1800" dirty="0">
                 <a:solidFill>
                   <a:schemeClr val="tx1">
                     <a:lumMod val="50000"/>
                     <a:lumOff val="50000"/>
                   </a:schemeClr>
                 </a:solidFill>
+                <a:latin typeface="Times New Roman" panose="02020603050405020304" pitchFamily="18" charset="0"/>
+                <a:cs typeface="Times New Roman" panose="02020603050405020304" pitchFamily="18" charset="0"/>
               </a:rPr>
               <a:t>OHLCV</a:t>
             </a:r>
-            <a:endParaRPr lang="ru-RU" dirty="0">
+            <a:endParaRPr lang="ru-RU" sz="1800" dirty="0">
               <a:solidFill>
                 <a:schemeClr val="tx1">
                   <a:lumMod val="50000"/>
                   <a:lumOff val="50000"/>
                 </a:schemeClr>
               </a:solidFill>
+              <a:latin typeface="Times New Roman" panose="02020603050405020304" pitchFamily="18" charset="0"/>
+              <a:cs typeface="Times New Roman" panose="02020603050405020304" pitchFamily="18" charset="0"/>
             </a:endParaRPr>
           </a:p>
         </p:txBody>
@@ -8223,12 +8962,24 @@
           </a:lstStyle>
           <a:p>
             <a:r>
-              <a:rPr lang="ru-RU" dirty="0">
+              <a:rPr lang="ru-RU" sz="2600" dirty="0">
                 <a:solidFill>
                   <a:schemeClr val="tx1"/>
                 </a:solidFill>
+                <a:latin typeface="Times New Roman" panose="02020603050405020304" pitchFamily="18" charset="0"/>
+                <a:cs typeface="Times New Roman" panose="02020603050405020304" pitchFamily="18" charset="0"/>
               </a:rPr>
-              <a:t>Мотивация:</a:t>
+              <a:t>Мотивация</a:t>
+            </a:r>
+            <a:r>
+              <a:rPr lang="ru-RU" sz="2500" dirty="0">
+                <a:solidFill>
+                  <a:schemeClr val="tx1"/>
+                </a:solidFill>
+                <a:latin typeface="Times New Roman" panose="02020603050405020304" pitchFamily="18" charset="0"/>
+                <a:cs typeface="Times New Roman" panose="02020603050405020304" pitchFamily="18" charset="0"/>
+              </a:rPr>
+              <a:t>:</a:t>
             </a:r>
           </a:p>
         </p:txBody>
@@ -8262,7 +9013,7 @@
         </p:spPr>
         <p:txBody>
           <a:bodyPr spcFirstLastPara="1" wrap="square" lIns="91425" tIns="91425" rIns="91425" bIns="91425" anchor="t" anchorCtr="0">
-            <a:normAutofit fontScale="60000" lnSpcReduction="20000"/>
+            <a:noAutofit/>
           </a:bodyPr>
           <a:lstStyle>
             <a:defPPr marR="0" lvl="0" algn="l" rtl="0">
@@ -8513,16 +9264,62 @@
           </a:lstStyle>
           <a:p>
             <a:r>
-              <a:rPr lang="ru-RU" dirty="0">
+              <a:rPr lang="ru-RU" sz="1800" dirty="0">
                 <a:solidFill>
                   <a:schemeClr val="tx1">
                     <a:lumMod val="50000"/>
                     <a:lumOff val="50000"/>
                   </a:schemeClr>
                 </a:solidFill>
+                <a:latin typeface="Times New Roman" panose="02020603050405020304" pitchFamily="18" charset="0"/>
+                <a:cs typeface="Times New Roman" panose="02020603050405020304" pitchFamily="18" charset="0"/>
               </a:rPr>
               <a:t>Прогноз цены сам по себе недостаточен: необходимо преобразовать прогноз в торговое действие с учётом реальных ограничений рынка</a:t>
             </a:r>
+          </a:p>
+        </p:txBody>
+      </p:sp>
+      <p:sp>
+        <p:nvSpPr>
+          <p:cNvPr id="3" name="Номер слайда 2">
+            <a:extLst>
+              <a:ext uri="{FF2B5EF4-FFF2-40B4-BE49-F238E27FC236}">
+                <a16:creationId xmlns:a16="http://schemas.microsoft.com/office/drawing/2014/main" id="{9DA5FB3A-9AB5-08E1-83B7-1034BC2005D1}"/>
+              </a:ext>
+            </a:extLst>
+          </p:cNvPr>
+          <p:cNvSpPr>
+            <a:spLocks noGrp="1"/>
+          </p:cNvSpPr>
+          <p:nvPr>
+            <p:ph type="sldNum" idx="12"/>
+          </p:nvPr>
+        </p:nvSpPr>
+        <p:spPr/>
+        <p:txBody>
+          <a:bodyPr/>
+          <a:lstStyle/>
+          <a:p>
+            <a:pPr marL="0" lvl="0" indent="0" algn="r" rtl="0">
+              <a:spcBef>
+                <a:spcPts val="0"/>
+              </a:spcBef>
+              <a:spcAft>
+                <a:spcPts val="0"/>
+              </a:spcAft>
+              <a:buNone/>
+            </a:pPr>
+            <a:fld id="{00000000-1234-1234-1234-123412341234}" type="slidenum">
+              <a:rPr lang="ru" smtClean="0">
+                <a:latin typeface="Times New Roman" panose="02020603050405020304" pitchFamily="18" charset="0"/>
+                <a:cs typeface="Times New Roman" panose="02020603050405020304" pitchFamily="18" charset="0"/>
+              </a:rPr>
+              <a:t>2</a:t>
+            </a:fld>
+            <a:endParaRPr lang="ru">
+              <a:latin typeface="Times New Roman" panose="02020603050405020304" pitchFamily="18" charset="0"/>
+              <a:cs typeface="Times New Roman" panose="02020603050405020304" pitchFamily="18" charset="0"/>
+            </a:endParaRPr>
           </a:p>
         </p:txBody>
       </p:sp>
@@ -8586,10 +9383,16 @@
               <a:buNone/>
             </a:pPr>
             <a:r>
-              <a:rPr lang="ru" dirty="0"/>
+              <a:rPr lang="ru" dirty="0">
+                <a:latin typeface="Times New Roman" panose="02020603050405020304" pitchFamily="18" charset="0"/>
+                <a:cs typeface="Times New Roman" panose="02020603050405020304" pitchFamily="18" charset="0"/>
+              </a:rPr>
               <a:t>Цель работы: повышение эффективности алгоритмического трейдинга</a:t>
             </a:r>
-            <a:endParaRPr dirty="0"/>
+            <a:endParaRPr dirty="0">
+              <a:latin typeface="Times New Roman" panose="02020603050405020304" pitchFamily="18" charset="0"/>
+              <a:cs typeface="Times New Roman" panose="02020603050405020304" pitchFamily="18" charset="0"/>
+            </a:endParaRPr>
           </a:p>
         </p:txBody>
       </p:sp>
@@ -8628,7 +9431,10 @@
               <a:buNone/>
             </a:pPr>
             <a:r>
-              <a:rPr lang="ru-RU" dirty="0"/>
+              <a:rPr lang="ru-RU" dirty="0">
+                <a:latin typeface="Times New Roman" panose="02020603050405020304" pitchFamily="18" charset="0"/>
+                <a:cs typeface="Times New Roman" panose="02020603050405020304" pitchFamily="18" charset="0"/>
+              </a:rPr>
               <a:t>Задачи:</a:t>
             </a:r>
           </a:p>
@@ -8638,11 +9444,17 @@
               <a:buAutoNum type="arabicPeriod"/>
             </a:pPr>
             <a:r>
-              <a:rPr lang="ru-RU" dirty="0"/>
-              <a:t>Анализ предметной области онлайн-трейдинга, методов прогнозирования и средств исторического тестирования</a:t>
+              <a:rPr lang="ru-RU" dirty="0">
+                <a:latin typeface="Times New Roman" panose="02020603050405020304" pitchFamily="18" charset="0"/>
+                <a:cs typeface="Times New Roman" panose="02020603050405020304" pitchFamily="18" charset="0"/>
+              </a:rPr>
+              <a:t>Проанализировать предметную область и существующие подходы</a:t>
             </a:r>
             <a:r>
-              <a:rPr lang="en-US" dirty="0"/>
+              <a:rPr lang="en-US" dirty="0">
+                <a:latin typeface="Times New Roman" panose="02020603050405020304" pitchFamily="18" charset="0"/>
+                <a:cs typeface="Times New Roman" panose="02020603050405020304" pitchFamily="18" charset="0"/>
+              </a:rPr>
               <a:t>;</a:t>
             </a:r>
           </a:p>
@@ -8652,14 +9464,23 @@
               <a:buAutoNum type="arabicPeriod"/>
             </a:pPr>
             <a:r>
-              <a:rPr lang="ru-RU" dirty="0"/>
-              <a:t>Подготовка минутных данных по ликвидным акциям MOEX</a:t>
+              <a:rPr lang="ru-RU" dirty="0">
+                <a:latin typeface="Times New Roman" panose="02020603050405020304" pitchFamily="18" charset="0"/>
+                <a:cs typeface="Times New Roman" panose="02020603050405020304" pitchFamily="18" charset="0"/>
+              </a:rPr>
+              <a:t>Подготовить минутные данные по ликвидным акциям Московской биржи</a:t>
             </a:r>
             <a:r>
-              <a:rPr lang="en-US" dirty="0"/>
+              <a:rPr lang="en-US" dirty="0">
+                <a:latin typeface="Times New Roman" panose="02020603050405020304" pitchFamily="18" charset="0"/>
+                <a:cs typeface="Times New Roman" panose="02020603050405020304" pitchFamily="18" charset="0"/>
+              </a:rPr>
               <a:t>;</a:t>
             </a:r>
-            <a:endParaRPr lang="ru-RU" dirty="0"/>
+            <a:endParaRPr lang="ru-RU" dirty="0">
+              <a:latin typeface="Times New Roman" panose="02020603050405020304" pitchFamily="18" charset="0"/>
+              <a:cs typeface="Times New Roman" panose="02020603050405020304" pitchFamily="18" charset="0"/>
+            </a:endParaRPr>
           </a:p>
           <a:p>
             <a:pPr marL="342900" lvl="0">
@@ -8667,11 +9488,17 @@
               <a:buAutoNum type="arabicPeriod"/>
             </a:pPr>
             <a:r>
-              <a:rPr lang="ru-RU" dirty="0"/>
-              <a:t>Разработка и сравнение моделей прогноза доходности</a:t>
+              <a:rPr lang="ru-RU" dirty="0">
+                <a:latin typeface="Times New Roman" panose="02020603050405020304" pitchFamily="18" charset="0"/>
+                <a:cs typeface="Times New Roman" panose="02020603050405020304" pitchFamily="18" charset="0"/>
+              </a:rPr>
+              <a:t>Разработать модели прогнозирования доходности</a:t>
             </a:r>
             <a:r>
-              <a:rPr lang="en-US" dirty="0"/>
+              <a:rPr lang="en-US" dirty="0">
+                <a:latin typeface="Times New Roman" panose="02020603050405020304" pitchFamily="18" charset="0"/>
+                <a:cs typeface="Times New Roman" panose="02020603050405020304" pitchFamily="18" charset="0"/>
+              </a:rPr>
               <a:t>;</a:t>
             </a:r>
           </a:p>
@@ -8681,22 +9508,23 @@
               <a:buAutoNum type="arabicPeriod"/>
             </a:pPr>
             <a:r>
-              <a:rPr lang="ru-RU" dirty="0"/>
-              <a:t>Проектирование модуля торговых решений стратегии</a:t>
+              <a:rPr lang="ru-RU" dirty="0">
+                <a:latin typeface="Times New Roman" panose="02020603050405020304" pitchFamily="18" charset="0"/>
+                <a:cs typeface="Times New Roman" panose="02020603050405020304" pitchFamily="18" charset="0"/>
+              </a:rPr>
+              <a:t>Спроектировать модуль принятия торговых решений</a:t>
             </a:r>
             <a:r>
-              <a:rPr lang="en-US" dirty="0"/>
-              <a:t> </a:t>
-            </a:r>
-            <a:r>
-              <a:rPr lang="ru-RU" dirty="0"/>
-              <a:t>торговли длинными позициями</a:t>
-            </a:r>
-            <a:r>
-              <a:rPr lang="en-US" dirty="0"/>
+              <a:rPr lang="en-US" dirty="0">
+                <a:latin typeface="Times New Roman" panose="02020603050405020304" pitchFamily="18" charset="0"/>
+                <a:cs typeface="Times New Roman" panose="02020603050405020304" pitchFamily="18" charset="0"/>
+              </a:rPr>
               <a:t>;</a:t>
             </a:r>
-            <a:endParaRPr lang="ru-RU" dirty="0"/>
+            <a:endParaRPr lang="ru-RU" dirty="0">
+              <a:latin typeface="Times New Roman" panose="02020603050405020304" pitchFamily="18" charset="0"/>
+              <a:cs typeface="Times New Roman" panose="02020603050405020304" pitchFamily="18" charset="0"/>
+            </a:endParaRPr>
           </a:p>
           <a:p>
             <a:pPr marL="342900" lvl="0">
@@ -8704,8 +9532,11 @@
               <a:buAutoNum type="arabicPeriod"/>
             </a:pPr>
             <a:r>
-              <a:rPr lang="ru-RU" dirty="0"/>
-              <a:t>Историческое тестирование и экспериментальная проверка полного контура системы.</a:t>
+              <a:rPr lang="ru-RU" dirty="0">
+                <a:latin typeface="Times New Roman" panose="02020603050405020304" pitchFamily="18" charset="0"/>
+                <a:cs typeface="Times New Roman" panose="02020603050405020304" pitchFamily="18" charset="0"/>
+              </a:rPr>
+              <a:t>Реализовать историческое тестирование стратегий.</a:t>
             </a:r>
           </a:p>
           <a:p>
@@ -8713,7 +9544,54 @@
               <a:buFont typeface="+mj-lt"/>
               <a:buAutoNum type="arabicPeriod"/>
             </a:pPr>
-            <a:endParaRPr lang="ru-RU" dirty="0"/>
+            <a:endParaRPr lang="ru-RU" dirty="0">
+              <a:latin typeface="Times New Roman" panose="02020603050405020304" pitchFamily="18" charset="0"/>
+              <a:cs typeface="Times New Roman" panose="02020603050405020304" pitchFamily="18" charset="0"/>
+            </a:endParaRPr>
+          </a:p>
+        </p:txBody>
+      </p:sp>
+      <p:sp>
+        <p:nvSpPr>
+          <p:cNvPr id="2" name="Номер слайда 1">
+            <a:extLst>
+              <a:ext uri="{FF2B5EF4-FFF2-40B4-BE49-F238E27FC236}">
+                <a16:creationId xmlns:a16="http://schemas.microsoft.com/office/drawing/2014/main" id="{12AB655C-A9E4-181F-1B02-20662E4851C7}"/>
+              </a:ext>
+            </a:extLst>
+          </p:cNvPr>
+          <p:cNvSpPr>
+            <a:spLocks noGrp="1"/>
+          </p:cNvSpPr>
+          <p:nvPr>
+            <p:ph type="sldNum" idx="12"/>
+          </p:nvPr>
+        </p:nvSpPr>
+        <p:spPr/>
+        <p:txBody>
+          <a:bodyPr/>
+          <a:lstStyle/>
+          <a:p>
+            <a:pPr marL="0" lvl="0" indent="0" algn="r" rtl="0">
+              <a:spcBef>
+                <a:spcPts val="0"/>
+              </a:spcBef>
+              <a:spcAft>
+                <a:spcPts val="0"/>
+              </a:spcAft>
+              <a:buNone/>
+            </a:pPr>
+            <a:fld id="{00000000-1234-1234-1234-123412341234}" type="slidenum">
+              <a:rPr lang="ru" smtClean="0">
+                <a:latin typeface="Times New Roman" panose="02020603050405020304" pitchFamily="18" charset="0"/>
+                <a:cs typeface="Times New Roman" panose="02020603050405020304" pitchFamily="18" charset="0"/>
+              </a:rPr>
+              <a:t>3</a:t>
+            </a:fld>
+            <a:endParaRPr lang="ru">
+              <a:latin typeface="Times New Roman" panose="02020603050405020304" pitchFamily="18" charset="0"/>
+              <a:cs typeface="Times New Roman" panose="02020603050405020304" pitchFamily="18" charset="0"/>
+            </a:endParaRPr>
           </a:p>
         </p:txBody>
       </p:sp>
@@ -8777,10 +9655,16 @@
               <a:buNone/>
             </a:pPr>
             <a:r>
-              <a:rPr lang="ru" dirty="0"/>
+              <a:rPr lang="ru" dirty="0">
+                <a:latin typeface="Times New Roman" panose="02020603050405020304" pitchFamily="18" charset="0"/>
+                <a:cs typeface="Times New Roman" panose="02020603050405020304" pitchFamily="18" charset="0"/>
+              </a:rPr>
               <a:t>Сравнение средств исторического тестирования</a:t>
             </a:r>
-            <a:endParaRPr dirty="0"/>
+            <a:endParaRPr dirty="0">
+              <a:latin typeface="Times New Roman" panose="02020603050405020304" pitchFamily="18" charset="0"/>
+              <a:cs typeface="Times New Roman" panose="02020603050405020304" pitchFamily="18" charset="0"/>
+            </a:endParaRPr>
           </a:p>
         </p:txBody>
       </p:sp>
@@ -8799,14 +9683,14 @@
           <p:nvPr>
             <p:extLst>
               <p:ext uri="{D42A27DB-BD31-4B8C-83A1-F6EECF244321}">
-                <p14:modId xmlns:p14="http://schemas.microsoft.com/office/powerpoint/2010/main" val="545714711"/>
+                <p14:modId xmlns:p14="http://schemas.microsoft.com/office/powerpoint/2010/main" val="1581128863"/>
               </p:ext>
             </p:extLst>
           </p:nvPr>
         </p:nvGraphicFramePr>
         <p:xfrm>
-          <a:off x="424720" y="1348155"/>
-          <a:ext cx="8294559" cy="2518096"/>
+          <a:off x="352840" y="1348155"/>
+          <a:ext cx="8366440" cy="2731456"/>
         </p:xfrm>
         <a:graphic>
           <a:graphicData uri="http://schemas.openxmlformats.org/drawingml/2006/table">
@@ -8815,42 +9699,42 @@
                 <a:tableStyleId>{5C22544A-7EE6-4342-B048-85BDC9FD1C3A}</a:tableStyleId>
               </a:tblPr>
               <a:tblGrid>
-                <a:gridCol w="1455508">
+                <a:gridCol w="1468121">
                   <a:extLst>
                     <a:ext uri="{9D8B030D-6E8A-4147-A177-3AD203B41FA5}">
                       <a16:colId xmlns:a16="http://schemas.microsoft.com/office/drawing/2014/main" val="2557347617"/>
                     </a:ext>
                   </a:extLst>
                 </a:gridCol>
-                <a:gridCol w="1047059">
+                <a:gridCol w="1056133">
                   <a:extLst>
                     <a:ext uri="{9D8B030D-6E8A-4147-A177-3AD203B41FA5}">
                       <a16:colId xmlns:a16="http://schemas.microsoft.com/office/drawing/2014/main" val="2319195195"/>
                     </a:ext>
                   </a:extLst>
                 </a:gridCol>
-                <a:gridCol w="1122865">
+                <a:gridCol w="1132596">
                   <a:extLst>
                     <a:ext uri="{9D8B030D-6E8A-4147-A177-3AD203B41FA5}">
                       <a16:colId xmlns:a16="http://schemas.microsoft.com/office/drawing/2014/main" val="100269759"/>
                     </a:ext>
                   </a:extLst>
                 </a:gridCol>
-                <a:gridCol w="1710264">
+                <a:gridCol w="1725085">
                   <a:extLst>
                     <a:ext uri="{9D8B030D-6E8A-4147-A177-3AD203B41FA5}">
                       <a16:colId xmlns:a16="http://schemas.microsoft.com/office/drawing/2014/main" val="1914388555"/>
                     </a:ext>
                   </a:extLst>
                 </a:gridCol>
-                <a:gridCol w="1514742">
+                <a:gridCol w="1633422">
                   <a:extLst>
                     <a:ext uri="{9D8B030D-6E8A-4147-A177-3AD203B41FA5}">
                       <a16:colId xmlns:a16="http://schemas.microsoft.com/office/drawing/2014/main" val="1650913469"/>
                     </a:ext>
                   </a:extLst>
                 </a:gridCol>
-                <a:gridCol w="1444121">
+                <a:gridCol w="1351083">
                   <a:extLst>
                     <a:ext uri="{9D8B030D-6E8A-4147-A177-3AD203B41FA5}">
                       <a16:colId xmlns:a16="http://schemas.microsoft.com/office/drawing/2014/main" val="824048194"/>
@@ -8866,7 +9750,10 @@
                     <a:p>
                       <a:pPr algn="ctr"/>
                       <a:r>
-                        <a:rPr lang="ru-RU" dirty="0"/>
+                        <a:rPr lang="ru-RU" dirty="0">
+                          <a:latin typeface="Times New Roman" panose="02020603050405020304" pitchFamily="18" charset="0"/>
+                          <a:cs typeface="Times New Roman" panose="02020603050405020304" pitchFamily="18" charset="0"/>
+                        </a:rPr>
                         <a:t>Средство</a:t>
                       </a:r>
                     </a:p>
@@ -8880,7 +9767,10 @@
                     <a:p>
                       <a:pPr algn="ctr"/>
                       <a:r>
-                        <a:rPr lang="ru-RU" dirty="0"/>
+                        <a:rPr lang="ru-RU" dirty="0">
+                          <a:latin typeface="Times New Roman" panose="02020603050405020304" pitchFamily="18" charset="0"/>
+                          <a:cs typeface="Times New Roman" panose="02020603050405020304" pitchFamily="18" charset="0"/>
+                        </a:rPr>
                         <a:t>Простота освоения</a:t>
                       </a:r>
                     </a:p>
@@ -8894,7 +9784,10 @@
                     <a:p>
                       <a:pPr algn="ctr"/>
                       <a:r>
-                        <a:rPr lang="ru-RU" dirty="0"/>
+                        <a:rPr lang="ru-RU" dirty="0">
+                          <a:latin typeface="Times New Roman" panose="02020603050405020304" pitchFamily="18" charset="0"/>
+                          <a:cs typeface="Times New Roman" panose="02020603050405020304" pitchFamily="18" charset="0"/>
+                        </a:rPr>
                         <a:t>Гибкость настройки</a:t>
                       </a:r>
                     </a:p>
@@ -8908,7 +9801,10 @@
                     <a:p>
                       <a:pPr algn="ctr"/>
                       <a:r>
-                        <a:rPr lang="ru-RU" dirty="0"/>
+                        <a:rPr lang="ru-RU" dirty="0">
+                          <a:latin typeface="Times New Roman" panose="02020603050405020304" pitchFamily="18" charset="0"/>
+                          <a:cs typeface="Times New Roman" panose="02020603050405020304" pitchFamily="18" charset="0"/>
+                        </a:rPr>
                         <a:t>Интеграция с моделями ИИ</a:t>
                       </a:r>
                     </a:p>
@@ -8922,14 +9818,37 @@
                     <a:p>
                       <a:pPr algn="ctr"/>
                       <a:r>
-                        <a:rPr lang="ru-RU" dirty="0"/>
-                        <a:t>Пригодность для данных </a:t>
+                        <a:rPr lang="ru-RU" dirty="0">
+                          <a:latin typeface="Times New Roman" panose="02020603050405020304" pitchFamily="18" charset="0"/>
+                          <a:cs typeface="Times New Roman" panose="02020603050405020304" pitchFamily="18" charset="0"/>
+                        </a:rPr>
+                        <a:t>Пригодность для </a:t>
                       </a:r>
                       <a:r>
-                        <a:rPr lang="en-US" dirty="0"/>
+                        <a:rPr lang="en-US" dirty="0">
+                          <a:latin typeface="Times New Roman" panose="02020603050405020304" pitchFamily="18" charset="0"/>
+                          <a:cs typeface="Times New Roman" panose="02020603050405020304" pitchFamily="18" charset="0"/>
+                        </a:rPr>
+                        <a:t>ML-</a:t>
+                      </a:r>
+                      <a:r>
+                        <a:rPr lang="ru-RU" dirty="0">
+                          <a:latin typeface="Times New Roman" panose="02020603050405020304" pitchFamily="18" charset="0"/>
+                          <a:cs typeface="Times New Roman" panose="02020603050405020304" pitchFamily="18" charset="0"/>
+                        </a:rPr>
+                        <a:t>экспериментов на данных </a:t>
+                      </a:r>
+                      <a:r>
+                        <a:rPr lang="en-US" dirty="0">
+                          <a:latin typeface="Times New Roman" panose="02020603050405020304" pitchFamily="18" charset="0"/>
+                          <a:cs typeface="Times New Roman" panose="02020603050405020304" pitchFamily="18" charset="0"/>
+                        </a:rPr>
                         <a:t>MOEX</a:t>
                       </a:r>
-                      <a:endParaRPr lang="ru-RU" dirty="0"/>
+                      <a:endParaRPr lang="ru-RU" dirty="0">
+                        <a:latin typeface="Times New Roman" panose="02020603050405020304" pitchFamily="18" charset="0"/>
+                        <a:cs typeface="Times New Roman" panose="02020603050405020304" pitchFamily="18" charset="0"/>
+                      </a:endParaRPr>
                     </a:p>
                   </a:txBody>
                   <a:tcPr anchor="ctr"/>
@@ -8941,7 +9860,10 @@
                     <a:p>
                       <a:pPr algn="ctr"/>
                       <a:r>
-                        <a:rPr lang="ru-RU" dirty="0"/>
+                        <a:rPr lang="ru-RU" dirty="0">
+                          <a:latin typeface="Times New Roman" panose="02020603050405020304" pitchFamily="18" charset="0"/>
+                          <a:cs typeface="Times New Roman" panose="02020603050405020304" pitchFamily="18" charset="0"/>
+                        </a:rPr>
                         <a:t>Временная валидация</a:t>
                       </a:r>
                     </a:p>
@@ -8962,10 +9884,16 @@
                     <a:p>
                       <a:pPr algn="ctr"/>
                       <a:r>
-                        <a:rPr lang="en-US" dirty="0"/>
+                        <a:rPr lang="en-US" dirty="0">
+                          <a:latin typeface="Times New Roman" panose="02020603050405020304" pitchFamily="18" charset="0"/>
+                          <a:cs typeface="Times New Roman" panose="02020603050405020304" pitchFamily="18" charset="0"/>
+                        </a:rPr>
                         <a:t>Backtrader</a:t>
                       </a:r>
-                      <a:endParaRPr lang="ru-RU" dirty="0"/>
+                      <a:endParaRPr lang="ru-RU" dirty="0">
+                        <a:latin typeface="Times New Roman" panose="02020603050405020304" pitchFamily="18" charset="0"/>
+                        <a:cs typeface="Times New Roman" panose="02020603050405020304" pitchFamily="18" charset="0"/>
+                      </a:endParaRPr>
                     </a:p>
                   </a:txBody>
                   <a:tcPr anchor="ctr">
@@ -8984,7 +9912,10 @@
                     <a:p>
                       <a:pPr algn="ctr"/>
                       <a:r>
-                        <a:rPr lang="ru-RU" dirty="0"/>
+                        <a:rPr lang="ru-RU" dirty="0">
+                          <a:latin typeface="Times New Roman" panose="02020603050405020304" pitchFamily="18" charset="0"/>
+                          <a:cs typeface="Times New Roman" panose="02020603050405020304" pitchFamily="18" charset="0"/>
+                        </a:rPr>
                         <a:t>Высокая</a:t>
                       </a:r>
                     </a:p>
@@ -9005,7 +9936,10 @@
                     <a:p>
                       <a:pPr algn="ctr"/>
                       <a:r>
-                        <a:rPr lang="ru-RU" dirty="0"/>
+                        <a:rPr lang="ru-RU" dirty="0">
+                          <a:latin typeface="Times New Roman" panose="02020603050405020304" pitchFamily="18" charset="0"/>
+                          <a:cs typeface="Times New Roman" panose="02020603050405020304" pitchFamily="18" charset="0"/>
+                        </a:rPr>
                         <a:t>Высокая</a:t>
                       </a:r>
                     </a:p>
@@ -9026,7 +9960,10 @@
                     <a:p>
                       <a:pPr algn="ctr"/>
                       <a:r>
-                        <a:rPr lang="ru-RU" dirty="0"/>
+                        <a:rPr lang="ru-RU" dirty="0">
+                          <a:latin typeface="Times New Roman" panose="02020603050405020304" pitchFamily="18" charset="0"/>
+                          <a:cs typeface="Times New Roman" panose="02020603050405020304" pitchFamily="18" charset="0"/>
+                        </a:rPr>
                         <a:t>Средняя</a:t>
                       </a:r>
                     </a:p>
@@ -9047,7 +9984,165 @@
                     <a:p>
                       <a:pPr algn="ctr"/>
                       <a:r>
-                        <a:rPr lang="ru-RU" dirty="0"/>
+                        <a:rPr lang="ru-RU" dirty="0">
+                          <a:latin typeface="Times New Roman" panose="02020603050405020304" pitchFamily="18" charset="0"/>
+                          <a:cs typeface="Times New Roman" panose="02020603050405020304" pitchFamily="18" charset="0"/>
+                        </a:rPr>
+                        <a:t>Средняя</a:t>
+                      </a:r>
+                    </a:p>
+                  </a:txBody>
+                  <a:tcPr anchor="ctr">
+                    <a:solidFill>
+                      <a:schemeClr val="accent1">
+                        <a:lumMod val="40000"/>
+                        <a:lumOff val="60000"/>
+                      </a:schemeClr>
+                    </a:solidFill>
+                  </a:tcPr>
+                </a:tc>
+                <a:tc>
+                  <a:txBody>
+                    <a:bodyPr/>
+                    <a:lstStyle/>
+                    <a:p>
+                      <a:pPr algn="ctr"/>
+                      <a:r>
+                        <a:rPr lang="ru-RU" dirty="0">
+                          <a:latin typeface="Times New Roman" panose="02020603050405020304" pitchFamily="18" charset="0"/>
+                          <a:cs typeface="Times New Roman" panose="02020603050405020304" pitchFamily="18" charset="0"/>
+                        </a:rPr>
+                        <a:t>Средняя</a:t>
+                      </a:r>
+                    </a:p>
+                  </a:txBody>
+                  <a:tcPr anchor="ctr">
+                    <a:solidFill>
+                      <a:schemeClr val="accent1">
+                        <a:lumMod val="40000"/>
+                        <a:lumOff val="60000"/>
+                      </a:schemeClr>
+                    </a:solidFill>
+                  </a:tcPr>
+                </a:tc>
+                <a:extLst>
+                  <a:ext uri="{0D108BD9-81ED-4DB2-BD59-A6C34878D82A}">
+                    <a16:rowId xmlns:a16="http://schemas.microsoft.com/office/drawing/2014/main" val="1599896190"/>
+                  </a:ext>
+                </a:extLst>
+              </a:tr>
+              <a:tr h="375128">
+                <a:tc>
+                  <a:txBody>
+                    <a:bodyPr/>
+                    <a:lstStyle/>
+                    <a:p>
+                      <a:pPr algn="ctr"/>
+                      <a:r>
+                        <a:rPr lang="en-US" dirty="0">
+                          <a:latin typeface="Times New Roman" panose="02020603050405020304" pitchFamily="18" charset="0"/>
+                          <a:cs typeface="Times New Roman" panose="02020603050405020304" pitchFamily="18" charset="0"/>
+                        </a:rPr>
+                        <a:t>Zipline</a:t>
+                      </a:r>
+                      <a:endParaRPr lang="ru-RU" dirty="0">
+                        <a:latin typeface="Times New Roman" panose="02020603050405020304" pitchFamily="18" charset="0"/>
+                        <a:cs typeface="Times New Roman" panose="02020603050405020304" pitchFamily="18" charset="0"/>
+                      </a:endParaRPr>
+                    </a:p>
+                  </a:txBody>
+                  <a:tcPr anchor="ctr">
+                    <a:solidFill>
+                      <a:schemeClr val="accent4">
+                        <a:lumMod val="20000"/>
+                        <a:lumOff val="80000"/>
+                      </a:schemeClr>
+                    </a:solidFill>
+                  </a:tcPr>
+                </a:tc>
+                <a:tc>
+                  <a:txBody>
+                    <a:bodyPr/>
+                    <a:lstStyle/>
+                    <a:p>
+                      <a:pPr algn="ctr"/>
+                      <a:r>
+                        <a:rPr lang="ru-RU" dirty="0">
+                          <a:latin typeface="Times New Roman" panose="02020603050405020304" pitchFamily="18" charset="0"/>
+                          <a:cs typeface="Times New Roman" panose="02020603050405020304" pitchFamily="18" charset="0"/>
+                        </a:rPr>
+                        <a:t>Средняя</a:t>
+                      </a:r>
+                    </a:p>
+                  </a:txBody>
+                  <a:tcPr anchor="ctr">
+                    <a:solidFill>
+                      <a:schemeClr val="accent1">
+                        <a:lumMod val="40000"/>
+                        <a:lumOff val="60000"/>
+                      </a:schemeClr>
+                    </a:solidFill>
+                  </a:tcPr>
+                </a:tc>
+                <a:tc>
+                  <a:txBody>
+                    <a:bodyPr/>
+                    <a:lstStyle/>
+                    <a:p>
+                      <a:pPr algn="ctr"/>
+                      <a:r>
+                        <a:rPr lang="ru-RU" dirty="0">
+                          <a:latin typeface="Times New Roman" panose="02020603050405020304" pitchFamily="18" charset="0"/>
+                          <a:cs typeface="Times New Roman" panose="02020603050405020304" pitchFamily="18" charset="0"/>
+                        </a:rPr>
+                        <a:t>Средняя</a:t>
+                      </a:r>
+                    </a:p>
+                  </a:txBody>
+                  <a:tcPr anchor="ctr">
+                    <a:solidFill>
+                      <a:schemeClr val="accent1">
+                        <a:lumMod val="40000"/>
+                        <a:lumOff val="60000"/>
+                      </a:schemeClr>
+                    </a:solidFill>
+                  </a:tcPr>
+                </a:tc>
+                <a:tc>
+                  <a:txBody>
+                    <a:bodyPr/>
+                    <a:lstStyle/>
+                    <a:p>
+                      <a:pPr algn="ctr"/>
+                      <a:r>
+                        <a:rPr lang="ru-RU" dirty="0">
+                          <a:latin typeface="Times New Roman" panose="02020603050405020304" pitchFamily="18" charset="0"/>
+                          <a:cs typeface="Times New Roman" panose="02020603050405020304" pitchFamily="18" charset="0"/>
+                        </a:rPr>
+                        <a:t>Средняя</a:t>
+                      </a:r>
+                    </a:p>
+                  </a:txBody>
+                  <a:tcPr anchor="ctr">
+                    <a:solidFill>
+                      <a:schemeClr val="accent1">
+                        <a:lumMod val="40000"/>
+                        <a:lumOff val="60000"/>
+                      </a:schemeClr>
+                    </a:solidFill>
+                  </a:tcPr>
+                </a:tc>
+                <a:tc>
+                  <a:txBody>
+                    <a:bodyPr/>
+                    <a:lstStyle/>
+                    <a:p>
+                      <a:pPr algn="ctr"/>
+                      <a:r>
+                        <a:rPr lang="ru-RU" dirty="0">
+                          <a:latin typeface="Times New Roman" panose="02020603050405020304" pitchFamily="18" charset="0"/>
+                          <a:cs typeface="Times New Roman" panose="02020603050405020304" pitchFamily="18" charset="0"/>
+                        </a:rPr>
                         <a:t>Низкая</a:t>
                       </a:r>
                     </a:p>
@@ -9068,141 +10163,10 @@
                     <a:p>
                       <a:pPr algn="ctr"/>
                       <a:r>
-                        <a:rPr lang="ru-RU" dirty="0"/>
-                        <a:t>Низкая</a:t>
-                      </a:r>
-                    </a:p>
-                  </a:txBody>
-                  <a:tcPr anchor="ctr">
-                    <a:solidFill>
-                      <a:schemeClr val="accent1">
-                        <a:lumMod val="20000"/>
-                        <a:lumOff val="80000"/>
-                      </a:schemeClr>
-                    </a:solidFill>
-                  </a:tcPr>
-                </a:tc>
-                <a:extLst>
-                  <a:ext uri="{0D108BD9-81ED-4DB2-BD59-A6C34878D82A}">
-                    <a16:rowId xmlns:a16="http://schemas.microsoft.com/office/drawing/2014/main" val="1599896190"/>
-                  </a:ext>
-                </a:extLst>
-              </a:tr>
-              <a:tr h="375128">
-                <a:tc>
-                  <a:txBody>
-                    <a:bodyPr/>
-                    <a:lstStyle/>
-                    <a:p>
-                      <a:pPr algn="ctr"/>
-                      <a:r>
-                        <a:rPr lang="en-US" dirty="0"/>
-                        <a:t>Zipline</a:t>
-                      </a:r>
-                      <a:endParaRPr lang="ru-RU" dirty="0"/>
-                    </a:p>
-                  </a:txBody>
-                  <a:tcPr anchor="ctr">
-                    <a:solidFill>
-                      <a:schemeClr val="accent4">
-                        <a:lumMod val="20000"/>
-                        <a:lumOff val="80000"/>
-                      </a:schemeClr>
-                    </a:solidFill>
-                  </a:tcPr>
-                </a:tc>
-                <a:tc>
-                  <a:txBody>
-                    <a:bodyPr/>
-                    <a:lstStyle/>
-                    <a:p>
-                      <a:pPr algn="ctr"/>
-                      <a:r>
-                        <a:rPr lang="ru-RU" dirty="0"/>
-                        <a:t>Средняя</a:t>
-                      </a:r>
-                    </a:p>
-                  </a:txBody>
-                  <a:tcPr anchor="ctr">
-                    <a:solidFill>
-                      <a:schemeClr val="accent1">
-                        <a:lumMod val="40000"/>
-                        <a:lumOff val="60000"/>
-                      </a:schemeClr>
-                    </a:solidFill>
-                  </a:tcPr>
-                </a:tc>
-                <a:tc>
-                  <a:txBody>
-                    <a:bodyPr/>
-                    <a:lstStyle/>
-                    <a:p>
-                      <a:pPr algn="ctr"/>
-                      <a:r>
-                        <a:rPr lang="ru-RU" dirty="0"/>
-                        <a:t>Средняя</a:t>
-                      </a:r>
-                    </a:p>
-                  </a:txBody>
-                  <a:tcPr anchor="ctr">
-                    <a:solidFill>
-                      <a:schemeClr val="accent1">
-                        <a:lumMod val="40000"/>
-                        <a:lumOff val="60000"/>
-                      </a:schemeClr>
-                    </a:solidFill>
-                  </a:tcPr>
-                </a:tc>
-                <a:tc>
-                  <a:txBody>
-                    <a:bodyPr/>
-                    <a:lstStyle/>
-                    <a:p>
-                      <a:pPr algn="ctr"/>
-                      <a:r>
-                        <a:rPr lang="ru-RU" dirty="0"/>
-                        <a:t>Средняя</a:t>
-                      </a:r>
-                    </a:p>
-                  </a:txBody>
-                  <a:tcPr anchor="ctr">
-                    <a:solidFill>
-                      <a:schemeClr val="accent1">
-                        <a:lumMod val="40000"/>
-                        <a:lumOff val="60000"/>
-                      </a:schemeClr>
-                    </a:solidFill>
-                  </a:tcPr>
-                </a:tc>
-                <a:tc>
-                  <a:txBody>
-                    <a:bodyPr/>
-                    <a:lstStyle/>
-                    <a:p>
-                      <a:pPr algn="ctr"/>
-                      <a:r>
-                        <a:rPr lang="ru-RU" dirty="0"/>
-                        <a:t>Низкая</a:t>
-                      </a:r>
-                    </a:p>
-                  </a:txBody>
-                  <a:tcPr anchor="ctr">
-                    <a:solidFill>
-                      <a:schemeClr val="accent1">
-                        <a:lumMod val="20000"/>
-                        <a:lumOff val="80000"/>
-                      </a:schemeClr>
-                    </a:solidFill>
-                  </a:tcPr>
-                </a:tc>
-                <a:tc>
-                  <a:txBody>
-                    <a:bodyPr/>
-                    <a:lstStyle/>
-                    <a:p>
-                      <a:pPr algn="ctr"/>
-                      <a:r>
-                        <a:rPr lang="ru-RU" dirty="0"/>
+                        <a:rPr lang="ru-RU" dirty="0">
+                          <a:latin typeface="Times New Roman" panose="02020603050405020304" pitchFamily="18" charset="0"/>
+                          <a:cs typeface="Times New Roman" panose="02020603050405020304" pitchFamily="18" charset="0"/>
+                        </a:rPr>
                         <a:t>Средняя</a:t>
                       </a:r>
                     </a:p>
@@ -9230,10 +10194,16 @@
                     <a:p>
                       <a:pPr algn="ctr"/>
                       <a:r>
-                        <a:rPr lang="en-US" dirty="0"/>
+                        <a:rPr lang="en-US" dirty="0">
+                          <a:latin typeface="Times New Roman" panose="02020603050405020304" pitchFamily="18" charset="0"/>
+                          <a:cs typeface="Times New Roman" panose="02020603050405020304" pitchFamily="18" charset="0"/>
+                        </a:rPr>
                         <a:t>LEAN / QuantConnect</a:t>
                       </a:r>
-                      <a:endParaRPr lang="ru-RU" dirty="0"/>
+                      <a:endParaRPr lang="ru-RU" dirty="0">
+                        <a:latin typeface="Times New Roman" panose="02020603050405020304" pitchFamily="18" charset="0"/>
+                        <a:cs typeface="Times New Roman" panose="02020603050405020304" pitchFamily="18" charset="0"/>
+                      </a:endParaRPr>
                     </a:p>
                   </a:txBody>
                   <a:tcPr anchor="ctr">
@@ -9252,7 +10222,10 @@
                     <a:p>
                       <a:pPr algn="ctr"/>
                       <a:r>
-                        <a:rPr lang="ru-RU" dirty="0"/>
+                        <a:rPr lang="ru-RU" dirty="0">
+                          <a:latin typeface="Times New Roman" panose="02020603050405020304" pitchFamily="18" charset="0"/>
+                          <a:cs typeface="Times New Roman" panose="02020603050405020304" pitchFamily="18" charset="0"/>
+                        </a:rPr>
                         <a:t>Низкая</a:t>
                       </a:r>
                     </a:p>
@@ -9273,7 +10246,10 @@
                     <a:p>
                       <a:pPr algn="ctr"/>
                       <a:r>
-                        <a:rPr lang="ru-RU" dirty="0"/>
+                        <a:rPr lang="ru-RU" dirty="0">
+                          <a:latin typeface="Times New Roman" panose="02020603050405020304" pitchFamily="18" charset="0"/>
+                          <a:cs typeface="Times New Roman" panose="02020603050405020304" pitchFamily="18" charset="0"/>
+                        </a:rPr>
                         <a:t>Высокая</a:t>
                       </a:r>
                     </a:p>
@@ -9294,7 +10270,10 @@
                     <a:p>
                       <a:pPr algn="ctr"/>
                       <a:r>
-                        <a:rPr lang="ru-RU" dirty="0"/>
+                        <a:rPr lang="ru-RU" dirty="0">
+                          <a:latin typeface="Times New Roman" panose="02020603050405020304" pitchFamily="18" charset="0"/>
+                          <a:cs typeface="Times New Roman" panose="02020603050405020304" pitchFamily="18" charset="0"/>
+                        </a:rPr>
                         <a:t>Высокая</a:t>
                       </a:r>
                     </a:p>
@@ -9315,7 +10294,10 @@
                     <a:p>
                       <a:pPr algn="ctr"/>
                       <a:r>
-                        <a:rPr lang="ru-RU" dirty="0"/>
+                        <a:rPr lang="ru-RU" dirty="0">
+                          <a:latin typeface="Times New Roman" panose="02020603050405020304" pitchFamily="18" charset="0"/>
+                          <a:cs typeface="Times New Roman" panose="02020603050405020304" pitchFamily="18" charset="0"/>
+                        </a:rPr>
                         <a:t>Средняя</a:t>
                       </a:r>
                     </a:p>
@@ -9336,7 +10318,10 @@
                     <a:p>
                       <a:pPr algn="ctr"/>
                       <a:r>
-                        <a:rPr lang="ru-RU" dirty="0"/>
+                        <a:rPr lang="ru-RU" dirty="0">
+                          <a:latin typeface="Times New Roman" panose="02020603050405020304" pitchFamily="18" charset="0"/>
+                          <a:cs typeface="Times New Roman" panose="02020603050405020304" pitchFamily="18" charset="0"/>
+                        </a:rPr>
                         <a:t>Средняя</a:t>
                       </a:r>
                     </a:p>
@@ -9364,7 +10349,10 @@
                     <a:p>
                       <a:pPr algn="ctr"/>
                       <a:r>
-                        <a:rPr lang="ru-RU" dirty="0"/>
+                        <a:rPr lang="ru-RU" dirty="0">
+                          <a:latin typeface="Times New Roman" panose="02020603050405020304" pitchFamily="18" charset="0"/>
+                          <a:cs typeface="Times New Roman" panose="02020603050405020304" pitchFamily="18" charset="0"/>
+                        </a:rPr>
                         <a:t>Предлагаемое решение</a:t>
                       </a:r>
                     </a:p>
@@ -9385,7 +10373,10 @@
                     <a:p>
                       <a:pPr algn="ctr"/>
                       <a:r>
-                        <a:rPr lang="ru-RU" dirty="0"/>
+                        <a:rPr lang="ru-RU" dirty="0">
+                          <a:latin typeface="Times New Roman" panose="02020603050405020304" pitchFamily="18" charset="0"/>
+                          <a:cs typeface="Times New Roman" panose="02020603050405020304" pitchFamily="18" charset="0"/>
+                        </a:rPr>
                         <a:t>Средняя</a:t>
                       </a:r>
                     </a:p>
@@ -9406,7 +10397,10 @@
                     <a:p>
                       <a:pPr algn="ctr"/>
                       <a:r>
-                        <a:rPr lang="ru-RU" dirty="0"/>
+                        <a:rPr lang="ru-RU" dirty="0">
+                          <a:latin typeface="Times New Roman" panose="02020603050405020304" pitchFamily="18" charset="0"/>
+                          <a:cs typeface="Times New Roman" panose="02020603050405020304" pitchFamily="18" charset="0"/>
+                        </a:rPr>
                         <a:t>Высокая</a:t>
                       </a:r>
                     </a:p>
@@ -9427,7 +10421,10 @@
                     <a:p>
                       <a:pPr algn="ctr"/>
                       <a:r>
-                        <a:rPr lang="ru-RU" dirty="0"/>
+                        <a:rPr lang="ru-RU" dirty="0">
+                          <a:latin typeface="Times New Roman" panose="02020603050405020304" pitchFamily="18" charset="0"/>
+                          <a:cs typeface="Times New Roman" panose="02020603050405020304" pitchFamily="18" charset="0"/>
+                        </a:rPr>
                         <a:t>Высокая</a:t>
                       </a:r>
                     </a:p>
@@ -9448,7 +10445,10 @@
                     <a:p>
                       <a:pPr algn="ctr"/>
                       <a:r>
-                        <a:rPr lang="ru-RU" dirty="0"/>
+                        <a:rPr lang="ru-RU" dirty="0">
+                          <a:latin typeface="Times New Roman" panose="02020603050405020304" pitchFamily="18" charset="0"/>
+                          <a:cs typeface="Times New Roman" panose="02020603050405020304" pitchFamily="18" charset="0"/>
+                        </a:rPr>
                         <a:t>Высокая</a:t>
                       </a:r>
                     </a:p>
@@ -9469,7 +10469,10 @@
                     <a:p>
                       <a:pPr algn="ctr"/>
                       <a:r>
-                        <a:rPr lang="ru-RU" dirty="0"/>
+                        <a:rPr lang="ru-RU" dirty="0">
+                          <a:latin typeface="Times New Roman" panose="02020603050405020304" pitchFamily="18" charset="0"/>
+                          <a:cs typeface="Times New Roman" panose="02020603050405020304" pitchFamily="18" charset="0"/>
+                        </a:rPr>
                         <a:t>Высокая</a:t>
                       </a:r>
                     </a:p>
@@ -9493,6 +10496,50 @@
           </a:graphicData>
         </a:graphic>
       </p:graphicFrame>
+      <p:sp>
+        <p:nvSpPr>
+          <p:cNvPr id="2" name="Номер слайда 1">
+            <a:extLst>
+              <a:ext uri="{FF2B5EF4-FFF2-40B4-BE49-F238E27FC236}">
+                <a16:creationId xmlns:a16="http://schemas.microsoft.com/office/drawing/2014/main" id="{879B60DB-0B41-9C88-30C2-148345CE5813}"/>
+              </a:ext>
+            </a:extLst>
+          </p:cNvPr>
+          <p:cNvSpPr>
+            <a:spLocks noGrp="1"/>
+          </p:cNvSpPr>
+          <p:nvPr>
+            <p:ph type="sldNum" idx="12"/>
+          </p:nvPr>
+        </p:nvSpPr>
+        <p:spPr/>
+        <p:txBody>
+          <a:bodyPr/>
+          <a:lstStyle/>
+          <a:p>
+            <a:pPr marL="0" lvl="0" indent="0" algn="r" rtl="0">
+              <a:spcBef>
+                <a:spcPts val="0"/>
+              </a:spcBef>
+              <a:spcAft>
+                <a:spcPts val="0"/>
+              </a:spcAft>
+              <a:buNone/>
+            </a:pPr>
+            <a:fld id="{00000000-1234-1234-1234-123412341234}" type="slidenum">
+              <a:rPr lang="ru" smtClean="0">
+                <a:latin typeface="Times New Roman" panose="02020603050405020304" pitchFamily="18" charset="0"/>
+                <a:cs typeface="Times New Roman" panose="02020603050405020304" pitchFamily="18" charset="0"/>
+              </a:rPr>
+              <a:t>4</a:t>
+            </a:fld>
+            <a:endParaRPr lang="ru">
+              <a:latin typeface="Times New Roman" panose="02020603050405020304" pitchFamily="18" charset="0"/>
+              <a:cs typeface="Times New Roman" panose="02020603050405020304" pitchFamily="18" charset="0"/>
+            </a:endParaRPr>
+          </a:p>
+        </p:txBody>
+      </p:sp>
     </p:spTree>
   </p:cSld>
   <p:clrMapOvr>
@@ -9553,14 +10600,23 @@
               <a:buNone/>
             </a:pPr>
             <a:r>
-              <a:rPr lang="ru" dirty="0"/>
+              <a:rPr lang="ru" dirty="0">
+                <a:latin typeface="Times New Roman" panose="02020603050405020304" pitchFamily="18" charset="0"/>
+                <a:cs typeface="Times New Roman" panose="02020603050405020304" pitchFamily="18" charset="0"/>
+              </a:rPr>
               <a:t>Материалы и методы</a:t>
             </a:r>
             <a:r>
-              <a:rPr lang="ru-RU" dirty="0"/>
+              <a:rPr lang="ru-RU" dirty="0">
+                <a:latin typeface="Times New Roman" panose="02020603050405020304" pitchFamily="18" charset="0"/>
+                <a:cs typeface="Times New Roman" panose="02020603050405020304" pitchFamily="18" charset="0"/>
+              </a:rPr>
               <a:t> подготовки данных</a:t>
             </a:r>
-            <a:endParaRPr dirty="0"/>
+            <a:endParaRPr dirty="0">
+              <a:latin typeface="Times New Roman" panose="02020603050405020304" pitchFamily="18" charset="0"/>
+              <a:cs typeface="Times New Roman" panose="02020603050405020304" pitchFamily="18" charset="0"/>
+            </a:endParaRPr>
           </a:p>
         </p:txBody>
       </p:sp>
@@ -9576,8 +10632,8 @@
         </p:nvSpPr>
         <p:spPr>
           <a:xfrm>
-            <a:off x="657224" y="2162126"/>
-            <a:ext cx="1548247" cy="406161"/>
+            <a:off x="372565" y="2058574"/>
+            <a:ext cx="1740099" cy="406161"/>
           </a:xfrm>
           <a:prstGeom prst="rect">
             <a:avLst/>
@@ -9585,7 +10641,7 @@
         </p:spPr>
         <p:txBody>
           <a:bodyPr spcFirstLastPara="1" wrap="square" lIns="91425" tIns="91425" rIns="91425" bIns="91425" anchor="ctr" anchorCtr="0">
-            <a:normAutofit fontScale="85000" lnSpcReduction="20000"/>
+            <a:noAutofit/>
           </a:bodyPr>
           <a:lstStyle/>
           <a:p>
@@ -9599,25 +10655,31 @@
               <a:buNone/>
             </a:pPr>
             <a:r>
-              <a:rPr lang="ru-RU" dirty="0">
+              <a:rPr lang="ru-RU" sz="1400" dirty="0">
                 <a:solidFill>
                   <a:schemeClr val="tx1"/>
                 </a:solidFill>
+                <a:latin typeface="Times New Roman" panose="02020603050405020304" pitchFamily="18" charset="0"/>
+                <a:cs typeface="Times New Roman" panose="02020603050405020304" pitchFamily="18" charset="0"/>
               </a:rPr>
               <a:t> </a:t>
             </a:r>
             <a:r>
-              <a:rPr lang="en-US" dirty="0">
+              <a:rPr lang="en-US" sz="1400" dirty="0">
                 <a:solidFill>
                   <a:schemeClr val="tx1"/>
                 </a:solidFill>
+                <a:latin typeface="Times New Roman" panose="02020603050405020304" pitchFamily="18" charset="0"/>
+                <a:cs typeface="Times New Roman" panose="02020603050405020304" pitchFamily="18" charset="0"/>
               </a:rPr>
               <a:t>MOEX ISS API</a:t>
             </a:r>
-            <a:endParaRPr lang="ru-RU" dirty="0">
+            <a:endParaRPr lang="ru-RU" sz="1400" dirty="0">
               <a:solidFill>
                 <a:schemeClr val="tx1"/>
               </a:solidFill>
+              <a:latin typeface="Times New Roman" panose="02020603050405020304" pitchFamily="18" charset="0"/>
+              <a:cs typeface="Times New Roman" panose="02020603050405020304" pitchFamily="18" charset="0"/>
             </a:endParaRPr>
           </a:p>
         </p:txBody>
@@ -9638,8 +10700,8 @@
         </p:nvSpPr>
         <p:spPr>
           <a:xfrm>
-            <a:off x="2483426" y="2049097"/>
-            <a:ext cx="1548247" cy="624371"/>
+            <a:off x="4168633" y="1941315"/>
+            <a:ext cx="1625647" cy="624371"/>
           </a:xfrm>
           <a:prstGeom prst="rect">
             <a:avLst/>
@@ -9651,7 +10713,7 @@
         </p:spPr>
         <p:txBody>
           <a:bodyPr spcFirstLastPara="1" wrap="square" lIns="91425" tIns="91425" rIns="91425" bIns="91425" anchor="ctr" anchorCtr="0">
-            <a:normAutofit fontScale="85000" lnSpcReduction="20000"/>
+            <a:noAutofit/>
           </a:bodyPr>
           <a:lstStyle>
             <a:defPPr marR="0" lvl="0" algn="l" rtl="0">
@@ -9906,26 +10968,14 @@
               <a:buNone/>
             </a:pPr>
             <a:r>
-              <a:rPr lang="ru-RU" dirty="0">
+              <a:rPr lang="ru-RU" sz="1400" dirty="0">
                 <a:solidFill>
                   <a:schemeClr val="tx1"/>
                 </a:solidFill>
+                <a:latin typeface="Times New Roman" panose="02020603050405020304" pitchFamily="18" charset="0"/>
+                <a:cs typeface="Times New Roman" panose="02020603050405020304" pitchFamily="18" charset="0"/>
               </a:rPr>
-              <a:t>Очистка и</a:t>
-            </a:r>
-          </a:p>
-          <a:p>
-            <a:pPr marL="0" indent="0" algn="ctr">
-              <a:buFont typeface="Arial"/>
-              <a:buNone/>
-            </a:pPr>
-            <a:r>
-              <a:rPr lang="ru-RU" dirty="0">
-                <a:solidFill>
-                  <a:schemeClr val="tx1"/>
-                </a:solidFill>
-              </a:rPr>
-              <a:t>синхронизация</a:t>
+              <a:t>Обучение моделей</a:t>
             </a:r>
           </a:p>
         </p:txBody>
@@ -9946,8 +10996,8 @@
         </p:nvSpPr>
         <p:spPr>
           <a:xfrm>
-            <a:off x="4436925" y="2049096"/>
-            <a:ext cx="1548247" cy="624371"/>
+            <a:off x="2227116" y="1876042"/>
+            <a:ext cx="1827065" cy="754915"/>
           </a:xfrm>
           <a:prstGeom prst="rect">
             <a:avLst/>
@@ -9959,7 +11009,7 @@
         </p:spPr>
         <p:txBody>
           <a:bodyPr spcFirstLastPara="1" wrap="square" lIns="91425" tIns="91425" rIns="91425" bIns="91425" anchor="ctr" anchorCtr="0">
-            <a:normAutofit fontScale="85000" lnSpcReduction="20000"/>
+            <a:noAutofit/>
           </a:bodyPr>
           <a:lstStyle>
             <a:defPPr marR="0" lvl="0" algn="l" rtl="0">
@@ -10214,27 +11264,33 @@
               <a:buNone/>
             </a:pPr>
             <a:r>
-              <a:rPr lang="ru-RU" dirty="0">
+              <a:rPr lang="ru-RU" sz="1400" dirty="0">
                 <a:solidFill>
                   <a:schemeClr val="tx1"/>
                 </a:solidFill>
+                <a:latin typeface="Times New Roman" panose="02020603050405020304" pitchFamily="18" charset="0"/>
+                <a:cs typeface="Times New Roman" panose="02020603050405020304" pitchFamily="18" charset="0"/>
               </a:rPr>
               <a:t>Формирование</a:t>
             </a:r>
             <a:br>
-              <a:rPr lang="ru-RU" dirty="0">
+              <a:rPr lang="ru-RU" sz="1400" dirty="0">
                 <a:solidFill>
                   <a:schemeClr val="tx1"/>
                 </a:solidFill>
+                <a:latin typeface="Times New Roman" panose="02020603050405020304" pitchFamily="18" charset="0"/>
+                <a:cs typeface="Times New Roman" panose="02020603050405020304" pitchFamily="18" charset="0"/>
               </a:rPr>
             </a:br>
             <a:r>
-              <a:rPr lang="ru-RU" dirty="0">
+              <a:rPr lang="ru-RU" sz="1400" dirty="0">
                 <a:solidFill>
                   <a:schemeClr val="tx1"/>
                 </a:solidFill>
+                <a:latin typeface="Times New Roman" panose="02020603050405020304" pitchFamily="18" charset="0"/>
+                <a:cs typeface="Times New Roman" panose="02020603050405020304" pitchFamily="18" charset="0"/>
               </a:rPr>
-              <a:t>признаков</a:t>
+              <a:t>признаков и целей для предсказания</a:t>
             </a:r>
           </a:p>
         </p:txBody>
@@ -10255,8 +11311,8 @@
         </p:nvSpPr>
         <p:spPr>
           <a:xfrm>
-            <a:off x="6457949" y="2049096"/>
-            <a:ext cx="1290204" cy="624371"/>
+            <a:off x="5908732" y="1949470"/>
+            <a:ext cx="1548247" cy="624370"/>
           </a:xfrm>
           <a:prstGeom prst="rect">
             <a:avLst/>
@@ -10268,7 +11324,7 @@
         </p:spPr>
         <p:txBody>
           <a:bodyPr spcFirstLastPara="1" wrap="square" lIns="91425" tIns="91425" rIns="91425" bIns="91425" anchor="ctr" anchorCtr="0">
-            <a:normAutofit fontScale="85000" lnSpcReduction="20000"/>
+            <a:noAutofit/>
           </a:bodyPr>
           <a:lstStyle>
             <a:defPPr marR="0" lvl="0" algn="l" rtl="0">
@@ -10523,12 +11579,14 @@
               <a:buNone/>
             </a:pPr>
             <a:r>
-              <a:rPr lang="ru-RU" dirty="0">
+              <a:rPr lang="ru-RU" sz="1400" dirty="0">
                 <a:solidFill>
                   <a:schemeClr val="tx1"/>
                 </a:solidFill>
+                <a:latin typeface="Times New Roman" panose="02020603050405020304" pitchFamily="18" charset="0"/>
+                <a:cs typeface="Times New Roman" panose="02020603050405020304" pitchFamily="18" charset="0"/>
               </a:rPr>
-              <a:t>Разметка датасета</a:t>
+              <a:t>Историческое тестирование</a:t>
             </a:r>
           </a:p>
         </p:txBody>
@@ -10590,8 +11648,323 @@
         </p:nvSpPr>
         <p:spPr>
           <a:xfrm>
-            <a:off x="742947" y="2568287"/>
+            <a:off x="564417" y="2756667"/>
             <a:ext cx="1548247" cy="690997"/>
+          </a:xfrm>
+          <a:prstGeom prst="rect">
+            <a:avLst/>
+          </a:prstGeom>
+          <a:noFill/>
+          <a:ln>
+            <a:noFill/>
+          </a:ln>
+        </p:spPr>
+        <p:txBody>
+          <a:bodyPr spcFirstLastPara="1" wrap="square" lIns="91425" tIns="91425" rIns="91425" bIns="91425" anchor="ctr" anchorCtr="0">
+            <a:normAutofit fontScale="85000" lnSpcReduction="10000"/>
+          </a:bodyPr>
+          <a:lstStyle>
+            <a:defPPr marR="0" lvl="0" algn="l" rtl="0">
+              <a:lnSpc>
+                <a:spcPct val="100000"/>
+              </a:lnSpc>
+              <a:spcBef>
+                <a:spcPts val="0"/>
+              </a:spcBef>
+              <a:spcAft>
+                <a:spcPts val="0"/>
+              </a:spcAft>
+            </a:defPPr>
+            <a:lvl1pPr marL="457200" marR="0" lvl="0" indent="-342900" algn="l" rtl="0">
+              <a:lnSpc>
+                <a:spcPct val="115000"/>
+              </a:lnSpc>
+              <a:spcBef>
+                <a:spcPts val="0"/>
+              </a:spcBef>
+              <a:spcAft>
+                <a:spcPts val="0"/>
+              </a:spcAft>
+              <a:buClr>
+                <a:schemeClr val="dk2"/>
+              </a:buClr>
+              <a:buSzPts val="1800"/>
+              <a:buFont typeface="Arial"/>
+              <a:buChar char="●"/>
+              <a:defRPr sz="1800" b="0" i="0" u="none" strike="noStrike" cap="none">
+                <a:solidFill>
+                  <a:schemeClr val="dk2"/>
+                </a:solidFill>
+                <a:latin typeface="Arial"/>
+                <a:ea typeface="Arial"/>
+                <a:cs typeface="Arial"/>
+                <a:sym typeface="Arial"/>
+              </a:defRPr>
+            </a:lvl1pPr>
+            <a:lvl2pPr marL="914400" marR="0" lvl="1" indent="-317500" algn="l" rtl="0">
+              <a:lnSpc>
+                <a:spcPct val="115000"/>
+              </a:lnSpc>
+              <a:spcBef>
+                <a:spcPts val="0"/>
+              </a:spcBef>
+              <a:spcAft>
+                <a:spcPts val="0"/>
+              </a:spcAft>
+              <a:buClr>
+                <a:schemeClr val="dk2"/>
+              </a:buClr>
+              <a:buSzPts val="1400"/>
+              <a:buFont typeface="Arial"/>
+              <a:buChar char="○"/>
+              <a:defRPr sz="1400" b="0" i="0" u="none" strike="noStrike" cap="none">
+                <a:solidFill>
+                  <a:schemeClr val="dk2"/>
+                </a:solidFill>
+                <a:latin typeface="Arial"/>
+                <a:ea typeface="Arial"/>
+                <a:cs typeface="Arial"/>
+                <a:sym typeface="Arial"/>
+              </a:defRPr>
+            </a:lvl2pPr>
+            <a:lvl3pPr marL="1371600" marR="0" lvl="2" indent="-317500" algn="l" rtl="0">
+              <a:lnSpc>
+                <a:spcPct val="115000"/>
+              </a:lnSpc>
+              <a:spcBef>
+                <a:spcPts val="0"/>
+              </a:spcBef>
+              <a:spcAft>
+                <a:spcPts val="0"/>
+              </a:spcAft>
+              <a:buClr>
+                <a:schemeClr val="dk2"/>
+              </a:buClr>
+              <a:buSzPts val="1400"/>
+              <a:buFont typeface="Arial"/>
+              <a:buChar char="■"/>
+              <a:defRPr sz="1400" b="0" i="0" u="none" strike="noStrike" cap="none">
+                <a:solidFill>
+                  <a:schemeClr val="dk2"/>
+                </a:solidFill>
+                <a:latin typeface="Arial"/>
+                <a:ea typeface="Arial"/>
+                <a:cs typeface="Arial"/>
+                <a:sym typeface="Arial"/>
+              </a:defRPr>
+            </a:lvl3pPr>
+            <a:lvl4pPr marL="1828800" marR="0" lvl="3" indent="-317500" algn="l" rtl="0">
+              <a:lnSpc>
+                <a:spcPct val="115000"/>
+              </a:lnSpc>
+              <a:spcBef>
+                <a:spcPts val="0"/>
+              </a:spcBef>
+              <a:spcAft>
+                <a:spcPts val="0"/>
+              </a:spcAft>
+              <a:buClr>
+                <a:schemeClr val="dk2"/>
+              </a:buClr>
+              <a:buSzPts val="1400"/>
+              <a:buFont typeface="Arial"/>
+              <a:buChar char="●"/>
+              <a:defRPr sz="1400" b="0" i="0" u="none" strike="noStrike" cap="none">
+                <a:solidFill>
+                  <a:schemeClr val="dk2"/>
+                </a:solidFill>
+                <a:latin typeface="Arial"/>
+                <a:ea typeface="Arial"/>
+                <a:cs typeface="Arial"/>
+                <a:sym typeface="Arial"/>
+              </a:defRPr>
+            </a:lvl4pPr>
+            <a:lvl5pPr marL="2286000" marR="0" lvl="4" indent="-317500" algn="l" rtl="0">
+              <a:lnSpc>
+                <a:spcPct val="115000"/>
+              </a:lnSpc>
+              <a:spcBef>
+                <a:spcPts val="0"/>
+              </a:spcBef>
+              <a:spcAft>
+                <a:spcPts val="0"/>
+              </a:spcAft>
+              <a:buClr>
+                <a:schemeClr val="dk2"/>
+              </a:buClr>
+              <a:buSzPts val="1400"/>
+              <a:buFont typeface="Arial"/>
+              <a:buChar char="○"/>
+              <a:defRPr sz="1400" b="0" i="0" u="none" strike="noStrike" cap="none">
+                <a:solidFill>
+                  <a:schemeClr val="dk2"/>
+                </a:solidFill>
+                <a:latin typeface="Arial"/>
+                <a:ea typeface="Arial"/>
+                <a:cs typeface="Arial"/>
+                <a:sym typeface="Arial"/>
+              </a:defRPr>
+            </a:lvl5pPr>
+            <a:lvl6pPr marL="2743200" marR="0" lvl="5" indent="-317500" algn="l" rtl="0">
+              <a:lnSpc>
+                <a:spcPct val="115000"/>
+              </a:lnSpc>
+              <a:spcBef>
+                <a:spcPts val="0"/>
+              </a:spcBef>
+              <a:spcAft>
+                <a:spcPts val="0"/>
+              </a:spcAft>
+              <a:buClr>
+                <a:schemeClr val="dk2"/>
+              </a:buClr>
+              <a:buSzPts val="1400"/>
+              <a:buFont typeface="Arial"/>
+              <a:buChar char="■"/>
+              <a:defRPr sz="1400" b="0" i="0" u="none" strike="noStrike" cap="none">
+                <a:solidFill>
+                  <a:schemeClr val="dk2"/>
+                </a:solidFill>
+                <a:latin typeface="Arial"/>
+                <a:ea typeface="Arial"/>
+                <a:cs typeface="Arial"/>
+                <a:sym typeface="Arial"/>
+              </a:defRPr>
+            </a:lvl6pPr>
+            <a:lvl7pPr marL="3200400" marR="0" lvl="6" indent="-317500" algn="l" rtl="0">
+              <a:lnSpc>
+                <a:spcPct val="115000"/>
+              </a:lnSpc>
+              <a:spcBef>
+                <a:spcPts val="0"/>
+              </a:spcBef>
+              <a:spcAft>
+                <a:spcPts val="0"/>
+              </a:spcAft>
+              <a:buClr>
+                <a:schemeClr val="dk2"/>
+              </a:buClr>
+              <a:buSzPts val="1400"/>
+              <a:buFont typeface="Arial"/>
+              <a:buChar char="●"/>
+              <a:defRPr sz="1400" b="0" i="0" u="none" strike="noStrike" cap="none">
+                <a:solidFill>
+                  <a:schemeClr val="dk2"/>
+                </a:solidFill>
+                <a:latin typeface="Arial"/>
+                <a:ea typeface="Arial"/>
+                <a:cs typeface="Arial"/>
+                <a:sym typeface="Arial"/>
+              </a:defRPr>
+            </a:lvl7pPr>
+            <a:lvl8pPr marL="3657600" marR="0" lvl="7" indent="-317500" algn="l" rtl="0">
+              <a:lnSpc>
+                <a:spcPct val="115000"/>
+              </a:lnSpc>
+              <a:spcBef>
+                <a:spcPts val="0"/>
+              </a:spcBef>
+              <a:spcAft>
+                <a:spcPts val="0"/>
+              </a:spcAft>
+              <a:buClr>
+                <a:schemeClr val="dk2"/>
+              </a:buClr>
+              <a:buSzPts val="1400"/>
+              <a:buFont typeface="Arial"/>
+              <a:buChar char="○"/>
+              <a:defRPr sz="1400" b="0" i="0" u="none" strike="noStrike" cap="none">
+                <a:solidFill>
+                  <a:schemeClr val="dk2"/>
+                </a:solidFill>
+                <a:latin typeface="Arial"/>
+                <a:ea typeface="Arial"/>
+                <a:cs typeface="Arial"/>
+                <a:sym typeface="Arial"/>
+              </a:defRPr>
+            </a:lvl8pPr>
+            <a:lvl9pPr marL="4114800" marR="0" lvl="8" indent="-317500" algn="l" rtl="0">
+              <a:lnSpc>
+                <a:spcPct val="115000"/>
+              </a:lnSpc>
+              <a:spcBef>
+                <a:spcPts val="0"/>
+              </a:spcBef>
+              <a:spcAft>
+                <a:spcPts val="0"/>
+              </a:spcAft>
+              <a:buClr>
+                <a:schemeClr val="dk2"/>
+              </a:buClr>
+              <a:buSzPts val="1400"/>
+              <a:buFont typeface="Arial"/>
+              <a:buChar char="■"/>
+              <a:defRPr sz="1400" b="0" i="0" u="none" strike="noStrike" cap="none">
+                <a:solidFill>
+                  <a:schemeClr val="dk2"/>
+                </a:solidFill>
+                <a:latin typeface="Arial"/>
+                <a:ea typeface="Arial"/>
+                <a:cs typeface="Arial"/>
+                <a:sym typeface="Arial"/>
+              </a:defRPr>
+            </a:lvl9pPr>
+          </a:lstStyle>
+          <a:p>
+            <a:pPr marL="0" indent="0">
+              <a:buFont typeface="Arial"/>
+              <a:buNone/>
+            </a:pPr>
+            <a:r>
+              <a:rPr lang="ru-RU" sz="1400" dirty="0">
+                <a:solidFill>
+                  <a:schemeClr val="bg2"/>
+                </a:solidFill>
+                <a:latin typeface="Times New Roman" panose="02020603050405020304" pitchFamily="18" charset="0"/>
+                <a:cs typeface="Times New Roman" panose="02020603050405020304" pitchFamily="18" charset="0"/>
+              </a:rPr>
+              <a:t>Загрузка минутных</a:t>
+            </a:r>
+            <a:br>
+              <a:rPr lang="ru-RU" sz="1400" dirty="0">
+                <a:solidFill>
+                  <a:schemeClr val="bg2"/>
+                </a:solidFill>
+                <a:latin typeface="Times New Roman" panose="02020603050405020304" pitchFamily="18" charset="0"/>
+                <a:cs typeface="Times New Roman" panose="02020603050405020304" pitchFamily="18" charset="0"/>
+              </a:rPr>
+            </a:br>
+            <a:r>
+              <a:rPr lang="ru-RU" sz="1400" dirty="0">
+                <a:solidFill>
+                  <a:schemeClr val="bg2"/>
+                </a:solidFill>
+                <a:latin typeface="Times New Roman" panose="02020603050405020304" pitchFamily="18" charset="0"/>
+                <a:cs typeface="Times New Roman" panose="02020603050405020304" pitchFamily="18" charset="0"/>
+              </a:rPr>
+              <a:t>данных акций</a:t>
+            </a:r>
+          </a:p>
+        </p:txBody>
+      </p:sp>
+      <p:sp>
+        <p:nvSpPr>
+          <p:cNvPr id="15" name="Google Shape;80;p17">
+            <a:extLst>
+              <a:ext uri="{FF2B5EF4-FFF2-40B4-BE49-F238E27FC236}">
+                <a16:creationId xmlns:a16="http://schemas.microsoft.com/office/drawing/2014/main" id="{52EAAA17-3D9C-A975-8FAD-8EA58E068A82}"/>
+              </a:ext>
+            </a:extLst>
+          </p:cNvPr>
+          <p:cNvSpPr txBox="1">
+            <a:spLocks/>
+          </p:cNvSpPr>
+          <p:nvPr/>
+        </p:nvSpPr>
+        <p:spPr>
+          <a:xfrm>
+            <a:off x="5908732" y="2756667"/>
+            <a:ext cx="2104159" cy="1007919"/>
           </a:xfrm>
           <a:prstGeom prst="rect">
             <a:avLst/>
@@ -10858,640 +12231,14 @@
               <a:buNone/>
             </a:pPr>
             <a:r>
-              <a:rPr lang="ru-RU" sz="1400" dirty="0">
+              <a:rPr lang="ru-RU" sz="1200" dirty="0">
                 <a:solidFill>
                   <a:schemeClr val="bg2"/>
                 </a:solidFill>
+                <a:latin typeface="Times New Roman" panose="02020603050405020304" pitchFamily="18" charset="0"/>
+                <a:cs typeface="Times New Roman" panose="02020603050405020304" pitchFamily="18" charset="0"/>
               </a:rPr>
-              <a:t>Минутные</a:t>
-            </a:r>
-            <a:br>
-              <a:rPr lang="ru-RU" sz="1400" dirty="0">
-                <a:solidFill>
-                  <a:schemeClr val="bg2"/>
-                </a:solidFill>
-              </a:rPr>
-            </a:br>
-            <a:r>
-              <a:rPr lang="ru-RU" sz="1400" dirty="0">
-                <a:solidFill>
-                  <a:schemeClr val="bg2"/>
-                </a:solidFill>
-              </a:rPr>
-              <a:t>данные акций</a:t>
-            </a:r>
-          </a:p>
-        </p:txBody>
-      </p:sp>
-      <p:sp>
-        <p:nvSpPr>
-          <p:cNvPr id="14" name="Google Shape;80;p17">
-            <a:extLst>
-              <a:ext uri="{FF2B5EF4-FFF2-40B4-BE49-F238E27FC236}">
-                <a16:creationId xmlns:a16="http://schemas.microsoft.com/office/drawing/2014/main" id="{255C3F48-6CC7-40F3-E5FB-EA40ADCB9EFC}"/>
-              </a:ext>
-            </a:extLst>
-          </p:cNvPr>
-          <p:cNvSpPr txBox="1">
-            <a:spLocks/>
-          </p:cNvSpPr>
-          <p:nvPr/>
-        </p:nvSpPr>
-        <p:spPr>
-          <a:xfrm>
-            <a:off x="1314447" y="2890405"/>
-            <a:ext cx="1548247" cy="690997"/>
-          </a:xfrm>
-          <a:prstGeom prst="rect">
-            <a:avLst/>
-          </a:prstGeom>
-          <a:noFill/>
-          <a:ln>
-            <a:noFill/>
-          </a:ln>
-        </p:spPr>
-        <p:txBody>
-          <a:bodyPr spcFirstLastPara="1" wrap="square" lIns="91425" tIns="91425" rIns="91425" bIns="91425" anchor="ctr" anchorCtr="0">
-            <a:normAutofit/>
-          </a:bodyPr>
-          <a:lstStyle>
-            <a:defPPr marR="0" lvl="0" algn="l" rtl="0">
-              <a:lnSpc>
-                <a:spcPct val="100000"/>
-              </a:lnSpc>
-              <a:spcBef>
-                <a:spcPts val="0"/>
-              </a:spcBef>
-              <a:spcAft>
-                <a:spcPts val="0"/>
-              </a:spcAft>
-            </a:defPPr>
-            <a:lvl1pPr marL="457200" marR="0" lvl="0" indent="-342900" algn="l" rtl="0">
-              <a:lnSpc>
-                <a:spcPct val="115000"/>
-              </a:lnSpc>
-              <a:spcBef>
-                <a:spcPts val="0"/>
-              </a:spcBef>
-              <a:spcAft>
-                <a:spcPts val="0"/>
-              </a:spcAft>
-              <a:buClr>
-                <a:schemeClr val="dk2"/>
-              </a:buClr>
-              <a:buSzPts val="1800"/>
-              <a:buFont typeface="Arial"/>
-              <a:buChar char="●"/>
-              <a:defRPr sz="1800" b="0" i="0" u="none" strike="noStrike" cap="none">
-                <a:solidFill>
-                  <a:schemeClr val="dk2"/>
-                </a:solidFill>
-                <a:latin typeface="Arial"/>
-                <a:ea typeface="Arial"/>
-                <a:cs typeface="Arial"/>
-                <a:sym typeface="Arial"/>
-              </a:defRPr>
-            </a:lvl1pPr>
-            <a:lvl2pPr marL="914400" marR="0" lvl="1" indent="-317500" algn="l" rtl="0">
-              <a:lnSpc>
-                <a:spcPct val="115000"/>
-              </a:lnSpc>
-              <a:spcBef>
-                <a:spcPts val="0"/>
-              </a:spcBef>
-              <a:spcAft>
-                <a:spcPts val="0"/>
-              </a:spcAft>
-              <a:buClr>
-                <a:schemeClr val="dk2"/>
-              </a:buClr>
-              <a:buSzPts val="1400"/>
-              <a:buFont typeface="Arial"/>
-              <a:buChar char="○"/>
-              <a:defRPr sz="1400" b="0" i="0" u="none" strike="noStrike" cap="none">
-                <a:solidFill>
-                  <a:schemeClr val="dk2"/>
-                </a:solidFill>
-                <a:latin typeface="Arial"/>
-                <a:ea typeface="Arial"/>
-                <a:cs typeface="Arial"/>
-                <a:sym typeface="Arial"/>
-              </a:defRPr>
-            </a:lvl2pPr>
-            <a:lvl3pPr marL="1371600" marR="0" lvl="2" indent="-317500" algn="l" rtl="0">
-              <a:lnSpc>
-                <a:spcPct val="115000"/>
-              </a:lnSpc>
-              <a:spcBef>
-                <a:spcPts val="0"/>
-              </a:spcBef>
-              <a:spcAft>
-                <a:spcPts val="0"/>
-              </a:spcAft>
-              <a:buClr>
-                <a:schemeClr val="dk2"/>
-              </a:buClr>
-              <a:buSzPts val="1400"/>
-              <a:buFont typeface="Arial"/>
-              <a:buChar char="■"/>
-              <a:defRPr sz="1400" b="0" i="0" u="none" strike="noStrike" cap="none">
-                <a:solidFill>
-                  <a:schemeClr val="dk2"/>
-                </a:solidFill>
-                <a:latin typeface="Arial"/>
-                <a:ea typeface="Arial"/>
-                <a:cs typeface="Arial"/>
-                <a:sym typeface="Arial"/>
-              </a:defRPr>
-            </a:lvl3pPr>
-            <a:lvl4pPr marL="1828800" marR="0" lvl="3" indent="-317500" algn="l" rtl="0">
-              <a:lnSpc>
-                <a:spcPct val="115000"/>
-              </a:lnSpc>
-              <a:spcBef>
-                <a:spcPts val="0"/>
-              </a:spcBef>
-              <a:spcAft>
-                <a:spcPts val="0"/>
-              </a:spcAft>
-              <a:buClr>
-                <a:schemeClr val="dk2"/>
-              </a:buClr>
-              <a:buSzPts val="1400"/>
-              <a:buFont typeface="Arial"/>
-              <a:buChar char="●"/>
-              <a:defRPr sz="1400" b="0" i="0" u="none" strike="noStrike" cap="none">
-                <a:solidFill>
-                  <a:schemeClr val="dk2"/>
-                </a:solidFill>
-                <a:latin typeface="Arial"/>
-                <a:ea typeface="Arial"/>
-                <a:cs typeface="Arial"/>
-                <a:sym typeface="Arial"/>
-              </a:defRPr>
-            </a:lvl4pPr>
-            <a:lvl5pPr marL="2286000" marR="0" lvl="4" indent="-317500" algn="l" rtl="0">
-              <a:lnSpc>
-                <a:spcPct val="115000"/>
-              </a:lnSpc>
-              <a:spcBef>
-                <a:spcPts val="0"/>
-              </a:spcBef>
-              <a:spcAft>
-                <a:spcPts val="0"/>
-              </a:spcAft>
-              <a:buClr>
-                <a:schemeClr val="dk2"/>
-              </a:buClr>
-              <a:buSzPts val="1400"/>
-              <a:buFont typeface="Arial"/>
-              <a:buChar char="○"/>
-              <a:defRPr sz="1400" b="0" i="0" u="none" strike="noStrike" cap="none">
-                <a:solidFill>
-                  <a:schemeClr val="dk2"/>
-                </a:solidFill>
-                <a:latin typeface="Arial"/>
-                <a:ea typeface="Arial"/>
-                <a:cs typeface="Arial"/>
-                <a:sym typeface="Arial"/>
-              </a:defRPr>
-            </a:lvl5pPr>
-            <a:lvl6pPr marL="2743200" marR="0" lvl="5" indent="-317500" algn="l" rtl="0">
-              <a:lnSpc>
-                <a:spcPct val="115000"/>
-              </a:lnSpc>
-              <a:spcBef>
-                <a:spcPts val="0"/>
-              </a:spcBef>
-              <a:spcAft>
-                <a:spcPts val="0"/>
-              </a:spcAft>
-              <a:buClr>
-                <a:schemeClr val="dk2"/>
-              </a:buClr>
-              <a:buSzPts val="1400"/>
-              <a:buFont typeface="Arial"/>
-              <a:buChar char="■"/>
-              <a:defRPr sz="1400" b="0" i="0" u="none" strike="noStrike" cap="none">
-                <a:solidFill>
-                  <a:schemeClr val="dk2"/>
-                </a:solidFill>
-                <a:latin typeface="Arial"/>
-                <a:ea typeface="Arial"/>
-                <a:cs typeface="Arial"/>
-                <a:sym typeface="Arial"/>
-              </a:defRPr>
-            </a:lvl6pPr>
-            <a:lvl7pPr marL="3200400" marR="0" lvl="6" indent="-317500" algn="l" rtl="0">
-              <a:lnSpc>
-                <a:spcPct val="115000"/>
-              </a:lnSpc>
-              <a:spcBef>
-                <a:spcPts val="0"/>
-              </a:spcBef>
-              <a:spcAft>
-                <a:spcPts val="0"/>
-              </a:spcAft>
-              <a:buClr>
-                <a:schemeClr val="dk2"/>
-              </a:buClr>
-              <a:buSzPts val="1400"/>
-              <a:buFont typeface="Arial"/>
-              <a:buChar char="●"/>
-              <a:defRPr sz="1400" b="0" i="0" u="none" strike="noStrike" cap="none">
-                <a:solidFill>
-                  <a:schemeClr val="dk2"/>
-                </a:solidFill>
-                <a:latin typeface="Arial"/>
-                <a:ea typeface="Arial"/>
-                <a:cs typeface="Arial"/>
-                <a:sym typeface="Arial"/>
-              </a:defRPr>
-            </a:lvl7pPr>
-            <a:lvl8pPr marL="3657600" marR="0" lvl="7" indent="-317500" algn="l" rtl="0">
-              <a:lnSpc>
-                <a:spcPct val="115000"/>
-              </a:lnSpc>
-              <a:spcBef>
-                <a:spcPts val="0"/>
-              </a:spcBef>
-              <a:spcAft>
-                <a:spcPts val="0"/>
-              </a:spcAft>
-              <a:buClr>
-                <a:schemeClr val="dk2"/>
-              </a:buClr>
-              <a:buSzPts val="1400"/>
-              <a:buFont typeface="Arial"/>
-              <a:buChar char="○"/>
-              <a:defRPr sz="1400" b="0" i="0" u="none" strike="noStrike" cap="none">
-                <a:solidFill>
-                  <a:schemeClr val="dk2"/>
-                </a:solidFill>
-                <a:latin typeface="Arial"/>
-                <a:ea typeface="Arial"/>
-                <a:cs typeface="Arial"/>
-                <a:sym typeface="Arial"/>
-              </a:defRPr>
-            </a:lvl8pPr>
-            <a:lvl9pPr marL="4114800" marR="0" lvl="8" indent="-317500" algn="l" rtl="0">
-              <a:lnSpc>
-                <a:spcPct val="115000"/>
-              </a:lnSpc>
-              <a:spcBef>
-                <a:spcPts val="0"/>
-              </a:spcBef>
-              <a:spcAft>
-                <a:spcPts val="0"/>
-              </a:spcAft>
-              <a:buClr>
-                <a:schemeClr val="dk2"/>
-              </a:buClr>
-              <a:buSzPts val="1400"/>
-              <a:buFont typeface="Arial"/>
-              <a:buChar char="■"/>
-              <a:defRPr sz="1400" b="0" i="0" u="none" strike="noStrike" cap="none">
-                <a:solidFill>
-                  <a:schemeClr val="dk2"/>
-                </a:solidFill>
-                <a:latin typeface="Arial"/>
-                <a:ea typeface="Arial"/>
-                <a:cs typeface="Arial"/>
-                <a:sym typeface="Arial"/>
-              </a:defRPr>
-            </a:lvl9pPr>
-          </a:lstStyle>
-          <a:p>
-            <a:pPr marL="0" indent="0" algn="ctr">
-              <a:buFont typeface="Arial"/>
-              <a:buNone/>
-            </a:pPr>
-            <a:endParaRPr lang="ru-RU" sz="1400" dirty="0">
-              <a:solidFill>
-                <a:schemeClr val="bg2"/>
-              </a:solidFill>
-            </a:endParaRPr>
-          </a:p>
-        </p:txBody>
-      </p:sp>
-      <p:sp>
-        <p:nvSpPr>
-          <p:cNvPr id="15" name="Google Shape;80;p17">
-            <a:extLst>
-              <a:ext uri="{FF2B5EF4-FFF2-40B4-BE49-F238E27FC236}">
-                <a16:creationId xmlns:a16="http://schemas.microsoft.com/office/drawing/2014/main" id="{52EAAA17-3D9C-A975-8FAD-8EA58E068A82}"/>
-              </a:ext>
-            </a:extLst>
-          </p:cNvPr>
-          <p:cNvSpPr txBox="1">
-            <a:spLocks/>
-          </p:cNvSpPr>
-          <p:nvPr/>
-        </p:nvSpPr>
-        <p:spPr>
-          <a:xfrm>
-            <a:off x="2311980" y="2476961"/>
-            <a:ext cx="2104159" cy="1007919"/>
-          </a:xfrm>
-          <a:prstGeom prst="rect">
-            <a:avLst/>
-          </a:prstGeom>
-          <a:noFill/>
-          <a:ln>
-            <a:noFill/>
-          </a:ln>
-        </p:spPr>
-        <p:txBody>
-          <a:bodyPr spcFirstLastPara="1" wrap="square" lIns="91425" tIns="91425" rIns="91425" bIns="91425" anchor="ctr" anchorCtr="0">
-            <a:normAutofit fontScale="92500"/>
-          </a:bodyPr>
-          <a:lstStyle>
-            <a:defPPr marR="0" lvl="0" algn="l" rtl="0">
-              <a:lnSpc>
-                <a:spcPct val="100000"/>
-              </a:lnSpc>
-              <a:spcBef>
-                <a:spcPts val="0"/>
-              </a:spcBef>
-              <a:spcAft>
-                <a:spcPts val="0"/>
-              </a:spcAft>
-            </a:defPPr>
-            <a:lvl1pPr marL="457200" marR="0" lvl="0" indent="-342900" algn="l" rtl="0">
-              <a:lnSpc>
-                <a:spcPct val="115000"/>
-              </a:lnSpc>
-              <a:spcBef>
-                <a:spcPts val="0"/>
-              </a:spcBef>
-              <a:spcAft>
-                <a:spcPts val="0"/>
-              </a:spcAft>
-              <a:buClr>
-                <a:schemeClr val="dk2"/>
-              </a:buClr>
-              <a:buSzPts val="1800"/>
-              <a:buFont typeface="Arial"/>
-              <a:buChar char="●"/>
-              <a:defRPr sz="1800" b="0" i="0" u="none" strike="noStrike" cap="none">
-                <a:solidFill>
-                  <a:schemeClr val="dk2"/>
-                </a:solidFill>
-                <a:latin typeface="Arial"/>
-                <a:ea typeface="Arial"/>
-                <a:cs typeface="Arial"/>
-                <a:sym typeface="Arial"/>
-              </a:defRPr>
-            </a:lvl1pPr>
-            <a:lvl2pPr marL="914400" marR="0" lvl="1" indent="-317500" algn="l" rtl="0">
-              <a:lnSpc>
-                <a:spcPct val="115000"/>
-              </a:lnSpc>
-              <a:spcBef>
-                <a:spcPts val="0"/>
-              </a:spcBef>
-              <a:spcAft>
-                <a:spcPts val="0"/>
-              </a:spcAft>
-              <a:buClr>
-                <a:schemeClr val="dk2"/>
-              </a:buClr>
-              <a:buSzPts val="1400"/>
-              <a:buFont typeface="Arial"/>
-              <a:buChar char="○"/>
-              <a:defRPr sz="1400" b="0" i="0" u="none" strike="noStrike" cap="none">
-                <a:solidFill>
-                  <a:schemeClr val="dk2"/>
-                </a:solidFill>
-                <a:latin typeface="Arial"/>
-                <a:ea typeface="Arial"/>
-                <a:cs typeface="Arial"/>
-                <a:sym typeface="Arial"/>
-              </a:defRPr>
-            </a:lvl2pPr>
-            <a:lvl3pPr marL="1371600" marR="0" lvl="2" indent="-317500" algn="l" rtl="0">
-              <a:lnSpc>
-                <a:spcPct val="115000"/>
-              </a:lnSpc>
-              <a:spcBef>
-                <a:spcPts val="0"/>
-              </a:spcBef>
-              <a:spcAft>
-                <a:spcPts val="0"/>
-              </a:spcAft>
-              <a:buClr>
-                <a:schemeClr val="dk2"/>
-              </a:buClr>
-              <a:buSzPts val="1400"/>
-              <a:buFont typeface="Arial"/>
-              <a:buChar char="■"/>
-              <a:defRPr sz="1400" b="0" i="0" u="none" strike="noStrike" cap="none">
-                <a:solidFill>
-                  <a:schemeClr val="dk2"/>
-                </a:solidFill>
-                <a:latin typeface="Arial"/>
-                <a:ea typeface="Arial"/>
-                <a:cs typeface="Arial"/>
-                <a:sym typeface="Arial"/>
-              </a:defRPr>
-            </a:lvl3pPr>
-            <a:lvl4pPr marL="1828800" marR="0" lvl="3" indent="-317500" algn="l" rtl="0">
-              <a:lnSpc>
-                <a:spcPct val="115000"/>
-              </a:lnSpc>
-              <a:spcBef>
-                <a:spcPts val="0"/>
-              </a:spcBef>
-              <a:spcAft>
-                <a:spcPts val="0"/>
-              </a:spcAft>
-              <a:buClr>
-                <a:schemeClr val="dk2"/>
-              </a:buClr>
-              <a:buSzPts val="1400"/>
-              <a:buFont typeface="Arial"/>
-              <a:buChar char="●"/>
-              <a:defRPr sz="1400" b="0" i="0" u="none" strike="noStrike" cap="none">
-                <a:solidFill>
-                  <a:schemeClr val="dk2"/>
-                </a:solidFill>
-                <a:latin typeface="Arial"/>
-                <a:ea typeface="Arial"/>
-                <a:cs typeface="Arial"/>
-                <a:sym typeface="Arial"/>
-              </a:defRPr>
-            </a:lvl4pPr>
-            <a:lvl5pPr marL="2286000" marR="0" lvl="4" indent="-317500" algn="l" rtl="0">
-              <a:lnSpc>
-                <a:spcPct val="115000"/>
-              </a:lnSpc>
-              <a:spcBef>
-                <a:spcPts val="0"/>
-              </a:spcBef>
-              <a:spcAft>
-                <a:spcPts val="0"/>
-              </a:spcAft>
-              <a:buClr>
-                <a:schemeClr val="dk2"/>
-              </a:buClr>
-              <a:buSzPts val="1400"/>
-              <a:buFont typeface="Arial"/>
-              <a:buChar char="○"/>
-              <a:defRPr sz="1400" b="0" i="0" u="none" strike="noStrike" cap="none">
-                <a:solidFill>
-                  <a:schemeClr val="dk2"/>
-                </a:solidFill>
-                <a:latin typeface="Arial"/>
-                <a:ea typeface="Arial"/>
-                <a:cs typeface="Arial"/>
-                <a:sym typeface="Arial"/>
-              </a:defRPr>
-            </a:lvl5pPr>
-            <a:lvl6pPr marL="2743200" marR="0" lvl="5" indent="-317500" algn="l" rtl="0">
-              <a:lnSpc>
-                <a:spcPct val="115000"/>
-              </a:lnSpc>
-              <a:spcBef>
-                <a:spcPts val="0"/>
-              </a:spcBef>
-              <a:spcAft>
-                <a:spcPts val="0"/>
-              </a:spcAft>
-              <a:buClr>
-                <a:schemeClr val="dk2"/>
-              </a:buClr>
-              <a:buSzPts val="1400"/>
-              <a:buFont typeface="Arial"/>
-              <a:buChar char="■"/>
-              <a:defRPr sz="1400" b="0" i="0" u="none" strike="noStrike" cap="none">
-                <a:solidFill>
-                  <a:schemeClr val="dk2"/>
-                </a:solidFill>
-                <a:latin typeface="Arial"/>
-                <a:ea typeface="Arial"/>
-                <a:cs typeface="Arial"/>
-                <a:sym typeface="Arial"/>
-              </a:defRPr>
-            </a:lvl6pPr>
-            <a:lvl7pPr marL="3200400" marR="0" lvl="6" indent="-317500" algn="l" rtl="0">
-              <a:lnSpc>
-                <a:spcPct val="115000"/>
-              </a:lnSpc>
-              <a:spcBef>
-                <a:spcPts val="0"/>
-              </a:spcBef>
-              <a:spcAft>
-                <a:spcPts val="0"/>
-              </a:spcAft>
-              <a:buClr>
-                <a:schemeClr val="dk2"/>
-              </a:buClr>
-              <a:buSzPts val="1400"/>
-              <a:buFont typeface="Arial"/>
-              <a:buChar char="●"/>
-              <a:defRPr sz="1400" b="0" i="0" u="none" strike="noStrike" cap="none">
-                <a:solidFill>
-                  <a:schemeClr val="dk2"/>
-                </a:solidFill>
-                <a:latin typeface="Arial"/>
-                <a:ea typeface="Arial"/>
-                <a:cs typeface="Arial"/>
-                <a:sym typeface="Arial"/>
-              </a:defRPr>
-            </a:lvl7pPr>
-            <a:lvl8pPr marL="3657600" marR="0" lvl="7" indent="-317500" algn="l" rtl="0">
-              <a:lnSpc>
-                <a:spcPct val="115000"/>
-              </a:lnSpc>
-              <a:spcBef>
-                <a:spcPts val="0"/>
-              </a:spcBef>
-              <a:spcAft>
-                <a:spcPts val="0"/>
-              </a:spcAft>
-              <a:buClr>
-                <a:schemeClr val="dk2"/>
-              </a:buClr>
-              <a:buSzPts val="1400"/>
-              <a:buFont typeface="Arial"/>
-              <a:buChar char="○"/>
-              <a:defRPr sz="1400" b="0" i="0" u="none" strike="noStrike" cap="none">
-                <a:solidFill>
-                  <a:schemeClr val="dk2"/>
-                </a:solidFill>
-                <a:latin typeface="Arial"/>
-                <a:ea typeface="Arial"/>
-                <a:cs typeface="Arial"/>
-                <a:sym typeface="Arial"/>
-              </a:defRPr>
-            </a:lvl8pPr>
-            <a:lvl9pPr marL="4114800" marR="0" lvl="8" indent="-317500" algn="l" rtl="0">
-              <a:lnSpc>
-                <a:spcPct val="115000"/>
-              </a:lnSpc>
-              <a:spcBef>
-                <a:spcPts val="0"/>
-              </a:spcBef>
-              <a:spcAft>
-                <a:spcPts val="0"/>
-              </a:spcAft>
-              <a:buClr>
-                <a:schemeClr val="dk2"/>
-              </a:buClr>
-              <a:buSzPts val="1400"/>
-              <a:buFont typeface="Arial"/>
-              <a:buChar char="■"/>
-              <a:defRPr sz="1400" b="0" i="0" u="none" strike="noStrike" cap="none">
-                <a:solidFill>
-                  <a:schemeClr val="dk2"/>
-                </a:solidFill>
-                <a:latin typeface="Arial"/>
-                <a:ea typeface="Arial"/>
-                <a:cs typeface="Arial"/>
-                <a:sym typeface="Arial"/>
-              </a:defRPr>
-            </a:lvl9pPr>
-          </a:lstStyle>
-          <a:p>
-            <a:pPr marL="0" indent="0">
-              <a:buFont typeface="Arial"/>
-              <a:buNone/>
-            </a:pPr>
-            <a:r>
-              <a:rPr lang="ru-RU" sz="1400" dirty="0">
-                <a:solidFill>
-                  <a:schemeClr val="bg2"/>
-                </a:solidFill>
-              </a:rPr>
-              <a:t>Сортировка по времени</a:t>
-            </a:r>
-          </a:p>
-          <a:p>
-            <a:pPr marL="0" indent="0">
-              <a:buFont typeface="Arial"/>
-              <a:buNone/>
-            </a:pPr>
-            <a:r>
-              <a:rPr lang="ru-RU" sz="1400" dirty="0">
-                <a:solidFill>
-                  <a:schemeClr val="bg2"/>
-                </a:solidFill>
-              </a:rPr>
-              <a:t>Удаление дубликатов</a:t>
-            </a:r>
-          </a:p>
-          <a:p>
-            <a:pPr marL="0" indent="0">
-              <a:buFont typeface="Arial"/>
-              <a:buNone/>
-            </a:pPr>
-            <a:r>
-              <a:rPr lang="ru-RU" sz="1400" dirty="0">
-                <a:solidFill>
-                  <a:schemeClr val="bg2"/>
-                </a:solidFill>
-              </a:rPr>
-              <a:t>Обработка пропусков</a:t>
+              <a:t>Подбор гиперпараметров модуля принятия решений</a:t>
             </a:r>
           </a:p>
         </p:txBody>
@@ -11512,8 +12259,8 @@
         </p:nvSpPr>
         <p:spPr>
           <a:xfrm>
-            <a:off x="4416140" y="2573483"/>
-            <a:ext cx="1827066" cy="1007919"/>
+            <a:off x="2252099" y="2821938"/>
+            <a:ext cx="2032399" cy="1330034"/>
           </a:xfrm>
           <a:prstGeom prst="rect">
             <a:avLst/>
@@ -11525,7 +12272,7 @@
         </p:spPr>
         <p:txBody>
           <a:bodyPr spcFirstLastPara="1" wrap="square" lIns="91425" tIns="91425" rIns="91425" bIns="91425" anchor="ctr" anchorCtr="0">
-            <a:normAutofit fontScale="92500" lnSpcReduction="20000"/>
+            <a:noAutofit/>
           </a:bodyPr>
           <a:lstStyle>
             <a:defPPr marR="0" lvl="0" algn="l" rtl="0">
@@ -11780,10 +12527,12 @@
               <a:buNone/>
             </a:pPr>
             <a:r>
-              <a:rPr lang="ru-RU" sz="1400" dirty="0">
+              <a:rPr lang="ru-RU" sz="1200" dirty="0">
                 <a:solidFill>
                   <a:schemeClr val="bg2"/>
                 </a:solidFill>
+                <a:latin typeface="Times New Roman" panose="02020603050405020304" pitchFamily="18" charset="0"/>
+                <a:cs typeface="Times New Roman" panose="02020603050405020304" pitchFamily="18" charset="0"/>
               </a:rPr>
               <a:t>Доходности</a:t>
             </a:r>
@@ -11794,10 +12543,12 @@
               <a:buNone/>
             </a:pPr>
             <a:r>
-              <a:rPr lang="ru-RU" sz="1400" dirty="0">
+              <a:rPr lang="ru-RU" sz="1200" dirty="0">
                 <a:solidFill>
                   <a:schemeClr val="bg2"/>
                 </a:solidFill>
+                <a:latin typeface="Times New Roman" panose="02020603050405020304" pitchFamily="18" charset="0"/>
+                <a:cs typeface="Times New Roman" panose="02020603050405020304" pitchFamily="18" charset="0"/>
               </a:rPr>
               <a:t>Объём и оборот</a:t>
             </a:r>
@@ -11808,10 +12559,12 @@
               <a:buNone/>
             </a:pPr>
             <a:r>
-              <a:rPr lang="ru-RU" sz="1400" dirty="0">
+              <a:rPr lang="ru-RU" sz="1200" dirty="0">
                 <a:solidFill>
                   <a:schemeClr val="bg2"/>
                 </a:solidFill>
+                <a:latin typeface="Times New Roman" panose="02020603050405020304" pitchFamily="18" charset="0"/>
+                <a:cs typeface="Times New Roman" panose="02020603050405020304" pitchFamily="18" charset="0"/>
               </a:rPr>
               <a:t>Волатильность</a:t>
             </a:r>
@@ -11822,12 +12575,62 @@
               <a:buNone/>
             </a:pPr>
             <a:r>
-              <a:rPr lang="ru-RU" sz="1400" dirty="0">
+              <a:rPr lang="ru-RU" sz="1200" dirty="0">
                 <a:solidFill>
                   <a:schemeClr val="bg2"/>
                 </a:solidFill>
+                <a:latin typeface="Times New Roman" panose="02020603050405020304" pitchFamily="18" charset="0"/>
+                <a:cs typeface="Times New Roman" panose="02020603050405020304" pitchFamily="18" charset="0"/>
               </a:rPr>
               <a:t>Временные признаки</a:t>
+            </a:r>
+          </a:p>
+          <a:p>
+            <a:pPr marL="0" indent="0">
+              <a:buFont typeface="Arial"/>
+              <a:buNone/>
+            </a:pPr>
+            <a:r>
+              <a:rPr lang="ru-RU" sz="1200" dirty="0">
+                <a:solidFill>
+                  <a:schemeClr val="bg2"/>
+                </a:solidFill>
+                <a:latin typeface="Times New Roman" panose="02020603050405020304" pitchFamily="18" charset="0"/>
+                <a:cs typeface="Times New Roman" panose="02020603050405020304" pitchFamily="18" charset="0"/>
+              </a:rPr>
+              <a:t>Будущая доходность</a:t>
+            </a:r>
+          </a:p>
+          <a:p>
+            <a:pPr marL="0" indent="0">
+              <a:buFont typeface="Arial"/>
+              <a:buNone/>
+            </a:pPr>
+            <a:r>
+              <a:rPr lang="ru-RU" sz="1200" dirty="0">
+                <a:solidFill>
+                  <a:schemeClr val="bg2"/>
+                </a:solidFill>
+                <a:latin typeface="Times New Roman" panose="02020603050405020304" pitchFamily="18" charset="0"/>
+                <a:cs typeface="Times New Roman" panose="02020603050405020304" pitchFamily="18" charset="0"/>
+              </a:rPr>
+              <a:t>Метка удержания позиций</a:t>
+            </a:r>
+          </a:p>
+          <a:p>
+            <a:pPr marL="0" indent="0">
+              <a:buFont typeface="Arial"/>
+              <a:buNone/>
+            </a:pPr>
+            <a:r>
+              <a:rPr lang="ru-RU" sz="1200" dirty="0">
+                <a:solidFill>
+                  <a:schemeClr val="bg2"/>
+                </a:solidFill>
+                <a:latin typeface="Times New Roman" panose="02020603050405020304" pitchFamily="18" charset="0"/>
+                <a:cs typeface="Times New Roman" panose="02020603050405020304" pitchFamily="18" charset="0"/>
+              </a:rPr>
+              <a:t>Окна прошлых наблюдений</a:t>
             </a:r>
           </a:p>
         </p:txBody>
@@ -11848,8 +12651,8 @@
         </p:nvSpPr>
         <p:spPr>
           <a:xfrm>
-            <a:off x="6263990" y="2568287"/>
-            <a:ext cx="2568310" cy="1007917"/>
+            <a:off x="4284498" y="2756667"/>
+            <a:ext cx="1435472" cy="1203019"/>
           </a:xfrm>
           <a:prstGeom prst="rect">
             <a:avLst/>
@@ -11861,7 +12664,7 @@
         </p:spPr>
         <p:txBody>
           <a:bodyPr spcFirstLastPara="1" wrap="square" lIns="91425" tIns="91425" rIns="91425" bIns="91425" anchor="ctr" anchorCtr="0">
-            <a:normAutofit/>
+            <a:noAutofit/>
           </a:bodyPr>
           <a:lstStyle>
             <a:defPPr marR="0" lvl="0" algn="l" rtl="0">
@@ -12116,13 +12919,22 @@
               <a:buNone/>
             </a:pPr>
             <a:r>
-              <a:rPr lang="ru-RU" sz="1400" dirty="0">
+              <a:rPr lang="en-US" sz="1200" dirty="0">
                 <a:solidFill>
                   <a:schemeClr val="bg2"/>
                 </a:solidFill>
+                <a:latin typeface="Times New Roman" panose="02020603050405020304" pitchFamily="18" charset="0"/>
+                <a:cs typeface="Times New Roman" panose="02020603050405020304" pitchFamily="18" charset="0"/>
               </a:rPr>
-              <a:t>Будущая доходность</a:t>
+              <a:t>Ridge</a:t>
             </a:r>
+            <a:endParaRPr lang="ru-RU" sz="1200" dirty="0">
+              <a:solidFill>
+                <a:schemeClr val="bg2"/>
+              </a:solidFill>
+              <a:latin typeface="Times New Roman" panose="02020603050405020304" pitchFamily="18" charset="0"/>
+              <a:cs typeface="Times New Roman" panose="02020603050405020304" pitchFamily="18" charset="0"/>
+            </a:endParaRPr>
           </a:p>
           <a:p>
             <a:pPr marL="0" indent="0">
@@ -12130,12 +12942,14 @@
               <a:buNone/>
             </a:pPr>
             <a:r>
-              <a:rPr lang="ru-RU" sz="1400" dirty="0">
+              <a:rPr lang="en-US" sz="1200" dirty="0">
                 <a:solidFill>
                   <a:schemeClr val="bg2"/>
                 </a:solidFill>
+                <a:latin typeface="Times New Roman" panose="02020603050405020304" pitchFamily="18" charset="0"/>
+                <a:cs typeface="Times New Roman" panose="02020603050405020304" pitchFamily="18" charset="0"/>
               </a:rPr>
-              <a:t>Метка удержания позиции</a:t>
+              <a:t>ARIMA</a:t>
             </a:r>
           </a:p>
           <a:p>
@@ -12144,13 +12958,98 @@
               <a:buNone/>
             </a:pPr>
             <a:r>
-              <a:rPr lang="ru-RU" sz="1400" dirty="0">
+              <a:rPr lang="en-US" sz="1200" dirty="0">
                 <a:solidFill>
                   <a:schemeClr val="bg2"/>
                 </a:solidFill>
+                <a:latin typeface="Times New Roman" panose="02020603050405020304" pitchFamily="18" charset="0"/>
+                <a:cs typeface="Times New Roman" panose="02020603050405020304" pitchFamily="18" charset="0"/>
               </a:rPr>
-              <a:t>Окна прошлых наблюдений</a:t>
+              <a:t>GRU</a:t>
             </a:r>
+          </a:p>
+          <a:p>
+            <a:pPr marL="0" indent="0">
+              <a:buFont typeface="Arial"/>
+              <a:buNone/>
+            </a:pPr>
+            <a:r>
+              <a:rPr lang="en-US" sz="1200" dirty="0">
+                <a:solidFill>
+                  <a:schemeClr val="bg2"/>
+                </a:solidFill>
+                <a:latin typeface="Times New Roman" panose="02020603050405020304" pitchFamily="18" charset="0"/>
+                <a:cs typeface="Times New Roman" panose="02020603050405020304" pitchFamily="18" charset="0"/>
+              </a:rPr>
+              <a:t>LSTM</a:t>
+            </a:r>
+          </a:p>
+          <a:p>
+            <a:pPr marL="0" indent="0">
+              <a:buFont typeface="Arial"/>
+              <a:buNone/>
+            </a:pPr>
+            <a:r>
+              <a:rPr lang="en-US" sz="1200" dirty="0">
+                <a:solidFill>
+                  <a:schemeClr val="bg2"/>
+                </a:solidFill>
+                <a:latin typeface="Times New Roman" panose="02020603050405020304" pitchFamily="18" charset="0"/>
+                <a:cs typeface="Times New Roman" panose="02020603050405020304" pitchFamily="18" charset="0"/>
+              </a:rPr>
+              <a:t>Transformer</a:t>
+            </a:r>
+            <a:endParaRPr lang="ru-RU" sz="1200" dirty="0">
+              <a:solidFill>
+                <a:schemeClr val="bg2"/>
+              </a:solidFill>
+              <a:latin typeface="Times New Roman" panose="02020603050405020304" pitchFamily="18" charset="0"/>
+              <a:cs typeface="Times New Roman" panose="02020603050405020304" pitchFamily="18" charset="0"/>
+            </a:endParaRPr>
+          </a:p>
+        </p:txBody>
+      </p:sp>
+      <p:sp>
+        <p:nvSpPr>
+          <p:cNvPr id="2" name="Номер слайда 1">
+            <a:extLst>
+              <a:ext uri="{FF2B5EF4-FFF2-40B4-BE49-F238E27FC236}">
+                <a16:creationId xmlns:a16="http://schemas.microsoft.com/office/drawing/2014/main" id="{A59C7F27-2308-DF44-2AF3-ACA6BF31759A}"/>
+              </a:ext>
+            </a:extLst>
+          </p:cNvPr>
+          <p:cNvSpPr>
+            <a:spLocks noGrp="1"/>
+          </p:cNvSpPr>
+          <p:nvPr>
+            <p:ph type="sldNum" idx="12"/>
+          </p:nvPr>
+        </p:nvSpPr>
+        <p:spPr/>
+        <p:txBody>
+          <a:bodyPr/>
+          <a:lstStyle/>
+          <a:p>
+            <a:pPr marL="0" lvl="0" indent="0" algn="r" rtl="0">
+              <a:spcBef>
+                <a:spcPts val="0"/>
+              </a:spcBef>
+              <a:spcAft>
+                <a:spcPts val="0"/>
+              </a:spcAft>
+              <a:buNone/>
+            </a:pPr>
+            <a:fld id="{00000000-1234-1234-1234-123412341234}" type="slidenum">
+              <a:rPr lang="ru" smtClean="0">
+                <a:latin typeface="Times New Roman" panose="02020603050405020304" pitchFamily="18" charset="0"/>
+                <a:cs typeface="Times New Roman" panose="02020603050405020304" pitchFamily="18" charset="0"/>
+              </a:rPr>
+              <a:t>5</a:t>
+            </a:fld>
+            <a:endParaRPr lang="ru">
+              <a:latin typeface="Times New Roman" panose="02020603050405020304" pitchFamily="18" charset="0"/>
+              <a:cs typeface="Times New Roman" panose="02020603050405020304" pitchFamily="18" charset="0"/>
+            </a:endParaRPr>
           </a:p>
         </p:txBody>
       </p:sp>
@@ -12181,48 +13080,6 @@
       </p:grpSpPr>
       <p:sp>
         <p:nvSpPr>
-          <p:cNvPr id="85" name="Google Shape;85;p18"/>
-          <p:cNvSpPr txBox="1">
-            <a:spLocks noGrp="1"/>
-          </p:cNvSpPr>
-          <p:nvPr>
-            <p:ph type="title"/>
-          </p:nvPr>
-        </p:nvSpPr>
-        <p:spPr>
-          <a:xfrm>
-            <a:off x="311700" y="16191"/>
-            <a:ext cx="8520600" cy="572700"/>
-          </a:xfrm>
-          <a:prstGeom prst="rect">
-            <a:avLst/>
-          </a:prstGeom>
-        </p:spPr>
-        <p:txBody>
-          <a:bodyPr spcFirstLastPara="1" wrap="square" lIns="91425" tIns="91425" rIns="91425" bIns="91425" anchor="t" anchorCtr="0">
-            <a:normAutofit fontScale="90000"/>
-          </a:bodyPr>
-          <a:lstStyle/>
-          <a:p>
-            <a:pPr marL="0" lvl="0" indent="0" algn="ctr" rtl="0">
-              <a:spcBef>
-                <a:spcPts val="0"/>
-              </a:spcBef>
-              <a:spcAft>
-                <a:spcPts val="0"/>
-              </a:spcAft>
-              <a:buNone/>
-            </a:pPr>
-            <a:r>
-              <a:rPr lang="ru" dirty="0"/>
-              <a:t>Архитектурные решения</a:t>
-            </a:r>
-            <a:endParaRPr dirty="0"/>
-          </a:p>
-        </p:txBody>
-      </p:sp>
-      <p:sp>
-        <p:nvSpPr>
           <p:cNvPr id="7" name="Текст 6">
             <a:extLst>
               <a:ext uri="{FF2B5EF4-FFF2-40B4-BE49-F238E27FC236}">
@@ -12237,7 +13094,12 @@
             <p:ph type="body" idx="1"/>
           </p:nvPr>
         </p:nvSpPr>
-        <p:spPr/>
+        <p:spPr>
+          <a:xfrm>
+            <a:off x="352299" y="2492095"/>
+            <a:ext cx="2635226" cy="2118728"/>
+          </a:xfrm>
+        </p:spPr>
         <p:txBody>
           <a:bodyPr/>
           <a:lstStyle/>
@@ -12246,7 +13108,10 @@
               <a:buNone/>
             </a:pPr>
             <a:r>
-              <a:rPr lang="ru-RU" dirty="0"/>
+              <a:rPr lang="ru-RU" dirty="0">
+                <a:latin typeface="Times New Roman" panose="02020603050405020304" pitchFamily="18" charset="0"/>
+                <a:cs typeface="Times New Roman" panose="02020603050405020304" pitchFamily="18" charset="0"/>
+              </a:rPr>
               <a:t> </a:t>
             </a:r>
           </a:p>
@@ -12281,8 +13146,8 @@
         </p:blipFill>
         <p:spPr bwMode="auto">
           <a:xfrm>
-            <a:off x="1589867" y="631825"/>
-            <a:ext cx="6120130" cy="4511675"/>
+            <a:off x="3370622" y="1160606"/>
+            <a:ext cx="5333924" cy="3932094"/>
           </a:xfrm>
           <a:prstGeom prst="rect">
             <a:avLst/>
@@ -12293,6 +13158,250 @@
           </a:ln>
         </p:spPr>
       </p:pic>
+      <p:sp>
+        <p:nvSpPr>
+          <p:cNvPr id="2" name="TextBox 1">
+            <a:extLst>
+              <a:ext uri="{FF2B5EF4-FFF2-40B4-BE49-F238E27FC236}">
+                <a16:creationId xmlns:a16="http://schemas.microsoft.com/office/drawing/2014/main" id="{1669A9EF-BE3B-3AC4-193D-01516E8D0F90}"/>
+              </a:ext>
+            </a:extLst>
+          </p:cNvPr>
+          <p:cNvSpPr txBox="1"/>
+          <p:nvPr/>
+        </p:nvSpPr>
+        <p:spPr>
+          <a:xfrm>
+            <a:off x="510654" y="1511205"/>
+            <a:ext cx="2776722" cy="2462213"/>
+          </a:xfrm>
+          <a:prstGeom prst="rect">
+            <a:avLst/>
+          </a:prstGeom>
+          <a:noFill/>
+        </p:spPr>
+        <p:txBody>
+          <a:bodyPr wrap="none" rtlCol="0">
+            <a:spAutoFit/>
+          </a:bodyPr>
+          <a:lstStyle/>
+          <a:p>
+            <a:pPr marL="285750" indent="-285750" algn="just">
+              <a:buFont typeface="Arial" panose="020B0604020202020204" pitchFamily="34" charset="0"/>
+              <a:buChar char="•"/>
+            </a:pPr>
+            <a:r>
+              <a:rPr lang="ru-RU" dirty="0">
+                <a:latin typeface="Times New Roman" panose="02020603050405020304" pitchFamily="18" charset="0"/>
+                <a:cs typeface="Times New Roman" panose="02020603050405020304" pitchFamily="18" charset="0"/>
+              </a:rPr>
+              <a:t>В работе прогнозирование</a:t>
+            </a:r>
+            <a:br>
+              <a:rPr lang="ru-RU" dirty="0">
+                <a:latin typeface="Times New Roman" panose="02020603050405020304" pitchFamily="18" charset="0"/>
+                <a:cs typeface="Times New Roman" panose="02020603050405020304" pitchFamily="18" charset="0"/>
+              </a:rPr>
+            </a:br>
+            <a:r>
+              <a:rPr lang="ru-RU" dirty="0">
+                <a:latin typeface="Times New Roman" panose="02020603050405020304" pitchFamily="18" charset="0"/>
+                <a:cs typeface="Times New Roman" panose="02020603050405020304" pitchFamily="18" charset="0"/>
+              </a:rPr>
+              <a:t>и формирование торговых</a:t>
+            </a:r>
+            <a:br>
+              <a:rPr lang="ru-RU" dirty="0">
+                <a:latin typeface="Times New Roman" panose="02020603050405020304" pitchFamily="18" charset="0"/>
+                <a:cs typeface="Times New Roman" panose="02020603050405020304" pitchFamily="18" charset="0"/>
+              </a:rPr>
+            </a:br>
+            <a:r>
+              <a:rPr lang="ru-RU" dirty="0">
+                <a:latin typeface="Times New Roman" panose="02020603050405020304" pitchFamily="18" charset="0"/>
+                <a:cs typeface="Times New Roman" panose="02020603050405020304" pitchFamily="18" charset="0"/>
+              </a:rPr>
+              <a:t>действий были выделены</a:t>
+            </a:r>
+            <a:br>
+              <a:rPr lang="ru-RU" dirty="0">
+                <a:latin typeface="Times New Roman" panose="02020603050405020304" pitchFamily="18" charset="0"/>
+                <a:cs typeface="Times New Roman" panose="02020603050405020304" pitchFamily="18" charset="0"/>
+              </a:rPr>
+            </a:br>
+            <a:r>
+              <a:rPr lang="ru-RU" dirty="0">
+                <a:latin typeface="Times New Roman" panose="02020603050405020304" pitchFamily="18" charset="0"/>
+                <a:cs typeface="Times New Roman" panose="02020603050405020304" pitchFamily="18" charset="0"/>
+              </a:rPr>
+              <a:t>в отдельные компоненты</a:t>
+            </a:r>
+            <a:br>
+              <a:rPr lang="ru-RU" dirty="0">
+                <a:latin typeface="Times New Roman" panose="02020603050405020304" pitchFamily="18" charset="0"/>
+                <a:cs typeface="Times New Roman" panose="02020603050405020304" pitchFamily="18" charset="0"/>
+              </a:rPr>
+            </a:br>
+            <a:r>
+              <a:rPr lang="ru-RU" dirty="0">
+                <a:latin typeface="Times New Roman" panose="02020603050405020304" pitchFamily="18" charset="0"/>
+                <a:cs typeface="Times New Roman" panose="02020603050405020304" pitchFamily="18" charset="0"/>
+              </a:rPr>
+              <a:t>системы.</a:t>
+            </a:r>
+          </a:p>
+          <a:p>
+            <a:pPr algn="just"/>
+            <a:endParaRPr lang="ru-RU" dirty="0">
+              <a:latin typeface="Times New Roman" panose="02020603050405020304" pitchFamily="18" charset="0"/>
+              <a:cs typeface="Times New Roman" panose="02020603050405020304" pitchFamily="18" charset="0"/>
+            </a:endParaRPr>
+          </a:p>
+          <a:p>
+            <a:pPr marL="285750" indent="-285750" algn="just">
+              <a:buFont typeface="Arial" panose="020B0604020202020204" pitchFamily="34" charset="0"/>
+              <a:buChar char="•"/>
+            </a:pPr>
+            <a:r>
+              <a:rPr lang="ru-RU" dirty="0">
+                <a:latin typeface="Times New Roman" panose="02020603050405020304" pitchFamily="18" charset="0"/>
+                <a:cs typeface="Times New Roman" panose="02020603050405020304" pitchFamily="18" charset="0"/>
+              </a:rPr>
+              <a:t>Прогнозирование</a:t>
+            </a:r>
+            <a:br>
+              <a:rPr lang="ru-RU" dirty="0">
+                <a:latin typeface="Times New Roman" panose="02020603050405020304" pitchFamily="18" charset="0"/>
+                <a:cs typeface="Times New Roman" panose="02020603050405020304" pitchFamily="18" charset="0"/>
+              </a:rPr>
+            </a:br>
+            <a:r>
+              <a:rPr lang="ru-RU" dirty="0">
+                <a:latin typeface="Times New Roman" panose="02020603050405020304" pitchFamily="18" charset="0"/>
+                <a:cs typeface="Times New Roman" panose="02020603050405020304" pitchFamily="18" charset="0"/>
+              </a:rPr>
+              <a:t>осуществляется нейросетевой</a:t>
+            </a:r>
+            <a:br>
+              <a:rPr lang="ru-RU" dirty="0">
+                <a:latin typeface="Times New Roman" panose="02020603050405020304" pitchFamily="18" charset="0"/>
+                <a:cs typeface="Times New Roman" panose="02020603050405020304" pitchFamily="18" charset="0"/>
+              </a:rPr>
+            </a:br>
+            <a:r>
+              <a:rPr lang="ru-RU" dirty="0">
+                <a:latin typeface="Times New Roman" panose="02020603050405020304" pitchFamily="18" charset="0"/>
+                <a:cs typeface="Times New Roman" panose="02020603050405020304" pitchFamily="18" charset="0"/>
+              </a:rPr>
+              <a:t>или статистической моделью,</a:t>
+            </a:r>
+            <a:br>
+              <a:rPr lang="ru-RU" dirty="0">
+                <a:latin typeface="Times New Roman" panose="02020603050405020304" pitchFamily="18" charset="0"/>
+                <a:cs typeface="Times New Roman" panose="02020603050405020304" pitchFamily="18" charset="0"/>
+              </a:rPr>
+            </a:br>
+            <a:r>
+              <a:rPr lang="ru-RU" dirty="0">
+                <a:latin typeface="Times New Roman" panose="02020603050405020304" pitchFamily="18" charset="0"/>
+                <a:cs typeface="Times New Roman" panose="02020603050405020304" pitchFamily="18" charset="0"/>
+              </a:rPr>
+              <a:t>а решения принимаются</a:t>
+            </a:r>
+            <a:br>
+              <a:rPr lang="ru-RU" dirty="0">
+                <a:latin typeface="Times New Roman" panose="02020603050405020304" pitchFamily="18" charset="0"/>
+                <a:cs typeface="Times New Roman" panose="02020603050405020304" pitchFamily="18" charset="0"/>
+              </a:rPr>
+            </a:br>
+            <a:r>
+              <a:rPr lang="ru-RU" dirty="0">
+                <a:latin typeface="Times New Roman" panose="02020603050405020304" pitchFamily="18" charset="0"/>
+                <a:cs typeface="Times New Roman" panose="02020603050405020304" pitchFamily="18" charset="0"/>
+              </a:rPr>
+              <a:t>отдельным алгоритмом.</a:t>
+            </a:r>
+          </a:p>
+        </p:txBody>
+      </p:sp>
+      <p:sp>
+        <p:nvSpPr>
+          <p:cNvPr id="6" name="Заголовок 5">
+            <a:extLst>
+              <a:ext uri="{FF2B5EF4-FFF2-40B4-BE49-F238E27FC236}">
+                <a16:creationId xmlns:a16="http://schemas.microsoft.com/office/drawing/2014/main" id="{DC47A364-9713-6E00-D534-2C7320E855FD}"/>
+              </a:ext>
+            </a:extLst>
+          </p:cNvPr>
+          <p:cNvSpPr>
+            <a:spLocks noGrp="1"/>
+          </p:cNvSpPr>
+          <p:nvPr>
+            <p:ph type="title"/>
+          </p:nvPr>
+        </p:nvSpPr>
+        <p:spPr/>
+        <p:txBody>
+          <a:bodyPr>
+            <a:normAutofit fontScale="90000"/>
+          </a:bodyPr>
+          <a:lstStyle/>
+          <a:p>
+            <a:pPr algn="ctr"/>
+            <a:r>
+              <a:rPr lang="ru-RU" dirty="0">
+                <a:latin typeface="Times New Roman" panose="02020603050405020304" pitchFamily="18" charset="0"/>
+                <a:cs typeface="Times New Roman" panose="02020603050405020304" pitchFamily="18" charset="0"/>
+              </a:rPr>
+              <a:t>Архитектурные решения</a:t>
+            </a:r>
+          </a:p>
+        </p:txBody>
+      </p:sp>
+      <p:sp>
+        <p:nvSpPr>
+          <p:cNvPr id="3" name="Номер слайда 2">
+            <a:extLst>
+              <a:ext uri="{FF2B5EF4-FFF2-40B4-BE49-F238E27FC236}">
+                <a16:creationId xmlns:a16="http://schemas.microsoft.com/office/drawing/2014/main" id="{A4003B6A-9026-03AB-6830-62F25E4D20FD}"/>
+              </a:ext>
+            </a:extLst>
+          </p:cNvPr>
+          <p:cNvSpPr>
+            <a:spLocks noGrp="1"/>
+          </p:cNvSpPr>
+          <p:nvPr>
+            <p:ph type="sldNum" idx="12"/>
+          </p:nvPr>
+        </p:nvSpPr>
+        <p:spPr/>
+        <p:txBody>
+          <a:bodyPr/>
+          <a:lstStyle/>
+          <a:p>
+            <a:pPr marL="0" lvl="0" indent="0" algn="r" rtl="0">
+              <a:spcBef>
+                <a:spcPts val="0"/>
+              </a:spcBef>
+              <a:spcAft>
+                <a:spcPts val="0"/>
+              </a:spcAft>
+              <a:buNone/>
+            </a:pPr>
+            <a:fld id="{00000000-1234-1234-1234-123412341234}" type="slidenum">
+              <a:rPr lang="ru" smtClean="0">
+                <a:latin typeface="Times New Roman" panose="02020603050405020304" pitchFamily="18" charset="0"/>
+                <a:cs typeface="Times New Roman" panose="02020603050405020304" pitchFamily="18" charset="0"/>
+              </a:rPr>
+              <a:t>6</a:t>
+            </a:fld>
+            <a:endParaRPr lang="ru">
+              <a:latin typeface="Times New Roman" panose="02020603050405020304" pitchFamily="18" charset="0"/>
+              <a:cs typeface="Times New Roman" panose="02020603050405020304" pitchFamily="18" charset="0"/>
+            </a:endParaRPr>
+          </a:p>
+        </p:txBody>
+      </p:sp>
     </p:spTree>
   </p:cSld>
   <p:clrMapOvr>
@@ -12306,7 +13415,13 @@
   <p:cSld>
     <p:spTree>
       <p:nvGrpSpPr>
-        <p:cNvPr id="1" name="Shape 90"/>
+        <p:cNvPr id="1" name="Shape 90">
+          <a:extLst>
+            <a:ext uri="{FF2B5EF4-FFF2-40B4-BE49-F238E27FC236}">
+              <a16:creationId xmlns:a16="http://schemas.microsoft.com/office/drawing/2014/main" id="{4B1C7F8D-8E3B-9F42-EB01-FBA69729AB27}"/>
+            </a:ext>
+          </a:extLst>
+        </p:cNvPr>
         <p:cNvGrpSpPr/>
         <p:nvPr/>
       </p:nvGrpSpPr>
@@ -12320,7 +13435,13 @@
       </p:grpSpPr>
       <p:sp>
         <p:nvSpPr>
-          <p:cNvPr id="91" name="Google Shape;91;p19"/>
+          <p:cNvPr id="91" name="Google Shape;91;p19">
+            <a:extLst>
+              <a:ext uri="{FF2B5EF4-FFF2-40B4-BE49-F238E27FC236}">
+                <a16:creationId xmlns:a16="http://schemas.microsoft.com/office/drawing/2014/main" id="{1142F66E-DF1C-B25F-F499-B90A5879040A}"/>
+              </a:ext>
+            </a:extLst>
+          </p:cNvPr>
           <p:cNvSpPr txBox="1">
             <a:spLocks noGrp="1"/>
           </p:cNvSpPr>
@@ -12353,16 +13474,28 @@
               <a:buNone/>
             </a:pPr>
             <a:r>
-              <a:rPr lang="ru" dirty="0"/>
-              <a:t>Разработанные методы и алгоритмы</a:t>
+              <a:rPr lang="ru" dirty="0">
+                <a:latin typeface="Times New Roman" panose="02020603050405020304" pitchFamily="18" charset="0"/>
+                <a:cs typeface="Times New Roman" panose="02020603050405020304" pitchFamily="18" charset="0"/>
+              </a:rPr>
+              <a:t>Алгоритм принятия решений</a:t>
             </a:r>
-            <a:endParaRPr dirty="0"/>
+            <a:endParaRPr dirty="0">
+              <a:latin typeface="Times New Roman" panose="02020603050405020304" pitchFamily="18" charset="0"/>
+              <a:cs typeface="Times New Roman" panose="02020603050405020304" pitchFamily="18" charset="0"/>
+            </a:endParaRPr>
           </a:p>
         </p:txBody>
       </p:sp>
       <p:sp>
         <p:nvSpPr>
-          <p:cNvPr id="92" name="Google Shape;92;p19"/>
+          <p:cNvPr id="92" name="Google Shape;92;p19">
+            <a:extLst>
+              <a:ext uri="{FF2B5EF4-FFF2-40B4-BE49-F238E27FC236}">
+                <a16:creationId xmlns:a16="http://schemas.microsoft.com/office/drawing/2014/main" id="{DF5326CD-CCA3-8126-7891-6CC71F7DC169}"/>
+              </a:ext>
+            </a:extLst>
+          </p:cNvPr>
           <p:cNvSpPr txBox="1">
             <a:spLocks noGrp="1"/>
           </p:cNvSpPr>
@@ -12395,19 +13528,25 @@
               <a:buNone/>
             </a:pPr>
             <a:r>
-              <a:rPr lang="ru-RU" dirty="0"/>
+              <a:rPr lang="ru-RU" dirty="0">
+                <a:latin typeface="Times New Roman" panose="02020603050405020304" pitchFamily="18" charset="0"/>
+                <a:cs typeface="Times New Roman" panose="02020603050405020304" pitchFamily="18" charset="0"/>
+              </a:rPr>
               <a:t> </a:t>
             </a:r>
-            <a:endParaRPr dirty="0"/>
+            <a:endParaRPr dirty="0">
+              <a:latin typeface="Times New Roman" panose="02020603050405020304" pitchFamily="18" charset="0"/>
+              <a:cs typeface="Times New Roman" panose="02020603050405020304" pitchFamily="18" charset="0"/>
+            </a:endParaRPr>
           </a:p>
         </p:txBody>
       </p:sp>
       <p:pic>
         <p:nvPicPr>
-          <p:cNvPr id="2" name="Рисунок 1" descr="PlantUML diagram">
+          <p:cNvPr id="5" name="Рисунок 4" descr="PlantUML diagram">
             <a:extLst>
               <a:ext uri="{FF2B5EF4-FFF2-40B4-BE49-F238E27FC236}">
-                <a16:creationId xmlns:a16="http://schemas.microsoft.com/office/drawing/2014/main" id="{911F78CB-0166-CB2D-6ADA-C345FF6E6910}"/>
+                <a16:creationId xmlns:a16="http://schemas.microsoft.com/office/drawing/2014/main" id="{3B522310-3928-727C-4257-60E97920995B}"/>
               </a:ext>
             </a:extLst>
           </p:cNvPr>
@@ -12417,33 +13556,290 @@
           <p:nvPr/>
         </p:nvPicPr>
         <p:blipFill>
-          <a:blip r:embed="rId3">
-            <a:extLst>
-              <a:ext uri="{28A0092B-C50C-407E-A947-70E740481C1C}">
-                <a14:useLocalDpi xmlns:a14="http://schemas.microsoft.com/office/drawing/2010/main" val="0"/>
-              </a:ext>
-            </a:extLst>
-          </a:blip>
-          <a:srcRect/>
+          <a:blip r:embed="rId3"/>
           <a:stretch>
             <a:fillRect/>
           </a:stretch>
         </p:blipFill>
-        <p:spPr bwMode="auto">
+        <p:spPr>
           <a:xfrm>
-            <a:off x="2918258" y="1152475"/>
-            <a:ext cx="3307484" cy="3718564"/>
+            <a:off x="5242214" y="909929"/>
+            <a:ext cx="2299969" cy="4233571"/>
+          </a:xfrm>
+          <a:prstGeom prst="rect">
+            <a:avLst/>
+          </a:prstGeom>
+        </p:spPr>
+      </p:pic>
+      <p:sp>
+        <p:nvSpPr>
+          <p:cNvPr id="6" name="TextBox 5">
+            <a:extLst>
+              <a:ext uri="{FF2B5EF4-FFF2-40B4-BE49-F238E27FC236}">
+                <a16:creationId xmlns:a16="http://schemas.microsoft.com/office/drawing/2014/main" id="{8179B106-7732-C916-0784-07C130ABD5AF}"/>
+              </a:ext>
+            </a:extLst>
+          </p:cNvPr>
+          <p:cNvSpPr txBox="1"/>
+          <p:nvPr/>
+        </p:nvSpPr>
+        <p:spPr>
+          <a:xfrm>
+            <a:off x="368877" y="1017725"/>
+            <a:ext cx="4756016" cy="1384995"/>
           </a:xfrm>
           <a:prstGeom prst="rect">
             <a:avLst/>
           </a:prstGeom>
           <a:noFill/>
-          <a:ln>
-            <a:noFill/>
-          </a:ln>
         </p:spPr>
-      </p:pic>
+        <p:txBody>
+          <a:bodyPr wrap="square" rtlCol="0">
+            <a:spAutoFit/>
+          </a:bodyPr>
+          <a:lstStyle/>
+          <a:p>
+            <a:r>
+              <a:rPr lang="ru-RU" dirty="0">
+                <a:latin typeface="Times New Roman" panose="02020603050405020304" pitchFamily="18" charset="0"/>
+                <a:cs typeface="Times New Roman" panose="02020603050405020304" pitchFamily="18" charset="0"/>
+              </a:rPr>
+              <a:t>Каждую минуту алгоритм проверяет уже открытые позиции</a:t>
+            </a:r>
+          </a:p>
+          <a:p>
+            <a:r>
+              <a:rPr lang="ru-RU" dirty="0">
+                <a:latin typeface="Times New Roman" panose="02020603050405020304" pitchFamily="18" charset="0"/>
+                <a:cs typeface="Times New Roman" panose="02020603050405020304" pitchFamily="18" charset="0"/>
+              </a:rPr>
+              <a:t>Позиция закрывается, если:</a:t>
+            </a:r>
+          </a:p>
+          <a:p>
+            <a:pPr marL="342900" indent="-342900">
+              <a:buFont typeface="+mj-lt"/>
+              <a:buAutoNum type="arabicPeriod"/>
+            </a:pPr>
+            <a:r>
+              <a:rPr lang="ru-RU" dirty="0">
+                <a:latin typeface="Times New Roman" panose="02020603050405020304" pitchFamily="18" charset="0"/>
+                <a:cs typeface="Times New Roman" panose="02020603050405020304" pitchFamily="18" charset="0"/>
+              </a:rPr>
+              <a:t>Достигнут лимит удержания позиции </a:t>
+            </a:r>
+            <a:r>
+              <a:rPr lang="ru-RU" dirty="0">
+                <a:solidFill>
+                  <a:schemeClr val="tx1">
+                    <a:lumMod val="50000"/>
+                    <a:lumOff val="50000"/>
+                  </a:schemeClr>
+                </a:solidFill>
+                <a:latin typeface="Times New Roman" panose="02020603050405020304" pitchFamily="18" charset="0"/>
+                <a:cs typeface="Times New Roman" panose="02020603050405020304" pitchFamily="18" charset="0"/>
+              </a:rPr>
+              <a:t>—</a:t>
+            </a:r>
+            <a:r>
+              <a:rPr lang="ru-RU" dirty="0">
+                <a:latin typeface="Times New Roman" panose="02020603050405020304" pitchFamily="18" charset="0"/>
+                <a:cs typeface="Times New Roman" panose="02020603050405020304" pitchFamily="18" charset="0"/>
+              </a:rPr>
+              <a:t> 30 минут</a:t>
+            </a:r>
+            <a:r>
+              <a:rPr lang="en-US" dirty="0">
+                <a:latin typeface="Times New Roman" panose="02020603050405020304" pitchFamily="18" charset="0"/>
+                <a:cs typeface="Times New Roman" panose="02020603050405020304" pitchFamily="18" charset="0"/>
+              </a:rPr>
+              <a:t>;</a:t>
+            </a:r>
+            <a:endParaRPr lang="ru-RU" dirty="0">
+              <a:latin typeface="Times New Roman" panose="02020603050405020304" pitchFamily="18" charset="0"/>
+              <a:cs typeface="Times New Roman" panose="02020603050405020304" pitchFamily="18" charset="0"/>
+            </a:endParaRPr>
+          </a:p>
+          <a:p>
+            <a:pPr marL="342900" indent="-342900">
+              <a:buFont typeface="+mj-lt"/>
+              <a:buAutoNum type="arabicPeriod"/>
+            </a:pPr>
+            <a:r>
+              <a:rPr lang="ru-RU" dirty="0">
+                <a:latin typeface="Times New Roman" panose="02020603050405020304" pitchFamily="18" charset="0"/>
+                <a:cs typeface="Times New Roman" panose="02020603050405020304" pitchFamily="18" charset="0"/>
+              </a:rPr>
+              <a:t>Прогноз удержания недостаточен для продолжения позиции.</a:t>
+            </a:r>
+          </a:p>
+        </p:txBody>
+      </p:sp>
+      <p:sp>
+        <p:nvSpPr>
+          <p:cNvPr id="7" name="TextBox 6">
+            <a:extLst>
+              <a:ext uri="{FF2B5EF4-FFF2-40B4-BE49-F238E27FC236}">
+                <a16:creationId xmlns:a16="http://schemas.microsoft.com/office/drawing/2014/main" id="{55764591-A864-C706-2CBE-5A01B2EFC76F}"/>
+              </a:ext>
+            </a:extLst>
+          </p:cNvPr>
+          <p:cNvSpPr txBox="1"/>
+          <p:nvPr/>
+        </p:nvSpPr>
+        <p:spPr>
+          <a:xfrm>
+            <a:off x="441612" y="2452200"/>
+            <a:ext cx="3673187" cy="523220"/>
+          </a:xfrm>
+          <a:prstGeom prst="rect">
+            <a:avLst/>
+          </a:prstGeom>
+          <a:noFill/>
+        </p:spPr>
+        <p:txBody>
+          <a:bodyPr wrap="square" rtlCol="0">
+            <a:spAutoFit/>
+          </a:bodyPr>
+          <a:lstStyle/>
+          <a:p>
+            <a:r>
+              <a:rPr lang="ru-RU" dirty="0">
+                <a:latin typeface="Times New Roman" panose="02020603050405020304" pitchFamily="18" charset="0"/>
+                <a:cs typeface="Times New Roman" panose="02020603050405020304" pitchFamily="18" charset="0"/>
+              </a:rPr>
+              <a:t>После этого проверяется возможность открытия новых позиций.</a:t>
+            </a:r>
+          </a:p>
+        </p:txBody>
+      </p:sp>
+      <p:sp>
+        <p:nvSpPr>
+          <p:cNvPr id="8" name="TextBox 7">
+            <a:extLst>
+              <a:ext uri="{FF2B5EF4-FFF2-40B4-BE49-F238E27FC236}">
+                <a16:creationId xmlns:a16="http://schemas.microsoft.com/office/drawing/2014/main" id="{6C9CE6BD-DE74-6BE1-D7FE-39DE76E56073}"/>
+              </a:ext>
+            </a:extLst>
+          </p:cNvPr>
+          <p:cNvSpPr txBox="1"/>
+          <p:nvPr/>
+        </p:nvSpPr>
+        <p:spPr>
+          <a:xfrm>
+            <a:off x="368875" y="3024900"/>
+            <a:ext cx="3745924" cy="1384995"/>
+          </a:xfrm>
+          <a:prstGeom prst="rect">
+            <a:avLst/>
+          </a:prstGeom>
+          <a:noFill/>
+        </p:spPr>
+        <p:txBody>
+          <a:bodyPr wrap="square" rtlCol="0">
+            <a:spAutoFit/>
+          </a:bodyPr>
+          <a:lstStyle/>
+          <a:p>
+            <a:r>
+              <a:rPr lang="ru-RU" dirty="0">
+                <a:latin typeface="Times New Roman" panose="02020603050405020304" pitchFamily="18" charset="0"/>
+                <a:cs typeface="Times New Roman" panose="02020603050405020304" pitchFamily="18" charset="0"/>
+              </a:rPr>
+              <a:t>Покупка выполняется, если:</a:t>
+            </a:r>
+          </a:p>
+          <a:p>
+            <a:pPr marL="342900" indent="-342900">
+              <a:buFont typeface="+mj-lt"/>
+              <a:buAutoNum type="arabicPeriod"/>
+            </a:pPr>
+            <a:r>
+              <a:rPr lang="ru-RU" dirty="0">
+                <a:latin typeface="Times New Roman" panose="02020603050405020304" pitchFamily="18" charset="0"/>
+                <a:cs typeface="Times New Roman" panose="02020603050405020304" pitchFamily="18" charset="0"/>
+              </a:rPr>
+              <a:t>Прогноз входа выше порога;</a:t>
+            </a:r>
+          </a:p>
+          <a:p>
+            <a:pPr marL="342900" indent="-342900">
+              <a:buFont typeface="+mj-lt"/>
+              <a:buAutoNum type="arabicPeriod"/>
+            </a:pPr>
+            <a:r>
+              <a:rPr lang="ru-RU" dirty="0">
+                <a:latin typeface="Times New Roman" panose="02020603050405020304" pitchFamily="18" charset="0"/>
+                <a:cs typeface="Times New Roman" panose="02020603050405020304" pitchFamily="18" charset="0"/>
+              </a:rPr>
+              <a:t>Ожидаемая чистая доходность после издержек положительная;</a:t>
+            </a:r>
+          </a:p>
+          <a:p>
+            <a:pPr marL="342900" indent="-342900">
+              <a:buFont typeface="+mj-lt"/>
+              <a:buAutoNum type="arabicPeriod"/>
+            </a:pPr>
+            <a:r>
+              <a:rPr lang="ru-RU" dirty="0">
+                <a:latin typeface="Times New Roman" panose="02020603050405020304" pitchFamily="18" charset="0"/>
+                <a:cs typeface="Times New Roman" panose="02020603050405020304" pitchFamily="18" charset="0"/>
+              </a:rPr>
+              <a:t>Не нарушены ограничения по капиталу и числу позиций.</a:t>
+            </a:r>
+          </a:p>
+        </p:txBody>
+      </p:sp>
+      <p:sp>
+        <p:nvSpPr>
+          <p:cNvPr id="2" name="Номер слайда 1">
+            <a:extLst>
+              <a:ext uri="{FF2B5EF4-FFF2-40B4-BE49-F238E27FC236}">
+                <a16:creationId xmlns:a16="http://schemas.microsoft.com/office/drawing/2014/main" id="{BB31E7D5-67C9-3255-2463-94EBCBAB4CCF}"/>
+              </a:ext>
+            </a:extLst>
+          </p:cNvPr>
+          <p:cNvSpPr>
+            <a:spLocks noGrp="1"/>
+          </p:cNvSpPr>
+          <p:nvPr>
+            <p:ph type="sldNum" idx="12"/>
+          </p:nvPr>
+        </p:nvSpPr>
+        <p:spPr/>
+        <p:txBody>
+          <a:bodyPr/>
+          <a:lstStyle/>
+          <a:p>
+            <a:pPr marL="0" lvl="0" indent="0" algn="r" rtl="0">
+              <a:spcBef>
+                <a:spcPts val="0"/>
+              </a:spcBef>
+              <a:spcAft>
+                <a:spcPts val="0"/>
+              </a:spcAft>
+              <a:buNone/>
+            </a:pPr>
+            <a:fld id="{00000000-1234-1234-1234-123412341234}" type="slidenum">
+              <a:rPr lang="ru" smtClean="0">
+                <a:latin typeface="Times New Roman" panose="02020603050405020304" pitchFamily="18" charset="0"/>
+                <a:cs typeface="Times New Roman" panose="02020603050405020304" pitchFamily="18" charset="0"/>
+              </a:rPr>
+              <a:t>7</a:t>
+            </a:fld>
+            <a:endParaRPr lang="ru">
+              <a:latin typeface="Times New Roman" panose="02020603050405020304" pitchFamily="18" charset="0"/>
+              <a:cs typeface="Times New Roman" panose="02020603050405020304" pitchFamily="18" charset="0"/>
+            </a:endParaRPr>
+          </a:p>
+        </p:txBody>
+      </p:sp>
     </p:spTree>
+    <p:extLst>
+      <p:ext uri="{BB962C8B-B14F-4D97-AF65-F5344CB8AC3E}">
+        <p14:creationId xmlns:p14="http://schemas.microsoft.com/office/powerpoint/2010/main" val="1763201188"/>
+      </p:ext>
+    </p:extLst>
   </p:cSld>
   <p:clrMapOvr>
     <a:masterClrMapping/>
@@ -12452,6 +13848,292 @@
 </file>
 
 <file path=ppt/slides/slide8.xml><?xml version="1.0" encoding="utf-8"?>
+<p:sld xmlns:a="http://schemas.openxmlformats.org/drawingml/2006/main" xmlns:r="http://schemas.openxmlformats.org/officeDocument/2006/relationships" xmlns:p="http://schemas.openxmlformats.org/presentationml/2006/main">
+  <p:cSld>
+    <p:spTree>
+      <p:nvGrpSpPr>
+        <p:cNvPr id="1" name="Shape 90">
+          <a:extLst>
+            <a:ext uri="{FF2B5EF4-FFF2-40B4-BE49-F238E27FC236}">
+              <a16:creationId xmlns:a16="http://schemas.microsoft.com/office/drawing/2014/main" id="{2ECFBE8A-78D8-6862-2EE4-1111F47E6B17}"/>
+            </a:ext>
+          </a:extLst>
+        </p:cNvPr>
+        <p:cNvGrpSpPr/>
+        <p:nvPr/>
+      </p:nvGrpSpPr>
+      <p:grpSpPr>
+        <a:xfrm>
+          <a:off x="0" y="0"/>
+          <a:ext cx="0" cy="0"/>
+          <a:chOff x="0" y="0"/>
+          <a:chExt cx="0" cy="0"/>
+        </a:xfrm>
+      </p:grpSpPr>
+      <p:sp>
+        <p:nvSpPr>
+          <p:cNvPr id="91" name="Google Shape;91;p19">
+            <a:extLst>
+              <a:ext uri="{FF2B5EF4-FFF2-40B4-BE49-F238E27FC236}">
+                <a16:creationId xmlns:a16="http://schemas.microsoft.com/office/drawing/2014/main" id="{999E019B-5396-0992-D3A2-0E4171244076}"/>
+              </a:ext>
+            </a:extLst>
+          </p:cNvPr>
+          <p:cNvSpPr txBox="1">
+            <a:spLocks noGrp="1"/>
+          </p:cNvSpPr>
+          <p:nvPr>
+            <p:ph type="title"/>
+          </p:nvPr>
+        </p:nvSpPr>
+        <p:spPr>
+          <a:xfrm>
+            <a:off x="311700" y="445025"/>
+            <a:ext cx="8520600" cy="572700"/>
+          </a:xfrm>
+          <a:prstGeom prst="rect">
+            <a:avLst/>
+          </a:prstGeom>
+        </p:spPr>
+        <p:txBody>
+          <a:bodyPr spcFirstLastPara="1" wrap="square" lIns="91425" tIns="91425" rIns="91425" bIns="91425" anchor="t" anchorCtr="0">
+            <a:normAutofit fontScale="90000"/>
+          </a:bodyPr>
+          <a:lstStyle/>
+          <a:p>
+            <a:pPr lvl="0" algn="ctr"/>
+            <a:r>
+              <a:rPr lang="ru-RU" dirty="0">
+                <a:latin typeface="Times New Roman" panose="02020603050405020304" pitchFamily="18" charset="0"/>
+                <a:cs typeface="Times New Roman" panose="02020603050405020304" pitchFamily="18" charset="0"/>
+              </a:rPr>
+              <a:t>Прогнозы моделей и параметры исторического тестирования</a:t>
+            </a:r>
+            <a:endParaRPr dirty="0">
+              <a:latin typeface="Times New Roman" panose="02020603050405020304" pitchFamily="18" charset="0"/>
+              <a:cs typeface="Times New Roman" panose="02020603050405020304" pitchFamily="18" charset="0"/>
+            </a:endParaRPr>
+          </a:p>
+        </p:txBody>
+      </p:sp>
+      <p:sp>
+        <p:nvSpPr>
+          <p:cNvPr id="92" name="Google Shape;92;p19">
+            <a:extLst>
+              <a:ext uri="{FF2B5EF4-FFF2-40B4-BE49-F238E27FC236}">
+                <a16:creationId xmlns:a16="http://schemas.microsoft.com/office/drawing/2014/main" id="{CB5F7715-7052-B331-2A2E-4D9175529C14}"/>
+              </a:ext>
+            </a:extLst>
+          </p:cNvPr>
+          <p:cNvSpPr txBox="1">
+            <a:spLocks noGrp="1"/>
+          </p:cNvSpPr>
+          <p:nvPr>
+            <p:ph type="body" idx="1"/>
+          </p:nvPr>
+        </p:nvSpPr>
+        <p:spPr>
+          <a:xfrm>
+            <a:off x="311700" y="1152475"/>
+            <a:ext cx="8520600" cy="3416400"/>
+          </a:xfrm>
+          <a:prstGeom prst="rect">
+            <a:avLst/>
+          </a:prstGeom>
+        </p:spPr>
+        <p:txBody>
+          <a:bodyPr spcFirstLastPara="1" wrap="square" lIns="91425" tIns="91425" rIns="91425" bIns="91425" anchor="t" anchorCtr="0">
+            <a:normAutofit/>
+          </a:bodyPr>
+          <a:lstStyle/>
+          <a:p>
+            <a:pPr marL="0" lvl="0" indent="0" algn="l" rtl="0">
+              <a:spcBef>
+                <a:spcPts val="0"/>
+              </a:spcBef>
+              <a:spcAft>
+                <a:spcPts val="0"/>
+              </a:spcAft>
+              <a:buNone/>
+            </a:pPr>
+            <a:r>
+              <a:rPr lang="ru-RU" dirty="0">
+                <a:latin typeface="Times New Roman" panose="02020603050405020304" pitchFamily="18" charset="0"/>
+                <a:cs typeface="Times New Roman" panose="02020603050405020304" pitchFamily="18" charset="0"/>
+              </a:rPr>
+              <a:t> </a:t>
+            </a:r>
+            <a:endParaRPr dirty="0">
+              <a:latin typeface="Times New Roman" panose="02020603050405020304" pitchFamily="18" charset="0"/>
+              <a:cs typeface="Times New Roman" panose="02020603050405020304" pitchFamily="18" charset="0"/>
+            </a:endParaRPr>
+          </a:p>
+        </p:txBody>
+      </p:sp>
+      <p:pic>
+        <p:nvPicPr>
+          <p:cNvPr id="9" name="Рисунок 8" descr="PlantUML diagram">
+            <a:extLst>
+              <a:ext uri="{FF2B5EF4-FFF2-40B4-BE49-F238E27FC236}">
+                <a16:creationId xmlns:a16="http://schemas.microsoft.com/office/drawing/2014/main" id="{21B34CED-BCB9-EA8D-0F9D-0EB4DD32CA05}"/>
+              </a:ext>
+            </a:extLst>
+          </p:cNvPr>
+          <p:cNvPicPr>
+            <a:picLocks noChangeAspect="1"/>
+          </p:cNvPicPr>
+          <p:nvPr/>
+        </p:nvPicPr>
+        <p:blipFill>
+          <a:blip r:embed="rId3"/>
+          <a:stretch>
+            <a:fillRect/>
+          </a:stretch>
+        </p:blipFill>
+        <p:spPr>
+          <a:xfrm>
+            <a:off x="0" y="1323925"/>
+            <a:ext cx="9144000" cy="2340025"/>
+          </a:xfrm>
+          <a:prstGeom prst="rect">
+            <a:avLst/>
+          </a:prstGeom>
+        </p:spPr>
+      </p:pic>
+      <p:sp>
+        <p:nvSpPr>
+          <p:cNvPr id="13" name="TextBox 12">
+            <a:extLst>
+              <a:ext uri="{FF2B5EF4-FFF2-40B4-BE49-F238E27FC236}">
+                <a16:creationId xmlns:a16="http://schemas.microsoft.com/office/drawing/2014/main" id="{96F3F427-9A41-AC7C-74A1-4C461FB8BE12}"/>
+              </a:ext>
+            </a:extLst>
+          </p:cNvPr>
+          <p:cNvSpPr txBox="1"/>
+          <p:nvPr/>
+        </p:nvSpPr>
+        <p:spPr>
+          <a:xfrm>
+            <a:off x="311700" y="3281237"/>
+            <a:ext cx="3441150" cy="954107"/>
+          </a:xfrm>
+          <a:prstGeom prst="rect">
+            <a:avLst/>
+          </a:prstGeom>
+          <a:noFill/>
+        </p:spPr>
+        <p:txBody>
+          <a:bodyPr wrap="square">
+            <a:spAutoFit/>
+          </a:bodyPr>
+          <a:lstStyle/>
+          <a:p>
+            <a:r>
+              <a:rPr lang="ru-RU" dirty="0">
+                <a:latin typeface="Times New Roman" panose="02020603050405020304" pitchFamily="18" charset="0"/>
+                <a:cs typeface="Times New Roman" panose="02020603050405020304" pitchFamily="18" charset="0"/>
+              </a:rPr>
+              <a:t>Модели предсказывают не торговое действие, а ожидаемую доходность для входа и удержания позиции на горизонтах от 1 до 15 минут.</a:t>
+            </a:r>
+          </a:p>
+        </p:txBody>
+      </p:sp>
+      <p:sp>
+        <p:nvSpPr>
+          <p:cNvPr id="2" name="Номер слайда 1">
+            <a:extLst>
+              <a:ext uri="{FF2B5EF4-FFF2-40B4-BE49-F238E27FC236}">
+                <a16:creationId xmlns:a16="http://schemas.microsoft.com/office/drawing/2014/main" id="{2A9FD7BC-3BDA-42D9-2031-F15A8EA26E1C}"/>
+              </a:ext>
+            </a:extLst>
+          </p:cNvPr>
+          <p:cNvSpPr>
+            <a:spLocks noGrp="1"/>
+          </p:cNvSpPr>
+          <p:nvPr>
+            <p:ph type="sldNum" idx="12"/>
+          </p:nvPr>
+        </p:nvSpPr>
+        <p:spPr/>
+        <p:txBody>
+          <a:bodyPr/>
+          <a:lstStyle/>
+          <a:p>
+            <a:pPr marL="0" lvl="0" indent="0" algn="r" rtl="0">
+              <a:spcBef>
+                <a:spcPts val="0"/>
+              </a:spcBef>
+              <a:spcAft>
+                <a:spcPts val="0"/>
+              </a:spcAft>
+              <a:buNone/>
+            </a:pPr>
+            <a:fld id="{00000000-1234-1234-1234-123412341234}" type="slidenum">
+              <a:rPr lang="ru" smtClean="0">
+                <a:latin typeface="Times New Roman" panose="02020603050405020304" pitchFamily="18" charset="0"/>
+                <a:cs typeface="Times New Roman" panose="02020603050405020304" pitchFamily="18" charset="0"/>
+              </a:rPr>
+              <a:t>8</a:t>
+            </a:fld>
+            <a:endParaRPr lang="ru">
+              <a:latin typeface="Times New Roman" panose="02020603050405020304" pitchFamily="18" charset="0"/>
+              <a:cs typeface="Times New Roman" panose="02020603050405020304" pitchFamily="18" charset="0"/>
+            </a:endParaRPr>
+          </a:p>
+        </p:txBody>
+      </p:sp>
+      <p:sp>
+        <p:nvSpPr>
+          <p:cNvPr id="4" name="TextBox 3">
+            <a:extLst>
+              <a:ext uri="{FF2B5EF4-FFF2-40B4-BE49-F238E27FC236}">
+                <a16:creationId xmlns:a16="http://schemas.microsoft.com/office/drawing/2014/main" id="{0725DCBC-34CE-5961-A560-EBEE83F700C2}"/>
+              </a:ext>
+            </a:extLst>
+          </p:cNvPr>
+          <p:cNvSpPr txBox="1"/>
+          <p:nvPr/>
+        </p:nvSpPr>
+        <p:spPr>
+          <a:xfrm>
+            <a:off x="5235302" y="3281238"/>
+            <a:ext cx="3596998" cy="954107"/>
+          </a:xfrm>
+          <a:prstGeom prst="rect">
+            <a:avLst/>
+          </a:prstGeom>
+          <a:noFill/>
+        </p:spPr>
+        <p:txBody>
+          <a:bodyPr wrap="square">
+            <a:spAutoFit/>
+          </a:bodyPr>
+          <a:lstStyle/>
+          <a:p>
+            <a:r>
+              <a:rPr lang="ru-RU" dirty="0">
+                <a:latin typeface="Times New Roman" panose="02020603050405020304" pitchFamily="18" charset="0"/>
+                <a:cs typeface="Times New Roman" panose="02020603050405020304" pitchFamily="18" charset="0"/>
+              </a:rPr>
+              <a:t>Решение о покупке, удержании или продаже принимает отдельный модуль, который учитывает прогноз, порог входа, число позиций, издержки и лимит удержания.</a:t>
+            </a:r>
+          </a:p>
+        </p:txBody>
+      </p:sp>
+    </p:spTree>
+    <p:extLst>
+      <p:ext uri="{BB962C8B-B14F-4D97-AF65-F5344CB8AC3E}">
+        <p14:creationId xmlns:p14="http://schemas.microsoft.com/office/powerpoint/2010/main" val="3998160571"/>
+      </p:ext>
+    </p:extLst>
+  </p:cSld>
+  <p:clrMapOvr>
+    <a:masterClrMapping/>
+  </p:clrMapOvr>
+</p:sld>
+</file>
+
+<file path=ppt/slides/slide9.xml><?xml version="1.0" encoding="utf-8"?>
 <p:sld xmlns:a="http://schemas.openxmlformats.org/drawingml/2006/main" xmlns:r="http://schemas.openxmlformats.org/officeDocument/2006/relationships" xmlns:p="http://schemas.openxmlformats.org/presentationml/2006/main">
   <p:cSld>
     <p:spTree>
@@ -12493,7 +14175,7 @@
           </a:bodyPr>
           <a:lstStyle/>
           <a:p>
-            <a:pPr marL="0" lvl="0" indent="0" algn="l" rtl="0">
+            <a:pPr marL="0" lvl="0" indent="0" algn="ctr" rtl="0">
               <a:spcBef>
                 <a:spcPts val="0"/>
               </a:spcBef>
@@ -12503,10 +14185,22 @@
               <a:buNone/>
             </a:pPr>
             <a:r>
-              <a:rPr lang="ru"/>
-              <a:t>Результаты тестирования программной системы</a:t>
+              <a:rPr lang="ru" dirty="0">
+                <a:solidFill>
+                  <a:schemeClr val="tx1"/>
+                </a:solidFill>
+                <a:latin typeface="Times New Roman" panose="02020603050405020304" pitchFamily="18" charset="0"/>
+                <a:cs typeface="Times New Roman" panose="02020603050405020304" pitchFamily="18" charset="0"/>
+              </a:rPr>
+              <a:t>Результаты торговой стратегии</a:t>
             </a:r>
-            <a:endParaRPr/>
+            <a:endParaRPr dirty="0">
+              <a:solidFill>
+                <a:schemeClr val="tx1"/>
+              </a:solidFill>
+              <a:latin typeface="Times New Roman" panose="02020603050405020304" pitchFamily="18" charset="0"/>
+              <a:cs typeface="Times New Roman" panose="02020603050405020304" pitchFamily="18" charset="0"/>
+            </a:endParaRPr>
           </a:p>
         </p:txBody>
       </p:sp>
@@ -12537,138 +14231,79 @@
           <a:p>
             <a:pPr marL="0" lvl="0" indent="0" algn="l" rtl="0">
               <a:spcBef>
-                <a:spcPts val="0"/>
-              </a:spcBef>
-              <a:spcAft>
-                <a:spcPts val="0"/>
+                <a:spcPts val="1200"/>
+              </a:spcBef>
+              <a:spcAft>
+                <a:spcPts val="1200"/>
               </a:spcAft>
               <a:buNone/>
             </a:pPr>
             <a:r>
-              <a:rPr lang="ru"/>
-              <a:t>Графики и результаты экспериментов (скриншоты, изображения)</a:t>
+              <a:rPr lang="ru-RU" dirty="0">
+                <a:latin typeface="Times New Roman" panose="02020603050405020304" pitchFamily="18" charset="0"/>
+                <a:cs typeface="Times New Roman" panose="02020603050405020304" pitchFamily="18" charset="0"/>
+              </a:rPr>
+              <a:t> </a:t>
             </a:r>
-            <a:endParaRPr/>
-          </a:p>
-          <a:p>
-            <a:pPr marL="0" lvl="0" indent="0" algn="l" rtl="0">
-              <a:spcBef>
-                <a:spcPts val="1200"/>
-              </a:spcBef>
-              <a:spcAft>
-                <a:spcPts val="0"/>
-              </a:spcAft>
-              <a:buNone/>
-            </a:pPr>
-            <a:endParaRPr/>
-          </a:p>
-          <a:p>
-            <a:pPr marL="0" lvl="0" indent="0" algn="l" rtl="0">
-              <a:spcBef>
-                <a:spcPts val="1200"/>
-              </a:spcBef>
-              <a:spcAft>
-                <a:spcPts val="1200"/>
-              </a:spcAft>
-              <a:buNone/>
-            </a:pPr>
-            <a:endParaRPr/>
+            <a:endParaRPr dirty="0">
+              <a:latin typeface="Times New Roman" panose="02020603050405020304" pitchFamily="18" charset="0"/>
+              <a:cs typeface="Times New Roman" panose="02020603050405020304" pitchFamily="18" charset="0"/>
+            </a:endParaRPr>
           </a:p>
         </p:txBody>
       </p:sp>
-    </p:spTree>
-  </p:cSld>
-  <p:clrMapOvr>
-    <a:masterClrMapping/>
-  </p:clrMapOvr>
-</p:sld>
-</file>
-
-<file path=ppt/slides/slide9.xml><?xml version="1.0" encoding="utf-8"?>
-<p:sld xmlns:a="http://schemas.openxmlformats.org/drawingml/2006/main" xmlns:r="http://schemas.openxmlformats.org/officeDocument/2006/relationships" xmlns:p="http://schemas.openxmlformats.org/presentationml/2006/main">
-  <p:cSld>
-    <p:spTree>
-      <p:nvGrpSpPr>
-        <p:cNvPr id="1" name="Shape 102"/>
-        <p:cNvGrpSpPr/>
-        <p:nvPr/>
-      </p:nvGrpSpPr>
-      <p:grpSpPr>
-        <a:xfrm>
-          <a:off x="0" y="0"/>
-          <a:ext cx="0" cy="0"/>
-          <a:chOff x="0" y="0"/>
-          <a:chExt cx="0" cy="0"/>
-        </a:xfrm>
-      </p:grpSpPr>
-      <p:sp>
-        <p:nvSpPr>
-          <p:cNvPr id="103" name="Google Shape;103;p21"/>
-          <p:cNvSpPr txBox="1">
-            <a:spLocks noGrp="1"/>
-          </p:cNvSpPr>
-          <p:nvPr>
-            <p:ph type="title"/>
-          </p:nvPr>
-        </p:nvSpPr>
+      <p:pic>
+        <p:nvPicPr>
+          <p:cNvPr id="5" name="Рисунок 4">
+            <a:extLst>
+              <a:ext uri="{FF2B5EF4-FFF2-40B4-BE49-F238E27FC236}">
+                <a16:creationId xmlns:a16="http://schemas.microsoft.com/office/drawing/2014/main" id="{E375E662-A8F5-EFD1-7E0D-EE48A08C5C33}"/>
+              </a:ext>
+            </a:extLst>
+          </p:cNvPr>
+          <p:cNvPicPr>
+            <a:picLocks noChangeAspect="1"/>
+          </p:cNvPicPr>
+          <p:nvPr/>
+        </p:nvPicPr>
+        <p:blipFill>
+          <a:blip r:embed="rId3"/>
+          <a:stretch>
+            <a:fillRect/>
+          </a:stretch>
+        </p:blipFill>
         <p:spPr>
           <a:xfrm>
-            <a:off x="311700" y="445025"/>
-            <a:ext cx="8520600" cy="572700"/>
+            <a:off x="904644" y="1017725"/>
+            <a:ext cx="7334711" cy="4125775"/>
           </a:xfrm>
           <a:prstGeom prst="rect">
             <a:avLst/>
           </a:prstGeom>
         </p:spPr>
-        <p:txBody>
-          <a:bodyPr spcFirstLastPara="1" wrap="square" lIns="91425" tIns="91425" rIns="91425" bIns="91425" anchor="t" anchorCtr="0">
-            <a:normAutofit fontScale="90000"/>
-          </a:bodyPr>
-          <a:lstStyle/>
-          <a:p>
-            <a:pPr marL="0" lvl="0" indent="0" algn="l" rtl="0">
-              <a:spcBef>
-                <a:spcPts val="0"/>
-              </a:spcBef>
-              <a:spcAft>
-                <a:spcPts val="0"/>
-              </a:spcAft>
-              <a:buNone/>
-            </a:pPr>
-            <a:r>
-              <a:rPr lang="ru"/>
-              <a:t>Результаты работы</a:t>
-            </a:r>
-            <a:endParaRPr/>
-          </a:p>
-        </p:txBody>
-      </p:sp>
+      </p:pic>
       <p:sp>
         <p:nvSpPr>
-          <p:cNvPr id="104" name="Google Shape;104;p21"/>
-          <p:cNvSpPr txBox="1">
+          <p:cNvPr id="2" name="Номер слайда 1">
+            <a:extLst>
+              <a:ext uri="{FF2B5EF4-FFF2-40B4-BE49-F238E27FC236}">
+                <a16:creationId xmlns:a16="http://schemas.microsoft.com/office/drawing/2014/main" id="{7AAC3570-04C9-268F-D629-AF60B902A9E3}"/>
+              </a:ext>
+            </a:extLst>
+          </p:cNvPr>
+          <p:cNvSpPr>
             <a:spLocks noGrp="1"/>
           </p:cNvSpPr>
           <p:nvPr>
-            <p:ph type="body" idx="1"/>
+            <p:ph type="sldNum" idx="12"/>
           </p:nvPr>
         </p:nvSpPr>
-        <p:spPr>
-          <a:xfrm>
-            <a:off x="311700" y="1152475"/>
-            <a:ext cx="8520600" cy="3416400"/>
-          </a:xfrm>
-          <a:prstGeom prst="rect">
-            <a:avLst/>
-          </a:prstGeom>
-        </p:spPr>
+        <p:spPr/>
         <p:txBody>
-          <a:bodyPr spcFirstLastPara="1" wrap="square" lIns="91425" tIns="91425" rIns="91425" bIns="91425" anchor="t" anchorCtr="0">
-            <a:normAutofit/>
-          </a:bodyPr>
+          <a:bodyPr/>
           <a:lstStyle/>
           <a:p>
-            <a:pPr marL="0" lvl="0" indent="0" algn="l" rtl="0">
+            <a:pPr marL="0" lvl="0" indent="0" algn="r" rtl="0">
               <a:spcBef>
                 <a:spcPts val="0"/>
               </a:spcBef>
@@ -12677,88 +14312,17 @@
               </a:spcAft>
               <a:buNone/>
             </a:pPr>
-            <a:r>
-              <a:rPr lang="ru"/>
-              <a:t>-предложена методика</a:t>
-            </a:r>
-            <a:endParaRPr/>
-          </a:p>
-          <a:p>
-            <a:pPr marL="0" lvl="0" indent="0" algn="l" rtl="0">
-              <a:spcBef>
-                <a:spcPts val="1200"/>
-              </a:spcBef>
-              <a:spcAft>
-                <a:spcPts val="0"/>
-              </a:spcAft>
-              <a:buNone/>
-            </a:pPr>
-            <a:r>
-              <a:rPr lang="ru"/>
-              <a:t>-разработана программная система</a:t>
-            </a:r>
-            <a:endParaRPr/>
-          </a:p>
-          <a:p>
-            <a:pPr marL="0" lvl="0" indent="0" algn="l" rtl="0">
-              <a:spcBef>
-                <a:spcPts val="1200"/>
-              </a:spcBef>
-              <a:spcAft>
-                <a:spcPts val="0"/>
-              </a:spcAft>
-              <a:buNone/>
-            </a:pPr>
-            <a:endParaRPr/>
-          </a:p>
-          <a:p>
-            <a:pPr marL="0" lvl="0" indent="0" algn="l" rtl="0">
-              <a:spcBef>
-                <a:spcPts val="1200"/>
-              </a:spcBef>
-              <a:spcAft>
-                <a:spcPts val="0"/>
-              </a:spcAft>
-              <a:buNone/>
-            </a:pPr>
-            <a:r>
-              <a:rPr lang="ru"/>
-              <a:t>Этот список должен быть в согласии со списком задач.</a:t>
-            </a:r>
-            <a:endParaRPr/>
-          </a:p>
-          <a:p>
-            <a:pPr marL="0" lvl="0" indent="0" algn="l" rtl="0">
-              <a:spcBef>
-                <a:spcPts val="1200"/>
-              </a:spcBef>
-              <a:spcAft>
-                <a:spcPts val="0"/>
-              </a:spcAft>
-              <a:buNone/>
-            </a:pPr>
-            <a:endParaRPr/>
-          </a:p>
-          <a:p>
-            <a:pPr marL="0" lvl="0" indent="0" algn="l" rtl="0">
-              <a:spcBef>
-                <a:spcPts val="1200"/>
-              </a:spcBef>
-              <a:spcAft>
-                <a:spcPts val="1200"/>
-              </a:spcAft>
-              <a:buClr>
-                <a:schemeClr val="dk1"/>
-              </a:buClr>
-              <a:buSzPts val="1100"/>
-              <a:buFont typeface="Arial"/>
-              <a:buNone/>
-            </a:pPr>
-            <a:r>
-              <a:rPr lang="ru"/>
-              <a:t>Резюмируем устно, что задачи работы выполнены и цель работы достигнута. Содержимое слайда не зачитывается.</a:t>
-            </a:r>
-            <a:endParaRPr/>
+            <a:fld id="{00000000-1234-1234-1234-123412341234}" type="slidenum">
+              <a:rPr lang="ru" smtClean="0">
+                <a:latin typeface="Times New Roman" panose="02020603050405020304" pitchFamily="18" charset="0"/>
+                <a:cs typeface="Times New Roman" panose="02020603050405020304" pitchFamily="18" charset="0"/>
+              </a:rPr>
+              <a:t>9</a:t>
+            </a:fld>
+            <a:endParaRPr lang="ru">
+              <a:latin typeface="Times New Roman" panose="02020603050405020304" pitchFamily="18" charset="0"/>
+              <a:cs typeface="Times New Roman" panose="02020603050405020304" pitchFamily="18" charset="0"/>
+            </a:endParaRPr>
           </a:p>
         </p:txBody>
       </p:sp>

--- a/Презентация.pptx
+++ b/Презентация.pptx
@@ -11,7 +11,7 @@
     <p:sldId id="256" r:id="rId2"/>
     <p:sldId id="257" r:id="rId3"/>
     <p:sldId id="258" r:id="rId4"/>
-    <p:sldId id="259" r:id="rId5"/>
+    <p:sldId id="269" r:id="rId5"/>
     <p:sldId id="260" r:id="rId6"/>
     <p:sldId id="261" r:id="rId7"/>
     <p:sldId id="267" r:id="rId8"/>
@@ -1492,7 +1492,13 @@
   <p:cSld>
     <p:spTree>
       <p:nvGrpSpPr>
-        <p:cNvPr id="1" name="Shape 69"/>
+        <p:cNvPr id="1" name="Shape 69">
+          <a:extLst>
+            <a:ext uri="{FF2B5EF4-FFF2-40B4-BE49-F238E27FC236}">
+              <a16:creationId xmlns:a16="http://schemas.microsoft.com/office/drawing/2014/main" id="{A380101B-FF3D-29F6-3DFD-0EB9BFAB2404}"/>
+            </a:ext>
+          </a:extLst>
+        </p:cNvPr>
         <p:cNvGrpSpPr/>
         <p:nvPr/>
       </p:nvGrpSpPr>
@@ -1506,7 +1512,13 @@
       </p:grpSpPr>
       <p:sp>
         <p:nvSpPr>
-          <p:cNvPr id="70" name="Google Shape;70;gdabd55fb20_0_15:notes"/>
+          <p:cNvPr id="70" name="Google Shape;70;gdabd55fb20_0_15:notes">
+            <a:extLst>
+              <a:ext uri="{FF2B5EF4-FFF2-40B4-BE49-F238E27FC236}">
+                <a16:creationId xmlns:a16="http://schemas.microsoft.com/office/drawing/2014/main" id="{0AAAA66E-7A7F-11BB-F046-E59A60D6336E}"/>
+              </a:ext>
+            </a:extLst>
+          </p:cNvPr>
           <p:cNvSpPr>
             <a:spLocks noGrp="1" noRot="1" noChangeAspect="1"/>
           </p:cNvSpPr>
@@ -1554,7 +1566,13 @@
       </p:sp>
       <p:sp>
         <p:nvSpPr>
-          <p:cNvPr id="71" name="Google Shape;71;gdabd55fb20_0_15:notes"/>
+          <p:cNvPr id="71" name="Google Shape;71;gdabd55fb20_0_15:notes">
+            <a:extLst>
+              <a:ext uri="{FF2B5EF4-FFF2-40B4-BE49-F238E27FC236}">
+                <a16:creationId xmlns:a16="http://schemas.microsoft.com/office/drawing/2014/main" id="{A2D2D544-68BD-D51F-7B28-DBADE64275E1}"/>
+              </a:ext>
+            </a:extLst>
+          </p:cNvPr>
           <p:cNvSpPr txBox="1">
             <a:spLocks noGrp="1"/>
           </p:cNvSpPr>
@@ -1625,6 +1643,11 @@
         </p:txBody>
       </p:sp>
     </p:spTree>
+    <p:extLst>
+      <p:ext uri="{BB962C8B-B14F-4D97-AF65-F5344CB8AC3E}">
+        <p14:creationId xmlns:p14="http://schemas.microsoft.com/office/powerpoint/2010/main" val="2415327873"/>
+      </p:ext>
+    </p:extLst>
   </p:cSld>
   <p:clrMapOvr>
     <a:masterClrMapping/>
@@ -7386,7 +7409,7 @@
                 <a:latin typeface="Times New Roman" panose="02020603050405020304" pitchFamily="18" charset="0"/>
                 <a:cs typeface="Times New Roman" panose="02020603050405020304" pitchFamily="18" charset="0"/>
               </a:rPr>
-              <a:t>Объяснение поведения стратегии</a:t>
+              <a:t>Графики прибыльности моделей</a:t>
             </a:r>
             <a:endParaRPr dirty="0">
               <a:solidFill>
@@ -7446,36 +7469,6 @@
           </a:p>
         </p:txBody>
       </p:sp>
-      <p:pic>
-        <p:nvPicPr>
-          <p:cNvPr id="3" name="Рисунок 2">
-            <a:extLst>
-              <a:ext uri="{FF2B5EF4-FFF2-40B4-BE49-F238E27FC236}">
-                <a16:creationId xmlns:a16="http://schemas.microsoft.com/office/drawing/2014/main" id="{0191E914-1929-1446-2525-F6209DA055A0}"/>
-              </a:ext>
-            </a:extLst>
-          </p:cNvPr>
-          <p:cNvPicPr>
-            <a:picLocks noChangeAspect="1"/>
-          </p:cNvPicPr>
-          <p:nvPr/>
-        </p:nvPicPr>
-        <p:blipFill>
-          <a:blip r:embed="rId3"/>
-          <a:stretch>
-            <a:fillRect/>
-          </a:stretch>
-        </p:blipFill>
-        <p:spPr>
-          <a:xfrm>
-            <a:off x="904644" y="1017725"/>
-            <a:ext cx="7334711" cy="4125775"/>
-          </a:xfrm>
-          <a:prstGeom prst="rect">
-            <a:avLst/>
-          </a:prstGeom>
-        </p:spPr>
-      </p:pic>
       <p:sp>
         <p:nvSpPr>
           <p:cNvPr id="2" name="Номер слайда 1">
@@ -7514,6 +7507,36 @@
           </a:p>
         </p:txBody>
       </p:sp>
+      <p:pic>
+        <p:nvPicPr>
+          <p:cNvPr id="5" name="Рисунок 4">
+            <a:extLst>
+              <a:ext uri="{FF2B5EF4-FFF2-40B4-BE49-F238E27FC236}">
+                <a16:creationId xmlns:a16="http://schemas.microsoft.com/office/drawing/2014/main" id="{477C0450-9A14-9703-B562-B1D30997FC30}"/>
+              </a:ext>
+            </a:extLst>
+          </p:cNvPr>
+          <p:cNvPicPr>
+            <a:picLocks noChangeAspect="1"/>
+          </p:cNvPicPr>
+          <p:nvPr/>
+        </p:nvPicPr>
+        <p:blipFill>
+          <a:blip r:embed="rId3"/>
+          <a:stretch>
+            <a:fillRect/>
+          </a:stretch>
+        </p:blipFill>
+        <p:spPr>
+          <a:xfrm>
+            <a:off x="883227" y="1017725"/>
+            <a:ext cx="7377545" cy="4098636"/>
+          </a:xfrm>
+          <a:prstGeom prst="rect">
+            <a:avLst/>
+          </a:prstGeom>
+        </p:spPr>
+      </p:pic>
     </p:spTree>
     <p:extLst>
       <p:ext uri="{BB962C8B-B14F-4D97-AF65-F5344CB8AC3E}">
@@ -9608,7 +9631,13 @@
   <p:cSld>
     <p:spTree>
       <p:nvGrpSpPr>
-        <p:cNvPr id="1" name="Shape 72"/>
+        <p:cNvPr id="1" name="Shape 72">
+          <a:extLst>
+            <a:ext uri="{FF2B5EF4-FFF2-40B4-BE49-F238E27FC236}">
+              <a16:creationId xmlns:a16="http://schemas.microsoft.com/office/drawing/2014/main" id="{39C047DD-5203-4C43-5A2C-CE3A00FF5201}"/>
+            </a:ext>
+          </a:extLst>
+        </p:cNvPr>
         <p:cNvGrpSpPr/>
         <p:nvPr/>
       </p:nvGrpSpPr>
@@ -9622,7 +9651,13 @@
       </p:grpSpPr>
       <p:sp>
         <p:nvSpPr>
-          <p:cNvPr id="73" name="Google Shape;73;p16"/>
+          <p:cNvPr id="73" name="Google Shape;73;p16">
+            <a:extLst>
+              <a:ext uri="{FF2B5EF4-FFF2-40B4-BE49-F238E27FC236}">
+                <a16:creationId xmlns:a16="http://schemas.microsoft.com/office/drawing/2014/main" id="{58903E45-3EAE-7775-8C5F-032778361B99}"/>
+              </a:ext>
+            </a:extLst>
+          </p:cNvPr>
           <p:cNvSpPr txBox="1">
             <a:spLocks noGrp="1"/>
           </p:cNvSpPr>
@@ -9673,7 +9708,7 @@
           <p:cNvPr id="3" name="Таблица 2">
             <a:extLst>
               <a:ext uri="{FF2B5EF4-FFF2-40B4-BE49-F238E27FC236}">
-                <a16:creationId xmlns:a16="http://schemas.microsoft.com/office/drawing/2014/main" id="{04DDF881-92D4-FC75-1DCF-BC41D3450630}"/>
+                <a16:creationId xmlns:a16="http://schemas.microsoft.com/office/drawing/2014/main" id="{ACA3AA35-A51E-AFB7-0E02-07C62F9A773B}"/>
               </a:ext>
             </a:extLst>
           </p:cNvPr>
@@ -9683,14 +9718,14 @@
           <p:nvPr>
             <p:extLst>
               <p:ext uri="{D42A27DB-BD31-4B8C-83A1-F6EECF244321}">
-                <p14:modId xmlns:p14="http://schemas.microsoft.com/office/powerpoint/2010/main" val="1581128863"/>
+                <p14:modId xmlns:p14="http://schemas.microsoft.com/office/powerpoint/2010/main" val="4068570933"/>
               </p:ext>
             </p:extLst>
           </p:nvPr>
         </p:nvGraphicFramePr>
         <p:xfrm>
           <a:off x="352840" y="1348155"/>
-          <a:ext cx="8366440" cy="2731456"/>
+          <a:ext cx="8366440" cy="2499360"/>
         </p:xfrm>
         <a:graphic>
           <a:graphicData uri="http://schemas.openxmlformats.org/drawingml/2006/table">
@@ -9699,35 +9734,35 @@
                 <a:tableStyleId>{5C22544A-7EE6-4342-B048-85BDC9FD1C3A}</a:tableStyleId>
               </a:tblPr>
               <a:tblGrid>
-                <a:gridCol w="1468121">
+                <a:gridCol w="1401417">
                   <a:extLst>
                     <a:ext uri="{9D8B030D-6E8A-4147-A177-3AD203B41FA5}">
                       <a16:colId xmlns:a16="http://schemas.microsoft.com/office/drawing/2014/main" val="2557347617"/>
                     </a:ext>
                   </a:extLst>
                 </a:gridCol>
-                <a:gridCol w="1056133">
+                <a:gridCol w="1122837">
                   <a:extLst>
                     <a:ext uri="{9D8B030D-6E8A-4147-A177-3AD203B41FA5}">
                       <a16:colId xmlns:a16="http://schemas.microsoft.com/office/drawing/2014/main" val="2319195195"/>
                     </a:ext>
                   </a:extLst>
                 </a:gridCol>
-                <a:gridCol w="1132596">
+                <a:gridCol w="1292371">
                   <a:extLst>
                     <a:ext uri="{9D8B030D-6E8A-4147-A177-3AD203B41FA5}">
                       <a16:colId xmlns:a16="http://schemas.microsoft.com/office/drawing/2014/main" val="100269759"/>
                     </a:ext>
                   </a:extLst>
                 </a:gridCol>
-                <a:gridCol w="1725085">
+                <a:gridCol w="1689652">
                   <a:extLst>
                     <a:ext uri="{9D8B030D-6E8A-4147-A177-3AD203B41FA5}">
                       <a16:colId xmlns:a16="http://schemas.microsoft.com/office/drawing/2014/main" val="1914388555"/>
                     </a:ext>
                   </a:extLst>
                 </a:gridCol>
-                <a:gridCol w="1633422">
+                <a:gridCol w="1509080">
                   <a:extLst>
                     <a:ext uri="{9D8B030D-6E8A-4147-A177-3AD203B41FA5}">
                       <a16:colId xmlns:a16="http://schemas.microsoft.com/office/drawing/2014/main" val="1650913469"/>
@@ -9754,7 +9789,7 @@
                           <a:latin typeface="Times New Roman" panose="02020603050405020304" pitchFamily="18" charset="0"/>
                           <a:cs typeface="Times New Roman" panose="02020603050405020304" pitchFamily="18" charset="0"/>
                         </a:rPr>
-                        <a:t>Средство</a:t>
+                        <a:t>Метод</a:t>
                       </a:r>
                     </a:p>
                   </a:txBody>
@@ -9767,83 +9802,11 @@
                     <a:p>
                       <a:pPr algn="ctr"/>
                       <a:r>
-                        <a:rPr lang="ru-RU" dirty="0">
+                        <a:rPr lang="ru-RU" dirty="0" err="1">
                           <a:latin typeface="Times New Roman" panose="02020603050405020304" pitchFamily="18" charset="0"/>
                           <a:cs typeface="Times New Roman" panose="02020603050405020304" pitchFamily="18" charset="0"/>
                         </a:rPr>
-                        <a:t>Простота освоения</a:t>
-                      </a:r>
-                    </a:p>
-                  </a:txBody>
-                  <a:tcPr anchor="ctr"/>
-                </a:tc>
-                <a:tc>
-                  <a:txBody>
-                    <a:bodyPr/>
-                    <a:lstStyle/>
-                    <a:p>
-                      <a:pPr algn="ctr"/>
-                      <a:r>
-                        <a:rPr lang="ru-RU" dirty="0">
-                          <a:latin typeface="Times New Roman" panose="02020603050405020304" pitchFamily="18" charset="0"/>
-                          <a:cs typeface="Times New Roman" panose="02020603050405020304" pitchFamily="18" charset="0"/>
-                        </a:rPr>
-                        <a:t>Гибкость настройки</a:t>
-                      </a:r>
-                    </a:p>
-                  </a:txBody>
-                  <a:tcPr anchor="ctr"/>
-                </a:tc>
-                <a:tc>
-                  <a:txBody>
-                    <a:bodyPr/>
-                    <a:lstStyle/>
-                    <a:p>
-                      <a:pPr algn="ctr"/>
-                      <a:r>
-                        <a:rPr lang="ru-RU" dirty="0">
-                          <a:latin typeface="Times New Roman" panose="02020603050405020304" pitchFamily="18" charset="0"/>
-                          <a:cs typeface="Times New Roman" panose="02020603050405020304" pitchFamily="18" charset="0"/>
-                        </a:rPr>
-                        <a:t>Интеграция с моделями ИИ</a:t>
-                      </a:r>
-                    </a:p>
-                  </a:txBody>
-                  <a:tcPr anchor="ctr"/>
-                </a:tc>
-                <a:tc>
-                  <a:txBody>
-                    <a:bodyPr/>
-                    <a:lstStyle/>
-                    <a:p>
-                      <a:pPr algn="ctr"/>
-                      <a:r>
-                        <a:rPr lang="ru-RU" dirty="0">
-                          <a:latin typeface="Times New Roman" panose="02020603050405020304" pitchFamily="18" charset="0"/>
-                          <a:cs typeface="Times New Roman" panose="02020603050405020304" pitchFamily="18" charset="0"/>
-                        </a:rPr>
-                        <a:t>Пригодность для </a:t>
-                      </a:r>
-                      <a:r>
-                        <a:rPr lang="en-US" dirty="0">
-                          <a:latin typeface="Times New Roman" panose="02020603050405020304" pitchFamily="18" charset="0"/>
-                          <a:cs typeface="Times New Roman" panose="02020603050405020304" pitchFamily="18" charset="0"/>
-                        </a:rPr>
-                        <a:t>ML-</a:t>
-                      </a:r>
-                      <a:r>
-                        <a:rPr lang="ru-RU" dirty="0">
-                          <a:latin typeface="Times New Roman" panose="02020603050405020304" pitchFamily="18" charset="0"/>
-                          <a:cs typeface="Times New Roman" panose="02020603050405020304" pitchFamily="18" charset="0"/>
-                        </a:rPr>
-                        <a:t>экспериментов на данных </a:t>
-                      </a:r>
-                      <a:r>
-                        <a:rPr lang="en-US" dirty="0">
-                          <a:latin typeface="Times New Roman" panose="02020603050405020304" pitchFamily="18" charset="0"/>
-                          <a:cs typeface="Times New Roman" panose="02020603050405020304" pitchFamily="18" charset="0"/>
-                        </a:rPr>
-                        <a:t>MOEX</a:t>
+                        <a:t>Интерпре-тируемость</a:t>
                       </a:r>
                       <a:endParaRPr lang="ru-RU" dirty="0">
                         <a:latin typeface="Times New Roman" panose="02020603050405020304" pitchFamily="18" charset="0"/>
@@ -9864,7 +9827,58 @@
                           <a:latin typeface="Times New Roman" panose="02020603050405020304" pitchFamily="18" charset="0"/>
                           <a:cs typeface="Times New Roman" panose="02020603050405020304" pitchFamily="18" charset="0"/>
                         </a:rPr>
-                        <a:t>Временная валидация</a:t>
+                        <a:t>Учёт сложных зависимостей</a:t>
+                      </a:r>
+                    </a:p>
+                  </a:txBody>
+                  <a:tcPr anchor="ctr"/>
+                </a:tc>
+                <a:tc>
+                  <a:txBody>
+                    <a:bodyPr/>
+                    <a:lstStyle/>
+                    <a:p>
+                      <a:pPr algn="ctr"/>
+                      <a:r>
+                        <a:rPr lang="ru-RU" dirty="0">
+                          <a:latin typeface="Times New Roman" panose="02020603050405020304" pitchFamily="18" charset="0"/>
+                          <a:cs typeface="Times New Roman" panose="02020603050405020304" pitchFamily="18" charset="0"/>
+                        </a:rPr>
+                        <a:t>Требовательность к данным и настройке</a:t>
+                      </a:r>
+                    </a:p>
+                  </a:txBody>
+                  <a:tcPr anchor="ctr"/>
+                </a:tc>
+                <a:tc>
+                  <a:txBody>
+                    <a:bodyPr/>
+                    <a:lstStyle/>
+                    <a:p>
+                      <a:pPr algn="ctr"/>
+                      <a:r>
+                        <a:rPr lang="ru-RU" dirty="0">
+                          <a:latin typeface="Times New Roman" panose="02020603050405020304" pitchFamily="18" charset="0"/>
+                          <a:cs typeface="Times New Roman" panose="02020603050405020304" pitchFamily="18" charset="0"/>
+                        </a:rPr>
+                        <a:t>Устойчивость к шуму</a:t>
+                      </a:r>
+                    </a:p>
+                  </a:txBody>
+                  <a:tcPr anchor="ctr"/>
+                </a:tc>
+                <a:tc>
+                  <a:txBody>
+                    <a:bodyPr/>
+                    <a:lstStyle/>
+                    <a:p>
+                      <a:pPr algn="ctr"/>
+                      <a:r>
+                        <a:rPr lang="ru-RU" dirty="0">
+                          <a:latin typeface="Times New Roman" panose="02020603050405020304" pitchFamily="18" charset="0"/>
+                          <a:cs typeface="Times New Roman" panose="02020603050405020304" pitchFamily="18" charset="0"/>
+                        </a:rPr>
+                        <a:t>Вычислительная сложность</a:t>
                       </a:r>
                     </a:p>
                   </a:txBody>
@@ -9884,16 +9898,12 @@
                     <a:p>
                       <a:pPr algn="ctr"/>
                       <a:r>
-                        <a:rPr lang="en-US" dirty="0">
+                        <a:rPr lang="ru-RU" dirty="0">
                           <a:latin typeface="Times New Roman" panose="02020603050405020304" pitchFamily="18" charset="0"/>
                           <a:cs typeface="Times New Roman" panose="02020603050405020304" pitchFamily="18" charset="0"/>
                         </a:rPr>
-                        <a:t>Backtrader</a:t>
+                        <a:t>Стратегии на основе правил</a:t>
                       </a:r>
-                      <a:endParaRPr lang="ru-RU" dirty="0">
-                        <a:latin typeface="Times New Roman" panose="02020603050405020304" pitchFamily="18" charset="0"/>
-                        <a:cs typeface="Times New Roman" panose="02020603050405020304" pitchFamily="18" charset="0"/>
-                      </a:endParaRPr>
                     </a:p>
                   </a:txBody>
                   <a:tcPr anchor="ctr">
@@ -9940,15 +9950,166 @@
                           <a:latin typeface="Times New Roman" panose="02020603050405020304" pitchFamily="18" charset="0"/>
                           <a:cs typeface="Times New Roman" panose="02020603050405020304" pitchFamily="18" charset="0"/>
                         </a:rPr>
-                        <a:t>Высокая</a:t>
+                        <a:t>Низкий</a:t>
                       </a:r>
                     </a:p>
                   </a:txBody>
                   <a:tcPr anchor="ctr">
                     <a:solidFill>
                       <a:schemeClr val="accent1">
-                        <a:lumMod val="60000"/>
-                        <a:lumOff val="40000"/>
+                        <a:lumMod val="20000"/>
+                        <a:lumOff val="80000"/>
+                      </a:schemeClr>
+                    </a:solidFill>
+                  </a:tcPr>
+                </a:tc>
+                <a:tc>
+                  <a:txBody>
+                    <a:bodyPr/>
+                    <a:lstStyle/>
+                    <a:p>
+                      <a:pPr algn="ctr"/>
+                      <a:r>
+                        <a:rPr lang="ru-RU" dirty="0">
+                          <a:latin typeface="Times New Roman" panose="02020603050405020304" pitchFamily="18" charset="0"/>
+                          <a:cs typeface="Times New Roman" panose="02020603050405020304" pitchFamily="18" charset="0"/>
+                        </a:rPr>
+                        <a:t>Низкая</a:t>
+                      </a:r>
+                    </a:p>
+                  </a:txBody>
+                  <a:tcPr anchor="ctr">
+                    <a:solidFill>
+                      <a:schemeClr val="accent1">
+                        <a:lumMod val="20000"/>
+                        <a:lumOff val="80000"/>
+                      </a:schemeClr>
+                    </a:solidFill>
+                  </a:tcPr>
+                </a:tc>
+                <a:tc>
+                  <a:txBody>
+                    <a:bodyPr/>
+                    <a:lstStyle/>
+                    <a:p>
+                      <a:pPr algn="ctr"/>
+                      <a:r>
+                        <a:rPr lang="ru-RU" dirty="0">
+                          <a:latin typeface="Times New Roman" panose="02020603050405020304" pitchFamily="18" charset="0"/>
+                          <a:cs typeface="Times New Roman" panose="02020603050405020304" pitchFamily="18" charset="0"/>
+                        </a:rPr>
+                        <a:t>Средняя</a:t>
+                      </a:r>
+                    </a:p>
+                  </a:txBody>
+                  <a:tcPr anchor="ctr">
+                    <a:solidFill>
+                      <a:schemeClr val="accent1">
+                        <a:lumMod val="40000"/>
+                        <a:lumOff val="60000"/>
+                      </a:schemeClr>
+                    </a:solidFill>
+                  </a:tcPr>
+                </a:tc>
+                <a:tc>
+                  <a:txBody>
+                    <a:bodyPr/>
+                    <a:lstStyle/>
+                    <a:p>
+                      <a:pPr algn="ctr"/>
+                      <a:r>
+                        <a:rPr lang="ru-RU" dirty="0">
+                          <a:latin typeface="Times New Roman" panose="02020603050405020304" pitchFamily="18" charset="0"/>
+                          <a:cs typeface="Times New Roman" panose="02020603050405020304" pitchFamily="18" charset="0"/>
+                        </a:rPr>
+                        <a:t>Низкая</a:t>
+                      </a:r>
+                    </a:p>
+                  </a:txBody>
+                  <a:tcPr anchor="ctr">
+                    <a:solidFill>
+                      <a:schemeClr val="accent1">
+                        <a:lumMod val="20000"/>
+                        <a:lumOff val="80000"/>
+                      </a:schemeClr>
+                    </a:solidFill>
+                  </a:tcPr>
+                </a:tc>
+                <a:extLst>
+                  <a:ext uri="{0D108BD9-81ED-4DB2-BD59-A6C34878D82A}">
+                    <a16:rowId xmlns:a16="http://schemas.microsoft.com/office/drawing/2014/main" val="1599896190"/>
+                  </a:ext>
+                </a:extLst>
+              </a:tr>
+              <a:tr h="375128">
+                <a:tc>
+                  <a:txBody>
+                    <a:bodyPr/>
+                    <a:lstStyle/>
+                    <a:p>
+                      <a:pPr algn="ctr"/>
+                      <a:r>
+                        <a:rPr lang="ru-RU" dirty="0">
+                          <a:latin typeface="Times New Roman" panose="02020603050405020304" pitchFamily="18" charset="0"/>
+                          <a:cs typeface="Times New Roman" panose="02020603050405020304" pitchFamily="18" charset="0"/>
+                        </a:rPr>
+                        <a:t>Методы машинного обучения</a:t>
+                      </a:r>
+                    </a:p>
+                  </a:txBody>
+                  <a:tcPr anchor="ctr">
+                    <a:solidFill>
+                      <a:schemeClr val="accent4">
+                        <a:lumMod val="20000"/>
+                        <a:lumOff val="80000"/>
+                      </a:schemeClr>
+                    </a:solidFill>
+                  </a:tcPr>
+                </a:tc>
+                <a:tc>
+                  <a:txBody>
+                    <a:bodyPr/>
+                    <a:lstStyle/>
+                    <a:p>
+                      <a:pPr algn="ctr"/>
+                      <a:r>
+                        <a:rPr lang="ru-RU" dirty="0">
+                          <a:latin typeface="Times New Roman" panose="02020603050405020304" pitchFamily="18" charset="0"/>
+                          <a:cs typeface="Times New Roman" panose="02020603050405020304" pitchFamily="18" charset="0"/>
+                        </a:rPr>
+                        <a:t>Средняя</a:t>
+                      </a:r>
+                    </a:p>
+                  </a:txBody>
+                  <a:tcPr anchor="ctr">
+                    <a:solidFill>
+                      <a:schemeClr val="accent1">
+                        <a:lumMod val="40000"/>
+                        <a:lumOff val="60000"/>
+                      </a:schemeClr>
+                    </a:solidFill>
+                  </a:tcPr>
+                </a:tc>
+                <a:tc>
+                  <a:txBody>
+                    <a:bodyPr/>
+                    <a:lstStyle/>
+                    <a:p>
+                      <a:pPr algn="ctr"/>
+                      <a:r>
+                        <a:rPr lang="ru-RU" dirty="0">
+                          <a:latin typeface="Times New Roman" panose="02020603050405020304" pitchFamily="18" charset="0"/>
+                          <a:cs typeface="Times New Roman" panose="02020603050405020304" pitchFamily="18" charset="0"/>
+                        </a:rPr>
+                        <a:t>Средний</a:t>
+                      </a:r>
+                    </a:p>
+                  </a:txBody>
+                  <a:tcPr anchor="ctr">
+                    <a:solidFill>
+                      <a:schemeClr val="accent1">
+                        <a:lumMod val="40000"/>
+                        <a:lumOff val="60000"/>
                       </a:schemeClr>
                     </a:solidFill>
                   </a:tcPr>
@@ -10027,161 +10188,6 @@
                 </a:tc>
                 <a:extLst>
                   <a:ext uri="{0D108BD9-81ED-4DB2-BD59-A6C34878D82A}">
-                    <a16:rowId xmlns:a16="http://schemas.microsoft.com/office/drawing/2014/main" val="1599896190"/>
-                  </a:ext>
-                </a:extLst>
-              </a:tr>
-              <a:tr h="375128">
-                <a:tc>
-                  <a:txBody>
-                    <a:bodyPr/>
-                    <a:lstStyle/>
-                    <a:p>
-                      <a:pPr algn="ctr"/>
-                      <a:r>
-                        <a:rPr lang="en-US" dirty="0">
-                          <a:latin typeface="Times New Roman" panose="02020603050405020304" pitchFamily="18" charset="0"/>
-                          <a:cs typeface="Times New Roman" panose="02020603050405020304" pitchFamily="18" charset="0"/>
-                        </a:rPr>
-                        <a:t>Zipline</a:t>
-                      </a:r>
-                      <a:endParaRPr lang="ru-RU" dirty="0">
-                        <a:latin typeface="Times New Roman" panose="02020603050405020304" pitchFamily="18" charset="0"/>
-                        <a:cs typeface="Times New Roman" panose="02020603050405020304" pitchFamily="18" charset="0"/>
-                      </a:endParaRPr>
-                    </a:p>
-                  </a:txBody>
-                  <a:tcPr anchor="ctr">
-                    <a:solidFill>
-                      <a:schemeClr val="accent4">
-                        <a:lumMod val="20000"/>
-                        <a:lumOff val="80000"/>
-                      </a:schemeClr>
-                    </a:solidFill>
-                  </a:tcPr>
-                </a:tc>
-                <a:tc>
-                  <a:txBody>
-                    <a:bodyPr/>
-                    <a:lstStyle/>
-                    <a:p>
-                      <a:pPr algn="ctr"/>
-                      <a:r>
-                        <a:rPr lang="ru-RU" dirty="0">
-                          <a:latin typeface="Times New Roman" panose="02020603050405020304" pitchFamily="18" charset="0"/>
-                          <a:cs typeface="Times New Roman" panose="02020603050405020304" pitchFamily="18" charset="0"/>
-                        </a:rPr>
-                        <a:t>Средняя</a:t>
-                      </a:r>
-                    </a:p>
-                  </a:txBody>
-                  <a:tcPr anchor="ctr">
-                    <a:solidFill>
-                      <a:schemeClr val="accent1">
-                        <a:lumMod val="40000"/>
-                        <a:lumOff val="60000"/>
-                      </a:schemeClr>
-                    </a:solidFill>
-                  </a:tcPr>
-                </a:tc>
-                <a:tc>
-                  <a:txBody>
-                    <a:bodyPr/>
-                    <a:lstStyle/>
-                    <a:p>
-                      <a:pPr algn="ctr"/>
-                      <a:r>
-                        <a:rPr lang="ru-RU" dirty="0">
-                          <a:latin typeface="Times New Roman" panose="02020603050405020304" pitchFamily="18" charset="0"/>
-                          <a:cs typeface="Times New Roman" panose="02020603050405020304" pitchFamily="18" charset="0"/>
-                        </a:rPr>
-                        <a:t>Средняя</a:t>
-                      </a:r>
-                    </a:p>
-                  </a:txBody>
-                  <a:tcPr anchor="ctr">
-                    <a:solidFill>
-                      <a:schemeClr val="accent1">
-                        <a:lumMod val="40000"/>
-                        <a:lumOff val="60000"/>
-                      </a:schemeClr>
-                    </a:solidFill>
-                  </a:tcPr>
-                </a:tc>
-                <a:tc>
-                  <a:txBody>
-                    <a:bodyPr/>
-                    <a:lstStyle/>
-                    <a:p>
-                      <a:pPr algn="ctr"/>
-                      <a:r>
-                        <a:rPr lang="ru-RU" dirty="0">
-                          <a:latin typeface="Times New Roman" panose="02020603050405020304" pitchFamily="18" charset="0"/>
-                          <a:cs typeface="Times New Roman" panose="02020603050405020304" pitchFamily="18" charset="0"/>
-                        </a:rPr>
-                        <a:t>Средняя</a:t>
-                      </a:r>
-                    </a:p>
-                  </a:txBody>
-                  <a:tcPr anchor="ctr">
-                    <a:solidFill>
-                      <a:schemeClr val="accent1">
-                        <a:lumMod val="40000"/>
-                        <a:lumOff val="60000"/>
-                      </a:schemeClr>
-                    </a:solidFill>
-                  </a:tcPr>
-                </a:tc>
-                <a:tc>
-                  <a:txBody>
-                    <a:bodyPr/>
-                    <a:lstStyle/>
-                    <a:p>
-                      <a:pPr algn="ctr"/>
-                      <a:r>
-                        <a:rPr lang="ru-RU" dirty="0">
-                          <a:latin typeface="Times New Roman" panose="02020603050405020304" pitchFamily="18" charset="0"/>
-                          <a:cs typeface="Times New Roman" panose="02020603050405020304" pitchFamily="18" charset="0"/>
-                        </a:rPr>
-                        <a:t>Низкая</a:t>
-                      </a:r>
-                    </a:p>
-                  </a:txBody>
-                  <a:tcPr anchor="ctr">
-                    <a:solidFill>
-                      <a:schemeClr val="accent1">
-                        <a:lumMod val="20000"/>
-                        <a:lumOff val="80000"/>
-                      </a:schemeClr>
-                    </a:solidFill>
-                  </a:tcPr>
-                </a:tc>
-                <a:tc>
-                  <a:txBody>
-                    <a:bodyPr/>
-                    <a:lstStyle/>
-                    <a:p>
-                      <a:pPr algn="ctr"/>
-                      <a:r>
-                        <a:rPr lang="ru-RU" dirty="0">
-                          <a:latin typeface="Times New Roman" panose="02020603050405020304" pitchFamily="18" charset="0"/>
-                          <a:cs typeface="Times New Roman" panose="02020603050405020304" pitchFamily="18" charset="0"/>
-                        </a:rPr>
-                        <a:t>Средняя</a:t>
-                      </a:r>
-                    </a:p>
-                  </a:txBody>
-                  <a:tcPr anchor="ctr">
-                    <a:solidFill>
-                      <a:schemeClr val="accent1">
-                        <a:lumMod val="40000"/>
-                        <a:lumOff val="60000"/>
-                      </a:schemeClr>
-                    </a:solidFill>
-                  </a:tcPr>
-                </a:tc>
-                <a:extLst>
-                  <a:ext uri="{0D108BD9-81ED-4DB2-BD59-A6C34878D82A}">
                     <a16:rowId xmlns:a16="http://schemas.microsoft.com/office/drawing/2014/main" val="4191483280"/>
                   </a:ext>
                 </a:extLst>
@@ -10194,16 +10200,12 @@
                     <a:p>
                       <a:pPr algn="ctr"/>
                       <a:r>
-                        <a:rPr lang="en-US" dirty="0">
+                        <a:rPr lang="ru-RU" dirty="0">
                           <a:latin typeface="Times New Roman" panose="02020603050405020304" pitchFamily="18" charset="0"/>
                           <a:cs typeface="Times New Roman" panose="02020603050405020304" pitchFamily="18" charset="0"/>
                         </a:rPr>
-                        <a:t>LEAN / QuantConnect</a:t>
+                        <a:t>Нейросетевые методы</a:t>
                       </a:r>
-                      <a:endParaRPr lang="ru-RU" dirty="0">
-                        <a:latin typeface="Times New Roman" panose="02020603050405020304" pitchFamily="18" charset="0"/>
-                        <a:cs typeface="Times New Roman" panose="02020603050405020304" pitchFamily="18" charset="0"/>
-                      </a:endParaRPr>
                     </a:p>
                   </a:txBody>
                   <a:tcPr anchor="ctr">
@@ -10322,157 +10324,6 @@
                           <a:latin typeface="Times New Roman" panose="02020603050405020304" pitchFamily="18" charset="0"/>
                           <a:cs typeface="Times New Roman" panose="02020603050405020304" pitchFamily="18" charset="0"/>
                         </a:rPr>
-                        <a:t>Средняя</a:t>
-                      </a:r>
-                    </a:p>
-                  </a:txBody>
-                  <a:tcPr anchor="ctr">
-                    <a:solidFill>
-                      <a:schemeClr val="accent1">
-                        <a:lumMod val="40000"/>
-                        <a:lumOff val="60000"/>
-                      </a:schemeClr>
-                    </a:solidFill>
-                  </a:tcPr>
-                </a:tc>
-                <a:extLst>
-                  <a:ext uri="{0D108BD9-81ED-4DB2-BD59-A6C34878D82A}">
-                    <a16:rowId xmlns:a16="http://schemas.microsoft.com/office/drawing/2014/main" val="2694561469"/>
-                  </a:ext>
-                </a:extLst>
-              </a:tr>
-              <a:tr h="375128">
-                <a:tc>
-                  <a:txBody>
-                    <a:bodyPr/>
-                    <a:lstStyle/>
-                    <a:p>
-                      <a:pPr algn="ctr"/>
-                      <a:r>
-                        <a:rPr lang="ru-RU" dirty="0">
-                          <a:latin typeface="Times New Roman" panose="02020603050405020304" pitchFamily="18" charset="0"/>
-                          <a:cs typeface="Times New Roman" panose="02020603050405020304" pitchFamily="18" charset="0"/>
-                        </a:rPr>
-                        <a:t>Предлагаемое решение</a:t>
-                      </a:r>
-                    </a:p>
-                  </a:txBody>
-                  <a:tcPr anchor="ctr">
-                    <a:solidFill>
-                      <a:schemeClr val="accent4">
-                        <a:lumMod val="20000"/>
-                        <a:lumOff val="80000"/>
-                      </a:schemeClr>
-                    </a:solidFill>
-                  </a:tcPr>
-                </a:tc>
-                <a:tc>
-                  <a:txBody>
-                    <a:bodyPr/>
-                    <a:lstStyle/>
-                    <a:p>
-                      <a:pPr algn="ctr"/>
-                      <a:r>
-                        <a:rPr lang="ru-RU" dirty="0">
-                          <a:latin typeface="Times New Roman" panose="02020603050405020304" pitchFamily="18" charset="0"/>
-                          <a:cs typeface="Times New Roman" panose="02020603050405020304" pitchFamily="18" charset="0"/>
-                        </a:rPr>
-                        <a:t>Средняя</a:t>
-                      </a:r>
-                    </a:p>
-                  </a:txBody>
-                  <a:tcPr anchor="ctr">
-                    <a:solidFill>
-                      <a:schemeClr val="accent1">
-                        <a:lumMod val="40000"/>
-                        <a:lumOff val="60000"/>
-                      </a:schemeClr>
-                    </a:solidFill>
-                  </a:tcPr>
-                </a:tc>
-                <a:tc>
-                  <a:txBody>
-                    <a:bodyPr/>
-                    <a:lstStyle/>
-                    <a:p>
-                      <a:pPr algn="ctr"/>
-                      <a:r>
-                        <a:rPr lang="ru-RU" dirty="0">
-                          <a:latin typeface="Times New Roman" panose="02020603050405020304" pitchFamily="18" charset="0"/>
-                          <a:cs typeface="Times New Roman" panose="02020603050405020304" pitchFamily="18" charset="0"/>
-                        </a:rPr>
-                        <a:t>Высокая</a:t>
-                      </a:r>
-                    </a:p>
-                  </a:txBody>
-                  <a:tcPr anchor="ctr">
-                    <a:solidFill>
-                      <a:schemeClr val="accent1">
-                        <a:lumMod val="60000"/>
-                        <a:lumOff val="40000"/>
-                      </a:schemeClr>
-                    </a:solidFill>
-                  </a:tcPr>
-                </a:tc>
-                <a:tc>
-                  <a:txBody>
-                    <a:bodyPr/>
-                    <a:lstStyle/>
-                    <a:p>
-                      <a:pPr algn="ctr"/>
-                      <a:r>
-                        <a:rPr lang="ru-RU" dirty="0">
-                          <a:latin typeface="Times New Roman" panose="02020603050405020304" pitchFamily="18" charset="0"/>
-                          <a:cs typeface="Times New Roman" panose="02020603050405020304" pitchFamily="18" charset="0"/>
-                        </a:rPr>
-                        <a:t>Высокая</a:t>
-                      </a:r>
-                    </a:p>
-                  </a:txBody>
-                  <a:tcPr anchor="ctr">
-                    <a:solidFill>
-                      <a:schemeClr val="accent1">
-                        <a:lumMod val="60000"/>
-                        <a:lumOff val="40000"/>
-                      </a:schemeClr>
-                    </a:solidFill>
-                  </a:tcPr>
-                </a:tc>
-                <a:tc>
-                  <a:txBody>
-                    <a:bodyPr/>
-                    <a:lstStyle/>
-                    <a:p>
-                      <a:pPr algn="ctr"/>
-                      <a:r>
-                        <a:rPr lang="ru-RU" dirty="0">
-                          <a:latin typeface="Times New Roman" panose="02020603050405020304" pitchFamily="18" charset="0"/>
-                          <a:cs typeface="Times New Roman" panose="02020603050405020304" pitchFamily="18" charset="0"/>
-                        </a:rPr>
-                        <a:t>Высокая</a:t>
-                      </a:r>
-                    </a:p>
-                  </a:txBody>
-                  <a:tcPr anchor="ctr">
-                    <a:solidFill>
-                      <a:schemeClr val="accent1">
-                        <a:lumMod val="60000"/>
-                        <a:lumOff val="40000"/>
-                      </a:schemeClr>
-                    </a:solidFill>
-                  </a:tcPr>
-                </a:tc>
-                <a:tc>
-                  <a:txBody>
-                    <a:bodyPr/>
-                    <a:lstStyle/>
-                    <a:p>
-                      <a:pPr algn="ctr"/>
-                      <a:r>
-                        <a:rPr lang="ru-RU" dirty="0">
-                          <a:latin typeface="Times New Roman" panose="02020603050405020304" pitchFamily="18" charset="0"/>
-                          <a:cs typeface="Times New Roman" panose="02020603050405020304" pitchFamily="18" charset="0"/>
-                        </a:rPr>
                         <a:t>Высокая</a:t>
                       </a:r>
                     </a:p>
@@ -10488,7 +10339,7 @@
                 </a:tc>
                 <a:extLst>
                   <a:ext uri="{0D108BD9-81ED-4DB2-BD59-A6C34878D82A}">
-                    <a16:rowId xmlns:a16="http://schemas.microsoft.com/office/drawing/2014/main" val="1643796940"/>
+                    <a16:rowId xmlns:a16="http://schemas.microsoft.com/office/drawing/2014/main" val="2694561469"/>
                   </a:ext>
                 </a:extLst>
               </a:tr>
@@ -10501,7 +10352,7 @@
           <p:cNvPr id="2" name="Номер слайда 1">
             <a:extLst>
               <a:ext uri="{FF2B5EF4-FFF2-40B4-BE49-F238E27FC236}">
-                <a16:creationId xmlns:a16="http://schemas.microsoft.com/office/drawing/2014/main" id="{879B60DB-0B41-9C88-30C2-148345CE5813}"/>
+                <a16:creationId xmlns:a16="http://schemas.microsoft.com/office/drawing/2014/main" id="{E233AC53-EC45-44D4-B69B-72A381CA6851}"/>
               </a:ext>
             </a:extLst>
           </p:cNvPr>
@@ -10541,6 +10392,11 @@
         </p:txBody>
       </p:sp>
     </p:spTree>
+    <p:extLst>
+      <p:ext uri="{BB962C8B-B14F-4D97-AF65-F5344CB8AC3E}">
+        <p14:creationId xmlns:p14="http://schemas.microsoft.com/office/powerpoint/2010/main" val="1016126469"/>
+      </p:ext>
+    </p:extLst>
   </p:cSld>
   <p:clrMapOvr>
     <a:masterClrMapping/>
@@ -12652,7 +12508,7 @@
         <p:spPr>
           <a:xfrm>
             <a:off x="4284498" y="2756667"/>
-            <a:ext cx="1435472" cy="1203019"/>
+            <a:ext cx="1435472" cy="1799747"/>
           </a:xfrm>
           <a:prstGeom prst="rect">
             <a:avLst/>
@@ -12949,7 +12805,39 @@
                 <a:latin typeface="Times New Roman" panose="02020603050405020304" pitchFamily="18" charset="0"/>
                 <a:cs typeface="Times New Roman" panose="02020603050405020304" pitchFamily="18" charset="0"/>
               </a:rPr>
-              <a:t>ARIMA</a:t>
+              <a:t>CatBoost</a:t>
+            </a:r>
+          </a:p>
+          <a:p>
+            <a:pPr marL="0" indent="0">
+              <a:buFont typeface="Arial"/>
+              <a:buNone/>
+            </a:pPr>
+            <a:r>
+              <a:rPr lang="ru-RU" sz="1200" dirty="0">
+                <a:solidFill>
+                  <a:schemeClr val="bg2"/>
+                </a:solidFill>
+                <a:latin typeface="Times New Roman" panose="02020603050405020304" pitchFamily="18" charset="0"/>
+                <a:cs typeface="Times New Roman" panose="02020603050405020304" pitchFamily="18" charset="0"/>
+              </a:rPr>
+              <a:t>Случайный лес</a:t>
+            </a:r>
+          </a:p>
+          <a:p>
+            <a:pPr marL="0" indent="0">
+              <a:buFont typeface="Arial"/>
+              <a:buNone/>
+            </a:pPr>
+            <a:r>
+              <a:rPr lang="ru-RU" sz="1200" dirty="0">
+                <a:solidFill>
+                  <a:schemeClr val="bg2"/>
+                </a:solidFill>
+                <a:latin typeface="Times New Roman" panose="02020603050405020304" pitchFamily="18" charset="0"/>
+                <a:cs typeface="Times New Roman" panose="02020603050405020304" pitchFamily="18" charset="0"/>
+              </a:rPr>
+              <a:t>Решающее дерево</a:t>
             </a:r>
           </a:p>
           <a:p>
@@ -12982,6 +12870,29 @@
                 <a:cs typeface="Times New Roman" panose="02020603050405020304" pitchFamily="18" charset="0"/>
               </a:rPr>
               <a:t>LSTM</a:t>
+            </a:r>
+            <a:endParaRPr lang="ru-RU" sz="1200" dirty="0">
+              <a:solidFill>
+                <a:schemeClr val="bg2"/>
+              </a:solidFill>
+              <a:latin typeface="Times New Roman" panose="02020603050405020304" pitchFamily="18" charset="0"/>
+              <a:cs typeface="Times New Roman" panose="02020603050405020304" pitchFamily="18" charset="0"/>
+            </a:endParaRPr>
+          </a:p>
+          <a:p>
+            <a:pPr marL="0" indent="0">
+              <a:buFont typeface="Arial"/>
+              <a:buNone/>
+            </a:pPr>
+            <a:r>
+              <a:rPr lang="en-US" sz="1200" dirty="0">
+                <a:solidFill>
+                  <a:schemeClr val="bg2"/>
+                </a:solidFill>
+                <a:latin typeface="Times New Roman" panose="02020603050405020304" pitchFamily="18" charset="0"/>
+                <a:cs typeface="Times New Roman" panose="02020603050405020304" pitchFamily="18" charset="0"/>
+              </a:rPr>
+              <a:t>TCN</a:t>
             </a:r>
           </a:p>
           <a:p>
@@ -14185,14 +14096,14 @@
               <a:buNone/>
             </a:pPr>
             <a:r>
-              <a:rPr lang="ru" dirty="0">
+              <a:rPr lang="ru-RU" dirty="0">
                 <a:solidFill>
                   <a:schemeClr val="tx1"/>
                 </a:solidFill>
                 <a:latin typeface="Times New Roman" panose="02020603050405020304" pitchFamily="18" charset="0"/>
                 <a:cs typeface="Times New Roman" panose="02020603050405020304" pitchFamily="18" charset="0"/>
               </a:rPr>
-              <a:t>Результаты торговой стратегии</a:t>
+              <a:t>Графики количества сделок</a:t>
             </a:r>
             <a:endParaRPr dirty="0">
               <a:solidFill>
@@ -14252,36 +14163,6 @@
           </a:p>
         </p:txBody>
       </p:sp>
-      <p:pic>
-        <p:nvPicPr>
-          <p:cNvPr id="5" name="Рисунок 4">
-            <a:extLst>
-              <a:ext uri="{FF2B5EF4-FFF2-40B4-BE49-F238E27FC236}">
-                <a16:creationId xmlns:a16="http://schemas.microsoft.com/office/drawing/2014/main" id="{E375E662-A8F5-EFD1-7E0D-EE48A08C5C33}"/>
-              </a:ext>
-            </a:extLst>
-          </p:cNvPr>
-          <p:cNvPicPr>
-            <a:picLocks noChangeAspect="1"/>
-          </p:cNvPicPr>
-          <p:nvPr/>
-        </p:nvPicPr>
-        <p:blipFill>
-          <a:blip r:embed="rId3"/>
-          <a:stretch>
-            <a:fillRect/>
-          </a:stretch>
-        </p:blipFill>
-        <p:spPr>
-          <a:xfrm>
-            <a:off x="904644" y="1017725"/>
-            <a:ext cx="7334711" cy="4125775"/>
-          </a:xfrm>
-          <a:prstGeom prst="rect">
-            <a:avLst/>
-          </a:prstGeom>
-        </p:spPr>
-      </p:pic>
       <p:sp>
         <p:nvSpPr>
           <p:cNvPr id="2" name="Номер слайда 1">
@@ -14326,6 +14207,36 @@
           </a:p>
         </p:txBody>
       </p:sp>
+      <p:pic>
+        <p:nvPicPr>
+          <p:cNvPr id="4" name="Рисунок 3">
+            <a:extLst>
+              <a:ext uri="{FF2B5EF4-FFF2-40B4-BE49-F238E27FC236}">
+                <a16:creationId xmlns:a16="http://schemas.microsoft.com/office/drawing/2014/main" id="{62185293-7DD6-00F0-65B9-8DFEBD60C0A2}"/>
+              </a:ext>
+            </a:extLst>
+          </p:cNvPr>
+          <p:cNvPicPr>
+            <a:picLocks noChangeAspect="1"/>
+          </p:cNvPicPr>
+          <p:nvPr/>
+        </p:nvPicPr>
+        <p:blipFill>
+          <a:blip r:embed="rId3"/>
+          <a:stretch>
+            <a:fillRect/>
+          </a:stretch>
+        </p:blipFill>
+        <p:spPr>
+          <a:xfrm>
+            <a:off x="891020" y="1017725"/>
+            <a:ext cx="7361959" cy="4089977"/>
+          </a:xfrm>
+          <a:prstGeom prst="rect">
+            <a:avLst/>
+          </a:prstGeom>
+        </p:spPr>
+      </p:pic>
     </p:spTree>
   </p:cSld>
   <p:clrMapOvr>

--- a/Презентация.pptx
+++ b/Презентация.pptx
@@ -5,21 +5,22 @@
     <p:sldMasterId id="2147483659" r:id="rId1"/>
   </p:sldMasterIdLst>
   <p:notesMasterIdLst>
-    <p:notesMasterId r:id="rId14"/>
+    <p:notesMasterId r:id="rId15"/>
   </p:notesMasterIdLst>
   <p:sldIdLst>
     <p:sldId id="256" r:id="rId2"/>
     <p:sldId id="257" r:id="rId3"/>
     <p:sldId id="258" r:id="rId4"/>
-    <p:sldId id="269" r:id="rId5"/>
-    <p:sldId id="260" r:id="rId6"/>
-    <p:sldId id="261" r:id="rId7"/>
-    <p:sldId id="267" r:id="rId8"/>
+    <p:sldId id="270" r:id="rId5"/>
+    <p:sldId id="269" r:id="rId6"/>
+    <p:sldId id="260" r:id="rId7"/>
+    <p:sldId id="261" r:id="rId8"/>
     <p:sldId id="266" r:id="rId9"/>
-    <p:sldId id="263" r:id="rId10"/>
-    <p:sldId id="268" r:id="rId11"/>
-    <p:sldId id="264" r:id="rId12"/>
-    <p:sldId id="265" r:id="rId13"/>
+    <p:sldId id="267" r:id="rId10"/>
+    <p:sldId id="263" r:id="rId11"/>
+    <p:sldId id="268" r:id="rId12"/>
+    <p:sldId id="264" r:id="rId13"/>
+    <p:sldId id="265" r:id="rId14"/>
   </p:sldIdLst>
   <p:sldSz cx="9144000" cy="5143500" type="screen16x9"/>
   <p:notesSz cx="6858000" cy="9144000"/>
@@ -809,35 +810,10 @@
           </a:bodyPr>
           <a:lstStyle/>
           <a:p>
-            <a:r>
-              <a:rPr lang="ru-RU" dirty="0"/>
-              <a:t>Здравствуйте, уважаемые члены комиссии.</a:t>
-            </a:r>
-            <a:br>
-              <a:rPr lang="ru-RU" dirty="0"/>
-            </a:br>
-            <a:r>
-              <a:rPr lang="ru-RU" dirty="0"/>
-              <a:t>Тема моей выпускной квалификационной работы — «Алгоритмический онлайн-трейдинг с использованием технологий искусственного интеллекта».</a:t>
-            </a:r>
-          </a:p>
-          <a:p>
-            <a:r>
-              <a:rPr lang="ru-RU" dirty="0"/>
-              <a:t>В работе рассматривается программный прототип системы, которая обрабатывает минутные данные акций Московской биржи, строит краткосрочные прогнозы доходности и на их основе формирует торговые решения.</a:t>
-            </a:r>
-          </a:p>
-          <a:p>
-            <a:pPr marL="0" lvl="0" indent="0" algn="l" rtl="0">
-              <a:spcBef>
-                <a:spcPts val="0"/>
-              </a:spcBef>
-              <a:spcAft>
-                <a:spcPts val="0"/>
-              </a:spcAft>
+            <a:pPr marL="158750" indent="0">
               <a:buNone/>
             </a:pPr>
-            <a:endParaRPr dirty="0"/>
+            <a:endParaRPr lang="ru-RU" dirty="0"/>
           </a:p>
         </p:txBody>
       </p:sp>
@@ -850,6 +826,111 @@
 </file>
 
 <file path=ppt/notesSlides/notesSlide10.xml><?xml version="1.0" encoding="utf-8"?>
+<p:notes xmlns:a="http://schemas.openxmlformats.org/drawingml/2006/main" xmlns:r="http://schemas.openxmlformats.org/officeDocument/2006/relationships" xmlns:p="http://schemas.openxmlformats.org/presentationml/2006/main" showMasterSp="0" showMasterPhAnim="0">
+  <p:cSld>
+    <p:spTree>
+      <p:nvGrpSpPr>
+        <p:cNvPr id="1" name="Shape 93"/>
+        <p:cNvGrpSpPr/>
+        <p:nvPr/>
+      </p:nvGrpSpPr>
+      <p:grpSpPr>
+        <a:xfrm>
+          <a:off x="0" y="0"/>
+          <a:ext cx="0" cy="0"/>
+          <a:chOff x="0" y="0"/>
+          <a:chExt cx="0" cy="0"/>
+        </a:xfrm>
+      </p:grpSpPr>
+      <p:sp>
+        <p:nvSpPr>
+          <p:cNvPr id="94" name="Google Shape;94;gdabd55fb20_0_25:notes"/>
+          <p:cNvSpPr>
+            <a:spLocks noGrp="1" noRot="1" noChangeAspect="1"/>
+          </p:cNvSpPr>
+          <p:nvPr>
+            <p:ph type="sldImg" idx="2"/>
+          </p:nvPr>
+        </p:nvSpPr>
+        <p:spPr>
+          <a:xfrm>
+            <a:off x="381000" y="685800"/>
+            <a:ext cx="6096000" cy="3429000"/>
+          </a:xfrm>
+          <a:custGeom>
+            <a:avLst/>
+            <a:gdLst/>
+            <a:ahLst/>
+            <a:cxnLst/>
+            <a:rect l="l" t="t" r="r" b="b"/>
+            <a:pathLst>
+              <a:path w="120000" h="120000" extrusionOk="0">
+                <a:moveTo>
+                  <a:pt x="0" y="0"/>
+                </a:moveTo>
+                <a:lnTo>
+                  <a:pt x="120000" y="0"/>
+                </a:lnTo>
+                <a:lnTo>
+                  <a:pt x="120000" y="120000"/>
+                </a:lnTo>
+                <a:lnTo>
+                  <a:pt x="0" y="120000"/>
+                </a:lnTo>
+                <a:close/>
+              </a:path>
+            </a:pathLst>
+          </a:custGeom>
+        </p:spPr>
+        <p:txBody>
+          <a:bodyPr/>
+          <a:lstStyle/>
+          <a:p>
+            <a:endParaRPr lang="ru-RU"/>
+          </a:p>
+        </p:txBody>
+      </p:sp>
+      <p:sp>
+        <p:nvSpPr>
+          <p:cNvPr id="95" name="Google Shape;95;gdabd55fb20_0_25:notes"/>
+          <p:cNvSpPr txBox="1">
+            <a:spLocks noGrp="1"/>
+          </p:cNvSpPr>
+          <p:nvPr>
+            <p:ph type="body" idx="1"/>
+          </p:nvPr>
+        </p:nvSpPr>
+        <p:spPr>
+          <a:xfrm>
+            <a:off x="685800" y="4343400"/>
+            <a:ext cx="5486400" cy="4114800"/>
+          </a:xfrm>
+          <a:prstGeom prst="rect">
+            <a:avLst/>
+          </a:prstGeom>
+        </p:spPr>
+        <p:txBody>
+          <a:bodyPr spcFirstLastPara="1" wrap="square" lIns="91425" tIns="91425" rIns="91425" bIns="91425" anchor="t" anchorCtr="0">
+            <a:noAutofit/>
+          </a:bodyPr>
+          <a:lstStyle/>
+          <a:p>
+            <a:pPr marL="158750" indent="0">
+              <a:buNone/>
+            </a:pPr>
+            <a:endParaRPr lang="ru-RU" dirty="0"/>
+          </a:p>
+        </p:txBody>
+      </p:sp>
+    </p:spTree>
+  </p:cSld>
+  <p:clrMapOvr>
+    <a:masterClrMapping/>
+  </p:clrMapOvr>
+</p:notes>
+</file>
+
+<file path=ppt/notesSlides/notesSlide11.xml><?xml version="1.0" encoding="utf-8"?>
 <p:notes xmlns:a="http://schemas.openxmlformats.org/drawingml/2006/main" xmlns:r="http://schemas.openxmlformats.org/officeDocument/2006/relationships" xmlns:p="http://schemas.openxmlformats.org/presentationml/2006/main" showMasterSp="0" showMasterPhAnim="0">
   <p:cSld>
     <p:spTree>
@@ -957,34 +1038,10 @@
           </a:bodyPr>
           <a:lstStyle/>
           <a:p>
-            <a:r>
-              <a:rPr lang="ru-RU" dirty="0"/>
-              <a:t>Этот слайд объясняет, почему стратегия чувствительна к издержкам.</a:t>
-            </a:r>
-          </a:p>
-          <a:p>
-            <a:r>
-              <a:rPr lang="ru-RU" dirty="0"/>
-              <a:t>При низких издержках модели активно открывают позиции и совершают много сделок. За счёт этого достигается положительная доходность.</a:t>
-            </a:r>
-          </a:p>
-          <a:p>
-            <a:r>
-              <a:rPr lang="ru-RU" dirty="0"/>
-              <a:t>Но большое число сделок приводит к большим суммарным комиссиям и потерям на спреде. Поэтому при увеличении издержек преимущество быстро исчезает.</a:t>
-            </a:r>
-          </a:p>
-          <a:p>
-            <a:r>
-              <a:rPr lang="ru-RU" dirty="0"/>
-              <a:t>Средняя длительность удержания и доля времени в рынке показывают, что поведение стратегии зависит не только от прогноза модели, но и от правил торгового модуля.</a:t>
-            </a:r>
-          </a:p>
-          <a:p>
-            <a:r>
-              <a:rPr lang="ru-RU"/>
-              <a:t>Главный вывод: высокая доходность достигается за счёт активной торговли, но именно это делает стратегию уязвимой к росту издержек.</a:t>
-            </a:r>
+            <a:pPr marL="158750" indent="0">
+              <a:buNone/>
+            </a:pPr>
+            <a:endParaRPr lang="ru-RU" dirty="0"/>
           </a:p>
         </p:txBody>
       </p:sp>
@@ -1001,7 +1058,7 @@
 </p:notes>
 </file>
 
-<file path=ppt/notesSlides/notesSlide11.xml><?xml version="1.0" encoding="utf-8"?>
+<file path=ppt/notesSlides/notesSlide12.xml><?xml version="1.0" encoding="utf-8"?>
 <p:notes xmlns:a="http://schemas.openxmlformats.org/drawingml/2006/main" xmlns:r="http://schemas.openxmlformats.org/officeDocument/2006/relationships" xmlns:p="http://schemas.openxmlformats.org/presentationml/2006/main" showMasterSp="0" showMasterPhAnim="0">
   <p:cSld>
     <p:spTree>
@@ -1091,31 +1148,7 @@
           </a:bodyPr>
           <a:lstStyle/>
           <a:p>
-            <a:r>
-              <a:rPr lang="ru-RU" dirty="0"/>
-              <a:t>В результате работы был выполнен анализ предметной области, подготовлен набор минутных данных Московской биржи и реализован конвейер их обработки.</a:t>
-            </a:r>
-          </a:p>
-          <a:p>
-            <a:r>
-              <a:rPr lang="ru-RU" dirty="0"/>
-              <a:t>Также были разработаны модели прогнозирования краткосрочной доходности, реализован модуль принятия торговых решений и контур исторического тестирования.</a:t>
-            </a:r>
-          </a:p>
-          <a:p>
-            <a:r>
-              <a:rPr lang="ru-RU" dirty="0"/>
-              <a:t>Таким образом, поставленные задачи выполнены, а итогом работы стал программный прототип системы алгоритмического онлайн-трейдинга с использованием технологий искусственного интеллекта.</a:t>
-            </a:r>
-          </a:p>
-          <a:p>
-            <a:pPr marL="0" lvl="0" indent="0" algn="l" rtl="0">
-              <a:spcBef>
-                <a:spcPts val="0"/>
-              </a:spcBef>
-              <a:spcAft>
-                <a:spcPts val="0"/>
-              </a:spcAft>
+            <a:pPr marL="158750" indent="0">
               <a:buNone/>
             </a:pPr>
             <a:endParaRPr dirty="0"/>
@@ -1130,7 +1163,7 @@
 </p:notes>
 </file>
 
-<file path=ppt/notesSlides/notesSlide12.xml><?xml version="1.0" encoding="utf-8"?>
+<file path=ppt/notesSlides/notesSlide13.xml><?xml version="1.0" encoding="utf-8"?>
 <p:notes xmlns:a="http://schemas.openxmlformats.org/drawingml/2006/main" xmlns:r="http://schemas.openxmlformats.org/officeDocument/2006/relationships" xmlns:p="http://schemas.openxmlformats.org/presentationml/2006/main" showMasterSp="0" showMasterPhAnim="0">
   <p:cSld>
     <p:spTree>
@@ -1331,22 +1364,7 @@
           </a:bodyPr>
           <a:lstStyle/>
           <a:p>
-            <a:r>
-              <a:rPr lang="ru-RU" dirty="0"/>
-              <a:t>Актуальность работы связана с тем, что краткосрочная торговля требует быстрой обработки рыночных данных и принятия решений с учётом реальных ограничений рынка.</a:t>
-            </a:r>
-          </a:p>
-          <a:p>
-            <a:r>
-              <a:rPr lang="ru-RU" dirty="0"/>
-              <a:t>На минутных горизонтах одного прогноза цены недостаточно. Даже если модель ожидает рост, сделка может оказаться невыгодной из-за комиссии, биржевого спреда или слишком малого ожидаемого движения цены.</a:t>
-            </a:r>
-          </a:p>
-          <a:p>
-            <a:r>
-              <a:rPr lang="ru-RU" dirty="0"/>
-              <a:t>Поэтому в работе рассматривается не только прогнозирующая модель, но и полный контур: подготовка данных, прогнозирование, принятие торгового решения и историческое тестирование стратегии.</a:t>
-            </a:r>
+            <a:endParaRPr lang="ru-RU" dirty="0"/>
           </a:p>
         </p:txBody>
       </p:sp>
@@ -1448,34 +1466,10 @@
           </a:bodyPr>
           <a:lstStyle/>
           <a:p>
-            <a:r>
-              <a:rPr lang="ru-RU" dirty="0"/>
-              <a:t>Цель работы — повышение эффективности алгоритмического трейдинга.</a:t>
-            </a:r>
-          </a:p>
-          <a:p>
-            <a:r>
-              <a:rPr lang="ru-RU" dirty="0"/>
-              <a:t>Для достижения этой цели были поставлены несколько задач: проанализировать предметную область и существующие подходы, подготовить минутные данные по ликвидным акциям Московской биржи, разработать модели прогнозирования доходности, спроектировать модуль принятия торговых решений и реализовать историческое тестирование стратегии.</a:t>
-            </a:r>
-          </a:p>
-          <a:p>
-            <a:r>
-              <a:rPr lang="ru-RU" dirty="0"/>
-              <a:t>Таким образом, работа охватывает не только обучение моделей, но и проверку того, как их прогнозы могут использоваться в торговой системе.</a:t>
-            </a:r>
-          </a:p>
-          <a:p>
-            <a:pPr marL="0" lvl="0" indent="0" algn="l" rtl="0">
-              <a:spcBef>
-                <a:spcPts val="0"/>
-              </a:spcBef>
-              <a:spcAft>
-                <a:spcPts val="0"/>
-              </a:spcAft>
+            <a:pPr marL="158750" indent="0">
               <a:buNone/>
             </a:pPr>
-            <a:endParaRPr dirty="0"/>
+            <a:endParaRPr lang="ru-RU" dirty="0"/>
           </a:p>
         </p:txBody>
       </p:sp>
@@ -1488,6 +1482,75 @@
 </file>
 
 <file path=ppt/notesSlides/notesSlide4.xml><?xml version="1.0" encoding="utf-8"?>
+<p:notes xmlns:a="http://schemas.openxmlformats.org/drawingml/2006/main" xmlns:r="http://schemas.openxmlformats.org/officeDocument/2006/relationships" xmlns:p="http://schemas.openxmlformats.org/presentationml/2006/main">
+  <p:cSld>
+    <p:spTree>
+      <p:nvGrpSpPr>
+        <p:cNvPr id="1" name=""/>
+        <p:cNvGrpSpPr/>
+        <p:nvPr/>
+      </p:nvGrpSpPr>
+      <p:grpSpPr>
+        <a:xfrm>
+          <a:off x="0" y="0"/>
+          <a:ext cx="0" cy="0"/>
+          <a:chOff x="0" y="0"/>
+          <a:chExt cx="0" cy="0"/>
+        </a:xfrm>
+      </p:grpSpPr>
+      <p:sp>
+        <p:nvSpPr>
+          <p:cNvPr id="2" name="Образ слайда 1"/>
+          <p:cNvSpPr>
+            <a:spLocks noGrp="1" noRot="1" noChangeAspect="1"/>
+          </p:cNvSpPr>
+          <p:nvPr>
+            <p:ph type="sldImg"/>
+          </p:nvPr>
+        </p:nvSpPr>
+        <p:spPr>
+          <a:xfrm>
+            <a:off x="381000" y="685800"/>
+            <a:ext cx="6096000" cy="3429000"/>
+          </a:xfrm>
+        </p:spPr>
+      </p:sp>
+      <p:sp>
+        <p:nvSpPr>
+          <p:cNvPr id="3" name="Заметки 2"/>
+          <p:cNvSpPr>
+            <a:spLocks noGrp="1"/>
+          </p:cNvSpPr>
+          <p:nvPr>
+            <p:ph type="body" idx="1"/>
+          </p:nvPr>
+        </p:nvSpPr>
+        <p:spPr/>
+        <p:txBody>
+          <a:bodyPr/>
+          <a:lstStyle/>
+          <a:p>
+            <a:pPr marL="158750" indent="0">
+              <a:buNone/>
+            </a:pPr>
+            <a:endParaRPr lang="ru-RU" dirty="0"/>
+          </a:p>
+        </p:txBody>
+      </p:sp>
+    </p:spTree>
+    <p:extLst>
+      <p:ext uri="{BB962C8B-B14F-4D97-AF65-F5344CB8AC3E}">
+        <p14:creationId xmlns:p14="http://schemas.microsoft.com/office/powerpoint/2010/main" val="2428347297"/>
+      </p:ext>
+    </p:extLst>
+  </p:cSld>
+  <p:clrMapOvr>
+    <a:masterClrMapping/>
+  </p:clrMapOvr>
+</p:notes>
+</file>
+
+<file path=ppt/notesSlides/notesSlide5.xml><?xml version="1.0" encoding="utf-8"?>
 <p:notes xmlns:a="http://schemas.openxmlformats.org/drawingml/2006/main" xmlns:r="http://schemas.openxmlformats.org/officeDocument/2006/relationships" xmlns:p="http://schemas.openxmlformats.org/presentationml/2006/main" showMasterSp="0" showMasterPhAnim="0">
   <p:cSld>
     <p:spTree>
@@ -1595,50 +1658,10 @@
           </a:bodyPr>
           <a:lstStyle/>
           <a:p>
-            <a:r>
-              <a:rPr lang="ru-RU" dirty="0"/>
-              <a:t>На этом слайде приведено сравнение средств исторического тестирования торговых алгоритмов.</a:t>
-            </a:r>
-          </a:p>
-          <a:p>
-            <a:r>
-              <a:rPr lang="ru-RU" dirty="0"/>
-              <a:t>Рассматривались Backtrader, </a:t>
-            </a:r>
-            <a:r>
-              <a:rPr lang="ru-RU" dirty="0" err="1"/>
-              <a:t>Zipline</a:t>
-            </a:r>
-            <a:r>
-              <a:rPr lang="ru-RU" dirty="0"/>
-              <a:t> и LEAN / QuantConnect. Эти инструменты позволяют проводить </a:t>
-            </a:r>
-            <a:r>
-              <a:rPr lang="ru-RU" dirty="0" err="1"/>
-              <a:t>backtesting</a:t>
-            </a:r>
-            <a:r>
-              <a:rPr lang="ru-RU" dirty="0"/>
-              <a:t>, но для данной работы было важно гибко работать с минутными данными Московской биржи, сравнивать разные модели искусственного интеллекта и контролировать временную валидацию.</a:t>
-            </a:r>
-          </a:p>
-          <a:p>
-            <a:r>
-              <a:rPr lang="ru-RU" dirty="0"/>
-              <a:t>Поэтому было принято решение реализовать собственный контур исторического тестирования. Это позволило явно учитывать комиссии, ограничения по позициям, число сделок и другие метрики.</a:t>
-            </a:r>
-          </a:p>
-          <a:p>
-            <a:pPr marL="0" lvl="0" indent="0" algn="l" rtl="0">
-              <a:spcBef>
-                <a:spcPts val="0"/>
-              </a:spcBef>
-              <a:spcAft>
-                <a:spcPts val="0"/>
-              </a:spcAft>
+            <a:pPr marL="158750" indent="0">
               <a:buNone/>
             </a:pPr>
-            <a:endParaRPr dirty="0"/>
+            <a:endParaRPr lang="ru-RU" dirty="0"/>
           </a:p>
         </p:txBody>
       </p:sp>
@@ -1655,7 +1678,7 @@
 </p:notes>
 </file>
 
-<file path=ppt/notesSlides/notesSlide5.xml><?xml version="1.0" encoding="utf-8"?>
+<file path=ppt/notesSlides/notesSlide6.xml><?xml version="1.0" encoding="utf-8"?>
 <p:notes xmlns:a="http://schemas.openxmlformats.org/drawingml/2006/main" xmlns:r="http://schemas.openxmlformats.org/officeDocument/2006/relationships" xmlns:p="http://schemas.openxmlformats.org/presentationml/2006/main" showMasterSp="0" showMasterPhAnim="0">
   <p:cSld>
     <p:spTree>
@@ -1745,28 +1768,10 @@
           </a:bodyPr>
           <a:lstStyle/>
           <a:p>
-            <a:r>
-              <a:rPr lang="ru-RU" dirty="0"/>
-              <a:t>Исходные данные получались через MOEX ISS API. Использовались минутные данные по акциям: цена открытия, максимум, минимум, цена закрытия, объём и денежный оборот.</a:t>
-            </a:r>
-          </a:p>
-          <a:p>
-            <a:r>
-              <a:rPr lang="ru-RU" dirty="0"/>
-              <a:t>Далее данные проходили очистку и синхронизацию: выполнялась сортировка по времени, удаление дубликатов и обработка пропусков.</a:t>
-            </a:r>
-          </a:p>
-          <a:p>
-            <a:r>
-              <a:rPr lang="ru-RU" dirty="0"/>
-              <a:t>После этого формировались признаки: доходности за предыдущие минуты, признаки объёма и оборота, волатильность, временные признаки и окна прошлых наблюдений. На основе этих данных формировались целевые переменные для обучения моделей.</a:t>
-            </a:r>
-          </a:p>
-          <a:p>
-            <a:r>
-              <a:rPr lang="ru-RU" dirty="0"/>
-              <a:t>После подготовки данных эти признаки использовались для обучения моделей и дальнейшего исторического тестирования стратегии.</a:t>
-            </a:r>
+            <a:pPr marL="158750" indent="0">
+              <a:buNone/>
+            </a:pPr>
+            <a:endParaRPr lang="ru-RU" dirty="0"/>
           </a:p>
         </p:txBody>
       </p:sp>
@@ -1778,7 +1783,7 @@
 </p:notes>
 </file>
 
-<file path=ppt/notesSlides/notesSlide6.xml><?xml version="1.0" encoding="utf-8"?>
+<file path=ppt/notesSlides/notesSlide7.xml><?xml version="1.0" encoding="utf-8"?>
 <p:notes xmlns:a="http://schemas.openxmlformats.org/drawingml/2006/main" xmlns:r="http://schemas.openxmlformats.org/officeDocument/2006/relationships" xmlns:p="http://schemas.openxmlformats.org/presentationml/2006/main" showMasterSp="0" showMasterPhAnim="0">
   <p:cSld>
     <p:spTree>
@@ -1868,24 +1873,6 @@
           </a:bodyPr>
           <a:lstStyle/>
           <a:p>
-            <a:r>
-              <a:rPr lang="ru-RU" dirty="0"/>
-              <a:t>Основное архитектурное решение работы — разделить прогнозирование и принятие торговых решений.</a:t>
-            </a:r>
-          </a:p>
-          <a:p>
-            <a:r>
-              <a:rPr lang="ru-RU" dirty="0"/>
-              <a:t>Модель не выдаёт напрямую команду «купить» или «продать». Она только предсказывает ожидаемую доходность. Затем отдельный модуль решает, можно ли использовать этот прогноз для открытия, удержания или закрытия позиции.</a:t>
-            </a:r>
-          </a:p>
-          <a:p>
-            <a:r>
-              <a:rPr lang="ru-RU" dirty="0"/>
-              <a:t>Такое разделение позволяет отдельно сравнивать качество моделей и отдельно задавать торговые ограничения: комиссии, лимиты по капиталу, максимальное число позиций и время удержания.</a:t>
-            </a:r>
-          </a:p>
-          <a:p>
             <a:pPr marL="0" lvl="0" indent="0" algn="l" rtl="0">
               <a:spcBef>
                 <a:spcPts val="0"/>
@@ -1900,152 +1887,6 @@
         </p:txBody>
       </p:sp>
     </p:spTree>
-  </p:cSld>
-  <p:clrMapOvr>
-    <a:masterClrMapping/>
-  </p:clrMapOvr>
-</p:notes>
-</file>
-
-<file path=ppt/notesSlides/notesSlide7.xml><?xml version="1.0" encoding="utf-8"?>
-<p:notes xmlns:a="http://schemas.openxmlformats.org/drawingml/2006/main" xmlns:r="http://schemas.openxmlformats.org/officeDocument/2006/relationships" xmlns:p="http://schemas.openxmlformats.org/presentationml/2006/main" showMasterSp="0" showMasterPhAnim="0">
-  <p:cSld>
-    <p:spTree>
-      <p:nvGrpSpPr>
-        <p:cNvPr id="1" name="Shape 87">
-          <a:extLst>
-            <a:ext uri="{FF2B5EF4-FFF2-40B4-BE49-F238E27FC236}">
-              <a16:creationId xmlns:a16="http://schemas.microsoft.com/office/drawing/2014/main" id="{61BD3947-C1E8-DC48-8F67-C6EA98F8B9DA}"/>
-            </a:ext>
-          </a:extLst>
-        </p:cNvPr>
-        <p:cNvGrpSpPr/>
-        <p:nvPr/>
-      </p:nvGrpSpPr>
-      <p:grpSpPr>
-        <a:xfrm>
-          <a:off x="0" y="0"/>
-          <a:ext cx="0" cy="0"/>
-          <a:chOff x="0" y="0"/>
-          <a:chExt cx="0" cy="0"/>
-        </a:xfrm>
-      </p:grpSpPr>
-      <p:sp>
-        <p:nvSpPr>
-          <p:cNvPr id="88" name="Google Shape;88;g3552527e0a1_1_0:notes">
-            <a:extLst>
-              <a:ext uri="{FF2B5EF4-FFF2-40B4-BE49-F238E27FC236}">
-                <a16:creationId xmlns:a16="http://schemas.microsoft.com/office/drawing/2014/main" id="{B5AEF8AC-09B0-0057-12A9-F9FC8E8B4B61}"/>
-              </a:ext>
-            </a:extLst>
-          </p:cNvPr>
-          <p:cNvSpPr>
-            <a:spLocks noGrp="1" noRot="1" noChangeAspect="1"/>
-          </p:cNvSpPr>
-          <p:nvPr>
-            <p:ph type="sldImg" idx="2"/>
-          </p:nvPr>
-        </p:nvSpPr>
-        <p:spPr>
-          <a:xfrm>
-            <a:off x="381000" y="685800"/>
-            <a:ext cx="6096000" cy="3429000"/>
-          </a:xfrm>
-          <a:custGeom>
-            <a:avLst/>
-            <a:gdLst/>
-            <a:ahLst/>
-            <a:cxnLst/>
-            <a:rect l="l" t="t" r="r" b="b"/>
-            <a:pathLst>
-              <a:path w="120000" h="120000" extrusionOk="0">
-                <a:moveTo>
-                  <a:pt x="0" y="0"/>
-                </a:moveTo>
-                <a:lnTo>
-                  <a:pt x="120000" y="0"/>
-                </a:lnTo>
-                <a:lnTo>
-                  <a:pt x="120000" y="120000"/>
-                </a:lnTo>
-                <a:lnTo>
-                  <a:pt x="0" y="120000"/>
-                </a:lnTo>
-                <a:close/>
-              </a:path>
-            </a:pathLst>
-          </a:custGeom>
-        </p:spPr>
-        <p:txBody>
-          <a:bodyPr/>
-          <a:lstStyle/>
-          <a:p>
-            <a:endParaRPr lang="ru-RU"/>
-          </a:p>
-        </p:txBody>
-      </p:sp>
-      <p:sp>
-        <p:nvSpPr>
-          <p:cNvPr id="89" name="Google Shape;89;g3552527e0a1_1_0:notes">
-            <a:extLst>
-              <a:ext uri="{FF2B5EF4-FFF2-40B4-BE49-F238E27FC236}">
-                <a16:creationId xmlns:a16="http://schemas.microsoft.com/office/drawing/2014/main" id="{5682DA1C-92D4-F969-3AC6-CC70A57A4270}"/>
-              </a:ext>
-            </a:extLst>
-          </p:cNvPr>
-          <p:cNvSpPr txBox="1">
-            <a:spLocks noGrp="1"/>
-          </p:cNvSpPr>
-          <p:nvPr>
-            <p:ph type="body" idx="1"/>
-          </p:nvPr>
-        </p:nvSpPr>
-        <p:spPr>
-          <a:xfrm>
-            <a:off x="685800" y="4343400"/>
-            <a:ext cx="5486400" cy="4114800"/>
-          </a:xfrm>
-          <a:prstGeom prst="rect">
-            <a:avLst/>
-          </a:prstGeom>
-        </p:spPr>
-        <p:txBody>
-          <a:bodyPr spcFirstLastPara="1" wrap="square" lIns="91425" tIns="91425" rIns="91425" bIns="91425" anchor="t" anchorCtr="0">
-            <a:noAutofit/>
-          </a:bodyPr>
-          <a:lstStyle/>
-          <a:p>
-            <a:r>
-              <a:rPr lang="ru-RU" dirty="0"/>
-              <a:t>Алгоритм работает на каждой торговой минуте.</a:t>
-            </a:r>
-          </a:p>
-          <a:p>
-            <a:r>
-              <a:rPr lang="ru-RU" dirty="0"/>
-              <a:t>Сначала проверяются уже открытые позиции. Позиция закрывается, если она удерживается дольше заданного лимита или если прогноз удержания становится недостаточным. В противном случае позиция продолжает удерживаться.</a:t>
-            </a:r>
-          </a:p>
-          <a:p>
-            <a:r>
-              <a:rPr lang="ru-RU" dirty="0"/>
-              <a:t>После этого проверяется возможность покупки новых бумаг. Для открытия позиции прогноз входа должен быть выше порога, а ожидаемая чистая доходность после учёта издержек должна оставаться положительной.</a:t>
-            </a:r>
-          </a:p>
-          <a:p>
-            <a:r>
-              <a:rPr lang="ru-RU" dirty="0"/>
-              <a:t>Если кандидатов несколько, выбираются лучшие бумаги, а капитал распределяется с учётом ограничений стратегии.</a:t>
-            </a:r>
-          </a:p>
-        </p:txBody>
-      </p:sp>
-    </p:spTree>
-    <p:extLst>
-      <p:ext uri="{BB962C8B-B14F-4D97-AF65-F5344CB8AC3E}">
-        <p14:creationId xmlns:p14="http://schemas.microsoft.com/office/powerpoint/2010/main" val="1704705553"/>
-      </p:ext>
-    </p:extLst>
   </p:cSld>
   <p:clrMapOvr>
     <a:masterClrMapping/>
@@ -2161,27 +2002,6 @@
           </a:bodyPr>
           <a:lstStyle/>
           <a:p>
-            <a:r>
-              <a:rPr lang="ru-RU" dirty="0"/>
-              <a:t>Модели получают на вход окно последних минутных наблюдений и предсказывают ожидаемую доходность на нескольких горизонтах: от 1 до 15 минут.</a:t>
-            </a:r>
-          </a:p>
-          <a:p>
-            <a:r>
-              <a:rPr lang="ru-RU" dirty="0"/>
-              <a:t>Отдельно используются прогнозы для входа в позицию и для удержания уже открытой позиции. Это важно, потому что покупка новой бумаги и продолжение удержания текущей позиции — это разные торговые ситуации.</a:t>
-            </a:r>
-          </a:p>
-          <a:p>
-            <a:r>
-              <a:rPr lang="ru-RU" dirty="0"/>
-              <a:t>Далее прогнозы передаются в модуль принятия решений, где дополнительно учитываются порог входа, максимальное количество позиций, издержки покупки и продажи, а также лимит удержания.</a:t>
-            </a:r>
-          </a:p>
-          <a:p>
-            <a:endParaRPr lang="ru-RU" dirty="0"/>
-          </a:p>
-          <a:p>
             <a:pPr marL="0" lvl="0" indent="0" algn="l" rtl="0">
               <a:spcBef>
                 <a:spcPts val="0"/>
@@ -2213,7 +2033,13 @@
   <p:cSld>
     <p:spTree>
       <p:nvGrpSpPr>
-        <p:cNvPr id="1" name="Shape 93"/>
+        <p:cNvPr id="1" name="Shape 87">
+          <a:extLst>
+            <a:ext uri="{FF2B5EF4-FFF2-40B4-BE49-F238E27FC236}">
+              <a16:creationId xmlns:a16="http://schemas.microsoft.com/office/drawing/2014/main" id="{61BD3947-C1E8-DC48-8F67-C6EA98F8B9DA}"/>
+            </a:ext>
+          </a:extLst>
+        </p:cNvPr>
         <p:cNvGrpSpPr/>
         <p:nvPr/>
       </p:nvGrpSpPr>
@@ -2227,7 +2053,13 @@
       </p:grpSpPr>
       <p:sp>
         <p:nvSpPr>
-          <p:cNvPr id="94" name="Google Shape;94;gdabd55fb20_0_25:notes"/>
+          <p:cNvPr id="88" name="Google Shape;88;g3552527e0a1_1_0:notes">
+            <a:extLst>
+              <a:ext uri="{FF2B5EF4-FFF2-40B4-BE49-F238E27FC236}">
+                <a16:creationId xmlns:a16="http://schemas.microsoft.com/office/drawing/2014/main" id="{B5AEF8AC-09B0-0057-12A9-F9FC8E8B4B61}"/>
+              </a:ext>
+            </a:extLst>
+          </p:cNvPr>
           <p:cNvSpPr>
             <a:spLocks noGrp="1" noRot="1" noChangeAspect="1"/>
           </p:cNvSpPr>
@@ -2275,7 +2107,13 @@
       </p:sp>
       <p:sp>
         <p:nvSpPr>
-          <p:cNvPr id="95" name="Google Shape;95;gdabd55fb20_0_25:notes"/>
+          <p:cNvPr id="89" name="Google Shape;89;g3552527e0a1_1_0:notes">
+            <a:extLst>
+              <a:ext uri="{FF2B5EF4-FFF2-40B4-BE49-F238E27FC236}">
+                <a16:creationId xmlns:a16="http://schemas.microsoft.com/office/drawing/2014/main" id="{5682DA1C-92D4-F969-3AC6-CC70A57A4270}"/>
+              </a:ext>
+            </a:extLst>
+          </p:cNvPr>
           <p:cNvSpPr txBox="1">
             <a:spLocks noGrp="1"/>
           </p:cNvSpPr>
@@ -2298,40 +2136,19 @@
           </a:bodyPr>
           <a:lstStyle/>
           <a:p>
-            <a:r>
-              <a:rPr lang="ru-RU" dirty="0"/>
-              <a:t>На этом слайде показаны результаты тестирования стратегии на горизонте 15 минут при издержках 0,01%, 0,03% и 0,05%.</a:t>
-            </a:r>
-          </a:p>
-          <a:p>
-            <a:r>
-              <a:rPr lang="ru-RU" dirty="0"/>
-              <a:t>При минимальных издержках почти все модели дают положительную доходность. Лучший результат показывает гребневая регрессия, далее идут </a:t>
-            </a:r>
-            <a:r>
-              <a:rPr lang="ru-RU" dirty="0" err="1"/>
-              <a:t>Transformer</a:t>
-            </a:r>
-            <a:r>
-              <a:rPr lang="ru-RU" dirty="0"/>
-              <a:t>, LSTM и GRU. ARIMA почти не даёт прибыли и выступает как простое сравнение.</a:t>
-            </a:r>
-          </a:p>
-          <a:p>
-            <a:r>
-              <a:rPr lang="ru-RU" dirty="0"/>
-              <a:t>При росте издержек доходность резко падает, а фактор прибыльности часто становится ниже 1.</a:t>
-            </a:r>
-          </a:p>
-          <a:p>
-            <a:r>
-              <a:rPr lang="ru-RU"/>
-              <a:t>Главный вывод: модели находят торговый сигнал, но результат стратегии сильно зависит от комиссий и биржевого спреда.</a:t>
-            </a:r>
+            <a:pPr marL="158750" indent="0">
+              <a:buNone/>
+            </a:pPr>
+            <a:endParaRPr lang="ru-RU" dirty="0"/>
           </a:p>
         </p:txBody>
       </p:sp>
     </p:spTree>
+    <p:extLst>
+      <p:ext uri="{BB962C8B-B14F-4D97-AF65-F5344CB8AC3E}">
+        <p14:creationId xmlns:p14="http://schemas.microsoft.com/office/powerpoint/2010/main" val="1704705553"/>
+      </p:ext>
+    </p:extLst>
   </p:cSld>
   <p:clrMapOvr>
     <a:masterClrMapping/>
@@ -7343,6 +7160,207 @@
   <p:cSld>
     <p:spTree>
       <p:nvGrpSpPr>
+        <p:cNvPr id="1" name="Shape 96"/>
+        <p:cNvGrpSpPr/>
+        <p:nvPr/>
+      </p:nvGrpSpPr>
+      <p:grpSpPr>
+        <a:xfrm>
+          <a:off x="0" y="0"/>
+          <a:ext cx="0" cy="0"/>
+          <a:chOff x="0" y="0"/>
+          <a:chExt cx="0" cy="0"/>
+        </a:xfrm>
+      </p:grpSpPr>
+      <p:sp>
+        <p:nvSpPr>
+          <p:cNvPr id="97" name="Google Shape;97;p20"/>
+          <p:cNvSpPr txBox="1">
+            <a:spLocks noGrp="1"/>
+          </p:cNvSpPr>
+          <p:nvPr>
+            <p:ph type="title"/>
+          </p:nvPr>
+        </p:nvSpPr>
+        <p:spPr>
+          <a:xfrm>
+            <a:off x="311700" y="445025"/>
+            <a:ext cx="8520600" cy="572700"/>
+          </a:xfrm>
+          <a:prstGeom prst="rect">
+            <a:avLst/>
+          </a:prstGeom>
+        </p:spPr>
+        <p:txBody>
+          <a:bodyPr spcFirstLastPara="1" wrap="square" lIns="91425" tIns="91425" rIns="91425" bIns="91425" anchor="t" anchorCtr="0">
+            <a:normAutofit fontScale="90000"/>
+          </a:bodyPr>
+          <a:lstStyle/>
+          <a:p>
+            <a:pPr marL="0" lvl="0" indent="0" algn="ctr" rtl="0">
+              <a:spcBef>
+                <a:spcPts val="0"/>
+              </a:spcBef>
+              <a:spcAft>
+                <a:spcPts val="0"/>
+              </a:spcAft>
+              <a:buNone/>
+            </a:pPr>
+            <a:r>
+              <a:rPr lang="ru-RU" dirty="0">
+                <a:solidFill>
+                  <a:schemeClr val="tx1"/>
+                </a:solidFill>
+                <a:latin typeface="Times New Roman" panose="02020603050405020304" pitchFamily="18" charset="0"/>
+                <a:cs typeface="Times New Roman" panose="02020603050405020304" pitchFamily="18" charset="0"/>
+              </a:rPr>
+              <a:t>Графики количества сделок</a:t>
+            </a:r>
+            <a:endParaRPr dirty="0">
+              <a:solidFill>
+                <a:schemeClr val="tx1"/>
+              </a:solidFill>
+              <a:latin typeface="Times New Roman" panose="02020603050405020304" pitchFamily="18" charset="0"/>
+              <a:cs typeface="Times New Roman" panose="02020603050405020304" pitchFamily="18" charset="0"/>
+            </a:endParaRPr>
+          </a:p>
+        </p:txBody>
+      </p:sp>
+      <p:sp>
+        <p:nvSpPr>
+          <p:cNvPr id="98" name="Google Shape;98;p20"/>
+          <p:cNvSpPr txBox="1">
+            <a:spLocks noGrp="1"/>
+          </p:cNvSpPr>
+          <p:nvPr>
+            <p:ph type="body" idx="1"/>
+          </p:nvPr>
+        </p:nvSpPr>
+        <p:spPr>
+          <a:xfrm>
+            <a:off x="311700" y="1152475"/>
+            <a:ext cx="8520600" cy="3416400"/>
+          </a:xfrm>
+          <a:prstGeom prst="rect">
+            <a:avLst/>
+          </a:prstGeom>
+        </p:spPr>
+        <p:txBody>
+          <a:bodyPr spcFirstLastPara="1" wrap="square" lIns="91425" tIns="91425" rIns="91425" bIns="91425" anchor="t" anchorCtr="0">
+            <a:normAutofit/>
+          </a:bodyPr>
+          <a:lstStyle/>
+          <a:p>
+            <a:pPr marL="0" lvl="0" indent="0" algn="l" rtl="0">
+              <a:spcBef>
+                <a:spcPts val="1200"/>
+              </a:spcBef>
+              <a:spcAft>
+                <a:spcPts val="1200"/>
+              </a:spcAft>
+              <a:buNone/>
+            </a:pPr>
+            <a:r>
+              <a:rPr lang="ru-RU" dirty="0">
+                <a:latin typeface="Times New Roman" panose="02020603050405020304" pitchFamily="18" charset="0"/>
+                <a:cs typeface="Times New Roman" panose="02020603050405020304" pitchFamily="18" charset="0"/>
+              </a:rPr>
+              <a:t> </a:t>
+            </a:r>
+            <a:endParaRPr dirty="0">
+              <a:latin typeface="Times New Roman" panose="02020603050405020304" pitchFamily="18" charset="0"/>
+              <a:cs typeface="Times New Roman" panose="02020603050405020304" pitchFamily="18" charset="0"/>
+            </a:endParaRPr>
+          </a:p>
+        </p:txBody>
+      </p:sp>
+      <p:sp>
+        <p:nvSpPr>
+          <p:cNvPr id="2" name="Номер слайда 1">
+            <a:extLst>
+              <a:ext uri="{FF2B5EF4-FFF2-40B4-BE49-F238E27FC236}">
+                <a16:creationId xmlns:a16="http://schemas.microsoft.com/office/drawing/2014/main" id="{7AAC3570-04C9-268F-D629-AF60B902A9E3}"/>
+              </a:ext>
+            </a:extLst>
+          </p:cNvPr>
+          <p:cNvSpPr>
+            <a:spLocks noGrp="1"/>
+          </p:cNvSpPr>
+          <p:nvPr>
+            <p:ph type="sldNum" idx="12"/>
+          </p:nvPr>
+        </p:nvSpPr>
+        <p:spPr/>
+        <p:txBody>
+          <a:bodyPr/>
+          <a:lstStyle/>
+          <a:p>
+            <a:pPr marL="0" lvl="0" indent="0" algn="r" rtl="0">
+              <a:spcBef>
+                <a:spcPts val="0"/>
+              </a:spcBef>
+              <a:spcAft>
+                <a:spcPts val="0"/>
+              </a:spcAft>
+              <a:buNone/>
+            </a:pPr>
+            <a:fld id="{00000000-1234-1234-1234-123412341234}" type="slidenum">
+              <a:rPr lang="ru" smtClean="0">
+                <a:latin typeface="Times New Roman" panose="02020603050405020304" pitchFamily="18" charset="0"/>
+                <a:cs typeface="Times New Roman" panose="02020603050405020304" pitchFamily="18" charset="0"/>
+              </a:rPr>
+              <a:t>10</a:t>
+            </a:fld>
+            <a:endParaRPr lang="ru">
+              <a:latin typeface="Times New Roman" panose="02020603050405020304" pitchFamily="18" charset="0"/>
+              <a:cs typeface="Times New Roman" panose="02020603050405020304" pitchFamily="18" charset="0"/>
+            </a:endParaRPr>
+          </a:p>
+        </p:txBody>
+      </p:sp>
+      <p:pic>
+        <p:nvPicPr>
+          <p:cNvPr id="4" name="Рисунок 3">
+            <a:extLst>
+              <a:ext uri="{FF2B5EF4-FFF2-40B4-BE49-F238E27FC236}">
+                <a16:creationId xmlns:a16="http://schemas.microsoft.com/office/drawing/2014/main" id="{FD87DC0B-EE6F-A6F5-73FD-910DF912EB6C}"/>
+              </a:ext>
+            </a:extLst>
+          </p:cNvPr>
+          <p:cNvPicPr>
+            <a:picLocks noChangeAspect="1"/>
+          </p:cNvPicPr>
+          <p:nvPr/>
+        </p:nvPicPr>
+        <p:blipFill>
+          <a:blip r:embed="rId3"/>
+          <a:stretch>
+            <a:fillRect/>
+          </a:stretch>
+        </p:blipFill>
+        <p:spPr>
+          <a:xfrm>
+            <a:off x="887377" y="1017725"/>
+            <a:ext cx="7369245" cy="4094025"/>
+          </a:xfrm>
+          <a:prstGeom prst="rect">
+            <a:avLst/>
+          </a:prstGeom>
+        </p:spPr>
+      </p:pic>
+    </p:spTree>
+  </p:cSld>
+  <p:clrMapOvr>
+    <a:masterClrMapping/>
+  </p:clrMapOvr>
+</p:sld>
+</file>
+
+<file path=ppt/slides/slide11.xml><?xml version="1.0" encoding="utf-8"?>
+<p:sld xmlns:a="http://schemas.openxmlformats.org/drawingml/2006/main" xmlns:r="http://schemas.openxmlformats.org/officeDocument/2006/relationships" xmlns:p="http://schemas.openxmlformats.org/presentationml/2006/main">
+  <p:cSld>
+    <p:spTree>
+      <p:nvGrpSpPr>
         <p:cNvPr id="1" name="Shape 96">
           <a:extLst>
             <a:ext uri="{FF2B5EF4-FFF2-40B4-BE49-F238E27FC236}">
@@ -7462,10 +7480,16 @@
               <a:buNone/>
             </a:pPr>
             <a:r>
-              <a:rPr lang="ru-RU" dirty="0"/>
+              <a:rPr lang="ru-RU" dirty="0">
+                <a:latin typeface="Times New Roman" panose="02020603050405020304" pitchFamily="18" charset="0"/>
+                <a:cs typeface="Times New Roman" panose="02020603050405020304" pitchFamily="18" charset="0"/>
+              </a:rPr>
               <a:t> </a:t>
             </a:r>
-            <a:endParaRPr dirty="0"/>
+            <a:endParaRPr dirty="0">
+              <a:latin typeface="Times New Roman" panose="02020603050405020304" pitchFamily="18" charset="0"/>
+              <a:cs typeface="Times New Roman" panose="02020603050405020304" pitchFamily="18" charset="0"/>
+            </a:endParaRPr>
           </a:p>
         </p:txBody>
       </p:sp>
@@ -7500,10 +7524,16 @@
               <a:buNone/>
             </a:pPr>
             <a:fld id="{00000000-1234-1234-1234-123412341234}" type="slidenum">
-              <a:rPr lang="ru" smtClean="0"/>
-              <a:t>10</a:t>
+              <a:rPr lang="ru" smtClean="0">
+                <a:latin typeface="Times New Roman" panose="02020603050405020304" pitchFamily="18" charset="0"/>
+                <a:cs typeface="Times New Roman" panose="02020603050405020304" pitchFamily="18" charset="0"/>
+              </a:rPr>
+              <a:t>11</a:t>
             </a:fld>
-            <a:endParaRPr lang="ru"/>
+            <a:endParaRPr lang="ru">
+              <a:latin typeface="Times New Roman" panose="02020603050405020304" pitchFamily="18" charset="0"/>
+              <a:cs typeface="Times New Roman" panose="02020603050405020304" pitchFamily="18" charset="0"/>
+            </a:endParaRPr>
           </a:p>
         </p:txBody>
       </p:sp>
@@ -7512,7 +7542,7 @@
           <p:cNvPr id="5" name="Рисунок 4">
             <a:extLst>
               <a:ext uri="{FF2B5EF4-FFF2-40B4-BE49-F238E27FC236}">
-                <a16:creationId xmlns:a16="http://schemas.microsoft.com/office/drawing/2014/main" id="{477C0450-9A14-9703-B562-B1D30997FC30}"/>
+                <a16:creationId xmlns:a16="http://schemas.microsoft.com/office/drawing/2014/main" id="{F59A0DF0-979D-2C5B-F79F-8DE9B47EFC9A}"/>
               </a:ext>
             </a:extLst>
           </p:cNvPr>
@@ -7529,8 +7559,8 @@
         </p:blipFill>
         <p:spPr>
           <a:xfrm>
-            <a:off x="883227" y="1017725"/>
-            <a:ext cx="7377545" cy="4098636"/>
+            <a:off x="1003610" y="1152475"/>
+            <a:ext cx="7136780" cy="3964878"/>
           </a:xfrm>
           <a:prstGeom prst="rect">
             <a:avLst/>
@@ -7550,7 +7580,7 @@
 </p:sld>
 </file>
 
-<file path=ppt/slides/slide11.xml><?xml version="1.0" encoding="utf-8"?>
+<file path=ppt/slides/slide12.xml><?xml version="1.0" encoding="utf-8"?>
 <p:sld xmlns:a="http://schemas.openxmlformats.org/drawingml/2006/main" xmlns:r="http://schemas.openxmlformats.org/officeDocument/2006/relationships" xmlns:p="http://schemas.openxmlformats.org/presentationml/2006/main">
   <p:cSld>
     <p:spTree>
@@ -7753,7 +7783,7 @@
                 <a:latin typeface="Times New Roman" panose="02020603050405020304" pitchFamily="18" charset="0"/>
                 <a:cs typeface="Times New Roman" panose="02020603050405020304" pitchFamily="18" charset="0"/>
               </a:rPr>
-              <a:t>Итог: разработан программный прототип системы алгоритмического онлайн-трейдинга.</a:t>
+              <a:t>Итог: разработана система алгоритмического онлайн-трейдинга, повышающая его эффективность.</a:t>
             </a:r>
             <a:endParaRPr dirty="0">
               <a:solidFill>
@@ -7800,7 +7830,7 @@
                 <a:latin typeface="Times New Roman" panose="02020603050405020304" pitchFamily="18" charset="0"/>
                 <a:cs typeface="Times New Roman" panose="02020603050405020304" pitchFamily="18" charset="0"/>
               </a:rPr>
-              <a:t>11</a:t>
+              <a:t>12</a:t>
             </a:fld>
             <a:endParaRPr lang="ru">
               <a:latin typeface="Times New Roman" panose="02020603050405020304" pitchFamily="18" charset="0"/>
@@ -7817,7 +7847,7 @@
 </p:sld>
 </file>
 
-<file path=ppt/slides/slide12.xml><?xml version="1.0" encoding="utf-8"?>
+<file path=ppt/slides/slide13.xml><?xml version="1.0" encoding="utf-8"?>
 <p:sld xmlns:a="http://schemas.openxmlformats.org/drawingml/2006/main" xmlns:r="http://schemas.openxmlformats.org/officeDocument/2006/relationships" xmlns:p="http://schemas.openxmlformats.org/presentationml/2006/main">
   <p:cSld>
     <p:spTree>
@@ -7965,7 +7995,7 @@
                 <a:latin typeface="Times New Roman" panose="02020603050405020304" pitchFamily="18" charset="0"/>
                 <a:cs typeface="Times New Roman" panose="02020603050405020304" pitchFamily="18" charset="0"/>
               </a:rPr>
-              <a:t>12</a:t>
+              <a:t>13</a:t>
             </a:fld>
             <a:endParaRPr lang="ru">
               <a:latin typeface="Times New Roman" panose="02020603050405020304" pitchFamily="18" charset="0"/>
@@ -8692,16 +8722,19 @@
               </a:rPr>
               <a:t>OHLCV</a:t>
             </a:r>
-            <a:endParaRPr lang="ru-RU" sz="1800" dirty="0">
-              <a:solidFill>
-                <a:schemeClr val="tx1">
-                  <a:lumMod val="50000"/>
-                  <a:lumOff val="50000"/>
-                </a:schemeClr>
-              </a:solidFill>
-              <a:latin typeface="Times New Roman" panose="02020603050405020304" pitchFamily="18" charset="0"/>
-              <a:cs typeface="Times New Roman" panose="02020603050405020304" pitchFamily="18" charset="0"/>
-            </a:endParaRPr>
+            <a:r>
+              <a:rPr lang="ru-RU" sz="1800" dirty="0">
+                <a:solidFill>
+                  <a:schemeClr val="tx1">
+                    <a:lumMod val="50000"/>
+                    <a:lumOff val="50000"/>
+                  </a:schemeClr>
+                </a:solidFill>
+                <a:latin typeface="Times New Roman" panose="02020603050405020304" pitchFamily="18" charset="0"/>
+                <a:cs typeface="Times New Roman" panose="02020603050405020304" pitchFamily="18" charset="0"/>
+              </a:rPr>
+              <a:t>.</a:t>
+            </a:r>
           </a:p>
         </p:txBody>
       </p:sp>
@@ -8721,7 +8754,7 @@
         </p:nvSpPr>
         <p:spPr>
           <a:xfrm>
-            <a:off x="311700" y="2826443"/>
+            <a:off x="311700" y="2934111"/>
             <a:ext cx="8520600" cy="612087"/>
           </a:xfrm>
           <a:prstGeom prst="rect">
@@ -9024,7 +9057,7 @@
         <p:spPr>
           <a:xfrm>
             <a:off x="450554" y="3472706"/>
-            <a:ext cx="8520600" cy="612087"/>
+            <a:ext cx="8520600" cy="965116"/>
           </a:xfrm>
           <a:prstGeom prst="rect">
             <a:avLst/>
@@ -9297,7 +9330,7 @@
                 <a:latin typeface="Times New Roman" panose="02020603050405020304" pitchFamily="18" charset="0"/>
                 <a:cs typeface="Times New Roman" panose="02020603050405020304" pitchFamily="18" charset="0"/>
               </a:rPr>
-              <a:t>Прогноз цены сам по себе недостаточен: необходимо преобразовать прогноз в торговое действие с учётом реальных ограничений рынка</a:t>
+              <a:t>Прогноз цены сам по себе недостаточен: необходимо преобразовать прогноз в торговое действие с учётом реальных ограничений рынка, поэтому в работе рассматривается полный контур: прогнозирование и принятие решений.</a:t>
             </a:r>
           </a:p>
         </p:txBody>
@@ -9627,6 +9660,284 @@
 </file>
 
 <file path=ppt/slides/slide4.xml><?xml version="1.0" encoding="utf-8"?>
+<p:sld xmlns:a="http://schemas.openxmlformats.org/drawingml/2006/main" xmlns:r="http://schemas.openxmlformats.org/officeDocument/2006/relationships" xmlns:p="http://schemas.openxmlformats.org/presentationml/2006/main">
+  <p:cSld>
+    <p:spTree>
+      <p:nvGrpSpPr>
+        <p:cNvPr id="1" name=""/>
+        <p:cNvGrpSpPr/>
+        <p:nvPr/>
+      </p:nvGrpSpPr>
+      <p:grpSpPr>
+        <a:xfrm>
+          <a:off x="0" y="0"/>
+          <a:ext cx="0" cy="0"/>
+          <a:chOff x="0" y="0"/>
+          <a:chExt cx="0" cy="0"/>
+        </a:xfrm>
+      </p:grpSpPr>
+      <p:sp>
+        <p:nvSpPr>
+          <p:cNvPr id="3" name="Текст 2">
+            <a:extLst>
+              <a:ext uri="{FF2B5EF4-FFF2-40B4-BE49-F238E27FC236}">
+                <a16:creationId xmlns:a16="http://schemas.microsoft.com/office/drawing/2014/main" id="{6937B550-B490-E334-D0C0-CEB3B6C90525}"/>
+              </a:ext>
+            </a:extLst>
+          </p:cNvPr>
+          <p:cNvSpPr>
+            <a:spLocks noGrp="1"/>
+          </p:cNvSpPr>
+          <p:nvPr>
+            <p:ph type="body" idx="1"/>
+          </p:nvPr>
+        </p:nvSpPr>
+        <p:spPr/>
+        <p:txBody>
+          <a:bodyPr/>
+          <a:lstStyle/>
+          <a:p>
+            <a:pPr marL="114300" indent="0">
+              <a:buNone/>
+            </a:pPr>
+            <a:r>
+              <a:rPr lang="ru-RU" dirty="0">
+                <a:latin typeface="Times New Roman" panose="02020603050405020304" pitchFamily="18" charset="0"/>
+                <a:cs typeface="Times New Roman" panose="02020603050405020304" pitchFamily="18" charset="0"/>
+              </a:rPr>
+              <a:t> </a:t>
+            </a:r>
+          </a:p>
+        </p:txBody>
+      </p:sp>
+      <p:sp>
+        <p:nvSpPr>
+          <p:cNvPr id="4" name="Номер слайда 3">
+            <a:extLst>
+              <a:ext uri="{FF2B5EF4-FFF2-40B4-BE49-F238E27FC236}">
+                <a16:creationId xmlns:a16="http://schemas.microsoft.com/office/drawing/2014/main" id="{A9A81207-E4B4-151D-0C5F-5DF1A9CC4219}"/>
+              </a:ext>
+            </a:extLst>
+          </p:cNvPr>
+          <p:cNvSpPr>
+            <a:spLocks noGrp="1"/>
+          </p:cNvSpPr>
+          <p:nvPr>
+            <p:ph type="sldNum" idx="12"/>
+          </p:nvPr>
+        </p:nvSpPr>
+        <p:spPr/>
+        <p:txBody>
+          <a:bodyPr/>
+          <a:lstStyle/>
+          <a:p>
+            <a:pPr marL="0" lvl="0" indent="0" algn="r" rtl="0">
+              <a:spcBef>
+                <a:spcPts val="0"/>
+              </a:spcBef>
+              <a:spcAft>
+                <a:spcPts val="0"/>
+              </a:spcAft>
+              <a:buNone/>
+            </a:pPr>
+            <a:fld id="{00000000-1234-1234-1234-123412341234}" type="slidenum">
+              <a:rPr lang="ru" smtClean="0">
+                <a:latin typeface="Times New Roman" panose="02020603050405020304" pitchFamily="18" charset="0"/>
+                <a:cs typeface="Times New Roman" panose="02020603050405020304" pitchFamily="18" charset="0"/>
+              </a:rPr>
+              <a:t>4</a:t>
+            </a:fld>
+            <a:endParaRPr lang="ru">
+              <a:latin typeface="Times New Roman" panose="02020603050405020304" pitchFamily="18" charset="0"/>
+              <a:cs typeface="Times New Roman" panose="02020603050405020304" pitchFamily="18" charset="0"/>
+            </a:endParaRPr>
+          </a:p>
+        </p:txBody>
+      </p:sp>
+      <p:sp>
+        <p:nvSpPr>
+          <p:cNvPr id="2" name="Заголовок 1">
+            <a:extLst>
+              <a:ext uri="{FF2B5EF4-FFF2-40B4-BE49-F238E27FC236}">
+                <a16:creationId xmlns:a16="http://schemas.microsoft.com/office/drawing/2014/main" id="{7B77078B-B912-5E49-9145-291938561425}"/>
+              </a:ext>
+            </a:extLst>
+          </p:cNvPr>
+          <p:cNvSpPr>
+            <a:spLocks noGrp="1"/>
+          </p:cNvSpPr>
+          <p:nvPr>
+            <p:ph type="title"/>
+          </p:nvPr>
+        </p:nvSpPr>
+        <p:spPr/>
+        <p:txBody>
+          <a:bodyPr>
+            <a:normAutofit fontScale="90000"/>
+          </a:bodyPr>
+          <a:lstStyle/>
+          <a:p>
+            <a:pPr algn="ctr"/>
+            <a:r>
+              <a:rPr lang="ru-RU" dirty="0">
+                <a:latin typeface="Times New Roman" panose="02020603050405020304" pitchFamily="18" charset="0"/>
+                <a:cs typeface="Times New Roman" panose="02020603050405020304" pitchFamily="18" charset="0"/>
+              </a:rPr>
+              <a:t>Этапы выполнения работы</a:t>
+            </a:r>
+          </a:p>
+        </p:txBody>
+      </p:sp>
+      <p:sp>
+        <p:nvSpPr>
+          <p:cNvPr id="5" name="TextBox 4">
+            <a:extLst>
+              <a:ext uri="{FF2B5EF4-FFF2-40B4-BE49-F238E27FC236}">
+                <a16:creationId xmlns:a16="http://schemas.microsoft.com/office/drawing/2014/main" id="{73F66B09-1390-E75C-6FA9-86761AC638A1}"/>
+              </a:ext>
+            </a:extLst>
+          </p:cNvPr>
+          <p:cNvSpPr txBox="1"/>
+          <p:nvPr/>
+        </p:nvSpPr>
+        <p:spPr>
+          <a:xfrm>
+            <a:off x="395868" y="1263988"/>
+            <a:ext cx="3590693" cy="3108543"/>
+          </a:xfrm>
+          <a:prstGeom prst="rect">
+            <a:avLst/>
+          </a:prstGeom>
+          <a:noFill/>
+        </p:spPr>
+        <p:txBody>
+          <a:bodyPr wrap="square" rtlCol="0">
+            <a:spAutoFit/>
+          </a:bodyPr>
+          <a:lstStyle/>
+          <a:p>
+            <a:pPr marL="285750" indent="-285750">
+              <a:buFont typeface="Arial" panose="020B0604020202020204" pitchFamily="34" charset="0"/>
+              <a:buChar char="•"/>
+            </a:pPr>
+            <a:r>
+              <a:rPr lang="ru-RU" dirty="0">
+                <a:latin typeface="Times New Roman" panose="02020603050405020304" pitchFamily="18" charset="0"/>
+                <a:cs typeface="Times New Roman" panose="02020603050405020304" pitchFamily="18" charset="0"/>
+              </a:rPr>
+              <a:t>Повышение эффективности заключается в создании единого модуля принятия решений и предложении стратегий на основе искусственного интеллекта – методы машинного обучения и нейросетевые модели.</a:t>
+            </a:r>
+            <a:endParaRPr lang="en-US" dirty="0">
+              <a:latin typeface="Times New Roman" panose="02020603050405020304" pitchFamily="18" charset="0"/>
+              <a:cs typeface="Times New Roman" panose="02020603050405020304" pitchFamily="18" charset="0"/>
+            </a:endParaRPr>
+          </a:p>
+          <a:p>
+            <a:pPr marL="285750" indent="-285750">
+              <a:buFont typeface="Arial" panose="020B0604020202020204" pitchFamily="34" charset="0"/>
+              <a:buChar char="•"/>
+            </a:pPr>
+            <a:endParaRPr lang="ru-RU" dirty="0">
+              <a:latin typeface="Times New Roman" panose="02020603050405020304" pitchFamily="18" charset="0"/>
+              <a:cs typeface="Times New Roman" panose="02020603050405020304" pitchFamily="18" charset="0"/>
+            </a:endParaRPr>
+          </a:p>
+          <a:p>
+            <a:pPr marL="285750" indent="-285750">
+              <a:buFont typeface="Arial" panose="020B0604020202020204" pitchFamily="34" charset="0"/>
+              <a:buChar char="•"/>
+            </a:pPr>
+            <a:r>
+              <a:rPr lang="ru-RU" dirty="0">
+                <a:latin typeface="Times New Roman" panose="02020603050405020304" pitchFamily="18" charset="0"/>
+                <a:cs typeface="Times New Roman" panose="02020603050405020304" pitchFamily="18" charset="0"/>
+              </a:rPr>
+              <a:t>Были взяты существующие стратегии на основе правил и предложены ИИ подходы, которые</a:t>
+            </a:r>
+            <a:r>
+              <a:rPr lang="en-US" dirty="0">
+                <a:latin typeface="Times New Roman" panose="02020603050405020304" pitchFamily="18" charset="0"/>
+                <a:cs typeface="Times New Roman" panose="02020603050405020304" pitchFamily="18" charset="0"/>
+              </a:rPr>
+              <a:t> </a:t>
+            </a:r>
+            <a:r>
+              <a:rPr lang="ru-RU" dirty="0">
+                <a:latin typeface="Times New Roman" panose="02020603050405020304" pitchFamily="18" charset="0"/>
+                <a:cs typeface="Times New Roman" panose="02020603050405020304" pitchFamily="18" charset="0"/>
+              </a:rPr>
+              <a:t>потенциально имели более высокую предсказательную силу.</a:t>
+            </a:r>
+          </a:p>
+          <a:p>
+            <a:pPr marL="285750" indent="-285750">
+              <a:buFont typeface="Arial" panose="020B0604020202020204" pitchFamily="34" charset="0"/>
+              <a:buChar char="•"/>
+            </a:pPr>
+            <a:endParaRPr lang="ru-RU" dirty="0">
+              <a:latin typeface="Times New Roman" panose="02020603050405020304" pitchFamily="18" charset="0"/>
+              <a:cs typeface="Times New Roman" panose="02020603050405020304" pitchFamily="18" charset="0"/>
+            </a:endParaRPr>
+          </a:p>
+          <a:p>
+            <a:pPr marL="285750" indent="-285750">
+              <a:buFont typeface="Arial" panose="020B0604020202020204" pitchFamily="34" charset="0"/>
+              <a:buChar char="•"/>
+            </a:pPr>
+            <a:r>
+              <a:rPr lang="ru-RU" dirty="0">
+                <a:latin typeface="Times New Roman" panose="02020603050405020304" pitchFamily="18" charset="0"/>
+                <a:cs typeface="Times New Roman" panose="02020603050405020304" pitchFamily="18" charset="0"/>
+              </a:rPr>
+              <a:t>Общий контур решения представлен на диаграмме вариантов использования</a:t>
+            </a:r>
+          </a:p>
+        </p:txBody>
+      </p:sp>
+      <p:pic>
+        <p:nvPicPr>
+          <p:cNvPr id="6" name="Рисунок 5" descr="PlantUML diagram">
+            <a:extLst>
+              <a:ext uri="{FF2B5EF4-FFF2-40B4-BE49-F238E27FC236}">
+                <a16:creationId xmlns:a16="http://schemas.microsoft.com/office/drawing/2014/main" id="{7EA84374-0303-580E-D954-2232B2DD8335}"/>
+              </a:ext>
+            </a:extLst>
+          </p:cNvPr>
+          <p:cNvPicPr>
+            <a:picLocks noChangeAspect="1"/>
+          </p:cNvPicPr>
+          <p:nvPr/>
+        </p:nvPicPr>
+        <p:blipFill>
+          <a:blip r:embed="rId3"/>
+          <a:stretch>
+            <a:fillRect/>
+          </a:stretch>
+        </p:blipFill>
+        <p:spPr>
+          <a:xfrm>
+            <a:off x="4572000" y="1152475"/>
+            <a:ext cx="3419125" cy="3857626"/>
+          </a:xfrm>
+          <a:prstGeom prst="rect">
+            <a:avLst/>
+          </a:prstGeom>
+        </p:spPr>
+      </p:pic>
+    </p:spTree>
+    <p:extLst>
+      <p:ext uri="{BB962C8B-B14F-4D97-AF65-F5344CB8AC3E}">
+        <p14:creationId xmlns:p14="http://schemas.microsoft.com/office/powerpoint/2010/main" val="1585884836"/>
+      </p:ext>
+    </p:extLst>
+  </p:cSld>
+  <p:clrMapOvr>
+    <a:masterClrMapping/>
+  </p:clrMapOvr>
+</p:sld>
+</file>
+
+<file path=ppt/slides/slide5.xml><?xml version="1.0" encoding="utf-8"?>
 <p:sld xmlns:a="http://schemas.openxmlformats.org/drawingml/2006/main" xmlns:r="http://schemas.openxmlformats.org/officeDocument/2006/relationships" xmlns:p="http://schemas.openxmlformats.org/presentationml/2006/main">
   <p:cSld>
     <p:spTree>
@@ -9694,7 +10005,14 @@
                 <a:latin typeface="Times New Roman" panose="02020603050405020304" pitchFamily="18" charset="0"/>
                 <a:cs typeface="Times New Roman" panose="02020603050405020304" pitchFamily="18" charset="0"/>
               </a:rPr>
-              <a:t>Сравнение средств исторического тестирования</a:t>
+              <a:t>Сравнение </a:t>
+            </a:r>
+            <a:r>
+              <a:rPr lang="ru-RU" dirty="0">
+                <a:latin typeface="Times New Roman" panose="02020603050405020304" pitchFamily="18" charset="0"/>
+                <a:cs typeface="Times New Roman" panose="02020603050405020304" pitchFamily="18" charset="0"/>
+              </a:rPr>
+              <a:t>методов прогнозирования</a:t>
             </a:r>
             <a:endParaRPr dirty="0">
               <a:latin typeface="Times New Roman" panose="02020603050405020304" pitchFamily="18" charset="0"/>
@@ -9718,7 +10036,7 @@
           <p:nvPr>
             <p:extLst>
               <p:ext uri="{D42A27DB-BD31-4B8C-83A1-F6EECF244321}">
-                <p14:modId xmlns:p14="http://schemas.microsoft.com/office/powerpoint/2010/main" val="4068570933"/>
+                <p14:modId xmlns:p14="http://schemas.microsoft.com/office/powerpoint/2010/main" val="3004986330"/>
               </p:ext>
             </p:extLst>
           </p:nvPr>
@@ -9762,14 +10080,14 @@
                     </a:ext>
                   </a:extLst>
                 </a:gridCol>
-                <a:gridCol w="1509080">
+                <a:gridCol w="1333420">
                   <a:extLst>
                     <a:ext uri="{9D8B030D-6E8A-4147-A177-3AD203B41FA5}">
                       <a16:colId xmlns:a16="http://schemas.microsoft.com/office/drawing/2014/main" val="1650913469"/>
                     </a:ext>
                   </a:extLst>
                 </a:gridCol>
-                <a:gridCol w="1351083">
+                <a:gridCol w="1526743">
                   <a:extLst>
                     <a:ext uri="{9D8B030D-6E8A-4147-A177-3AD203B41FA5}">
                       <a16:colId xmlns:a16="http://schemas.microsoft.com/office/drawing/2014/main" val="824048194"/>
@@ -9878,7 +10196,7 @@
                           <a:latin typeface="Times New Roman" panose="02020603050405020304" pitchFamily="18" charset="0"/>
                           <a:cs typeface="Times New Roman" panose="02020603050405020304" pitchFamily="18" charset="0"/>
                         </a:rPr>
-                        <a:t>Вычислительная сложность</a:t>
+                        <a:t>Вычислитель-ная сложность</a:t>
                       </a:r>
                     </a:p>
                   </a:txBody>
@@ -9902,7 +10220,7 @@
                           <a:latin typeface="Times New Roman" panose="02020603050405020304" pitchFamily="18" charset="0"/>
                           <a:cs typeface="Times New Roman" panose="02020603050405020304" pitchFamily="18" charset="0"/>
                         </a:rPr>
-                        <a:t>Стратегии на основе правил</a:t>
+                        <a:t>Методы на основе правил</a:t>
                       </a:r>
                     </a:p>
                   </a:txBody>
@@ -10382,7 +10700,7 @@
                 <a:latin typeface="Times New Roman" panose="02020603050405020304" pitchFamily="18" charset="0"/>
                 <a:cs typeface="Times New Roman" panose="02020603050405020304" pitchFamily="18" charset="0"/>
               </a:rPr>
-              <a:t>4</a:t>
+              <a:t>5</a:t>
             </a:fld>
             <a:endParaRPr lang="ru">
               <a:latin typeface="Times New Roman" panose="02020603050405020304" pitchFamily="18" charset="0"/>
@@ -10404,7 +10722,7 @@
 </p:sld>
 </file>
 
-<file path=ppt/slides/slide5.xml><?xml version="1.0" encoding="utf-8"?>
+<file path=ppt/slides/slide6.xml><?xml version="1.0" encoding="utf-8"?>
 <p:sld xmlns:a="http://schemas.openxmlformats.org/drawingml/2006/main" xmlns:r="http://schemas.openxmlformats.org/officeDocument/2006/relationships" xmlns:p="http://schemas.openxmlformats.org/presentationml/2006/main">
   <p:cSld>
     <p:spTree>
@@ -10456,2464 +10774,13 @@
               <a:buNone/>
             </a:pPr>
             <a:r>
-              <a:rPr lang="ru" dirty="0">
-                <a:latin typeface="Times New Roman" panose="02020603050405020304" pitchFamily="18" charset="0"/>
-                <a:cs typeface="Times New Roman" panose="02020603050405020304" pitchFamily="18" charset="0"/>
-              </a:rPr>
-              <a:t>Материалы и методы</a:t>
-            </a:r>
-            <a:r>
               <a:rPr lang="ru-RU" dirty="0">
                 <a:latin typeface="Times New Roman" panose="02020603050405020304" pitchFamily="18" charset="0"/>
                 <a:cs typeface="Times New Roman" panose="02020603050405020304" pitchFamily="18" charset="0"/>
               </a:rPr>
-              <a:t> подготовки данных</a:t>
+              <a:t>Метод подготовки данных</a:t>
             </a:r>
             <a:endParaRPr dirty="0">
-              <a:latin typeface="Times New Roman" panose="02020603050405020304" pitchFamily="18" charset="0"/>
-              <a:cs typeface="Times New Roman" panose="02020603050405020304" pitchFamily="18" charset="0"/>
-            </a:endParaRPr>
-          </a:p>
-        </p:txBody>
-      </p:sp>
-      <p:sp>
-        <p:nvSpPr>
-          <p:cNvPr id="80" name="Google Shape;80;p17"/>
-          <p:cNvSpPr txBox="1">
-            <a:spLocks noGrp="1"/>
-          </p:cNvSpPr>
-          <p:nvPr>
-            <p:ph type="body" idx="1"/>
-          </p:nvPr>
-        </p:nvSpPr>
-        <p:spPr>
-          <a:xfrm>
-            <a:off x="372565" y="2058574"/>
-            <a:ext cx="1740099" cy="406161"/>
-          </a:xfrm>
-          <a:prstGeom prst="rect">
-            <a:avLst/>
-          </a:prstGeom>
-        </p:spPr>
-        <p:txBody>
-          <a:bodyPr spcFirstLastPara="1" wrap="square" lIns="91425" tIns="91425" rIns="91425" bIns="91425" anchor="ctr" anchorCtr="0">
-            <a:noAutofit/>
-          </a:bodyPr>
-          <a:lstStyle/>
-          <a:p>
-            <a:pPr marL="0" lvl="0" indent="0" algn="ctr" rtl="0">
-              <a:spcBef>
-                <a:spcPts val="0"/>
-              </a:spcBef>
-              <a:spcAft>
-                <a:spcPts val="0"/>
-              </a:spcAft>
-              <a:buNone/>
-            </a:pPr>
-            <a:r>
-              <a:rPr lang="ru-RU" sz="1400" dirty="0">
-                <a:solidFill>
-                  <a:schemeClr val="tx1"/>
-                </a:solidFill>
-                <a:latin typeface="Times New Roman" panose="02020603050405020304" pitchFamily="18" charset="0"/>
-                <a:cs typeface="Times New Roman" panose="02020603050405020304" pitchFamily="18" charset="0"/>
-              </a:rPr>
-              <a:t> </a:t>
-            </a:r>
-            <a:r>
-              <a:rPr lang="en-US" sz="1400" dirty="0">
-                <a:solidFill>
-                  <a:schemeClr val="tx1"/>
-                </a:solidFill>
-                <a:latin typeface="Times New Roman" panose="02020603050405020304" pitchFamily="18" charset="0"/>
-                <a:cs typeface="Times New Roman" panose="02020603050405020304" pitchFamily="18" charset="0"/>
-              </a:rPr>
-              <a:t>MOEX ISS API</a:t>
-            </a:r>
-            <a:endParaRPr lang="ru-RU" sz="1400" dirty="0">
-              <a:solidFill>
-                <a:schemeClr val="tx1"/>
-              </a:solidFill>
-              <a:latin typeface="Times New Roman" panose="02020603050405020304" pitchFamily="18" charset="0"/>
-              <a:cs typeface="Times New Roman" panose="02020603050405020304" pitchFamily="18" charset="0"/>
-            </a:endParaRPr>
-          </a:p>
-        </p:txBody>
-      </p:sp>
-      <p:sp>
-        <p:nvSpPr>
-          <p:cNvPr id="6" name="Google Shape;80;p17">
-            <a:extLst>
-              <a:ext uri="{FF2B5EF4-FFF2-40B4-BE49-F238E27FC236}">
-                <a16:creationId xmlns:a16="http://schemas.microsoft.com/office/drawing/2014/main" id="{AC0D3561-9207-39A5-B374-3265DBEC99BD}"/>
-              </a:ext>
-            </a:extLst>
-          </p:cNvPr>
-          <p:cNvSpPr txBox="1">
-            <a:spLocks/>
-          </p:cNvSpPr>
-          <p:nvPr/>
-        </p:nvSpPr>
-        <p:spPr>
-          <a:xfrm>
-            <a:off x="4168633" y="1941315"/>
-            <a:ext cx="1625647" cy="624371"/>
-          </a:xfrm>
-          <a:prstGeom prst="rect">
-            <a:avLst/>
-          </a:prstGeom>
-          <a:noFill/>
-          <a:ln>
-            <a:noFill/>
-          </a:ln>
-        </p:spPr>
-        <p:txBody>
-          <a:bodyPr spcFirstLastPara="1" wrap="square" lIns="91425" tIns="91425" rIns="91425" bIns="91425" anchor="ctr" anchorCtr="0">
-            <a:noAutofit/>
-          </a:bodyPr>
-          <a:lstStyle>
-            <a:defPPr marR="0" lvl="0" algn="l" rtl="0">
-              <a:lnSpc>
-                <a:spcPct val="100000"/>
-              </a:lnSpc>
-              <a:spcBef>
-                <a:spcPts val="0"/>
-              </a:spcBef>
-              <a:spcAft>
-                <a:spcPts val="0"/>
-              </a:spcAft>
-            </a:defPPr>
-            <a:lvl1pPr marL="457200" marR="0" lvl="0" indent="-342900" algn="l" rtl="0">
-              <a:lnSpc>
-                <a:spcPct val="115000"/>
-              </a:lnSpc>
-              <a:spcBef>
-                <a:spcPts val="0"/>
-              </a:spcBef>
-              <a:spcAft>
-                <a:spcPts val="0"/>
-              </a:spcAft>
-              <a:buClr>
-                <a:schemeClr val="dk2"/>
-              </a:buClr>
-              <a:buSzPts val="1800"/>
-              <a:buFont typeface="Arial"/>
-              <a:buChar char="●"/>
-              <a:defRPr sz="1800" b="0" i="0" u="none" strike="noStrike" cap="none">
-                <a:solidFill>
-                  <a:schemeClr val="dk2"/>
-                </a:solidFill>
-                <a:latin typeface="Arial"/>
-                <a:ea typeface="Arial"/>
-                <a:cs typeface="Arial"/>
-                <a:sym typeface="Arial"/>
-              </a:defRPr>
-            </a:lvl1pPr>
-            <a:lvl2pPr marL="914400" marR="0" lvl="1" indent="-317500" algn="l" rtl="0">
-              <a:lnSpc>
-                <a:spcPct val="115000"/>
-              </a:lnSpc>
-              <a:spcBef>
-                <a:spcPts val="0"/>
-              </a:spcBef>
-              <a:spcAft>
-                <a:spcPts val="0"/>
-              </a:spcAft>
-              <a:buClr>
-                <a:schemeClr val="dk2"/>
-              </a:buClr>
-              <a:buSzPts val="1400"/>
-              <a:buFont typeface="Arial"/>
-              <a:buChar char="○"/>
-              <a:defRPr sz="1400" b="0" i="0" u="none" strike="noStrike" cap="none">
-                <a:solidFill>
-                  <a:schemeClr val="dk2"/>
-                </a:solidFill>
-                <a:latin typeface="Arial"/>
-                <a:ea typeface="Arial"/>
-                <a:cs typeface="Arial"/>
-                <a:sym typeface="Arial"/>
-              </a:defRPr>
-            </a:lvl2pPr>
-            <a:lvl3pPr marL="1371600" marR="0" lvl="2" indent="-317500" algn="l" rtl="0">
-              <a:lnSpc>
-                <a:spcPct val="115000"/>
-              </a:lnSpc>
-              <a:spcBef>
-                <a:spcPts val="0"/>
-              </a:spcBef>
-              <a:spcAft>
-                <a:spcPts val="0"/>
-              </a:spcAft>
-              <a:buClr>
-                <a:schemeClr val="dk2"/>
-              </a:buClr>
-              <a:buSzPts val="1400"/>
-              <a:buFont typeface="Arial"/>
-              <a:buChar char="■"/>
-              <a:defRPr sz="1400" b="0" i="0" u="none" strike="noStrike" cap="none">
-                <a:solidFill>
-                  <a:schemeClr val="dk2"/>
-                </a:solidFill>
-                <a:latin typeface="Arial"/>
-                <a:ea typeface="Arial"/>
-                <a:cs typeface="Arial"/>
-                <a:sym typeface="Arial"/>
-              </a:defRPr>
-            </a:lvl3pPr>
-            <a:lvl4pPr marL="1828800" marR="0" lvl="3" indent="-317500" algn="l" rtl="0">
-              <a:lnSpc>
-                <a:spcPct val="115000"/>
-              </a:lnSpc>
-              <a:spcBef>
-                <a:spcPts val="0"/>
-              </a:spcBef>
-              <a:spcAft>
-                <a:spcPts val="0"/>
-              </a:spcAft>
-              <a:buClr>
-                <a:schemeClr val="dk2"/>
-              </a:buClr>
-              <a:buSzPts val="1400"/>
-              <a:buFont typeface="Arial"/>
-              <a:buChar char="●"/>
-              <a:defRPr sz="1400" b="0" i="0" u="none" strike="noStrike" cap="none">
-                <a:solidFill>
-                  <a:schemeClr val="dk2"/>
-                </a:solidFill>
-                <a:latin typeface="Arial"/>
-                <a:ea typeface="Arial"/>
-                <a:cs typeface="Arial"/>
-                <a:sym typeface="Arial"/>
-              </a:defRPr>
-            </a:lvl4pPr>
-            <a:lvl5pPr marL="2286000" marR="0" lvl="4" indent="-317500" algn="l" rtl="0">
-              <a:lnSpc>
-                <a:spcPct val="115000"/>
-              </a:lnSpc>
-              <a:spcBef>
-                <a:spcPts val="0"/>
-              </a:spcBef>
-              <a:spcAft>
-                <a:spcPts val="0"/>
-              </a:spcAft>
-              <a:buClr>
-                <a:schemeClr val="dk2"/>
-              </a:buClr>
-              <a:buSzPts val="1400"/>
-              <a:buFont typeface="Arial"/>
-              <a:buChar char="○"/>
-              <a:defRPr sz="1400" b="0" i="0" u="none" strike="noStrike" cap="none">
-                <a:solidFill>
-                  <a:schemeClr val="dk2"/>
-                </a:solidFill>
-                <a:latin typeface="Arial"/>
-                <a:ea typeface="Arial"/>
-                <a:cs typeface="Arial"/>
-                <a:sym typeface="Arial"/>
-              </a:defRPr>
-            </a:lvl5pPr>
-            <a:lvl6pPr marL="2743200" marR="0" lvl="5" indent="-317500" algn="l" rtl="0">
-              <a:lnSpc>
-                <a:spcPct val="115000"/>
-              </a:lnSpc>
-              <a:spcBef>
-                <a:spcPts val="0"/>
-              </a:spcBef>
-              <a:spcAft>
-                <a:spcPts val="0"/>
-              </a:spcAft>
-              <a:buClr>
-                <a:schemeClr val="dk2"/>
-              </a:buClr>
-              <a:buSzPts val="1400"/>
-              <a:buFont typeface="Arial"/>
-              <a:buChar char="■"/>
-              <a:defRPr sz="1400" b="0" i="0" u="none" strike="noStrike" cap="none">
-                <a:solidFill>
-                  <a:schemeClr val="dk2"/>
-                </a:solidFill>
-                <a:latin typeface="Arial"/>
-                <a:ea typeface="Arial"/>
-                <a:cs typeface="Arial"/>
-                <a:sym typeface="Arial"/>
-              </a:defRPr>
-            </a:lvl6pPr>
-            <a:lvl7pPr marL="3200400" marR="0" lvl="6" indent="-317500" algn="l" rtl="0">
-              <a:lnSpc>
-                <a:spcPct val="115000"/>
-              </a:lnSpc>
-              <a:spcBef>
-                <a:spcPts val="0"/>
-              </a:spcBef>
-              <a:spcAft>
-                <a:spcPts val="0"/>
-              </a:spcAft>
-              <a:buClr>
-                <a:schemeClr val="dk2"/>
-              </a:buClr>
-              <a:buSzPts val="1400"/>
-              <a:buFont typeface="Arial"/>
-              <a:buChar char="●"/>
-              <a:defRPr sz="1400" b="0" i="0" u="none" strike="noStrike" cap="none">
-                <a:solidFill>
-                  <a:schemeClr val="dk2"/>
-                </a:solidFill>
-                <a:latin typeface="Arial"/>
-                <a:ea typeface="Arial"/>
-                <a:cs typeface="Arial"/>
-                <a:sym typeface="Arial"/>
-              </a:defRPr>
-            </a:lvl7pPr>
-            <a:lvl8pPr marL="3657600" marR="0" lvl="7" indent="-317500" algn="l" rtl="0">
-              <a:lnSpc>
-                <a:spcPct val="115000"/>
-              </a:lnSpc>
-              <a:spcBef>
-                <a:spcPts val="0"/>
-              </a:spcBef>
-              <a:spcAft>
-                <a:spcPts val="0"/>
-              </a:spcAft>
-              <a:buClr>
-                <a:schemeClr val="dk2"/>
-              </a:buClr>
-              <a:buSzPts val="1400"/>
-              <a:buFont typeface="Arial"/>
-              <a:buChar char="○"/>
-              <a:defRPr sz="1400" b="0" i="0" u="none" strike="noStrike" cap="none">
-                <a:solidFill>
-                  <a:schemeClr val="dk2"/>
-                </a:solidFill>
-                <a:latin typeface="Arial"/>
-                <a:ea typeface="Arial"/>
-                <a:cs typeface="Arial"/>
-                <a:sym typeface="Arial"/>
-              </a:defRPr>
-            </a:lvl8pPr>
-            <a:lvl9pPr marL="4114800" marR="0" lvl="8" indent="-317500" algn="l" rtl="0">
-              <a:lnSpc>
-                <a:spcPct val="115000"/>
-              </a:lnSpc>
-              <a:spcBef>
-                <a:spcPts val="0"/>
-              </a:spcBef>
-              <a:spcAft>
-                <a:spcPts val="0"/>
-              </a:spcAft>
-              <a:buClr>
-                <a:schemeClr val="dk2"/>
-              </a:buClr>
-              <a:buSzPts val="1400"/>
-              <a:buFont typeface="Arial"/>
-              <a:buChar char="■"/>
-              <a:defRPr sz="1400" b="0" i="0" u="none" strike="noStrike" cap="none">
-                <a:solidFill>
-                  <a:schemeClr val="dk2"/>
-                </a:solidFill>
-                <a:latin typeface="Arial"/>
-                <a:ea typeface="Arial"/>
-                <a:cs typeface="Arial"/>
-                <a:sym typeface="Arial"/>
-              </a:defRPr>
-            </a:lvl9pPr>
-          </a:lstStyle>
-          <a:p>
-            <a:pPr marL="0" indent="0" algn="ctr">
-              <a:buFont typeface="Arial"/>
-              <a:buNone/>
-            </a:pPr>
-            <a:r>
-              <a:rPr lang="ru-RU" sz="1400" dirty="0">
-                <a:solidFill>
-                  <a:schemeClr val="tx1"/>
-                </a:solidFill>
-                <a:latin typeface="Times New Roman" panose="02020603050405020304" pitchFamily="18" charset="0"/>
-                <a:cs typeface="Times New Roman" panose="02020603050405020304" pitchFamily="18" charset="0"/>
-              </a:rPr>
-              <a:t>Обучение моделей</a:t>
-            </a:r>
-          </a:p>
-        </p:txBody>
-      </p:sp>
-      <p:sp>
-        <p:nvSpPr>
-          <p:cNvPr id="7" name="Google Shape;80;p17">
-            <a:extLst>
-              <a:ext uri="{FF2B5EF4-FFF2-40B4-BE49-F238E27FC236}">
-                <a16:creationId xmlns:a16="http://schemas.microsoft.com/office/drawing/2014/main" id="{2F482305-E4B7-A89E-91C9-E2392F386348}"/>
-              </a:ext>
-            </a:extLst>
-          </p:cNvPr>
-          <p:cNvSpPr txBox="1">
-            <a:spLocks/>
-          </p:cNvSpPr>
-          <p:nvPr/>
-        </p:nvSpPr>
-        <p:spPr>
-          <a:xfrm>
-            <a:off x="2227116" y="1876042"/>
-            <a:ext cx="1827065" cy="754915"/>
-          </a:xfrm>
-          <a:prstGeom prst="rect">
-            <a:avLst/>
-          </a:prstGeom>
-          <a:noFill/>
-          <a:ln>
-            <a:noFill/>
-          </a:ln>
-        </p:spPr>
-        <p:txBody>
-          <a:bodyPr spcFirstLastPara="1" wrap="square" lIns="91425" tIns="91425" rIns="91425" bIns="91425" anchor="ctr" anchorCtr="0">
-            <a:noAutofit/>
-          </a:bodyPr>
-          <a:lstStyle>
-            <a:defPPr marR="0" lvl="0" algn="l" rtl="0">
-              <a:lnSpc>
-                <a:spcPct val="100000"/>
-              </a:lnSpc>
-              <a:spcBef>
-                <a:spcPts val="0"/>
-              </a:spcBef>
-              <a:spcAft>
-                <a:spcPts val="0"/>
-              </a:spcAft>
-            </a:defPPr>
-            <a:lvl1pPr marL="457200" marR="0" lvl="0" indent="-342900" algn="l" rtl="0">
-              <a:lnSpc>
-                <a:spcPct val="115000"/>
-              </a:lnSpc>
-              <a:spcBef>
-                <a:spcPts val="0"/>
-              </a:spcBef>
-              <a:spcAft>
-                <a:spcPts val="0"/>
-              </a:spcAft>
-              <a:buClr>
-                <a:schemeClr val="dk2"/>
-              </a:buClr>
-              <a:buSzPts val="1800"/>
-              <a:buFont typeface="Arial"/>
-              <a:buChar char="●"/>
-              <a:defRPr sz="1800" b="0" i="0" u="none" strike="noStrike" cap="none">
-                <a:solidFill>
-                  <a:schemeClr val="dk2"/>
-                </a:solidFill>
-                <a:latin typeface="Arial"/>
-                <a:ea typeface="Arial"/>
-                <a:cs typeface="Arial"/>
-                <a:sym typeface="Arial"/>
-              </a:defRPr>
-            </a:lvl1pPr>
-            <a:lvl2pPr marL="914400" marR="0" lvl="1" indent="-317500" algn="l" rtl="0">
-              <a:lnSpc>
-                <a:spcPct val="115000"/>
-              </a:lnSpc>
-              <a:spcBef>
-                <a:spcPts val="0"/>
-              </a:spcBef>
-              <a:spcAft>
-                <a:spcPts val="0"/>
-              </a:spcAft>
-              <a:buClr>
-                <a:schemeClr val="dk2"/>
-              </a:buClr>
-              <a:buSzPts val="1400"/>
-              <a:buFont typeface="Arial"/>
-              <a:buChar char="○"/>
-              <a:defRPr sz="1400" b="0" i="0" u="none" strike="noStrike" cap="none">
-                <a:solidFill>
-                  <a:schemeClr val="dk2"/>
-                </a:solidFill>
-                <a:latin typeface="Arial"/>
-                <a:ea typeface="Arial"/>
-                <a:cs typeface="Arial"/>
-                <a:sym typeface="Arial"/>
-              </a:defRPr>
-            </a:lvl2pPr>
-            <a:lvl3pPr marL="1371600" marR="0" lvl="2" indent="-317500" algn="l" rtl="0">
-              <a:lnSpc>
-                <a:spcPct val="115000"/>
-              </a:lnSpc>
-              <a:spcBef>
-                <a:spcPts val="0"/>
-              </a:spcBef>
-              <a:spcAft>
-                <a:spcPts val="0"/>
-              </a:spcAft>
-              <a:buClr>
-                <a:schemeClr val="dk2"/>
-              </a:buClr>
-              <a:buSzPts val="1400"/>
-              <a:buFont typeface="Arial"/>
-              <a:buChar char="■"/>
-              <a:defRPr sz="1400" b="0" i="0" u="none" strike="noStrike" cap="none">
-                <a:solidFill>
-                  <a:schemeClr val="dk2"/>
-                </a:solidFill>
-                <a:latin typeface="Arial"/>
-                <a:ea typeface="Arial"/>
-                <a:cs typeface="Arial"/>
-                <a:sym typeface="Arial"/>
-              </a:defRPr>
-            </a:lvl3pPr>
-            <a:lvl4pPr marL="1828800" marR="0" lvl="3" indent="-317500" algn="l" rtl="0">
-              <a:lnSpc>
-                <a:spcPct val="115000"/>
-              </a:lnSpc>
-              <a:spcBef>
-                <a:spcPts val="0"/>
-              </a:spcBef>
-              <a:spcAft>
-                <a:spcPts val="0"/>
-              </a:spcAft>
-              <a:buClr>
-                <a:schemeClr val="dk2"/>
-              </a:buClr>
-              <a:buSzPts val="1400"/>
-              <a:buFont typeface="Arial"/>
-              <a:buChar char="●"/>
-              <a:defRPr sz="1400" b="0" i="0" u="none" strike="noStrike" cap="none">
-                <a:solidFill>
-                  <a:schemeClr val="dk2"/>
-                </a:solidFill>
-                <a:latin typeface="Arial"/>
-                <a:ea typeface="Arial"/>
-                <a:cs typeface="Arial"/>
-                <a:sym typeface="Arial"/>
-              </a:defRPr>
-            </a:lvl4pPr>
-            <a:lvl5pPr marL="2286000" marR="0" lvl="4" indent="-317500" algn="l" rtl="0">
-              <a:lnSpc>
-                <a:spcPct val="115000"/>
-              </a:lnSpc>
-              <a:spcBef>
-                <a:spcPts val="0"/>
-              </a:spcBef>
-              <a:spcAft>
-                <a:spcPts val="0"/>
-              </a:spcAft>
-              <a:buClr>
-                <a:schemeClr val="dk2"/>
-              </a:buClr>
-              <a:buSzPts val="1400"/>
-              <a:buFont typeface="Arial"/>
-              <a:buChar char="○"/>
-              <a:defRPr sz="1400" b="0" i="0" u="none" strike="noStrike" cap="none">
-                <a:solidFill>
-                  <a:schemeClr val="dk2"/>
-                </a:solidFill>
-                <a:latin typeface="Arial"/>
-                <a:ea typeface="Arial"/>
-                <a:cs typeface="Arial"/>
-                <a:sym typeface="Arial"/>
-              </a:defRPr>
-            </a:lvl5pPr>
-            <a:lvl6pPr marL="2743200" marR="0" lvl="5" indent="-317500" algn="l" rtl="0">
-              <a:lnSpc>
-                <a:spcPct val="115000"/>
-              </a:lnSpc>
-              <a:spcBef>
-                <a:spcPts val="0"/>
-              </a:spcBef>
-              <a:spcAft>
-                <a:spcPts val="0"/>
-              </a:spcAft>
-              <a:buClr>
-                <a:schemeClr val="dk2"/>
-              </a:buClr>
-              <a:buSzPts val="1400"/>
-              <a:buFont typeface="Arial"/>
-              <a:buChar char="■"/>
-              <a:defRPr sz="1400" b="0" i="0" u="none" strike="noStrike" cap="none">
-                <a:solidFill>
-                  <a:schemeClr val="dk2"/>
-                </a:solidFill>
-                <a:latin typeface="Arial"/>
-                <a:ea typeface="Arial"/>
-                <a:cs typeface="Arial"/>
-                <a:sym typeface="Arial"/>
-              </a:defRPr>
-            </a:lvl6pPr>
-            <a:lvl7pPr marL="3200400" marR="0" lvl="6" indent="-317500" algn="l" rtl="0">
-              <a:lnSpc>
-                <a:spcPct val="115000"/>
-              </a:lnSpc>
-              <a:spcBef>
-                <a:spcPts val="0"/>
-              </a:spcBef>
-              <a:spcAft>
-                <a:spcPts val="0"/>
-              </a:spcAft>
-              <a:buClr>
-                <a:schemeClr val="dk2"/>
-              </a:buClr>
-              <a:buSzPts val="1400"/>
-              <a:buFont typeface="Arial"/>
-              <a:buChar char="●"/>
-              <a:defRPr sz="1400" b="0" i="0" u="none" strike="noStrike" cap="none">
-                <a:solidFill>
-                  <a:schemeClr val="dk2"/>
-                </a:solidFill>
-                <a:latin typeface="Arial"/>
-                <a:ea typeface="Arial"/>
-                <a:cs typeface="Arial"/>
-                <a:sym typeface="Arial"/>
-              </a:defRPr>
-            </a:lvl7pPr>
-            <a:lvl8pPr marL="3657600" marR="0" lvl="7" indent="-317500" algn="l" rtl="0">
-              <a:lnSpc>
-                <a:spcPct val="115000"/>
-              </a:lnSpc>
-              <a:spcBef>
-                <a:spcPts val="0"/>
-              </a:spcBef>
-              <a:spcAft>
-                <a:spcPts val="0"/>
-              </a:spcAft>
-              <a:buClr>
-                <a:schemeClr val="dk2"/>
-              </a:buClr>
-              <a:buSzPts val="1400"/>
-              <a:buFont typeface="Arial"/>
-              <a:buChar char="○"/>
-              <a:defRPr sz="1400" b="0" i="0" u="none" strike="noStrike" cap="none">
-                <a:solidFill>
-                  <a:schemeClr val="dk2"/>
-                </a:solidFill>
-                <a:latin typeface="Arial"/>
-                <a:ea typeface="Arial"/>
-                <a:cs typeface="Arial"/>
-                <a:sym typeface="Arial"/>
-              </a:defRPr>
-            </a:lvl8pPr>
-            <a:lvl9pPr marL="4114800" marR="0" lvl="8" indent="-317500" algn="l" rtl="0">
-              <a:lnSpc>
-                <a:spcPct val="115000"/>
-              </a:lnSpc>
-              <a:spcBef>
-                <a:spcPts val="0"/>
-              </a:spcBef>
-              <a:spcAft>
-                <a:spcPts val="0"/>
-              </a:spcAft>
-              <a:buClr>
-                <a:schemeClr val="dk2"/>
-              </a:buClr>
-              <a:buSzPts val="1400"/>
-              <a:buFont typeface="Arial"/>
-              <a:buChar char="■"/>
-              <a:defRPr sz="1400" b="0" i="0" u="none" strike="noStrike" cap="none">
-                <a:solidFill>
-                  <a:schemeClr val="dk2"/>
-                </a:solidFill>
-                <a:latin typeface="Arial"/>
-                <a:ea typeface="Arial"/>
-                <a:cs typeface="Arial"/>
-                <a:sym typeface="Arial"/>
-              </a:defRPr>
-            </a:lvl9pPr>
-          </a:lstStyle>
-          <a:p>
-            <a:pPr marL="0" indent="0" algn="ctr">
-              <a:buFont typeface="Arial"/>
-              <a:buNone/>
-            </a:pPr>
-            <a:r>
-              <a:rPr lang="ru-RU" sz="1400" dirty="0">
-                <a:solidFill>
-                  <a:schemeClr val="tx1"/>
-                </a:solidFill>
-                <a:latin typeface="Times New Roman" panose="02020603050405020304" pitchFamily="18" charset="0"/>
-                <a:cs typeface="Times New Roman" panose="02020603050405020304" pitchFamily="18" charset="0"/>
-              </a:rPr>
-              <a:t>Формирование</a:t>
-            </a:r>
-            <a:br>
-              <a:rPr lang="ru-RU" sz="1400" dirty="0">
-                <a:solidFill>
-                  <a:schemeClr val="tx1"/>
-                </a:solidFill>
-                <a:latin typeface="Times New Roman" panose="02020603050405020304" pitchFamily="18" charset="0"/>
-                <a:cs typeface="Times New Roman" panose="02020603050405020304" pitchFamily="18" charset="0"/>
-              </a:rPr>
-            </a:br>
-            <a:r>
-              <a:rPr lang="ru-RU" sz="1400" dirty="0">
-                <a:solidFill>
-                  <a:schemeClr val="tx1"/>
-                </a:solidFill>
-                <a:latin typeface="Times New Roman" panose="02020603050405020304" pitchFamily="18" charset="0"/>
-                <a:cs typeface="Times New Roman" panose="02020603050405020304" pitchFamily="18" charset="0"/>
-              </a:rPr>
-              <a:t>признаков и целей для предсказания</a:t>
-            </a:r>
-          </a:p>
-        </p:txBody>
-      </p:sp>
-      <p:sp>
-        <p:nvSpPr>
-          <p:cNvPr id="8" name="Google Shape;80;p17">
-            <a:extLst>
-              <a:ext uri="{FF2B5EF4-FFF2-40B4-BE49-F238E27FC236}">
-                <a16:creationId xmlns:a16="http://schemas.microsoft.com/office/drawing/2014/main" id="{767695A8-47C2-2C8C-3073-41ED342BC5A4}"/>
-              </a:ext>
-            </a:extLst>
-          </p:cNvPr>
-          <p:cNvSpPr txBox="1">
-            <a:spLocks/>
-          </p:cNvSpPr>
-          <p:nvPr/>
-        </p:nvSpPr>
-        <p:spPr>
-          <a:xfrm>
-            <a:off x="5908732" y="1949470"/>
-            <a:ext cx="1548247" cy="624370"/>
-          </a:xfrm>
-          <a:prstGeom prst="rect">
-            <a:avLst/>
-          </a:prstGeom>
-          <a:noFill/>
-          <a:ln>
-            <a:noFill/>
-          </a:ln>
-        </p:spPr>
-        <p:txBody>
-          <a:bodyPr spcFirstLastPara="1" wrap="square" lIns="91425" tIns="91425" rIns="91425" bIns="91425" anchor="ctr" anchorCtr="0">
-            <a:noAutofit/>
-          </a:bodyPr>
-          <a:lstStyle>
-            <a:defPPr marR="0" lvl="0" algn="l" rtl="0">
-              <a:lnSpc>
-                <a:spcPct val="100000"/>
-              </a:lnSpc>
-              <a:spcBef>
-                <a:spcPts val="0"/>
-              </a:spcBef>
-              <a:spcAft>
-                <a:spcPts val="0"/>
-              </a:spcAft>
-            </a:defPPr>
-            <a:lvl1pPr marL="457200" marR="0" lvl="0" indent="-342900" algn="l" rtl="0">
-              <a:lnSpc>
-                <a:spcPct val="115000"/>
-              </a:lnSpc>
-              <a:spcBef>
-                <a:spcPts val="0"/>
-              </a:spcBef>
-              <a:spcAft>
-                <a:spcPts val="0"/>
-              </a:spcAft>
-              <a:buClr>
-                <a:schemeClr val="dk2"/>
-              </a:buClr>
-              <a:buSzPts val="1800"/>
-              <a:buFont typeface="Arial"/>
-              <a:buChar char="●"/>
-              <a:defRPr sz="1800" b="0" i="0" u="none" strike="noStrike" cap="none">
-                <a:solidFill>
-                  <a:schemeClr val="dk2"/>
-                </a:solidFill>
-                <a:latin typeface="Arial"/>
-                <a:ea typeface="Arial"/>
-                <a:cs typeface="Arial"/>
-                <a:sym typeface="Arial"/>
-              </a:defRPr>
-            </a:lvl1pPr>
-            <a:lvl2pPr marL="914400" marR="0" lvl="1" indent="-317500" algn="l" rtl="0">
-              <a:lnSpc>
-                <a:spcPct val="115000"/>
-              </a:lnSpc>
-              <a:spcBef>
-                <a:spcPts val="0"/>
-              </a:spcBef>
-              <a:spcAft>
-                <a:spcPts val="0"/>
-              </a:spcAft>
-              <a:buClr>
-                <a:schemeClr val="dk2"/>
-              </a:buClr>
-              <a:buSzPts val="1400"/>
-              <a:buFont typeface="Arial"/>
-              <a:buChar char="○"/>
-              <a:defRPr sz="1400" b="0" i="0" u="none" strike="noStrike" cap="none">
-                <a:solidFill>
-                  <a:schemeClr val="dk2"/>
-                </a:solidFill>
-                <a:latin typeface="Arial"/>
-                <a:ea typeface="Arial"/>
-                <a:cs typeface="Arial"/>
-                <a:sym typeface="Arial"/>
-              </a:defRPr>
-            </a:lvl2pPr>
-            <a:lvl3pPr marL="1371600" marR="0" lvl="2" indent="-317500" algn="l" rtl="0">
-              <a:lnSpc>
-                <a:spcPct val="115000"/>
-              </a:lnSpc>
-              <a:spcBef>
-                <a:spcPts val="0"/>
-              </a:spcBef>
-              <a:spcAft>
-                <a:spcPts val="0"/>
-              </a:spcAft>
-              <a:buClr>
-                <a:schemeClr val="dk2"/>
-              </a:buClr>
-              <a:buSzPts val="1400"/>
-              <a:buFont typeface="Arial"/>
-              <a:buChar char="■"/>
-              <a:defRPr sz="1400" b="0" i="0" u="none" strike="noStrike" cap="none">
-                <a:solidFill>
-                  <a:schemeClr val="dk2"/>
-                </a:solidFill>
-                <a:latin typeface="Arial"/>
-                <a:ea typeface="Arial"/>
-                <a:cs typeface="Arial"/>
-                <a:sym typeface="Arial"/>
-              </a:defRPr>
-            </a:lvl3pPr>
-            <a:lvl4pPr marL="1828800" marR="0" lvl="3" indent="-317500" algn="l" rtl="0">
-              <a:lnSpc>
-                <a:spcPct val="115000"/>
-              </a:lnSpc>
-              <a:spcBef>
-                <a:spcPts val="0"/>
-              </a:spcBef>
-              <a:spcAft>
-                <a:spcPts val="0"/>
-              </a:spcAft>
-              <a:buClr>
-                <a:schemeClr val="dk2"/>
-              </a:buClr>
-              <a:buSzPts val="1400"/>
-              <a:buFont typeface="Arial"/>
-              <a:buChar char="●"/>
-              <a:defRPr sz="1400" b="0" i="0" u="none" strike="noStrike" cap="none">
-                <a:solidFill>
-                  <a:schemeClr val="dk2"/>
-                </a:solidFill>
-                <a:latin typeface="Arial"/>
-                <a:ea typeface="Arial"/>
-                <a:cs typeface="Arial"/>
-                <a:sym typeface="Arial"/>
-              </a:defRPr>
-            </a:lvl4pPr>
-            <a:lvl5pPr marL="2286000" marR="0" lvl="4" indent="-317500" algn="l" rtl="0">
-              <a:lnSpc>
-                <a:spcPct val="115000"/>
-              </a:lnSpc>
-              <a:spcBef>
-                <a:spcPts val="0"/>
-              </a:spcBef>
-              <a:spcAft>
-                <a:spcPts val="0"/>
-              </a:spcAft>
-              <a:buClr>
-                <a:schemeClr val="dk2"/>
-              </a:buClr>
-              <a:buSzPts val="1400"/>
-              <a:buFont typeface="Arial"/>
-              <a:buChar char="○"/>
-              <a:defRPr sz="1400" b="0" i="0" u="none" strike="noStrike" cap="none">
-                <a:solidFill>
-                  <a:schemeClr val="dk2"/>
-                </a:solidFill>
-                <a:latin typeface="Arial"/>
-                <a:ea typeface="Arial"/>
-                <a:cs typeface="Arial"/>
-                <a:sym typeface="Arial"/>
-              </a:defRPr>
-            </a:lvl5pPr>
-            <a:lvl6pPr marL="2743200" marR="0" lvl="5" indent="-317500" algn="l" rtl="0">
-              <a:lnSpc>
-                <a:spcPct val="115000"/>
-              </a:lnSpc>
-              <a:spcBef>
-                <a:spcPts val="0"/>
-              </a:spcBef>
-              <a:spcAft>
-                <a:spcPts val="0"/>
-              </a:spcAft>
-              <a:buClr>
-                <a:schemeClr val="dk2"/>
-              </a:buClr>
-              <a:buSzPts val="1400"/>
-              <a:buFont typeface="Arial"/>
-              <a:buChar char="■"/>
-              <a:defRPr sz="1400" b="0" i="0" u="none" strike="noStrike" cap="none">
-                <a:solidFill>
-                  <a:schemeClr val="dk2"/>
-                </a:solidFill>
-                <a:latin typeface="Arial"/>
-                <a:ea typeface="Arial"/>
-                <a:cs typeface="Arial"/>
-                <a:sym typeface="Arial"/>
-              </a:defRPr>
-            </a:lvl6pPr>
-            <a:lvl7pPr marL="3200400" marR="0" lvl="6" indent="-317500" algn="l" rtl="0">
-              <a:lnSpc>
-                <a:spcPct val="115000"/>
-              </a:lnSpc>
-              <a:spcBef>
-                <a:spcPts val="0"/>
-              </a:spcBef>
-              <a:spcAft>
-                <a:spcPts val="0"/>
-              </a:spcAft>
-              <a:buClr>
-                <a:schemeClr val="dk2"/>
-              </a:buClr>
-              <a:buSzPts val="1400"/>
-              <a:buFont typeface="Arial"/>
-              <a:buChar char="●"/>
-              <a:defRPr sz="1400" b="0" i="0" u="none" strike="noStrike" cap="none">
-                <a:solidFill>
-                  <a:schemeClr val="dk2"/>
-                </a:solidFill>
-                <a:latin typeface="Arial"/>
-                <a:ea typeface="Arial"/>
-                <a:cs typeface="Arial"/>
-                <a:sym typeface="Arial"/>
-              </a:defRPr>
-            </a:lvl7pPr>
-            <a:lvl8pPr marL="3657600" marR="0" lvl="7" indent="-317500" algn="l" rtl="0">
-              <a:lnSpc>
-                <a:spcPct val="115000"/>
-              </a:lnSpc>
-              <a:spcBef>
-                <a:spcPts val="0"/>
-              </a:spcBef>
-              <a:spcAft>
-                <a:spcPts val="0"/>
-              </a:spcAft>
-              <a:buClr>
-                <a:schemeClr val="dk2"/>
-              </a:buClr>
-              <a:buSzPts val="1400"/>
-              <a:buFont typeface="Arial"/>
-              <a:buChar char="○"/>
-              <a:defRPr sz="1400" b="0" i="0" u="none" strike="noStrike" cap="none">
-                <a:solidFill>
-                  <a:schemeClr val="dk2"/>
-                </a:solidFill>
-                <a:latin typeface="Arial"/>
-                <a:ea typeface="Arial"/>
-                <a:cs typeface="Arial"/>
-                <a:sym typeface="Arial"/>
-              </a:defRPr>
-            </a:lvl8pPr>
-            <a:lvl9pPr marL="4114800" marR="0" lvl="8" indent="-317500" algn="l" rtl="0">
-              <a:lnSpc>
-                <a:spcPct val="115000"/>
-              </a:lnSpc>
-              <a:spcBef>
-                <a:spcPts val="0"/>
-              </a:spcBef>
-              <a:spcAft>
-                <a:spcPts val="0"/>
-              </a:spcAft>
-              <a:buClr>
-                <a:schemeClr val="dk2"/>
-              </a:buClr>
-              <a:buSzPts val="1400"/>
-              <a:buFont typeface="Arial"/>
-              <a:buChar char="■"/>
-              <a:defRPr sz="1400" b="0" i="0" u="none" strike="noStrike" cap="none">
-                <a:solidFill>
-                  <a:schemeClr val="dk2"/>
-                </a:solidFill>
-                <a:latin typeface="Arial"/>
-                <a:ea typeface="Arial"/>
-                <a:cs typeface="Arial"/>
-                <a:sym typeface="Arial"/>
-              </a:defRPr>
-            </a:lvl9pPr>
-          </a:lstStyle>
-          <a:p>
-            <a:pPr marL="0" indent="0" algn="ctr">
-              <a:buFont typeface="Arial"/>
-              <a:buNone/>
-            </a:pPr>
-            <a:r>
-              <a:rPr lang="ru-RU" sz="1400" dirty="0">
-                <a:solidFill>
-                  <a:schemeClr val="tx1"/>
-                </a:solidFill>
-                <a:latin typeface="Times New Roman" panose="02020603050405020304" pitchFamily="18" charset="0"/>
-                <a:cs typeface="Times New Roman" panose="02020603050405020304" pitchFamily="18" charset="0"/>
-              </a:rPr>
-              <a:t>Историческое тестирование</a:t>
-            </a:r>
-          </a:p>
-        </p:txBody>
-      </p:sp>
-      <p:cxnSp>
-        <p:nvCxnSpPr>
-          <p:cNvPr id="11" name="Прямая со стрелкой 10">
-            <a:extLst>
-              <a:ext uri="{FF2B5EF4-FFF2-40B4-BE49-F238E27FC236}">
-                <a16:creationId xmlns:a16="http://schemas.microsoft.com/office/drawing/2014/main" id="{CE9C1F11-63D1-8DA9-3025-C2FD8EA7AC48}"/>
-              </a:ext>
-            </a:extLst>
-          </p:cNvPr>
-          <p:cNvCxnSpPr>
-            <a:cxnSpLocks/>
-          </p:cNvCxnSpPr>
-          <p:nvPr/>
-        </p:nvCxnSpPr>
-        <p:spPr>
-          <a:xfrm>
-            <a:off x="713509" y="1685060"/>
-            <a:ext cx="7716982" cy="0"/>
-          </a:xfrm>
-          <a:prstGeom prst="straightConnector1">
-            <a:avLst/>
-          </a:prstGeom>
-          <a:ln w="66675">
-            <a:tailEnd type="triangle"/>
-          </a:ln>
-        </p:spPr>
-        <p:style>
-          <a:lnRef idx="1">
-            <a:schemeClr val="accent1"/>
-          </a:lnRef>
-          <a:fillRef idx="0">
-            <a:schemeClr val="accent1"/>
-          </a:fillRef>
-          <a:effectRef idx="0">
-            <a:schemeClr val="accent1"/>
-          </a:effectRef>
-          <a:fontRef idx="minor">
-            <a:schemeClr val="tx1"/>
-          </a:fontRef>
-        </p:style>
-      </p:cxnSp>
-      <p:sp>
-        <p:nvSpPr>
-          <p:cNvPr id="13" name="Google Shape;80;p17">
-            <a:extLst>
-              <a:ext uri="{FF2B5EF4-FFF2-40B4-BE49-F238E27FC236}">
-                <a16:creationId xmlns:a16="http://schemas.microsoft.com/office/drawing/2014/main" id="{40D90262-F775-D54F-8EA5-AEBD29D472E8}"/>
-              </a:ext>
-            </a:extLst>
-          </p:cNvPr>
-          <p:cNvSpPr txBox="1">
-            <a:spLocks/>
-          </p:cNvSpPr>
-          <p:nvPr/>
-        </p:nvSpPr>
-        <p:spPr>
-          <a:xfrm>
-            <a:off x="564417" y="2756667"/>
-            <a:ext cx="1548247" cy="690997"/>
-          </a:xfrm>
-          <a:prstGeom prst="rect">
-            <a:avLst/>
-          </a:prstGeom>
-          <a:noFill/>
-          <a:ln>
-            <a:noFill/>
-          </a:ln>
-        </p:spPr>
-        <p:txBody>
-          <a:bodyPr spcFirstLastPara="1" wrap="square" lIns="91425" tIns="91425" rIns="91425" bIns="91425" anchor="ctr" anchorCtr="0">
-            <a:normAutofit fontScale="85000" lnSpcReduction="10000"/>
-          </a:bodyPr>
-          <a:lstStyle>
-            <a:defPPr marR="0" lvl="0" algn="l" rtl="0">
-              <a:lnSpc>
-                <a:spcPct val="100000"/>
-              </a:lnSpc>
-              <a:spcBef>
-                <a:spcPts val="0"/>
-              </a:spcBef>
-              <a:spcAft>
-                <a:spcPts val="0"/>
-              </a:spcAft>
-            </a:defPPr>
-            <a:lvl1pPr marL="457200" marR="0" lvl="0" indent="-342900" algn="l" rtl="0">
-              <a:lnSpc>
-                <a:spcPct val="115000"/>
-              </a:lnSpc>
-              <a:spcBef>
-                <a:spcPts val="0"/>
-              </a:spcBef>
-              <a:spcAft>
-                <a:spcPts val="0"/>
-              </a:spcAft>
-              <a:buClr>
-                <a:schemeClr val="dk2"/>
-              </a:buClr>
-              <a:buSzPts val="1800"/>
-              <a:buFont typeface="Arial"/>
-              <a:buChar char="●"/>
-              <a:defRPr sz="1800" b="0" i="0" u="none" strike="noStrike" cap="none">
-                <a:solidFill>
-                  <a:schemeClr val="dk2"/>
-                </a:solidFill>
-                <a:latin typeface="Arial"/>
-                <a:ea typeface="Arial"/>
-                <a:cs typeface="Arial"/>
-                <a:sym typeface="Arial"/>
-              </a:defRPr>
-            </a:lvl1pPr>
-            <a:lvl2pPr marL="914400" marR="0" lvl="1" indent="-317500" algn="l" rtl="0">
-              <a:lnSpc>
-                <a:spcPct val="115000"/>
-              </a:lnSpc>
-              <a:spcBef>
-                <a:spcPts val="0"/>
-              </a:spcBef>
-              <a:spcAft>
-                <a:spcPts val="0"/>
-              </a:spcAft>
-              <a:buClr>
-                <a:schemeClr val="dk2"/>
-              </a:buClr>
-              <a:buSzPts val="1400"/>
-              <a:buFont typeface="Arial"/>
-              <a:buChar char="○"/>
-              <a:defRPr sz="1400" b="0" i="0" u="none" strike="noStrike" cap="none">
-                <a:solidFill>
-                  <a:schemeClr val="dk2"/>
-                </a:solidFill>
-                <a:latin typeface="Arial"/>
-                <a:ea typeface="Arial"/>
-                <a:cs typeface="Arial"/>
-                <a:sym typeface="Arial"/>
-              </a:defRPr>
-            </a:lvl2pPr>
-            <a:lvl3pPr marL="1371600" marR="0" lvl="2" indent="-317500" algn="l" rtl="0">
-              <a:lnSpc>
-                <a:spcPct val="115000"/>
-              </a:lnSpc>
-              <a:spcBef>
-                <a:spcPts val="0"/>
-              </a:spcBef>
-              <a:spcAft>
-                <a:spcPts val="0"/>
-              </a:spcAft>
-              <a:buClr>
-                <a:schemeClr val="dk2"/>
-              </a:buClr>
-              <a:buSzPts val="1400"/>
-              <a:buFont typeface="Arial"/>
-              <a:buChar char="■"/>
-              <a:defRPr sz="1400" b="0" i="0" u="none" strike="noStrike" cap="none">
-                <a:solidFill>
-                  <a:schemeClr val="dk2"/>
-                </a:solidFill>
-                <a:latin typeface="Arial"/>
-                <a:ea typeface="Arial"/>
-                <a:cs typeface="Arial"/>
-                <a:sym typeface="Arial"/>
-              </a:defRPr>
-            </a:lvl3pPr>
-            <a:lvl4pPr marL="1828800" marR="0" lvl="3" indent="-317500" algn="l" rtl="0">
-              <a:lnSpc>
-                <a:spcPct val="115000"/>
-              </a:lnSpc>
-              <a:spcBef>
-                <a:spcPts val="0"/>
-              </a:spcBef>
-              <a:spcAft>
-                <a:spcPts val="0"/>
-              </a:spcAft>
-              <a:buClr>
-                <a:schemeClr val="dk2"/>
-              </a:buClr>
-              <a:buSzPts val="1400"/>
-              <a:buFont typeface="Arial"/>
-              <a:buChar char="●"/>
-              <a:defRPr sz="1400" b="0" i="0" u="none" strike="noStrike" cap="none">
-                <a:solidFill>
-                  <a:schemeClr val="dk2"/>
-                </a:solidFill>
-                <a:latin typeface="Arial"/>
-                <a:ea typeface="Arial"/>
-                <a:cs typeface="Arial"/>
-                <a:sym typeface="Arial"/>
-              </a:defRPr>
-            </a:lvl4pPr>
-            <a:lvl5pPr marL="2286000" marR="0" lvl="4" indent="-317500" algn="l" rtl="0">
-              <a:lnSpc>
-                <a:spcPct val="115000"/>
-              </a:lnSpc>
-              <a:spcBef>
-                <a:spcPts val="0"/>
-              </a:spcBef>
-              <a:spcAft>
-                <a:spcPts val="0"/>
-              </a:spcAft>
-              <a:buClr>
-                <a:schemeClr val="dk2"/>
-              </a:buClr>
-              <a:buSzPts val="1400"/>
-              <a:buFont typeface="Arial"/>
-              <a:buChar char="○"/>
-              <a:defRPr sz="1400" b="0" i="0" u="none" strike="noStrike" cap="none">
-                <a:solidFill>
-                  <a:schemeClr val="dk2"/>
-                </a:solidFill>
-                <a:latin typeface="Arial"/>
-                <a:ea typeface="Arial"/>
-                <a:cs typeface="Arial"/>
-                <a:sym typeface="Arial"/>
-              </a:defRPr>
-            </a:lvl5pPr>
-            <a:lvl6pPr marL="2743200" marR="0" lvl="5" indent="-317500" algn="l" rtl="0">
-              <a:lnSpc>
-                <a:spcPct val="115000"/>
-              </a:lnSpc>
-              <a:spcBef>
-                <a:spcPts val="0"/>
-              </a:spcBef>
-              <a:spcAft>
-                <a:spcPts val="0"/>
-              </a:spcAft>
-              <a:buClr>
-                <a:schemeClr val="dk2"/>
-              </a:buClr>
-              <a:buSzPts val="1400"/>
-              <a:buFont typeface="Arial"/>
-              <a:buChar char="■"/>
-              <a:defRPr sz="1400" b="0" i="0" u="none" strike="noStrike" cap="none">
-                <a:solidFill>
-                  <a:schemeClr val="dk2"/>
-                </a:solidFill>
-                <a:latin typeface="Arial"/>
-                <a:ea typeface="Arial"/>
-                <a:cs typeface="Arial"/>
-                <a:sym typeface="Arial"/>
-              </a:defRPr>
-            </a:lvl6pPr>
-            <a:lvl7pPr marL="3200400" marR="0" lvl="6" indent="-317500" algn="l" rtl="0">
-              <a:lnSpc>
-                <a:spcPct val="115000"/>
-              </a:lnSpc>
-              <a:spcBef>
-                <a:spcPts val="0"/>
-              </a:spcBef>
-              <a:spcAft>
-                <a:spcPts val="0"/>
-              </a:spcAft>
-              <a:buClr>
-                <a:schemeClr val="dk2"/>
-              </a:buClr>
-              <a:buSzPts val="1400"/>
-              <a:buFont typeface="Arial"/>
-              <a:buChar char="●"/>
-              <a:defRPr sz="1400" b="0" i="0" u="none" strike="noStrike" cap="none">
-                <a:solidFill>
-                  <a:schemeClr val="dk2"/>
-                </a:solidFill>
-                <a:latin typeface="Arial"/>
-                <a:ea typeface="Arial"/>
-                <a:cs typeface="Arial"/>
-                <a:sym typeface="Arial"/>
-              </a:defRPr>
-            </a:lvl7pPr>
-            <a:lvl8pPr marL="3657600" marR="0" lvl="7" indent="-317500" algn="l" rtl="0">
-              <a:lnSpc>
-                <a:spcPct val="115000"/>
-              </a:lnSpc>
-              <a:spcBef>
-                <a:spcPts val="0"/>
-              </a:spcBef>
-              <a:spcAft>
-                <a:spcPts val="0"/>
-              </a:spcAft>
-              <a:buClr>
-                <a:schemeClr val="dk2"/>
-              </a:buClr>
-              <a:buSzPts val="1400"/>
-              <a:buFont typeface="Arial"/>
-              <a:buChar char="○"/>
-              <a:defRPr sz="1400" b="0" i="0" u="none" strike="noStrike" cap="none">
-                <a:solidFill>
-                  <a:schemeClr val="dk2"/>
-                </a:solidFill>
-                <a:latin typeface="Arial"/>
-                <a:ea typeface="Arial"/>
-                <a:cs typeface="Arial"/>
-                <a:sym typeface="Arial"/>
-              </a:defRPr>
-            </a:lvl8pPr>
-            <a:lvl9pPr marL="4114800" marR="0" lvl="8" indent="-317500" algn="l" rtl="0">
-              <a:lnSpc>
-                <a:spcPct val="115000"/>
-              </a:lnSpc>
-              <a:spcBef>
-                <a:spcPts val="0"/>
-              </a:spcBef>
-              <a:spcAft>
-                <a:spcPts val="0"/>
-              </a:spcAft>
-              <a:buClr>
-                <a:schemeClr val="dk2"/>
-              </a:buClr>
-              <a:buSzPts val="1400"/>
-              <a:buFont typeface="Arial"/>
-              <a:buChar char="■"/>
-              <a:defRPr sz="1400" b="0" i="0" u="none" strike="noStrike" cap="none">
-                <a:solidFill>
-                  <a:schemeClr val="dk2"/>
-                </a:solidFill>
-                <a:latin typeface="Arial"/>
-                <a:ea typeface="Arial"/>
-                <a:cs typeface="Arial"/>
-                <a:sym typeface="Arial"/>
-              </a:defRPr>
-            </a:lvl9pPr>
-          </a:lstStyle>
-          <a:p>
-            <a:pPr marL="0" indent="0">
-              <a:buFont typeface="Arial"/>
-              <a:buNone/>
-            </a:pPr>
-            <a:r>
-              <a:rPr lang="ru-RU" sz="1400" dirty="0">
-                <a:solidFill>
-                  <a:schemeClr val="bg2"/>
-                </a:solidFill>
-                <a:latin typeface="Times New Roman" panose="02020603050405020304" pitchFamily="18" charset="0"/>
-                <a:cs typeface="Times New Roman" panose="02020603050405020304" pitchFamily="18" charset="0"/>
-              </a:rPr>
-              <a:t>Загрузка минутных</a:t>
-            </a:r>
-            <a:br>
-              <a:rPr lang="ru-RU" sz="1400" dirty="0">
-                <a:solidFill>
-                  <a:schemeClr val="bg2"/>
-                </a:solidFill>
-                <a:latin typeface="Times New Roman" panose="02020603050405020304" pitchFamily="18" charset="0"/>
-                <a:cs typeface="Times New Roman" panose="02020603050405020304" pitchFamily="18" charset="0"/>
-              </a:rPr>
-            </a:br>
-            <a:r>
-              <a:rPr lang="ru-RU" sz="1400" dirty="0">
-                <a:solidFill>
-                  <a:schemeClr val="bg2"/>
-                </a:solidFill>
-                <a:latin typeface="Times New Roman" panose="02020603050405020304" pitchFamily="18" charset="0"/>
-                <a:cs typeface="Times New Roman" panose="02020603050405020304" pitchFamily="18" charset="0"/>
-              </a:rPr>
-              <a:t>данных акций</a:t>
-            </a:r>
-          </a:p>
-        </p:txBody>
-      </p:sp>
-      <p:sp>
-        <p:nvSpPr>
-          <p:cNvPr id="15" name="Google Shape;80;p17">
-            <a:extLst>
-              <a:ext uri="{FF2B5EF4-FFF2-40B4-BE49-F238E27FC236}">
-                <a16:creationId xmlns:a16="http://schemas.microsoft.com/office/drawing/2014/main" id="{52EAAA17-3D9C-A975-8FAD-8EA58E068A82}"/>
-              </a:ext>
-            </a:extLst>
-          </p:cNvPr>
-          <p:cNvSpPr txBox="1">
-            <a:spLocks/>
-          </p:cNvSpPr>
-          <p:nvPr/>
-        </p:nvSpPr>
-        <p:spPr>
-          <a:xfrm>
-            <a:off x="5908732" y="2756667"/>
-            <a:ext cx="2104159" cy="1007919"/>
-          </a:xfrm>
-          <a:prstGeom prst="rect">
-            <a:avLst/>
-          </a:prstGeom>
-          <a:noFill/>
-          <a:ln>
-            <a:noFill/>
-          </a:ln>
-        </p:spPr>
-        <p:txBody>
-          <a:bodyPr spcFirstLastPara="1" wrap="square" lIns="91425" tIns="91425" rIns="91425" bIns="91425" anchor="ctr" anchorCtr="0">
-            <a:normAutofit/>
-          </a:bodyPr>
-          <a:lstStyle>
-            <a:defPPr marR="0" lvl="0" algn="l" rtl="0">
-              <a:lnSpc>
-                <a:spcPct val="100000"/>
-              </a:lnSpc>
-              <a:spcBef>
-                <a:spcPts val="0"/>
-              </a:spcBef>
-              <a:spcAft>
-                <a:spcPts val="0"/>
-              </a:spcAft>
-            </a:defPPr>
-            <a:lvl1pPr marL="457200" marR="0" lvl="0" indent="-342900" algn="l" rtl="0">
-              <a:lnSpc>
-                <a:spcPct val="115000"/>
-              </a:lnSpc>
-              <a:spcBef>
-                <a:spcPts val="0"/>
-              </a:spcBef>
-              <a:spcAft>
-                <a:spcPts val="0"/>
-              </a:spcAft>
-              <a:buClr>
-                <a:schemeClr val="dk2"/>
-              </a:buClr>
-              <a:buSzPts val="1800"/>
-              <a:buFont typeface="Arial"/>
-              <a:buChar char="●"/>
-              <a:defRPr sz="1800" b="0" i="0" u="none" strike="noStrike" cap="none">
-                <a:solidFill>
-                  <a:schemeClr val="dk2"/>
-                </a:solidFill>
-                <a:latin typeface="Arial"/>
-                <a:ea typeface="Arial"/>
-                <a:cs typeface="Arial"/>
-                <a:sym typeface="Arial"/>
-              </a:defRPr>
-            </a:lvl1pPr>
-            <a:lvl2pPr marL="914400" marR="0" lvl="1" indent="-317500" algn="l" rtl="0">
-              <a:lnSpc>
-                <a:spcPct val="115000"/>
-              </a:lnSpc>
-              <a:spcBef>
-                <a:spcPts val="0"/>
-              </a:spcBef>
-              <a:spcAft>
-                <a:spcPts val="0"/>
-              </a:spcAft>
-              <a:buClr>
-                <a:schemeClr val="dk2"/>
-              </a:buClr>
-              <a:buSzPts val="1400"/>
-              <a:buFont typeface="Arial"/>
-              <a:buChar char="○"/>
-              <a:defRPr sz="1400" b="0" i="0" u="none" strike="noStrike" cap="none">
-                <a:solidFill>
-                  <a:schemeClr val="dk2"/>
-                </a:solidFill>
-                <a:latin typeface="Arial"/>
-                <a:ea typeface="Arial"/>
-                <a:cs typeface="Arial"/>
-                <a:sym typeface="Arial"/>
-              </a:defRPr>
-            </a:lvl2pPr>
-            <a:lvl3pPr marL="1371600" marR="0" lvl="2" indent="-317500" algn="l" rtl="0">
-              <a:lnSpc>
-                <a:spcPct val="115000"/>
-              </a:lnSpc>
-              <a:spcBef>
-                <a:spcPts val="0"/>
-              </a:spcBef>
-              <a:spcAft>
-                <a:spcPts val="0"/>
-              </a:spcAft>
-              <a:buClr>
-                <a:schemeClr val="dk2"/>
-              </a:buClr>
-              <a:buSzPts val="1400"/>
-              <a:buFont typeface="Arial"/>
-              <a:buChar char="■"/>
-              <a:defRPr sz="1400" b="0" i="0" u="none" strike="noStrike" cap="none">
-                <a:solidFill>
-                  <a:schemeClr val="dk2"/>
-                </a:solidFill>
-                <a:latin typeface="Arial"/>
-                <a:ea typeface="Arial"/>
-                <a:cs typeface="Arial"/>
-                <a:sym typeface="Arial"/>
-              </a:defRPr>
-            </a:lvl3pPr>
-            <a:lvl4pPr marL="1828800" marR="0" lvl="3" indent="-317500" algn="l" rtl="0">
-              <a:lnSpc>
-                <a:spcPct val="115000"/>
-              </a:lnSpc>
-              <a:spcBef>
-                <a:spcPts val="0"/>
-              </a:spcBef>
-              <a:spcAft>
-                <a:spcPts val="0"/>
-              </a:spcAft>
-              <a:buClr>
-                <a:schemeClr val="dk2"/>
-              </a:buClr>
-              <a:buSzPts val="1400"/>
-              <a:buFont typeface="Arial"/>
-              <a:buChar char="●"/>
-              <a:defRPr sz="1400" b="0" i="0" u="none" strike="noStrike" cap="none">
-                <a:solidFill>
-                  <a:schemeClr val="dk2"/>
-                </a:solidFill>
-                <a:latin typeface="Arial"/>
-                <a:ea typeface="Arial"/>
-                <a:cs typeface="Arial"/>
-                <a:sym typeface="Arial"/>
-              </a:defRPr>
-            </a:lvl4pPr>
-            <a:lvl5pPr marL="2286000" marR="0" lvl="4" indent="-317500" algn="l" rtl="0">
-              <a:lnSpc>
-                <a:spcPct val="115000"/>
-              </a:lnSpc>
-              <a:spcBef>
-                <a:spcPts val="0"/>
-              </a:spcBef>
-              <a:spcAft>
-                <a:spcPts val="0"/>
-              </a:spcAft>
-              <a:buClr>
-                <a:schemeClr val="dk2"/>
-              </a:buClr>
-              <a:buSzPts val="1400"/>
-              <a:buFont typeface="Arial"/>
-              <a:buChar char="○"/>
-              <a:defRPr sz="1400" b="0" i="0" u="none" strike="noStrike" cap="none">
-                <a:solidFill>
-                  <a:schemeClr val="dk2"/>
-                </a:solidFill>
-                <a:latin typeface="Arial"/>
-                <a:ea typeface="Arial"/>
-                <a:cs typeface="Arial"/>
-                <a:sym typeface="Arial"/>
-              </a:defRPr>
-            </a:lvl5pPr>
-            <a:lvl6pPr marL="2743200" marR="0" lvl="5" indent="-317500" algn="l" rtl="0">
-              <a:lnSpc>
-                <a:spcPct val="115000"/>
-              </a:lnSpc>
-              <a:spcBef>
-                <a:spcPts val="0"/>
-              </a:spcBef>
-              <a:spcAft>
-                <a:spcPts val="0"/>
-              </a:spcAft>
-              <a:buClr>
-                <a:schemeClr val="dk2"/>
-              </a:buClr>
-              <a:buSzPts val="1400"/>
-              <a:buFont typeface="Arial"/>
-              <a:buChar char="■"/>
-              <a:defRPr sz="1400" b="0" i="0" u="none" strike="noStrike" cap="none">
-                <a:solidFill>
-                  <a:schemeClr val="dk2"/>
-                </a:solidFill>
-                <a:latin typeface="Arial"/>
-                <a:ea typeface="Arial"/>
-                <a:cs typeface="Arial"/>
-                <a:sym typeface="Arial"/>
-              </a:defRPr>
-            </a:lvl6pPr>
-            <a:lvl7pPr marL="3200400" marR="0" lvl="6" indent="-317500" algn="l" rtl="0">
-              <a:lnSpc>
-                <a:spcPct val="115000"/>
-              </a:lnSpc>
-              <a:spcBef>
-                <a:spcPts val="0"/>
-              </a:spcBef>
-              <a:spcAft>
-                <a:spcPts val="0"/>
-              </a:spcAft>
-              <a:buClr>
-                <a:schemeClr val="dk2"/>
-              </a:buClr>
-              <a:buSzPts val="1400"/>
-              <a:buFont typeface="Arial"/>
-              <a:buChar char="●"/>
-              <a:defRPr sz="1400" b="0" i="0" u="none" strike="noStrike" cap="none">
-                <a:solidFill>
-                  <a:schemeClr val="dk2"/>
-                </a:solidFill>
-                <a:latin typeface="Arial"/>
-                <a:ea typeface="Arial"/>
-                <a:cs typeface="Arial"/>
-                <a:sym typeface="Arial"/>
-              </a:defRPr>
-            </a:lvl7pPr>
-            <a:lvl8pPr marL="3657600" marR="0" lvl="7" indent="-317500" algn="l" rtl="0">
-              <a:lnSpc>
-                <a:spcPct val="115000"/>
-              </a:lnSpc>
-              <a:spcBef>
-                <a:spcPts val="0"/>
-              </a:spcBef>
-              <a:spcAft>
-                <a:spcPts val="0"/>
-              </a:spcAft>
-              <a:buClr>
-                <a:schemeClr val="dk2"/>
-              </a:buClr>
-              <a:buSzPts val="1400"/>
-              <a:buFont typeface="Arial"/>
-              <a:buChar char="○"/>
-              <a:defRPr sz="1400" b="0" i="0" u="none" strike="noStrike" cap="none">
-                <a:solidFill>
-                  <a:schemeClr val="dk2"/>
-                </a:solidFill>
-                <a:latin typeface="Arial"/>
-                <a:ea typeface="Arial"/>
-                <a:cs typeface="Arial"/>
-                <a:sym typeface="Arial"/>
-              </a:defRPr>
-            </a:lvl8pPr>
-            <a:lvl9pPr marL="4114800" marR="0" lvl="8" indent="-317500" algn="l" rtl="0">
-              <a:lnSpc>
-                <a:spcPct val="115000"/>
-              </a:lnSpc>
-              <a:spcBef>
-                <a:spcPts val="0"/>
-              </a:spcBef>
-              <a:spcAft>
-                <a:spcPts val="0"/>
-              </a:spcAft>
-              <a:buClr>
-                <a:schemeClr val="dk2"/>
-              </a:buClr>
-              <a:buSzPts val="1400"/>
-              <a:buFont typeface="Arial"/>
-              <a:buChar char="■"/>
-              <a:defRPr sz="1400" b="0" i="0" u="none" strike="noStrike" cap="none">
-                <a:solidFill>
-                  <a:schemeClr val="dk2"/>
-                </a:solidFill>
-                <a:latin typeface="Arial"/>
-                <a:ea typeface="Arial"/>
-                <a:cs typeface="Arial"/>
-                <a:sym typeface="Arial"/>
-              </a:defRPr>
-            </a:lvl9pPr>
-          </a:lstStyle>
-          <a:p>
-            <a:pPr marL="0" indent="0">
-              <a:buFont typeface="Arial"/>
-              <a:buNone/>
-            </a:pPr>
-            <a:r>
-              <a:rPr lang="ru-RU" sz="1200" dirty="0">
-                <a:solidFill>
-                  <a:schemeClr val="bg2"/>
-                </a:solidFill>
-                <a:latin typeface="Times New Roman" panose="02020603050405020304" pitchFamily="18" charset="0"/>
-                <a:cs typeface="Times New Roman" panose="02020603050405020304" pitchFamily="18" charset="0"/>
-              </a:rPr>
-              <a:t>Подбор гиперпараметров модуля принятия решений</a:t>
-            </a:r>
-          </a:p>
-        </p:txBody>
-      </p:sp>
-      <p:sp>
-        <p:nvSpPr>
-          <p:cNvPr id="17" name="Google Shape;80;p17">
-            <a:extLst>
-              <a:ext uri="{FF2B5EF4-FFF2-40B4-BE49-F238E27FC236}">
-                <a16:creationId xmlns:a16="http://schemas.microsoft.com/office/drawing/2014/main" id="{E542635D-4750-DA5F-C072-F6FD2D44A99F}"/>
-              </a:ext>
-            </a:extLst>
-          </p:cNvPr>
-          <p:cNvSpPr txBox="1">
-            <a:spLocks/>
-          </p:cNvSpPr>
-          <p:nvPr/>
-        </p:nvSpPr>
-        <p:spPr>
-          <a:xfrm>
-            <a:off x="2252099" y="2821938"/>
-            <a:ext cx="2032399" cy="1330034"/>
-          </a:xfrm>
-          <a:prstGeom prst="rect">
-            <a:avLst/>
-          </a:prstGeom>
-          <a:noFill/>
-          <a:ln>
-            <a:noFill/>
-          </a:ln>
-        </p:spPr>
-        <p:txBody>
-          <a:bodyPr spcFirstLastPara="1" wrap="square" lIns="91425" tIns="91425" rIns="91425" bIns="91425" anchor="ctr" anchorCtr="0">
-            <a:noAutofit/>
-          </a:bodyPr>
-          <a:lstStyle>
-            <a:defPPr marR="0" lvl="0" algn="l" rtl="0">
-              <a:lnSpc>
-                <a:spcPct val="100000"/>
-              </a:lnSpc>
-              <a:spcBef>
-                <a:spcPts val="0"/>
-              </a:spcBef>
-              <a:spcAft>
-                <a:spcPts val="0"/>
-              </a:spcAft>
-            </a:defPPr>
-            <a:lvl1pPr marL="457200" marR="0" lvl="0" indent="-342900" algn="l" rtl="0">
-              <a:lnSpc>
-                <a:spcPct val="115000"/>
-              </a:lnSpc>
-              <a:spcBef>
-                <a:spcPts val="0"/>
-              </a:spcBef>
-              <a:spcAft>
-                <a:spcPts val="0"/>
-              </a:spcAft>
-              <a:buClr>
-                <a:schemeClr val="dk2"/>
-              </a:buClr>
-              <a:buSzPts val="1800"/>
-              <a:buFont typeface="Arial"/>
-              <a:buChar char="●"/>
-              <a:defRPr sz="1800" b="0" i="0" u="none" strike="noStrike" cap="none">
-                <a:solidFill>
-                  <a:schemeClr val="dk2"/>
-                </a:solidFill>
-                <a:latin typeface="Arial"/>
-                <a:ea typeface="Arial"/>
-                <a:cs typeface="Arial"/>
-                <a:sym typeface="Arial"/>
-              </a:defRPr>
-            </a:lvl1pPr>
-            <a:lvl2pPr marL="914400" marR="0" lvl="1" indent="-317500" algn="l" rtl="0">
-              <a:lnSpc>
-                <a:spcPct val="115000"/>
-              </a:lnSpc>
-              <a:spcBef>
-                <a:spcPts val="0"/>
-              </a:spcBef>
-              <a:spcAft>
-                <a:spcPts val="0"/>
-              </a:spcAft>
-              <a:buClr>
-                <a:schemeClr val="dk2"/>
-              </a:buClr>
-              <a:buSzPts val="1400"/>
-              <a:buFont typeface="Arial"/>
-              <a:buChar char="○"/>
-              <a:defRPr sz="1400" b="0" i="0" u="none" strike="noStrike" cap="none">
-                <a:solidFill>
-                  <a:schemeClr val="dk2"/>
-                </a:solidFill>
-                <a:latin typeface="Arial"/>
-                <a:ea typeface="Arial"/>
-                <a:cs typeface="Arial"/>
-                <a:sym typeface="Arial"/>
-              </a:defRPr>
-            </a:lvl2pPr>
-            <a:lvl3pPr marL="1371600" marR="0" lvl="2" indent="-317500" algn="l" rtl="0">
-              <a:lnSpc>
-                <a:spcPct val="115000"/>
-              </a:lnSpc>
-              <a:spcBef>
-                <a:spcPts val="0"/>
-              </a:spcBef>
-              <a:spcAft>
-                <a:spcPts val="0"/>
-              </a:spcAft>
-              <a:buClr>
-                <a:schemeClr val="dk2"/>
-              </a:buClr>
-              <a:buSzPts val="1400"/>
-              <a:buFont typeface="Arial"/>
-              <a:buChar char="■"/>
-              <a:defRPr sz="1400" b="0" i="0" u="none" strike="noStrike" cap="none">
-                <a:solidFill>
-                  <a:schemeClr val="dk2"/>
-                </a:solidFill>
-                <a:latin typeface="Arial"/>
-                <a:ea typeface="Arial"/>
-                <a:cs typeface="Arial"/>
-                <a:sym typeface="Arial"/>
-              </a:defRPr>
-            </a:lvl3pPr>
-            <a:lvl4pPr marL="1828800" marR="0" lvl="3" indent="-317500" algn="l" rtl="0">
-              <a:lnSpc>
-                <a:spcPct val="115000"/>
-              </a:lnSpc>
-              <a:spcBef>
-                <a:spcPts val="0"/>
-              </a:spcBef>
-              <a:spcAft>
-                <a:spcPts val="0"/>
-              </a:spcAft>
-              <a:buClr>
-                <a:schemeClr val="dk2"/>
-              </a:buClr>
-              <a:buSzPts val="1400"/>
-              <a:buFont typeface="Arial"/>
-              <a:buChar char="●"/>
-              <a:defRPr sz="1400" b="0" i="0" u="none" strike="noStrike" cap="none">
-                <a:solidFill>
-                  <a:schemeClr val="dk2"/>
-                </a:solidFill>
-                <a:latin typeface="Arial"/>
-                <a:ea typeface="Arial"/>
-                <a:cs typeface="Arial"/>
-                <a:sym typeface="Arial"/>
-              </a:defRPr>
-            </a:lvl4pPr>
-            <a:lvl5pPr marL="2286000" marR="0" lvl="4" indent="-317500" algn="l" rtl="0">
-              <a:lnSpc>
-                <a:spcPct val="115000"/>
-              </a:lnSpc>
-              <a:spcBef>
-                <a:spcPts val="0"/>
-              </a:spcBef>
-              <a:spcAft>
-                <a:spcPts val="0"/>
-              </a:spcAft>
-              <a:buClr>
-                <a:schemeClr val="dk2"/>
-              </a:buClr>
-              <a:buSzPts val="1400"/>
-              <a:buFont typeface="Arial"/>
-              <a:buChar char="○"/>
-              <a:defRPr sz="1400" b="0" i="0" u="none" strike="noStrike" cap="none">
-                <a:solidFill>
-                  <a:schemeClr val="dk2"/>
-                </a:solidFill>
-                <a:latin typeface="Arial"/>
-                <a:ea typeface="Arial"/>
-                <a:cs typeface="Arial"/>
-                <a:sym typeface="Arial"/>
-              </a:defRPr>
-            </a:lvl5pPr>
-            <a:lvl6pPr marL="2743200" marR="0" lvl="5" indent="-317500" algn="l" rtl="0">
-              <a:lnSpc>
-                <a:spcPct val="115000"/>
-              </a:lnSpc>
-              <a:spcBef>
-                <a:spcPts val="0"/>
-              </a:spcBef>
-              <a:spcAft>
-                <a:spcPts val="0"/>
-              </a:spcAft>
-              <a:buClr>
-                <a:schemeClr val="dk2"/>
-              </a:buClr>
-              <a:buSzPts val="1400"/>
-              <a:buFont typeface="Arial"/>
-              <a:buChar char="■"/>
-              <a:defRPr sz="1400" b="0" i="0" u="none" strike="noStrike" cap="none">
-                <a:solidFill>
-                  <a:schemeClr val="dk2"/>
-                </a:solidFill>
-                <a:latin typeface="Arial"/>
-                <a:ea typeface="Arial"/>
-                <a:cs typeface="Arial"/>
-                <a:sym typeface="Arial"/>
-              </a:defRPr>
-            </a:lvl6pPr>
-            <a:lvl7pPr marL="3200400" marR="0" lvl="6" indent="-317500" algn="l" rtl="0">
-              <a:lnSpc>
-                <a:spcPct val="115000"/>
-              </a:lnSpc>
-              <a:spcBef>
-                <a:spcPts val="0"/>
-              </a:spcBef>
-              <a:spcAft>
-                <a:spcPts val="0"/>
-              </a:spcAft>
-              <a:buClr>
-                <a:schemeClr val="dk2"/>
-              </a:buClr>
-              <a:buSzPts val="1400"/>
-              <a:buFont typeface="Arial"/>
-              <a:buChar char="●"/>
-              <a:defRPr sz="1400" b="0" i="0" u="none" strike="noStrike" cap="none">
-                <a:solidFill>
-                  <a:schemeClr val="dk2"/>
-                </a:solidFill>
-                <a:latin typeface="Arial"/>
-                <a:ea typeface="Arial"/>
-                <a:cs typeface="Arial"/>
-                <a:sym typeface="Arial"/>
-              </a:defRPr>
-            </a:lvl7pPr>
-            <a:lvl8pPr marL="3657600" marR="0" lvl="7" indent="-317500" algn="l" rtl="0">
-              <a:lnSpc>
-                <a:spcPct val="115000"/>
-              </a:lnSpc>
-              <a:spcBef>
-                <a:spcPts val="0"/>
-              </a:spcBef>
-              <a:spcAft>
-                <a:spcPts val="0"/>
-              </a:spcAft>
-              <a:buClr>
-                <a:schemeClr val="dk2"/>
-              </a:buClr>
-              <a:buSzPts val="1400"/>
-              <a:buFont typeface="Arial"/>
-              <a:buChar char="○"/>
-              <a:defRPr sz="1400" b="0" i="0" u="none" strike="noStrike" cap="none">
-                <a:solidFill>
-                  <a:schemeClr val="dk2"/>
-                </a:solidFill>
-                <a:latin typeface="Arial"/>
-                <a:ea typeface="Arial"/>
-                <a:cs typeface="Arial"/>
-                <a:sym typeface="Arial"/>
-              </a:defRPr>
-            </a:lvl8pPr>
-            <a:lvl9pPr marL="4114800" marR="0" lvl="8" indent="-317500" algn="l" rtl="0">
-              <a:lnSpc>
-                <a:spcPct val="115000"/>
-              </a:lnSpc>
-              <a:spcBef>
-                <a:spcPts val="0"/>
-              </a:spcBef>
-              <a:spcAft>
-                <a:spcPts val="0"/>
-              </a:spcAft>
-              <a:buClr>
-                <a:schemeClr val="dk2"/>
-              </a:buClr>
-              <a:buSzPts val="1400"/>
-              <a:buFont typeface="Arial"/>
-              <a:buChar char="■"/>
-              <a:defRPr sz="1400" b="0" i="0" u="none" strike="noStrike" cap="none">
-                <a:solidFill>
-                  <a:schemeClr val="dk2"/>
-                </a:solidFill>
-                <a:latin typeface="Arial"/>
-                <a:ea typeface="Arial"/>
-                <a:cs typeface="Arial"/>
-                <a:sym typeface="Arial"/>
-              </a:defRPr>
-            </a:lvl9pPr>
-          </a:lstStyle>
-          <a:p>
-            <a:pPr marL="0" indent="0">
-              <a:buFont typeface="Arial"/>
-              <a:buNone/>
-            </a:pPr>
-            <a:r>
-              <a:rPr lang="ru-RU" sz="1200" dirty="0">
-                <a:solidFill>
-                  <a:schemeClr val="bg2"/>
-                </a:solidFill>
-                <a:latin typeface="Times New Roman" panose="02020603050405020304" pitchFamily="18" charset="0"/>
-                <a:cs typeface="Times New Roman" panose="02020603050405020304" pitchFamily="18" charset="0"/>
-              </a:rPr>
-              <a:t>Доходности</a:t>
-            </a:r>
-          </a:p>
-          <a:p>
-            <a:pPr marL="0" indent="0">
-              <a:buFont typeface="Arial"/>
-              <a:buNone/>
-            </a:pPr>
-            <a:r>
-              <a:rPr lang="ru-RU" sz="1200" dirty="0">
-                <a:solidFill>
-                  <a:schemeClr val="bg2"/>
-                </a:solidFill>
-                <a:latin typeface="Times New Roman" panose="02020603050405020304" pitchFamily="18" charset="0"/>
-                <a:cs typeface="Times New Roman" panose="02020603050405020304" pitchFamily="18" charset="0"/>
-              </a:rPr>
-              <a:t>Объём и оборот</a:t>
-            </a:r>
-          </a:p>
-          <a:p>
-            <a:pPr marL="0" indent="0">
-              <a:buFont typeface="Arial"/>
-              <a:buNone/>
-            </a:pPr>
-            <a:r>
-              <a:rPr lang="ru-RU" sz="1200" dirty="0">
-                <a:solidFill>
-                  <a:schemeClr val="bg2"/>
-                </a:solidFill>
-                <a:latin typeface="Times New Roman" panose="02020603050405020304" pitchFamily="18" charset="0"/>
-                <a:cs typeface="Times New Roman" panose="02020603050405020304" pitchFamily="18" charset="0"/>
-              </a:rPr>
-              <a:t>Волатильность</a:t>
-            </a:r>
-          </a:p>
-          <a:p>
-            <a:pPr marL="0" indent="0">
-              <a:buFont typeface="Arial"/>
-              <a:buNone/>
-            </a:pPr>
-            <a:r>
-              <a:rPr lang="ru-RU" sz="1200" dirty="0">
-                <a:solidFill>
-                  <a:schemeClr val="bg2"/>
-                </a:solidFill>
-                <a:latin typeface="Times New Roman" panose="02020603050405020304" pitchFamily="18" charset="0"/>
-                <a:cs typeface="Times New Roman" panose="02020603050405020304" pitchFamily="18" charset="0"/>
-              </a:rPr>
-              <a:t>Временные признаки</a:t>
-            </a:r>
-          </a:p>
-          <a:p>
-            <a:pPr marL="0" indent="0">
-              <a:buFont typeface="Arial"/>
-              <a:buNone/>
-            </a:pPr>
-            <a:r>
-              <a:rPr lang="ru-RU" sz="1200" dirty="0">
-                <a:solidFill>
-                  <a:schemeClr val="bg2"/>
-                </a:solidFill>
-                <a:latin typeface="Times New Roman" panose="02020603050405020304" pitchFamily="18" charset="0"/>
-                <a:cs typeface="Times New Roman" panose="02020603050405020304" pitchFamily="18" charset="0"/>
-              </a:rPr>
-              <a:t>Будущая доходность</a:t>
-            </a:r>
-          </a:p>
-          <a:p>
-            <a:pPr marL="0" indent="0">
-              <a:buFont typeface="Arial"/>
-              <a:buNone/>
-            </a:pPr>
-            <a:r>
-              <a:rPr lang="ru-RU" sz="1200" dirty="0">
-                <a:solidFill>
-                  <a:schemeClr val="bg2"/>
-                </a:solidFill>
-                <a:latin typeface="Times New Roman" panose="02020603050405020304" pitchFamily="18" charset="0"/>
-                <a:cs typeface="Times New Roman" panose="02020603050405020304" pitchFamily="18" charset="0"/>
-              </a:rPr>
-              <a:t>Метка удержания позиций</a:t>
-            </a:r>
-          </a:p>
-          <a:p>
-            <a:pPr marL="0" indent="0">
-              <a:buFont typeface="Arial"/>
-              <a:buNone/>
-            </a:pPr>
-            <a:r>
-              <a:rPr lang="ru-RU" sz="1200" dirty="0">
-                <a:solidFill>
-                  <a:schemeClr val="bg2"/>
-                </a:solidFill>
-                <a:latin typeface="Times New Roman" panose="02020603050405020304" pitchFamily="18" charset="0"/>
-                <a:cs typeface="Times New Roman" panose="02020603050405020304" pitchFamily="18" charset="0"/>
-              </a:rPr>
-              <a:t>Окна прошлых наблюдений</a:t>
-            </a:r>
-          </a:p>
-        </p:txBody>
-      </p:sp>
-      <p:sp>
-        <p:nvSpPr>
-          <p:cNvPr id="19" name="Google Shape;80;p17">
-            <a:extLst>
-              <a:ext uri="{FF2B5EF4-FFF2-40B4-BE49-F238E27FC236}">
-                <a16:creationId xmlns:a16="http://schemas.microsoft.com/office/drawing/2014/main" id="{9D7CD218-D82F-7595-B047-8E33C2969C0F}"/>
-              </a:ext>
-            </a:extLst>
-          </p:cNvPr>
-          <p:cNvSpPr txBox="1">
-            <a:spLocks/>
-          </p:cNvSpPr>
-          <p:nvPr/>
-        </p:nvSpPr>
-        <p:spPr>
-          <a:xfrm>
-            <a:off x="4284498" y="2756667"/>
-            <a:ext cx="1435472" cy="1799747"/>
-          </a:xfrm>
-          <a:prstGeom prst="rect">
-            <a:avLst/>
-          </a:prstGeom>
-          <a:noFill/>
-          <a:ln>
-            <a:noFill/>
-          </a:ln>
-        </p:spPr>
-        <p:txBody>
-          <a:bodyPr spcFirstLastPara="1" wrap="square" lIns="91425" tIns="91425" rIns="91425" bIns="91425" anchor="ctr" anchorCtr="0">
-            <a:noAutofit/>
-          </a:bodyPr>
-          <a:lstStyle>
-            <a:defPPr marR="0" lvl="0" algn="l" rtl="0">
-              <a:lnSpc>
-                <a:spcPct val="100000"/>
-              </a:lnSpc>
-              <a:spcBef>
-                <a:spcPts val="0"/>
-              </a:spcBef>
-              <a:spcAft>
-                <a:spcPts val="0"/>
-              </a:spcAft>
-            </a:defPPr>
-            <a:lvl1pPr marL="457200" marR="0" lvl="0" indent="-342900" algn="l" rtl="0">
-              <a:lnSpc>
-                <a:spcPct val="115000"/>
-              </a:lnSpc>
-              <a:spcBef>
-                <a:spcPts val="0"/>
-              </a:spcBef>
-              <a:spcAft>
-                <a:spcPts val="0"/>
-              </a:spcAft>
-              <a:buClr>
-                <a:schemeClr val="dk2"/>
-              </a:buClr>
-              <a:buSzPts val="1800"/>
-              <a:buFont typeface="Arial"/>
-              <a:buChar char="●"/>
-              <a:defRPr sz="1800" b="0" i="0" u="none" strike="noStrike" cap="none">
-                <a:solidFill>
-                  <a:schemeClr val="dk2"/>
-                </a:solidFill>
-                <a:latin typeface="Arial"/>
-                <a:ea typeface="Arial"/>
-                <a:cs typeface="Arial"/>
-                <a:sym typeface="Arial"/>
-              </a:defRPr>
-            </a:lvl1pPr>
-            <a:lvl2pPr marL="914400" marR="0" lvl="1" indent="-317500" algn="l" rtl="0">
-              <a:lnSpc>
-                <a:spcPct val="115000"/>
-              </a:lnSpc>
-              <a:spcBef>
-                <a:spcPts val="0"/>
-              </a:spcBef>
-              <a:spcAft>
-                <a:spcPts val="0"/>
-              </a:spcAft>
-              <a:buClr>
-                <a:schemeClr val="dk2"/>
-              </a:buClr>
-              <a:buSzPts val="1400"/>
-              <a:buFont typeface="Arial"/>
-              <a:buChar char="○"/>
-              <a:defRPr sz="1400" b="0" i="0" u="none" strike="noStrike" cap="none">
-                <a:solidFill>
-                  <a:schemeClr val="dk2"/>
-                </a:solidFill>
-                <a:latin typeface="Arial"/>
-                <a:ea typeface="Arial"/>
-                <a:cs typeface="Arial"/>
-                <a:sym typeface="Arial"/>
-              </a:defRPr>
-            </a:lvl2pPr>
-            <a:lvl3pPr marL="1371600" marR="0" lvl="2" indent="-317500" algn="l" rtl="0">
-              <a:lnSpc>
-                <a:spcPct val="115000"/>
-              </a:lnSpc>
-              <a:spcBef>
-                <a:spcPts val="0"/>
-              </a:spcBef>
-              <a:spcAft>
-                <a:spcPts val="0"/>
-              </a:spcAft>
-              <a:buClr>
-                <a:schemeClr val="dk2"/>
-              </a:buClr>
-              <a:buSzPts val="1400"/>
-              <a:buFont typeface="Arial"/>
-              <a:buChar char="■"/>
-              <a:defRPr sz="1400" b="0" i="0" u="none" strike="noStrike" cap="none">
-                <a:solidFill>
-                  <a:schemeClr val="dk2"/>
-                </a:solidFill>
-                <a:latin typeface="Arial"/>
-                <a:ea typeface="Arial"/>
-                <a:cs typeface="Arial"/>
-                <a:sym typeface="Arial"/>
-              </a:defRPr>
-            </a:lvl3pPr>
-            <a:lvl4pPr marL="1828800" marR="0" lvl="3" indent="-317500" algn="l" rtl="0">
-              <a:lnSpc>
-                <a:spcPct val="115000"/>
-              </a:lnSpc>
-              <a:spcBef>
-                <a:spcPts val="0"/>
-              </a:spcBef>
-              <a:spcAft>
-                <a:spcPts val="0"/>
-              </a:spcAft>
-              <a:buClr>
-                <a:schemeClr val="dk2"/>
-              </a:buClr>
-              <a:buSzPts val="1400"/>
-              <a:buFont typeface="Arial"/>
-              <a:buChar char="●"/>
-              <a:defRPr sz="1400" b="0" i="0" u="none" strike="noStrike" cap="none">
-                <a:solidFill>
-                  <a:schemeClr val="dk2"/>
-                </a:solidFill>
-                <a:latin typeface="Arial"/>
-                <a:ea typeface="Arial"/>
-                <a:cs typeface="Arial"/>
-                <a:sym typeface="Arial"/>
-              </a:defRPr>
-            </a:lvl4pPr>
-            <a:lvl5pPr marL="2286000" marR="0" lvl="4" indent="-317500" algn="l" rtl="0">
-              <a:lnSpc>
-                <a:spcPct val="115000"/>
-              </a:lnSpc>
-              <a:spcBef>
-                <a:spcPts val="0"/>
-              </a:spcBef>
-              <a:spcAft>
-                <a:spcPts val="0"/>
-              </a:spcAft>
-              <a:buClr>
-                <a:schemeClr val="dk2"/>
-              </a:buClr>
-              <a:buSzPts val="1400"/>
-              <a:buFont typeface="Arial"/>
-              <a:buChar char="○"/>
-              <a:defRPr sz="1400" b="0" i="0" u="none" strike="noStrike" cap="none">
-                <a:solidFill>
-                  <a:schemeClr val="dk2"/>
-                </a:solidFill>
-                <a:latin typeface="Arial"/>
-                <a:ea typeface="Arial"/>
-                <a:cs typeface="Arial"/>
-                <a:sym typeface="Arial"/>
-              </a:defRPr>
-            </a:lvl5pPr>
-            <a:lvl6pPr marL="2743200" marR="0" lvl="5" indent="-317500" algn="l" rtl="0">
-              <a:lnSpc>
-                <a:spcPct val="115000"/>
-              </a:lnSpc>
-              <a:spcBef>
-                <a:spcPts val="0"/>
-              </a:spcBef>
-              <a:spcAft>
-                <a:spcPts val="0"/>
-              </a:spcAft>
-              <a:buClr>
-                <a:schemeClr val="dk2"/>
-              </a:buClr>
-              <a:buSzPts val="1400"/>
-              <a:buFont typeface="Arial"/>
-              <a:buChar char="■"/>
-              <a:defRPr sz="1400" b="0" i="0" u="none" strike="noStrike" cap="none">
-                <a:solidFill>
-                  <a:schemeClr val="dk2"/>
-                </a:solidFill>
-                <a:latin typeface="Arial"/>
-                <a:ea typeface="Arial"/>
-                <a:cs typeface="Arial"/>
-                <a:sym typeface="Arial"/>
-              </a:defRPr>
-            </a:lvl6pPr>
-            <a:lvl7pPr marL="3200400" marR="0" lvl="6" indent="-317500" algn="l" rtl="0">
-              <a:lnSpc>
-                <a:spcPct val="115000"/>
-              </a:lnSpc>
-              <a:spcBef>
-                <a:spcPts val="0"/>
-              </a:spcBef>
-              <a:spcAft>
-                <a:spcPts val="0"/>
-              </a:spcAft>
-              <a:buClr>
-                <a:schemeClr val="dk2"/>
-              </a:buClr>
-              <a:buSzPts val="1400"/>
-              <a:buFont typeface="Arial"/>
-              <a:buChar char="●"/>
-              <a:defRPr sz="1400" b="0" i="0" u="none" strike="noStrike" cap="none">
-                <a:solidFill>
-                  <a:schemeClr val="dk2"/>
-                </a:solidFill>
-                <a:latin typeface="Arial"/>
-                <a:ea typeface="Arial"/>
-                <a:cs typeface="Arial"/>
-                <a:sym typeface="Arial"/>
-              </a:defRPr>
-            </a:lvl7pPr>
-            <a:lvl8pPr marL="3657600" marR="0" lvl="7" indent="-317500" algn="l" rtl="0">
-              <a:lnSpc>
-                <a:spcPct val="115000"/>
-              </a:lnSpc>
-              <a:spcBef>
-                <a:spcPts val="0"/>
-              </a:spcBef>
-              <a:spcAft>
-                <a:spcPts val="0"/>
-              </a:spcAft>
-              <a:buClr>
-                <a:schemeClr val="dk2"/>
-              </a:buClr>
-              <a:buSzPts val="1400"/>
-              <a:buFont typeface="Arial"/>
-              <a:buChar char="○"/>
-              <a:defRPr sz="1400" b="0" i="0" u="none" strike="noStrike" cap="none">
-                <a:solidFill>
-                  <a:schemeClr val="dk2"/>
-                </a:solidFill>
-                <a:latin typeface="Arial"/>
-                <a:ea typeface="Arial"/>
-                <a:cs typeface="Arial"/>
-                <a:sym typeface="Arial"/>
-              </a:defRPr>
-            </a:lvl8pPr>
-            <a:lvl9pPr marL="4114800" marR="0" lvl="8" indent="-317500" algn="l" rtl="0">
-              <a:lnSpc>
-                <a:spcPct val="115000"/>
-              </a:lnSpc>
-              <a:spcBef>
-                <a:spcPts val="0"/>
-              </a:spcBef>
-              <a:spcAft>
-                <a:spcPts val="0"/>
-              </a:spcAft>
-              <a:buClr>
-                <a:schemeClr val="dk2"/>
-              </a:buClr>
-              <a:buSzPts val="1400"/>
-              <a:buFont typeface="Arial"/>
-              <a:buChar char="■"/>
-              <a:defRPr sz="1400" b="0" i="0" u="none" strike="noStrike" cap="none">
-                <a:solidFill>
-                  <a:schemeClr val="dk2"/>
-                </a:solidFill>
-                <a:latin typeface="Arial"/>
-                <a:ea typeface="Arial"/>
-                <a:cs typeface="Arial"/>
-                <a:sym typeface="Arial"/>
-              </a:defRPr>
-            </a:lvl9pPr>
-          </a:lstStyle>
-          <a:p>
-            <a:pPr marL="0" indent="0">
-              <a:buFont typeface="Arial"/>
-              <a:buNone/>
-            </a:pPr>
-            <a:r>
-              <a:rPr lang="en-US" sz="1200" dirty="0">
-                <a:solidFill>
-                  <a:schemeClr val="bg2"/>
-                </a:solidFill>
-                <a:latin typeface="Times New Roman" panose="02020603050405020304" pitchFamily="18" charset="0"/>
-                <a:cs typeface="Times New Roman" panose="02020603050405020304" pitchFamily="18" charset="0"/>
-              </a:rPr>
-              <a:t>Ridge</a:t>
-            </a:r>
-            <a:endParaRPr lang="ru-RU" sz="1200" dirty="0">
-              <a:solidFill>
-                <a:schemeClr val="bg2"/>
-              </a:solidFill>
-              <a:latin typeface="Times New Roman" panose="02020603050405020304" pitchFamily="18" charset="0"/>
-              <a:cs typeface="Times New Roman" panose="02020603050405020304" pitchFamily="18" charset="0"/>
-            </a:endParaRPr>
-          </a:p>
-          <a:p>
-            <a:pPr marL="0" indent="0">
-              <a:buFont typeface="Arial"/>
-              <a:buNone/>
-            </a:pPr>
-            <a:r>
-              <a:rPr lang="en-US" sz="1200" dirty="0">
-                <a:solidFill>
-                  <a:schemeClr val="bg2"/>
-                </a:solidFill>
-                <a:latin typeface="Times New Roman" panose="02020603050405020304" pitchFamily="18" charset="0"/>
-                <a:cs typeface="Times New Roman" panose="02020603050405020304" pitchFamily="18" charset="0"/>
-              </a:rPr>
-              <a:t>CatBoost</a:t>
-            </a:r>
-          </a:p>
-          <a:p>
-            <a:pPr marL="0" indent="0">
-              <a:buFont typeface="Arial"/>
-              <a:buNone/>
-            </a:pPr>
-            <a:r>
-              <a:rPr lang="ru-RU" sz="1200" dirty="0">
-                <a:solidFill>
-                  <a:schemeClr val="bg2"/>
-                </a:solidFill>
-                <a:latin typeface="Times New Roman" panose="02020603050405020304" pitchFamily="18" charset="0"/>
-                <a:cs typeface="Times New Roman" panose="02020603050405020304" pitchFamily="18" charset="0"/>
-              </a:rPr>
-              <a:t>Случайный лес</a:t>
-            </a:r>
-          </a:p>
-          <a:p>
-            <a:pPr marL="0" indent="0">
-              <a:buFont typeface="Arial"/>
-              <a:buNone/>
-            </a:pPr>
-            <a:r>
-              <a:rPr lang="ru-RU" sz="1200" dirty="0">
-                <a:solidFill>
-                  <a:schemeClr val="bg2"/>
-                </a:solidFill>
-                <a:latin typeface="Times New Roman" panose="02020603050405020304" pitchFamily="18" charset="0"/>
-                <a:cs typeface="Times New Roman" panose="02020603050405020304" pitchFamily="18" charset="0"/>
-              </a:rPr>
-              <a:t>Решающее дерево</a:t>
-            </a:r>
-          </a:p>
-          <a:p>
-            <a:pPr marL="0" indent="0">
-              <a:buFont typeface="Arial"/>
-              <a:buNone/>
-            </a:pPr>
-            <a:r>
-              <a:rPr lang="en-US" sz="1200" dirty="0">
-                <a:solidFill>
-                  <a:schemeClr val="bg2"/>
-                </a:solidFill>
-                <a:latin typeface="Times New Roman" panose="02020603050405020304" pitchFamily="18" charset="0"/>
-                <a:cs typeface="Times New Roman" panose="02020603050405020304" pitchFamily="18" charset="0"/>
-              </a:rPr>
-              <a:t>GRU</a:t>
-            </a:r>
-          </a:p>
-          <a:p>
-            <a:pPr marL="0" indent="0">
-              <a:buFont typeface="Arial"/>
-              <a:buNone/>
-            </a:pPr>
-            <a:r>
-              <a:rPr lang="en-US" sz="1200" dirty="0">
-                <a:solidFill>
-                  <a:schemeClr val="bg2"/>
-                </a:solidFill>
-                <a:latin typeface="Times New Roman" panose="02020603050405020304" pitchFamily="18" charset="0"/>
-                <a:cs typeface="Times New Roman" panose="02020603050405020304" pitchFamily="18" charset="0"/>
-              </a:rPr>
-              <a:t>LSTM</a:t>
-            </a:r>
-            <a:endParaRPr lang="ru-RU" sz="1200" dirty="0">
-              <a:solidFill>
-                <a:schemeClr val="bg2"/>
-              </a:solidFill>
-              <a:latin typeface="Times New Roman" panose="02020603050405020304" pitchFamily="18" charset="0"/>
-              <a:cs typeface="Times New Roman" panose="02020603050405020304" pitchFamily="18" charset="0"/>
-            </a:endParaRPr>
-          </a:p>
-          <a:p>
-            <a:pPr marL="0" indent="0">
-              <a:buFont typeface="Arial"/>
-              <a:buNone/>
-            </a:pPr>
-            <a:r>
-              <a:rPr lang="en-US" sz="1200" dirty="0">
-                <a:solidFill>
-                  <a:schemeClr val="bg2"/>
-                </a:solidFill>
-                <a:latin typeface="Times New Roman" panose="02020603050405020304" pitchFamily="18" charset="0"/>
-                <a:cs typeface="Times New Roman" panose="02020603050405020304" pitchFamily="18" charset="0"/>
-              </a:rPr>
-              <a:t>TCN</a:t>
-            </a:r>
-          </a:p>
-          <a:p>
-            <a:pPr marL="0" indent="0">
-              <a:buFont typeface="Arial"/>
-              <a:buNone/>
-            </a:pPr>
-            <a:r>
-              <a:rPr lang="en-US" sz="1200" dirty="0">
-                <a:solidFill>
-                  <a:schemeClr val="bg2"/>
-                </a:solidFill>
-                <a:latin typeface="Times New Roman" panose="02020603050405020304" pitchFamily="18" charset="0"/>
-                <a:cs typeface="Times New Roman" panose="02020603050405020304" pitchFamily="18" charset="0"/>
-              </a:rPr>
-              <a:t>Transformer</a:t>
-            </a:r>
-            <a:endParaRPr lang="ru-RU" sz="1200" dirty="0">
-              <a:solidFill>
-                <a:schemeClr val="bg2"/>
-              </a:solidFill>
               <a:latin typeface="Times New Roman" panose="02020603050405020304" pitchFamily="18" charset="0"/>
               <a:cs typeface="Times New Roman" panose="02020603050405020304" pitchFamily="18" charset="0"/>
             </a:endParaRPr>
@@ -12955,7 +10822,7 @@
                 <a:latin typeface="Times New Roman" panose="02020603050405020304" pitchFamily="18" charset="0"/>
                 <a:cs typeface="Times New Roman" panose="02020603050405020304" pitchFamily="18" charset="0"/>
               </a:rPr>
-              <a:t>5</a:t>
+              <a:t>6</a:t>
             </a:fld>
             <a:endParaRPr lang="ru">
               <a:latin typeface="Times New Roman" panose="02020603050405020304" pitchFamily="18" charset="0"/>
@@ -12964,6 +10831,224 @@
           </a:p>
         </p:txBody>
       </p:sp>
+      <p:sp>
+        <p:nvSpPr>
+          <p:cNvPr id="4" name="Текст 3">
+            <a:extLst>
+              <a:ext uri="{FF2B5EF4-FFF2-40B4-BE49-F238E27FC236}">
+                <a16:creationId xmlns:a16="http://schemas.microsoft.com/office/drawing/2014/main" id="{5598F67C-3362-1CB8-D39F-74257B85286E}"/>
+              </a:ext>
+            </a:extLst>
+          </p:cNvPr>
+          <p:cNvSpPr>
+            <a:spLocks noGrp="1"/>
+          </p:cNvSpPr>
+          <p:nvPr>
+            <p:ph type="body" idx="1"/>
+          </p:nvPr>
+        </p:nvSpPr>
+        <p:spPr/>
+        <p:txBody>
+          <a:bodyPr/>
+          <a:lstStyle/>
+          <a:p>
+            <a:pPr marL="114300" indent="0">
+              <a:buNone/>
+            </a:pPr>
+            <a:r>
+              <a:rPr lang="ru-RU" dirty="0">
+                <a:latin typeface="Times New Roman" panose="02020603050405020304" pitchFamily="18" charset="0"/>
+                <a:cs typeface="Times New Roman" panose="02020603050405020304" pitchFamily="18" charset="0"/>
+              </a:rPr>
+              <a:t>  </a:t>
+            </a:r>
+          </a:p>
+        </p:txBody>
+      </p:sp>
+      <p:sp>
+        <p:nvSpPr>
+          <p:cNvPr id="18" name="TextBox 17">
+            <a:extLst>
+              <a:ext uri="{FF2B5EF4-FFF2-40B4-BE49-F238E27FC236}">
+                <a16:creationId xmlns:a16="http://schemas.microsoft.com/office/drawing/2014/main" id="{A91A61EB-34D1-B331-2215-1FE4CFEB08B9}"/>
+              </a:ext>
+            </a:extLst>
+          </p:cNvPr>
+          <p:cNvSpPr txBox="1"/>
+          <p:nvPr/>
+        </p:nvSpPr>
+        <p:spPr>
+          <a:xfrm>
+            <a:off x="576693" y="1148401"/>
+            <a:ext cx="3995305" cy="1077218"/>
+          </a:xfrm>
+          <a:prstGeom prst="rect">
+            <a:avLst/>
+          </a:prstGeom>
+          <a:noFill/>
+        </p:spPr>
+        <p:txBody>
+          <a:bodyPr wrap="square" rtlCol="0">
+            <a:spAutoFit/>
+          </a:bodyPr>
+          <a:lstStyle/>
+          <a:p>
+            <a:pPr marL="285750" indent="-285750">
+              <a:buFont typeface="Arial" panose="020B0604020202020204" pitchFamily="34" charset="0"/>
+              <a:buChar char="•"/>
+            </a:pPr>
+            <a:r>
+              <a:rPr lang="ru-RU" sz="1600" dirty="0">
+                <a:latin typeface="Times New Roman" panose="02020603050405020304" pitchFamily="18" charset="0"/>
+                <a:cs typeface="Times New Roman" panose="02020603050405020304" pitchFamily="18" charset="0"/>
+              </a:rPr>
+              <a:t>Получение и обработка данных были разделены в последовательные компоненты, образующие единый конвейер.</a:t>
+            </a:r>
+          </a:p>
+        </p:txBody>
+      </p:sp>
+      <p:sp>
+        <p:nvSpPr>
+          <p:cNvPr id="26" name="TextBox 25">
+            <a:extLst>
+              <a:ext uri="{FF2B5EF4-FFF2-40B4-BE49-F238E27FC236}">
+                <a16:creationId xmlns:a16="http://schemas.microsoft.com/office/drawing/2014/main" id="{F9568C4F-8350-4572-7E48-28234FC106BB}"/>
+              </a:ext>
+            </a:extLst>
+          </p:cNvPr>
+          <p:cNvSpPr txBox="1"/>
+          <p:nvPr/>
+        </p:nvSpPr>
+        <p:spPr>
+          <a:xfrm>
+            <a:off x="576693" y="2314595"/>
+            <a:ext cx="3995305" cy="1077218"/>
+          </a:xfrm>
+          <a:prstGeom prst="rect">
+            <a:avLst/>
+          </a:prstGeom>
+          <a:noFill/>
+        </p:spPr>
+        <p:txBody>
+          <a:bodyPr wrap="square" rtlCol="0">
+            <a:spAutoFit/>
+          </a:bodyPr>
+          <a:lstStyle/>
+          <a:p>
+            <a:pPr marL="285750" indent="-285750">
+              <a:buFont typeface="Arial" panose="020B0604020202020204" pitchFamily="34" charset="0"/>
+              <a:buChar char="•"/>
+            </a:pPr>
+            <a:r>
+              <a:rPr lang="ru-RU" sz="1600" dirty="0">
+                <a:latin typeface="Times New Roman" panose="02020603050405020304" pitchFamily="18" charset="0"/>
+                <a:cs typeface="Times New Roman" panose="02020603050405020304" pitchFamily="18" charset="0"/>
+              </a:rPr>
+              <a:t>Каждый из пунктов был реализован при помощи </a:t>
+            </a:r>
+            <a:r>
+              <a:rPr lang="en-US" sz="1600" dirty="0">
+                <a:latin typeface="Times New Roman" panose="02020603050405020304" pitchFamily="18" charset="0"/>
+                <a:cs typeface="Times New Roman" panose="02020603050405020304" pitchFamily="18" charset="0"/>
+              </a:rPr>
+              <a:t>python-</a:t>
+            </a:r>
+            <a:r>
+              <a:rPr lang="ru-RU" sz="1600" dirty="0">
+                <a:latin typeface="Times New Roman" panose="02020603050405020304" pitchFamily="18" charset="0"/>
+                <a:cs typeface="Times New Roman" panose="02020603050405020304" pitchFamily="18" charset="0"/>
+              </a:rPr>
+              <a:t>скриптов, позволяя вносить изменения в любом месте конвейера.</a:t>
+            </a:r>
+          </a:p>
+        </p:txBody>
+      </p:sp>
+      <p:sp>
+        <p:nvSpPr>
+          <p:cNvPr id="27" name="TextBox 26">
+            <a:extLst>
+              <a:ext uri="{FF2B5EF4-FFF2-40B4-BE49-F238E27FC236}">
+                <a16:creationId xmlns:a16="http://schemas.microsoft.com/office/drawing/2014/main" id="{6E14C5A3-03B1-D1A6-6D21-0F2A647067D9}"/>
+              </a:ext>
+            </a:extLst>
+          </p:cNvPr>
+          <p:cNvSpPr txBox="1"/>
+          <p:nvPr/>
+        </p:nvSpPr>
+        <p:spPr>
+          <a:xfrm>
+            <a:off x="576692" y="3366587"/>
+            <a:ext cx="3995305" cy="1077218"/>
+          </a:xfrm>
+          <a:prstGeom prst="rect">
+            <a:avLst/>
+          </a:prstGeom>
+          <a:noFill/>
+        </p:spPr>
+        <p:txBody>
+          <a:bodyPr wrap="square" rtlCol="0">
+            <a:spAutoFit/>
+          </a:bodyPr>
+          <a:lstStyle/>
+          <a:p>
+            <a:pPr marL="285750" indent="-285750">
+              <a:buFont typeface="Arial" panose="020B0604020202020204" pitchFamily="34" charset="0"/>
+              <a:buChar char="•"/>
+            </a:pPr>
+            <a:r>
+              <a:rPr lang="ru-RU" sz="1600" dirty="0">
+                <a:latin typeface="Times New Roman" panose="02020603050405020304" pitchFamily="18" charset="0"/>
+                <a:cs typeface="Times New Roman" panose="02020603050405020304" pitchFamily="18" charset="0"/>
+              </a:rPr>
+              <a:t>В итоге был сформирован единый </a:t>
+            </a:r>
+            <a:r>
+              <a:rPr lang="en-US" sz="1600" dirty="0">
+                <a:latin typeface="Times New Roman" panose="02020603050405020304" pitchFamily="18" charset="0"/>
+                <a:cs typeface="Times New Roman" panose="02020603050405020304" pitchFamily="18" charset="0"/>
+              </a:rPr>
+              <a:t>parquet-</a:t>
+            </a:r>
+            <a:r>
+              <a:rPr lang="ru-RU" sz="1600" dirty="0">
+                <a:latin typeface="Times New Roman" panose="02020603050405020304" pitchFamily="18" charset="0"/>
+                <a:cs typeface="Times New Roman" panose="02020603050405020304" pitchFamily="18" charset="0"/>
+              </a:rPr>
+              <a:t>файл, содержащий данные, готовые для обучения моделей, подбора параметров и тестирования.</a:t>
+            </a:r>
+          </a:p>
+        </p:txBody>
+      </p:sp>
+      <p:pic>
+        <p:nvPicPr>
+          <p:cNvPr id="5" name="Рисунок 4" descr="PlantUML diagram">
+            <a:extLst>
+              <a:ext uri="{FF2B5EF4-FFF2-40B4-BE49-F238E27FC236}">
+                <a16:creationId xmlns:a16="http://schemas.microsoft.com/office/drawing/2014/main" id="{0FB64039-4EC0-CC18-F741-FAED8004046D}"/>
+              </a:ext>
+            </a:extLst>
+          </p:cNvPr>
+          <p:cNvPicPr>
+            <a:picLocks noChangeAspect="1"/>
+          </p:cNvPicPr>
+          <p:nvPr/>
+        </p:nvPicPr>
+        <p:blipFill>
+          <a:blip r:embed="rId3"/>
+          <a:stretch>
+            <a:fillRect/>
+          </a:stretch>
+        </p:blipFill>
+        <p:spPr>
+          <a:xfrm>
+            <a:off x="4571996" y="1148400"/>
+            <a:ext cx="3911759" cy="3995099"/>
+          </a:xfrm>
+          <a:prstGeom prst="rect">
+            <a:avLst/>
+          </a:prstGeom>
+        </p:spPr>
+      </p:pic>
     </p:spTree>
   </p:cSld>
   <p:clrMapOvr>
@@ -12972,7 +11057,7 @@
 </p:sld>
 </file>
 
-<file path=ppt/slides/slide6.xml><?xml version="1.0" encoding="utf-8"?>
+<file path=ppt/slides/slide7.xml><?xml version="1.0" encoding="utf-8"?>
 <p:sld xmlns:a="http://schemas.openxmlformats.org/drawingml/2006/main" xmlns:r="http://schemas.openxmlformats.org/officeDocument/2006/relationships" xmlns:p="http://schemas.openxmlformats.org/presentationml/2006/main">
   <p:cSld>
     <p:spTree>
@@ -12989,51 +11074,12 @@
           <a:chExt cx="0" cy="0"/>
         </a:xfrm>
       </p:grpSpPr>
-      <p:sp>
-        <p:nvSpPr>
-          <p:cNvPr id="7" name="Текст 6">
+      <p:pic>
+        <p:nvPicPr>
+          <p:cNvPr id="7" name="Рисунок 6" descr="PlantUML diagram">
             <a:extLst>
               <a:ext uri="{FF2B5EF4-FFF2-40B4-BE49-F238E27FC236}">
-                <a16:creationId xmlns:a16="http://schemas.microsoft.com/office/drawing/2014/main" id="{2A780F20-9E79-C391-A165-9502E33FBD8E}"/>
-              </a:ext>
-            </a:extLst>
-          </p:cNvPr>
-          <p:cNvSpPr>
-            <a:spLocks noGrp="1"/>
-          </p:cNvSpPr>
-          <p:nvPr>
-            <p:ph type="body" idx="1"/>
-          </p:nvPr>
-        </p:nvSpPr>
-        <p:spPr>
-          <a:xfrm>
-            <a:off x="352299" y="2492095"/>
-            <a:ext cx="2635226" cy="2118728"/>
-          </a:xfrm>
-        </p:spPr>
-        <p:txBody>
-          <a:bodyPr/>
-          <a:lstStyle/>
-          <a:p>
-            <a:pPr marL="114300" indent="0">
-              <a:buNone/>
-            </a:pPr>
-            <a:r>
-              <a:rPr lang="ru-RU" dirty="0">
-                <a:latin typeface="Times New Roman" panose="02020603050405020304" pitchFamily="18" charset="0"/>
-                <a:cs typeface="Times New Roman" panose="02020603050405020304" pitchFamily="18" charset="0"/>
-              </a:rPr>
-              <a:t> </a:t>
-            </a:r>
-          </a:p>
-        </p:txBody>
-      </p:sp>
-      <p:pic>
-        <p:nvPicPr>
-          <p:cNvPr id="8" name="Рисунок 7" descr="PlantUML diagram">
-            <a:extLst>
-              <a:ext uri="{FF2B5EF4-FFF2-40B4-BE49-F238E27FC236}">
-                <a16:creationId xmlns:a16="http://schemas.microsoft.com/office/drawing/2014/main" id="{DFF5848B-FB87-057A-D89F-CBA79A35FBE2}"/>
+                <a16:creationId xmlns:a16="http://schemas.microsoft.com/office/drawing/2014/main" id="{F7DD3540-E4C4-77B9-C453-12F9421454D0}"/>
               </a:ext>
             </a:extLst>
           </p:cNvPr>
@@ -13043,198 +11089,21 @@
           <p:nvPr/>
         </p:nvPicPr>
         <p:blipFill>
-          <a:blip r:embed="rId3">
-            <a:extLst>
-              <a:ext uri="{28A0092B-C50C-407E-A947-70E740481C1C}">
-                <a14:useLocalDpi xmlns:a14="http://schemas.microsoft.com/office/drawing/2010/main" val="0"/>
-              </a:ext>
-            </a:extLst>
-          </a:blip>
-          <a:srcRect/>
+          <a:blip r:embed="rId3"/>
           <a:stretch>
             <a:fillRect/>
           </a:stretch>
         </p:blipFill>
-        <p:spPr bwMode="auto">
+        <p:spPr>
           <a:xfrm>
-            <a:off x="3370622" y="1160606"/>
-            <a:ext cx="5333924" cy="3932094"/>
+            <a:off x="310263" y="1479873"/>
+            <a:ext cx="8436545" cy="2761603"/>
           </a:xfrm>
           <a:prstGeom prst="rect">
             <a:avLst/>
           </a:prstGeom>
-          <a:noFill/>
-          <a:ln>
-            <a:noFill/>
-          </a:ln>
         </p:spPr>
       </p:pic>
-      <p:sp>
-        <p:nvSpPr>
-          <p:cNvPr id="2" name="TextBox 1">
-            <a:extLst>
-              <a:ext uri="{FF2B5EF4-FFF2-40B4-BE49-F238E27FC236}">
-                <a16:creationId xmlns:a16="http://schemas.microsoft.com/office/drawing/2014/main" id="{1669A9EF-BE3B-3AC4-193D-01516E8D0F90}"/>
-              </a:ext>
-            </a:extLst>
-          </p:cNvPr>
-          <p:cNvSpPr txBox="1"/>
-          <p:nvPr/>
-        </p:nvSpPr>
-        <p:spPr>
-          <a:xfrm>
-            <a:off x="510654" y="1511205"/>
-            <a:ext cx="2776722" cy="2462213"/>
-          </a:xfrm>
-          <a:prstGeom prst="rect">
-            <a:avLst/>
-          </a:prstGeom>
-          <a:noFill/>
-        </p:spPr>
-        <p:txBody>
-          <a:bodyPr wrap="none" rtlCol="0">
-            <a:spAutoFit/>
-          </a:bodyPr>
-          <a:lstStyle/>
-          <a:p>
-            <a:pPr marL="285750" indent="-285750" algn="just">
-              <a:buFont typeface="Arial" panose="020B0604020202020204" pitchFamily="34" charset="0"/>
-              <a:buChar char="•"/>
-            </a:pPr>
-            <a:r>
-              <a:rPr lang="ru-RU" dirty="0">
-                <a:latin typeface="Times New Roman" panose="02020603050405020304" pitchFamily="18" charset="0"/>
-                <a:cs typeface="Times New Roman" panose="02020603050405020304" pitchFamily="18" charset="0"/>
-              </a:rPr>
-              <a:t>В работе прогнозирование</a:t>
-            </a:r>
-            <a:br>
-              <a:rPr lang="ru-RU" dirty="0">
-                <a:latin typeface="Times New Roman" panose="02020603050405020304" pitchFamily="18" charset="0"/>
-                <a:cs typeface="Times New Roman" panose="02020603050405020304" pitchFamily="18" charset="0"/>
-              </a:rPr>
-            </a:br>
-            <a:r>
-              <a:rPr lang="ru-RU" dirty="0">
-                <a:latin typeface="Times New Roman" panose="02020603050405020304" pitchFamily="18" charset="0"/>
-                <a:cs typeface="Times New Roman" panose="02020603050405020304" pitchFamily="18" charset="0"/>
-              </a:rPr>
-              <a:t>и формирование торговых</a:t>
-            </a:r>
-            <a:br>
-              <a:rPr lang="ru-RU" dirty="0">
-                <a:latin typeface="Times New Roman" panose="02020603050405020304" pitchFamily="18" charset="0"/>
-                <a:cs typeface="Times New Roman" panose="02020603050405020304" pitchFamily="18" charset="0"/>
-              </a:rPr>
-            </a:br>
-            <a:r>
-              <a:rPr lang="ru-RU" dirty="0">
-                <a:latin typeface="Times New Roman" panose="02020603050405020304" pitchFamily="18" charset="0"/>
-                <a:cs typeface="Times New Roman" panose="02020603050405020304" pitchFamily="18" charset="0"/>
-              </a:rPr>
-              <a:t>действий были выделены</a:t>
-            </a:r>
-            <a:br>
-              <a:rPr lang="ru-RU" dirty="0">
-                <a:latin typeface="Times New Roman" panose="02020603050405020304" pitchFamily="18" charset="0"/>
-                <a:cs typeface="Times New Roman" panose="02020603050405020304" pitchFamily="18" charset="0"/>
-              </a:rPr>
-            </a:br>
-            <a:r>
-              <a:rPr lang="ru-RU" dirty="0">
-                <a:latin typeface="Times New Roman" panose="02020603050405020304" pitchFamily="18" charset="0"/>
-                <a:cs typeface="Times New Roman" panose="02020603050405020304" pitchFamily="18" charset="0"/>
-              </a:rPr>
-              <a:t>в отдельные компоненты</a:t>
-            </a:r>
-            <a:br>
-              <a:rPr lang="ru-RU" dirty="0">
-                <a:latin typeface="Times New Roman" panose="02020603050405020304" pitchFamily="18" charset="0"/>
-                <a:cs typeface="Times New Roman" panose="02020603050405020304" pitchFamily="18" charset="0"/>
-              </a:rPr>
-            </a:br>
-            <a:r>
-              <a:rPr lang="ru-RU" dirty="0">
-                <a:latin typeface="Times New Roman" panose="02020603050405020304" pitchFamily="18" charset="0"/>
-                <a:cs typeface="Times New Roman" panose="02020603050405020304" pitchFamily="18" charset="0"/>
-              </a:rPr>
-              <a:t>системы.</a:t>
-            </a:r>
-          </a:p>
-          <a:p>
-            <a:pPr algn="just"/>
-            <a:endParaRPr lang="ru-RU" dirty="0">
-              <a:latin typeface="Times New Roman" panose="02020603050405020304" pitchFamily="18" charset="0"/>
-              <a:cs typeface="Times New Roman" panose="02020603050405020304" pitchFamily="18" charset="0"/>
-            </a:endParaRPr>
-          </a:p>
-          <a:p>
-            <a:pPr marL="285750" indent="-285750" algn="just">
-              <a:buFont typeface="Arial" panose="020B0604020202020204" pitchFamily="34" charset="0"/>
-              <a:buChar char="•"/>
-            </a:pPr>
-            <a:r>
-              <a:rPr lang="ru-RU" dirty="0">
-                <a:latin typeface="Times New Roman" panose="02020603050405020304" pitchFamily="18" charset="0"/>
-                <a:cs typeface="Times New Roman" panose="02020603050405020304" pitchFamily="18" charset="0"/>
-              </a:rPr>
-              <a:t>Прогнозирование</a:t>
-            </a:r>
-            <a:br>
-              <a:rPr lang="ru-RU" dirty="0">
-                <a:latin typeface="Times New Roman" panose="02020603050405020304" pitchFamily="18" charset="0"/>
-                <a:cs typeface="Times New Roman" panose="02020603050405020304" pitchFamily="18" charset="0"/>
-              </a:rPr>
-            </a:br>
-            <a:r>
-              <a:rPr lang="ru-RU" dirty="0">
-                <a:latin typeface="Times New Roman" panose="02020603050405020304" pitchFamily="18" charset="0"/>
-                <a:cs typeface="Times New Roman" panose="02020603050405020304" pitchFamily="18" charset="0"/>
-              </a:rPr>
-              <a:t>осуществляется нейросетевой</a:t>
-            </a:r>
-            <a:br>
-              <a:rPr lang="ru-RU" dirty="0">
-                <a:latin typeface="Times New Roman" panose="02020603050405020304" pitchFamily="18" charset="0"/>
-                <a:cs typeface="Times New Roman" panose="02020603050405020304" pitchFamily="18" charset="0"/>
-              </a:rPr>
-            </a:br>
-            <a:r>
-              <a:rPr lang="ru-RU" dirty="0">
-                <a:latin typeface="Times New Roman" panose="02020603050405020304" pitchFamily="18" charset="0"/>
-                <a:cs typeface="Times New Roman" panose="02020603050405020304" pitchFamily="18" charset="0"/>
-              </a:rPr>
-              <a:t>или статистической моделью,</a:t>
-            </a:r>
-            <a:br>
-              <a:rPr lang="ru-RU" dirty="0">
-                <a:latin typeface="Times New Roman" panose="02020603050405020304" pitchFamily="18" charset="0"/>
-                <a:cs typeface="Times New Roman" panose="02020603050405020304" pitchFamily="18" charset="0"/>
-              </a:rPr>
-            </a:br>
-            <a:r>
-              <a:rPr lang="ru-RU" dirty="0">
-                <a:latin typeface="Times New Roman" panose="02020603050405020304" pitchFamily="18" charset="0"/>
-                <a:cs typeface="Times New Roman" panose="02020603050405020304" pitchFamily="18" charset="0"/>
-              </a:rPr>
-              <a:t>а решения принимаются</a:t>
-            </a:r>
-            <a:br>
-              <a:rPr lang="ru-RU" dirty="0">
-                <a:latin typeface="Times New Roman" panose="02020603050405020304" pitchFamily="18" charset="0"/>
-                <a:cs typeface="Times New Roman" panose="02020603050405020304" pitchFamily="18" charset="0"/>
-              </a:rPr>
-            </a:br>
-            <a:r>
-              <a:rPr lang="ru-RU" dirty="0">
-                <a:latin typeface="Times New Roman" panose="02020603050405020304" pitchFamily="18" charset="0"/>
-                <a:cs typeface="Times New Roman" panose="02020603050405020304" pitchFamily="18" charset="0"/>
-              </a:rPr>
-              <a:t>отдельным алгоритмом.</a:t>
-            </a:r>
-          </a:p>
-        </p:txBody>
-      </p:sp>
       <p:sp>
         <p:nvSpPr>
           <p:cNvPr id="6" name="Заголовок 5">
@@ -13264,7 +11133,7 @@
                 <a:latin typeface="Times New Roman" panose="02020603050405020304" pitchFamily="18" charset="0"/>
                 <a:cs typeface="Times New Roman" panose="02020603050405020304" pitchFamily="18" charset="0"/>
               </a:rPr>
-              <a:t>Архитектурные решения</a:t>
+              <a:t>Модуль прогнозирования</a:t>
             </a:r>
           </a:p>
         </p:txBody>
@@ -13304,7 +11173,7 @@
                 <a:latin typeface="Times New Roman" panose="02020603050405020304" pitchFamily="18" charset="0"/>
                 <a:cs typeface="Times New Roman" panose="02020603050405020304" pitchFamily="18" charset="0"/>
               </a:rPr>
-              <a:t>6</a:t>
+              <a:t>7</a:t>
             </a:fld>
             <a:endParaRPr lang="ru">
               <a:latin typeface="Times New Roman" panose="02020603050405020304" pitchFamily="18" charset="0"/>
@@ -13313,129 +11182,28 @@
           </a:p>
         </p:txBody>
       </p:sp>
-    </p:spTree>
-  </p:cSld>
-  <p:clrMapOvr>
-    <a:masterClrMapping/>
-  </p:clrMapOvr>
-</p:sld>
-</file>
-
-<file path=ppt/slides/slide7.xml><?xml version="1.0" encoding="utf-8"?>
-<p:sld xmlns:a="http://schemas.openxmlformats.org/drawingml/2006/main" xmlns:r="http://schemas.openxmlformats.org/officeDocument/2006/relationships" xmlns:p="http://schemas.openxmlformats.org/presentationml/2006/main">
-  <p:cSld>
-    <p:spTree>
-      <p:nvGrpSpPr>
-        <p:cNvPr id="1" name="Shape 90">
-          <a:extLst>
-            <a:ext uri="{FF2B5EF4-FFF2-40B4-BE49-F238E27FC236}">
-              <a16:creationId xmlns:a16="http://schemas.microsoft.com/office/drawing/2014/main" id="{4B1C7F8D-8E3B-9F42-EB01-FBA69729AB27}"/>
-            </a:ext>
-          </a:extLst>
-        </p:cNvPr>
-        <p:cNvGrpSpPr/>
-        <p:nvPr/>
-      </p:nvGrpSpPr>
-      <p:grpSpPr>
-        <a:xfrm>
-          <a:off x="0" y="0"/>
-          <a:ext cx="0" cy="0"/>
-          <a:chOff x="0" y="0"/>
-          <a:chExt cx="0" cy="0"/>
-        </a:xfrm>
-      </p:grpSpPr>
       <p:sp>
         <p:nvSpPr>
-          <p:cNvPr id="91" name="Google Shape;91;p19">
+          <p:cNvPr id="9" name="Текст 8">
             <a:extLst>
               <a:ext uri="{FF2B5EF4-FFF2-40B4-BE49-F238E27FC236}">
-                <a16:creationId xmlns:a16="http://schemas.microsoft.com/office/drawing/2014/main" id="{1142F66E-DF1C-B25F-F499-B90A5879040A}"/>
+                <a16:creationId xmlns:a16="http://schemas.microsoft.com/office/drawing/2014/main" id="{CC87F97C-BC01-E6EB-74D2-81FC32A3CF66}"/>
               </a:ext>
             </a:extLst>
           </p:cNvPr>
-          <p:cNvSpPr txBox="1">
-            <a:spLocks noGrp="1"/>
-          </p:cNvSpPr>
-          <p:nvPr>
-            <p:ph type="title"/>
-          </p:nvPr>
-        </p:nvSpPr>
-        <p:spPr>
-          <a:xfrm>
-            <a:off x="311700" y="445025"/>
-            <a:ext cx="8520600" cy="572700"/>
-          </a:xfrm>
-          <a:prstGeom prst="rect">
-            <a:avLst/>
-          </a:prstGeom>
-        </p:spPr>
-        <p:txBody>
-          <a:bodyPr spcFirstLastPara="1" wrap="square" lIns="91425" tIns="91425" rIns="91425" bIns="91425" anchor="t" anchorCtr="0">
-            <a:normAutofit fontScale="90000"/>
-          </a:bodyPr>
-          <a:lstStyle/>
-          <a:p>
-            <a:pPr marL="0" lvl="0" indent="0" algn="ctr" rtl="0">
-              <a:spcBef>
-                <a:spcPts val="0"/>
-              </a:spcBef>
-              <a:spcAft>
-                <a:spcPts val="0"/>
-              </a:spcAft>
-              <a:buNone/>
-            </a:pPr>
-            <a:r>
-              <a:rPr lang="ru" dirty="0">
-                <a:latin typeface="Times New Roman" panose="02020603050405020304" pitchFamily="18" charset="0"/>
-                <a:cs typeface="Times New Roman" panose="02020603050405020304" pitchFamily="18" charset="0"/>
-              </a:rPr>
-              <a:t>Алгоритм принятия решений</a:t>
-            </a:r>
-            <a:endParaRPr dirty="0">
-              <a:latin typeface="Times New Roman" panose="02020603050405020304" pitchFamily="18" charset="0"/>
-              <a:cs typeface="Times New Roman" panose="02020603050405020304" pitchFamily="18" charset="0"/>
-            </a:endParaRPr>
-          </a:p>
-        </p:txBody>
-      </p:sp>
-      <p:sp>
-        <p:nvSpPr>
-          <p:cNvPr id="92" name="Google Shape;92;p19">
-            <a:extLst>
-              <a:ext uri="{FF2B5EF4-FFF2-40B4-BE49-F238E27FC236}">
-                <a16:creationId xmlns:a16="http://schemas.microsoft.com/office/drawing/2014/main" id="{DF5326CD-CCA3-8126-7891-6CC71F7DC169}"/>
-              </a:ext>
-            </a:extLst>
-          </p:cNvPr>
-          <p:cNvSpPr txBox="1">
+          <p:cNvSpPr>
             <a:spLocks noGrp="1"/>
           </p:cNvSpPr>
           <p:nvPr>
             <p:ph type="body" idx="1"/>
           </p:nvPr>
         </p:nvSpPr>
-        <p:spPr>
-          <a:xfrm>
-            <a:off x="311700" y="1152475"/>
-            <a:ext cx="8520600" cy="3416400"/>
-          </a:xfrm>
-          <a:prstGeom prst="rect">
-            <a:avLst/>
-          </a:prstGeom>
-        </p:spPr>
+        <p:spPr/>
         <p:txBody>
-          <a:bodyPr spcFirstLastPara="1" wrap="square" lIns="91425" tIns="91425" rIns="91425" bIns="91425" anchor="t" anchorCtr="0">
-            <a:normAutofit/>
-          </a:bodyPr>
+          <a:bodyPr/>
           <a:lstStyle/>
           <a:p>
-            <a:pPr marL="0" lvl="0" indent="0" algn="l" rtl="0">
-              <a:spcBef>
-                <a:spcPts val="0"/>
-              </a:spcBef>
-              <a:spcAft>
-                <a:spcPts val="0"/>
-              </a:spcAft>
+            <a:pPr marL="114300" indent="0">
               <a:buNone/>
             </a:pPr>
             <a:r>
@@ -13445,49 +11213,15 @@
               </a:rPr>
               <a:t> </a:t>
             </a:r>
-            <a:endParaRPr dirty="0">
-              <a:latin typeface="Times New Roman" panose="02020603050405020304" pitchFamily="18" charset="0"/>
-              <a:cs typeface="Times New Roman" panose="02020603050405020304" pitchFamily="18" charset="0"/>
-            </a:endParaRPr>
           </a:p>
         </p:txBody>
       </p:sp>
-      <p:pic>
-        <p:nvPicPr>
-          <p:cNvPr id="5" name="Рисунок 4" descr="PlantUML diagram">
+      <p:sp>
+        <p:nvSpPr>
+          <p:cNvPr id="11" name="TextBox 10">
             <a:extLst>
               <a:ext uri="{FF2B5EF4-FFF2-40B4-BE49-F238E27FC236}">
-                <a16:creationId xmlns:a16="http://schemas.microsoft.com/office/drawing/2014/main" id="{3B522310-3928-727C-4257-60E97920995B}"/>
-              </a:ext>
-            </a:extLst>
-          </p:cNvPr>
-          <p:cNvPicPr>
-            <a:picLocks noChangeAspect="1"/>
-          </p:cNvPicPr>
-          <p:nvPr/>
-        </p:nvPicPr>
-        <p:blipFill>
-          <a:blip r:embed="rId3"/>
-          <a:stretch>
-            <a:fillRect/>
-          </a:stretch>
-        </p:blipFill>
-        <p:spPr>
-          <a:xfrm>
-            <a:off x="5242214" y="909929"/>
-            <a:ext cx="2299969" cy="4233571"/>
-          </a:xfrm>
-          <a:prstGeom prst="rect">
-            <a:avLst/>
-          </a:prstGeom>
-        </p:spPr>
-      </p:pic>
-      <p:sp>
-        <p:nvSpPr>
-          <p:cNvPr id="6" name="TextBox 5">
-            <a:extLst>
-              <a:ext uri="{FF2B5EF4-FFF2-40B4-BE49-F238E27FC236}">
-                <a16:creationId xmlns:a16="http://schemas.microsoft.com/office/drawing/2014/main" id="{8179B106-7732-C916-0784-07C130ABD5AF}"/>
+                <a16:creationId xmlns:a16="http://schemas.microsoft.com/office/drawing/2014/main" id="{E12FEFE4-F0BF-9763-F273-C71A2BE981DF}"/>
               </a:ext>
             </a:extLst>
           </p:cNvPr>
@@ -13496,8 +11230,8 @@
         </p:nvSpPr>
         <p:spPr>
           <a:xfrm>
-            <a:off x="368877" y="1017725"/>
-            <a:ext cx="4756016" cy="1384995"/>
+            <a:off x="4923263" y="1603230"/>
+            <a:ext cx="3065131" cy="738664"/>
           </a:xfrm>
           <a:prstGeom prst="rect">
             <a:avLst/>
@@ -13510,247 +11244,21 @@
           </a:bodyPr>
           <a:lstStyle/>
           <a:p>
-            <a:r>
-              <a:rPr lang="ru-RU" dirty="0">
-                <a:latin typeface="Times New Roman" panose="02020603050405020304" pitchFamily="18" charset="0"/>
-                <a:cs typeface="Times New Roman" panose="02020603050405020304" pitchFamily="18" charset="0"/>
-              </a:rPr>
-              <a:t>Каждую минуту алгоритм проверяет уже открытые позиции</a:t>
-            </a:r>
-          </a:p>
-          <a:p>
-            <a:r>
-              <a:rPr lang="ru-RU" dirty="0">
-                <a:latin typeface="Times New Roman" panose="02020603050405020304" pitchFamily="18" charset="0"/>
-                <a:cs typeface="Times New Roman" panose="02020603050405020304" pitchFamily="18" charset="0"/>
-              </a:rPr>
-              <a:t>Позиция закрывается, если:</a:t>
-            </a:r>
-          </a:p>
-          <a:p>
-            <a:pPr marL="342900" indent="-342900">
-              <a:buFont typeface="+mj-lt"/>
-              <a:buAutoNum type="arabicPeriod"/>
+            <a:pPr marL="285750" indent="-285750">
+              <a:buFont typeface="Arial" panose="020B0604020202020204" pitchFamily="34" charset="0"/>
+              <a:buChar char="•"/>
             </a:pPr>
             <a:r>
               <a:rPr lang="ru-RU" dirty="0">
                 <a:latin typeface="Times New Roman" panose="02020603050405020304" pitchFamily="18" charset="0"/>
                 <a:cs typeface="Times New Roman" panose="02020603050405020304" pitchFamily="18" charset="0"/>
               </a:rPr>
-              <a:t>Достигнут лимит удержания позиции </a:t>
+              <a:t>Система разделена на два модуля: модуль прогнозирования и модуль принятия решений</a:t>
             </a:r>
-            <a:r>
-              <a:rPr lang="ru-RU" dirty="0">
-                <a:solidFill>
-                  <a:schemeClr val="tx1">
-                    <a:lumMod val="50000"/>
-                    <a:lumOff val="50000"/>
-                  </a:schemeClr>
-                </a:solidFill>
-                <a:latin typeface="Times New Roman" panose="02020603050405020304" pitchFamily="18" charset="0"/>
-                <a:cs typeface="Times New Roman" panose="02020603050405020304" pitchFamily="18" charset="0"/>
-              </a:rPr>
-              <a:t>—</a:t>
-            </a:r>
-            <a:r>
-              <a:rPr lang="ru-RU" dirty="0">
-                <a:latin typeface="Times New Roman" panose="02020603050405020304" pitchFamily="18" charset="0"/>
-                <a:cs typeface="Times New Roman" panose="02020603050405020304" pitchFamily="18" charset="0"/>
-              </a:rPr>
-              <a:t> 30 минут</a:t>
-            </a:r>
-            <a:r>
-              <a:rPr lang="en-US" dirty="0">
-                <a:latin typeface="Times New Roman" panose="02020603050405020304" pitchFamily="18" charset="0"/>
-                <a:cs typeface="Times New Roman" panose="02020603050405020304" pitchFamily="18" charset="0"/>
-              </a:rPr>
-              <a:t>;</a:t>
-            </a:r>
-            <a:endParaRPr lang="ru-RU" dirty="0">
-              <a:latin typeface="Times New Roman" panose="02020603050405020304" pitchFamily="18" charset="0"/>
-              <a:cs typeface="Times New Roman" panose="02020603050405020304" pitchFamily="18" charset="0"/>
-            </a:endParaRPr>
-          </a:p>
-          <a:p>
-            <a:pPr marL="342900" indent="-342900">
-              <a:buFont typeface="+mj-lt"/>
-              <a:buAutoNum type="arabicPeriod"/>
-            </a:pPr>
-            <a:r>
-              <a:rPr lang="ru-RU" dirty="0">
-                <a:latin typeface="Times New Roman" panose="02020603050405020304" pitchFamily="18" charset="0"/>
-                <a:cs typeface="Times New Roman" panose="02020603050405020304" pitchFamily="18" charset="0"/>
-              </a:rPr>
-              <a:t>Прогноз удержания недостаточен для продолжения позиции.</a:t>
-            </a:r>
-          </a:p>
-        </p:txBody>
-      </p:sp>
-      <p:sp>
-        <p:nvSpPr>
-          <p:cNvPr id="7" name="TextBox 6">
-            <a:extLst>
-              <a:ext uri="{FF2B5EF4-FFF2-40B4-BE49-F238E27FC236}">
-                <a16:creationId xmlns:a16="http://schemas.microsoft.com/office/drawing/2014/main" id="{55764591-A864-C706-2CBE-5A01B2EFC76F}"/>
-              </a:ext>
-            </a:extLst>
-          </p:cNvPr>
-          <p:cNvSpPr txBox="1"/>
-          <p:nvPr/>
-        </p:nvSpPr>
-        <p:spPr>
-          <a:xfrm>
-            <a:off x="441612" y="2452200"/>
-            <a:ext cx="3673187" cy="523220"/>
-          </a:xfrm>
-          <a:prstGeom prst="rect">
-            <a:avLst/>
-          </a:prstGeom>
-          <a:noFill/>
-        </p:spPr>
-        <p:txBody>
-          <a:bodyPr wrap="square" rtlCol="0">
-            <a:spAutoFit/>
-          </a:bodyPr>
-          <a:lstStyle/>
-          <a:p>
-            <a:r>
-              <a:rPr lang="ru-RU" dirty="0">
-                <a:latin typeface="Times New Roman" panose="02020603050405020304" pitchFamily="18" charset="0"/>
-                <a:cs typeface="Times New Roman" panose="02020603050405020304" pitchFamily="18" charset="0"/>
-              </a:rPr>
-              <a:t>После этого проверяется возможность открытия новых позиций.</a:t>
-            </a:r>
-          </a:p>
-        </p:txBody>
-      </p:sp>
-      <p:sp>
-        <p:nvSpPr>
-          <p:cNvPr id="8" name="TextBox 7">
-            <a:extLst>
-              <a:ext uri="{FF2B5EF4-FFF2-40B4-BE49-F238E27FC236}">
-                <a16:creationId xmlns:a16="http://schemas.microsoft.com/office/drawing/2014/main" id="{6C9CE6BD-DE74-6BE1-D7FE-39DE76E56073}"/>
-              </a:ext>
-            </a:extLst>
-          </p:cNvPr>
-          <p:cNvSpPr txBox="1"/>
-          <p:nvPr/>
-        </p:nvSpPr>
-        <p:spPr>
-          <a:xfrm>
-            <a:off x="368875" y="3024900"/>
-            <a:ext cx="3745924" cy="1384995"/>
-          </a:xfrm>
-          <a:prstGeom prst="rect">
-            <a:avLst/>
-          </a:prstGeom>
-          <a:noFill/>
-        </p:spPr>
-        <p:txBody>
-          <a:bodyPr wrap="square" rtlCol="0">
-            <a:spAutoFit/>
-          </a:bodyPr>
-          <a:lstStyle/>
-          <a:p>
-            <a:r>
-              <a:rPr lang="ru-RU" dirty="0">
-                <a:latin typeface="Times New Roman" panose="02020603050405020304" pitchFamily="18" charset="0"/>
-                <a:cs typeface="Times New Roman" panose="02020603050405020304" pitchFamily="18" charset="0"/>
-              </a:rPr>
-              <a:t>Покупка выполняется, если:</a:t>
-            </a:r>
-          </a:p>
-          <a:p>
-            <a:pPr marL="342900" indent="-342900">
-              <a:buFont typeface="+mj-lt"/>
-              <a:buAutoNum type="arabicPeriod"/>
-            </a:pPr>
-            <a:r>
-              <a:rPr lang="ru-RU" dirty="0">
-                <a:latin typeface="Times New Roman" panose="02020603050405020304" pitchFamily="18" charset="0"/>
-                <a:cs typeface="Times New Roman" panose="02020603050405020304" pitchFamily="18" charset="0"/>
-              </a:rPr>
-              <a:t>Прогноз входа выше порога;</a:t>
-            </a:r>
-          </a:p>
-          <a:p>
-            <a:pPr marL="342900" indent="-342900">
-              <a:buFont typeface="+mj-lt"/>
-              <a:buAutoNum type="arabicPeriod"/>
-            </a:pPr>
-            <a:r>
-              <a:rPr lang="ru-RU" dirty="0">
-                <a:latin typeface="Times New Roman" panose="02020603050405020304" pitchFamily="18" charset="0"/>
-                <a:cs typeface="Times New Roman" panose="02020603050405020304" pitchFamily="18" charset="0"/>
-              </a:rPr>
-              <a:t>Ожидаемая чистая доходность после издержек положительная;</a:t>
-            </a:r>
-          </a:p>
-          <a:p>
-            <a:pPr marL="342900" indent="-342900">
-              <a:buFont typeface="+mj-lt"/>
-              <a:buAutoNum type="arabicPeriod"/>
-            </a:pPr>
-            <a:r>
-              <a:rPr lang="ru-RU" dirty="0">
-                <a:latin typeface="Times New Roman" panose="02020603050405020304" pitchFamily="18" charset="0"/>
-                <a:cs typeface="Times New Roman" panose="02020603050405020304" pitchFamily="18" charset="0"/>
-              </a:rPr>
-              <a:t>Не нарушены ограничения по капиталу и числу позиций.</a:t>
-            </a:r>
-          </a:p>
-        </p:txBody>
-      </p:sp>
-      <p:sp>
-        <p:nvSpPr>
-          <p:cNvPr id="2" name="Номер слайда 1">
-            <a:extLst>
-              <a:ext uri="{FF2B5EF4-FFF2-40B4-BE49-F238E27FC236}">
-                <a16:creationId xmlns:a16="http://schemas.microsoft.com/office/drawing/2014/main" id="{BB31E7D5-67C9-3255-2463-94EBCBAB4CCF}"/>
-              </a:ext>
-            </a:extLst>
-          </p:cNvPr>
-          <p:cNvSpPr>
-            <a:spLocks noGrp="1"/>
-          </p:cNvSpPr>
-          <p:nvPr>
-            <p:ph type="sldNum" idx="12"/>
-          </p:nvPr>
-        </p:nvSpPr>
-        <p:spPr/>
-        <p:txBody>
-          <a:bodyPr/>
-          <a:lstStyle/>
-          <a:p>
-            <a:pPr marL="0" lvl="0" indent="0" algn="r" rtl="0">
-              <a:spcBef>
-                <a:spcPts val="0"/>
-              </a:spcBef>
-              <a:spcAft>
-                <a:spcPts val="0"/>
-              </a:spcAft>
-              <a:buNone/>
-            </a:pPr>
-            <a:fld id="{00000000-1234-1234-1234-123412341234}" type="slidenum">
-              <a:rPr lang="ru" smtClean="0">
-                <a:latin typeface="Times New Roman" panose="02020603050405020304" pitchFamily="18" charset="0"/>
-                <a:cs typeface="Times New Roman" panose="02020603050405020304" pitchFamily="18" charset="0"/>
-              </a:rPr>
-              <a:t>7</a:t>
-            </a:fld>
-            <a:endParaRPr lang="ru">
-              <a:latin typeface="Times New Roman" panose="02020603050405020304" pitchFamily="18" charset="0"/>
-              <a:cs typeface="Times New Roman" panose="02020603050405020304" pitchFamily="18" charset="0"/>
-            </a:endParaRPr>
           </a:p>
         </p:txBody>
       </p:sp>
     </p:spTree>
-    <p:extLst>
-      <p:ext uri="{BB962C8B-B14F-4D97-AF65-F5344CB8AC3E}">
-        <p14:creationId xmlns:p14="http://schemas.microsoft.com/office/powerpoint/2010/main" val="1763201188"/>
-      </p:ext>
-    </p:extLst>
   </p:cSld>
   <p:clrMapOvr>
     <a:masterClrMapping/>
@@ -13818,7 +11326,7 @@
                 <a:latin typeface="Times New Roman" panose="02020603050405020304" pitchFamily="18" charset="0"/>
                 <a:cs typeface="Times New Roman" panose="02020603050405020304" pitchFamily="18" charset="0"/>
               </a:rPr>
-              <a:t>Прогнозы моделей и параметры исторического тестирования</a:t>
+              <a:t>Модуль прогнозирования торговой системы</a:t>
             </a:r>
             <a:endParaRPr dirty="0">
               <a:latin typeface="Times New Roman" panose="02020603050405020304" pitchFamily="18" charset="0"/>
@@ -13881,74 +11389,6 @@
           </a:p>
         </p:txBody>
       </p:sp>
-      <p:pic>
-        <p:nvPicPr>
-          <p:cNvPr id="9" name="Рисунок 8" descr="PlantUML diagram">
-            <a:extLst>
-              <a:ext uri="{FF2B5EF4-FFF2-40B4-BE49-F238E27FC236}">
-                <a16:creationId xmlns:a16="http://schemas.microsoft.com/office/drawing/2014/main" id="{21B34CED-BCB9-EA8D-0F9D-0EB4DD32CA05}"/>
-              </a:ext>
-            </a:extLst>
-          </p:cNvPr>
-          <p:cNvPicPr>
-            <a:picLocks noChangeAspect="1"/>
-          </p:cNvPicPr>
-          <p:nvPr/>
-        </p:nvPicPr>
-        <p:blipFill>
-          <a:blip r:embed="rId3"/>
-          <a:stretch>
-            <a:fillRect/>
-          </a:stretch>
-        </p:blipFill>
-        <p:spPr>
-          <a:xfrm>
-            <a:off x="0" y="1323925"/>
-            <a:ext cx="9144000" cy="2340025"/>
-          </a:xfrm>
-          <a:prstGeom prst="rect">
-            <a:avLst/>
-          </a:prstGeom>
-        </p:spPr>
-      </p:pic>
-      <p:sp>
-        <p:nvSpPr>
-          <p:cNvPr id="13" name="TextBox 12">
-            <a:extLst>
-              <a:ext uri="{FF2B5EF4-FFF2-40B4-BE49-F238E27FC236}">
-                <a16:creationId xmlns:a16="http://schemas.microsoft.com/office/drawing/2014/main" id="{96F3F427-9A41-AC7C-74A1-4C461FB8BE12}"/>
-              </a:ext>
-            </a:extLst>
-          </p:cNvPr>
-          <p:cNvSpPr txBox="1"/>
-          <p:nvPr/>
-        </p:nvSpPr>
-        <p:spPr>
-          <a:xfrm>
-            <a:off x="311700" y="3281237"/>
-            <a:ext cx="3441150" cy="954107"/>
-          </a:xfrm>
-          <a:prstGeom prst="rect">
-            <a:avLst/>
-          </a:prstGeom>
-          <a:noFill/>
-        </p:spPr>
-        <p:txBody>
-          <a:bodyPr wrap="square">
-            <a:spAutoFit/>
-          </a:bodyPr>
-          <a:lstStyle/>
-          <a:p>
-            <a:r>
-              <a:rPr lang="ru-RU" dirty="0">
-                <a:latin typeface="Times New Roman" panose="02020603050405020304" pitchFamily="18" charset="0"/>
-                <a:cs typeface="Times New Roman" panose="02020603050405020304" pitchFamily="18" charset="0"/>
-              </a:rPr>
-              <a:t>Модели предсказывают не торговое действие, а ожидаемую доходность для входа и удержания позиции на горизонтах от 1 до 15 минут.</a:t>
-            </a:r>
-          </a:p>
-        </p:txBody>
-      </p:sp>
       <p:sp>
         <p:nvSpPr>
           <p:cNvPr id="2" name="Номер слайда 1">
@@ -13993,12 +11433,42 @@
           </a:p>
         </p:txBody>
       </p:sp>
+      <p:pic>
+        <p:nvPicPr>
+          <p:cNvPr id="5" name="Рисунок 4" descr="PlantUML diagram">
+            <a:extLst>
+              <a:ext uri="{FF2B5EF4-FFF2-40B4-BE49-F238E27FC236}">
+                <a16:creationId xmlns:a16="http://schemas.microsoft.com/office/drawing/2014/main" id="{3DBD9E49-2A1D-260C-F4D8-47C3892D9FCE}"/>
+              </a:ext>
+            </a:extLst>
+          </p:cNvPr>
+          <p:cNvPicPr>
+            <a:picLocks noChangeAspect="1"/>
+          </p:cNvPicPr>
+          <p:nvPr/>
+        </p:nvPicPr>
+        <p:blipFill>
+          <a:blip r:embed="rId3"/>
+          <a:stretch>
+            <a:fillRect/>
+          </a:stretch>
+        </p:blipFill>
+        <p:spPr>
+          <a:xfrm>
+            <a:off x="212043" y="1410362"/>
+            <a:ext cx="8620257" cy="2900626"/>
+          </a:xfrm>
+          <a:prstGeom prst="rect">
+            <a:avLst/>
+          </a:prstGeom>
+        </p:spPr>
+      </p:pic>
       <p:sp>
         <p:nvSpPr>
-          <p:cNvPr id="4" name="TextBox 3">
+          <p:cNvPr id="6" name="TextBox 5">
             <a:extLst>
               <a:ext uri="{FF2B5EF4-FFF2-40B4-BE49-F238E27FC236}">
-                <a16:creationId xmlns:a16="http://schemas.microsoft.com/office/drawing/2014/main" id="{0725DCBC-34CE-5961-A560-EBEE83F700C2}"/>
+                <a16:creationId xmlns:a16="http://schemas.microsoft.com/office/drawing/2014/main" id="{2F100B28-6BDC-31BE-F6C5-2A14087E465F}"/>
               </a:ext>
             </a:extLst>
           </p:cNvPr>
@@ -14007,8 +11477,8 @@
         </p:nvSpPr>
         <p:spPr>
           <a:xfrm>
-            <a:off x="5235302" y="3281238"/>
-            <a:ext cx="3596998" cy="954107"/>
+            <a:off x="4909929" y="3485824"/>
+            <a:ext cx="3665359" cy="1384995"/>
           </a:xfrm>
           <a:prstGeom prst="rect">
             <a:avLst/>
@@ -14016,17 +11486,34 @@
           <a:noFill/>
         </p:spPr>
         <p:txBody>
-          <a:bodyPr wrap="square">
+          <a:bodyPr wrap="square" rtlCol="0">
             <a:spAutoFit/>
           </a:bodyPr>
           <a:lstStyle/>
           <a:p>
+            <a:pPr marL="285750" indent="-285750">
+              <a:buFont typeface="Arial" panose="020B0604020202020204" pitchFamily="34" charset="0"/>
+              <a:buChar char="•"/>
+            </a:pPr>
             <a:r>
               <a:rPr lang="ru-RU" dirty="0">
                 <a:latin typeface="Times New Roman" panose="02020603050405020304" pitchFamily="18" charset="0"/>
                 <a:cs typeface="Times New Roman" panose="02020603050405020304" pitchFamily="18" charset="0"/>
               </a:rPr>
-              <a:t>Решение о покупке, удержании или продаже принимает отдельный модуль, который учитывает прогноз, порог входа, число позиций, издержки и лимит удержания.</a:t>
+              <a:t>Модуль прогнозирования объединяет внутри себя все три подхода. Каждому из них даётся одинаковый набор признаков.</a:t>
+            </a:r>
+          </a:p>
+          <a:p>
+            <a:pPr marL="285750" indent="-285750">
+              <a:buFont typeface="Arial" panose="020B0604020202020204" pitchFamily="34" charset="0"/>
+              <a:buChar char="•"/>
+            </a:pPr>
+            <a:r>
+              <a:rPr lang="ru-RU" dirty="0">
+                <a:latin typeface="Times New Roman" panose="02020603050405020304" pitchFamily="18" charset="0"/>
+                <a:cs typeface="Times New Roman" panose="02020603050405020304" pitchFamily="18" charset="0"/>
+              </a:rPr>
+              <a:t>Важно отметить, что прогнозы формируются отдельно для входа в позицию и для удержания позиции.</a:t>
             </a:r>
           </a:p>
         </p:txBody>
@@ -14049,7 +11536,13 @@
   <p:cSld>
     <p:spTree>
       <p:nvGrpSpPr>
-        <p:cNvPr id="1" name="Shape 96"/>
+        <p:cNvPr id="1" name="Shape 90">
+          <a:extLst>
+            <a:ext uri="{FF2B5EF4-FFF2-40B4-BE49-F238E27FC236}">
+              <a16:creationId xmlns:a16="http://schemas.microsoft.com/office/drawing/2014/main" id="{4B1C7F8D-8E3B-9F42-EB01-FBA69729AB27}"/>
+            </a:ext>
+          </a:extLst>
+        </p:cNvPr>
         <p:cNvGrpSpPr/>
         <p:nvPr/>
       </p:nvGrpSpPr>
@@ -14063,7 +11556,13 @@
       </p:grpSpPr>
       <p:sp>
         <p:nvSpPr>
-          <p:cNvPr id="97" name="Google Shape;97;p20"/>
+          <p:cNvPr id="91" name="Google Shape;91;p19">
+            <a:extLst>
+              <a:ext uri="{FF2B5EF4-FFF2-40B4-BE49-F238E27FC236}">
+                <a16:creationId xmlns:a16="http://schemas.microsoft.com/office/drawing/2014/main" id="{1142F66E-DF1C-B25F-F499-B90A5879040A}"/>
+              </a:ext>
+            </a:extLst>
+          </p:cNvPr>
           <p:cNvSpPr txBox="1">
             <a:spLocks noGrp="1"/>
           </p:cNvSpPr>
@@ -14096,19 +11595,13 @@
               <a:buNone/>
             </a:pPr>
             <a:r>
-              <a:rPr lang="ru-RU" dirty="0">
-                <a:solidFill>
-                  <a:schemeClr val="tx1"/>
-                </a:solidFill>
+              <a:rPr lang="ru" dirty="0">
                 <a:latin typeface="Times New Roman" panose="02020603050405020304" pitchFamily="18" charset="0"/>
                 <a:cs typeface="Times New Roman" panose="02020603050405020304" pitchFamily="18" charset="0"/>
               </a:rPr>
-              <a:t>Графики количества сделок</a:t>
+              <a:t>Модуль принятия решений</a:t>
             </a:r>
             <a:endParaRPr dirty="0">
-              <a:solidFill>
-                <a:schemeClr val="tx1"/>
-              </a:solidFill>
               <a:latin typeface="Times New Roman" panose="02020603050405020304" pitchFamily="18" charset="0"/>
               <a:cs typeface="Times New Roman" panose="02020603050405020304" pitchFamily="18" charset="0"/>
             </a:endParaRPr>
@@ -14117,7 +11610,13 @@
       </p:sp>
       <p:sp>
         <p:nvSpPr>
-          <p:cNvPr id="98" name="Google Shape;98;p20"/>
+          <p:cNvPr id="92" name="Google Shape;92;p19">
+            <a:extLst>
+              <a:ext uri="{FF2B5EF4-FFF2-40B4-BE49-F238E27FC236}">
+                <a16:creationId xmlns:a16="http://schemas.microsoft.com/office/drawing/2014/main" id="{DF5326CD-CCA3-8126-7891-6CC71F7DC169}"/>
+              </a:ext>
+            </a:extLst>
+          </p:cNvPr>
           <p:cNvSpPr txBox="1">
             <a:spLocks noGrp="1"/>
           </p:cNvSpPr>
@@ -14142,10 +11641,10 @@
           <a:p>
             <a:pPr marL="0" lvl="0" indent="0" algn="l" rtl="0">
               <a:spcBef>
-                <a:spcPts val="1200"/>
-              </a:spcBef>
-              <a:spcAft>
-                <a:spcPts val="1200"/>
+                <a:spcPts val="0"/>
+              </a:spcBef>
+              <a:spcAft>
+                <a:spcPts val="0"/>
               </a:spcAft>
               <a:buNone/>
             </a:pPr>
@@ -14163,56 +11662,12 @@
           </a:p>
         </p:txBody>
       </p:sp>
-      <p:sp>
-        <p:nvSpPr>
-          <p:cNvPr id="2" name="Номер слайда 1">
+      <p:pic>
+        <p:nvPicPr>
+          <p:cNvPr id="5" name="Рисунок 4" descr="PlantUML diagram">
             <a:extLst>
               <a:ext uri="{FF2B5EF4-FFF2-40B4-BE49-F238E27FC236}">
-                <a16:creationId xmlns:a16="http://schemas.microsoft.com/office/drawing/2014/main" id="{7AAC3570-04C9-268F-D629-AF60B902A9E3}"/>
-              </a:ext>
-            </a:extLst>
-          </p:cNvPr>
-          <p:cNvSpPr>
-            <a:spLocks noGrp="1"/>
-          </p:cNvSpPr>
-          <p:nvPr>
-            <p:ph type="sldNum" idx="12"/>
-          </p:nvPr>
-        </p:nvSpPr>
-        <p:spPr/>
-        <p:txBody>
-          <a:bodyPr/>
-          <a:lstStyle/>
-          <a:p>
-            <a:pPr marL="0" lvl="0" indent="0" algn="r" rtl="0">
-              <a:spcBef>
-                <a:spcPts val="0"/>
-              </a:spcBef>
-              <a:spcAft>
-                <a:spcPts val="0"/>
-              </a:spcAft>
-              <a:buNone/>
-            </a:pPr>
-            <a:fld id="{00000000-1234-1234-1234-123412341234}" type="slidenum">
-              <a:rPr lang="ru" smtClean="0">
-                <a:latin typeface="Times New Roman" panose="02020603050405020304" pitchFamily="18" charset="0"/>
-                <a:cs typeface="Times New Roman" panose="02020603050405020304" pitchFamily="18" charset="0"/>
-              </a:rPr>
-              <a:t>9</a:t>
-            </a:fld>
-            <a:endParaRPr lang="ru">
-              <a:latin typeface="Times New Roman" panose="02020603050405020304" pitchFamily="18" charset="0"/>
-              <a:cs typeface="Times New Roman" panose="02020603050405020304" pitchFamily="18" charset="0"/>
-            </a:endParaRPr>
-          </a:p>
-        </p:txBody>
-      </p:sp>
-      <p:pic>
-        <p:nvPicPr>
-          <p:cNvPr id="4" name="Рисунок 3">
-            <a:extLst>
-              <a:ext uri="{FF2B5EF4-FFF2-40B4-BE49-F238E27FC236}">
-                <a16:creationId xmlns:a16="http://schemas.microsoft.com/office/drawing/2014/main" id="{62185293-7DD6-00F0-65B9-8DFEBD60C0A2}"/>
+                <a16:creationId xmlns:a16="http://schemas.microsoft.com/office/drawing/2014/main" id="{3B522310-3928-727C-4257-60E97920995B}"/>
               </a:ext>
             </a:extLst>
           </p:cNvPr>
@@ -14229,15 +11684,283 @@
         </p:blipFill>
         <p:spPr>
           <a:xfrm>
-            <a:off x="891020" y="1017725"/>
-            <a:ext cx="7361959" cy="4089977"/>
+            <a:off x="5242214" y="909929"/>
+            <a:ext cx="2299969" cy="4233571"/>
           </a:xfrm>
           <a:prstGeom prst="rect">
             <a:avLst/>
           </a:prstGeom>
         </p:spPr>
       </p:pic>
+      <p:sp>
+        <p:nvSpPr>
+          <p:cNvPr id="6" name="TextBox 5">
+            <a:extLst>
+              <a:ext uri="{FF2B5EF4-FFF2-40B4-BE49-F238E27FC236}">
+                <a16:creationId xmlns:a16="http://schemas.microsoft.com/office/drawing/2014/main" id="{8179B106-7732-C916-0784-07C130ABD5AF}"/>
+              </a:ext>
+            </a:extLst>
+          </p:cNvPr>
+          <p:cNvSpPr txBox="1"/>
+          <p:nvPr/>
+        </p:nvSpPr>
+        <p:spPr>
+          <a:xfrm>
+            <a:off x="368877" y="1017725"/>
+            <a:ext cx="4756016" cy="1600438"/>
+          </a:xfrm>
+          <a:prstGeom prst="rect">
+            <a:avLst/>
+          </a:prstGeom>
+          <a:noFill/>
+        </p:spPr>
+        <p:txBody>
+          <a:bodyPr wrap="square" rtlCol="0">
+            <a:spAutoFit/>
+          </a:bodyPr>
+          <a:lstStyle/>
+          <a:p>
+            <a:r>
+              <a:rPr lang="ru-RU" dirty="0">
+                <a:latin typeface="Times New Roman" panose="02020603050405020304" pitchFamily="18" charset="0"/>
+                <a:cs typeface="Times New Roman" panose="02020603050405020304" pitchFamily="18" charset="0"/>
+              </a:rPr>
+              <a:t>Каждую минуту алгоритм проверяет уже открытые позиции</a:t>
+            </a:r>
+          </a:p>
+          <a:p>
+            <a:r>
+              <a:rPr lang="ru-RU" dirty="0">
+                <a:latin typeface="Times New Roman" panose="02020603050405020304" pitchFamily="18" charset="0"/>
+                <a:cs typeface="Times New Roman" panose="02020603050405020304" pitchFamily="18" charset="0"/>
+              </a:rPr>
+              <a:t>Позиция закрывается, если выполняется одно из следующих правил:</a:t>
+            </a:r>
+          </a:p>
+          <a:p>
+            <a:pPr marL="342900" indent="-342900">
+              <a:buFont typeface="+mj-lt"/>
+              <a:buAutoNum type="arabicPeriod"/>
+            </a:pPr>
+            <a:r>
+              <a:rPr lang="ru-RU" dirty="0">
+                <a:latin typeface="Times New Roman" panose="02020603050405020304" pitchFamily="18" charset="0"/>
+                <a:cs typeface="Times New Roman" panose="02020603050405020304" pitchFamily="18" charset="0"/>
+              </a:rPr>
+              <a:t>Прогноз удержания недостаточен для продолжения позиции.</a:t>
+            </a:r>
+          </a:p>
+          <a:p>
+            <a:pPr marL="342900" indent="-342900">
+              <a:buFont typeface="+mj-lt"/>
+              <a:buAutoNum type="arabicPeriod"/>
+            </a:pPr>
+            <a:r>
+              <a:rPr lang="ru-RU" dirty="0">
+                <a:latin typeface="Times New Roman" panose="02020603050405020304" pitchFamily="18" charset="0"/>
+                <a:cs typeface="Times New Roman" panose="02020603050405020304" pitchFamily="18" charset="0"/>
+              </a:rPr>
+              <a:t>Достигнут лимит удержания позиции </a:t>
+            </a:r>
+            <a:r>
+              <a:rPr lang="ru-RU" dirty="0">
+                <a:solidFill>
+                  <a:schemeClr val="tx1">
+                    <a:lumMod val="50000"/>
+                    <a:lumOff val="50000"/>
+                  </a:schemeClr>
+                </a:solidFill>
+                <a:latin typeface="Times New Roman" panose="02020603050405020304" pitchFamily="18" charset="0"/>
+                <a:cs typeface="Times New Roman" panose="02020603050405020304" pitchFamily="18" charset="0"/>
+              </a:rPr>
+              <a:t>—</a:t>
+            </a:r>
+            <a:r>
+              <a:rPr lang="ru-RU" dirty="0">
+                <a:latin typeface="Times New Roman" panose="02020603050405020304" pitchFamily="18" charset="0"/>
+                <a:cs typeface="Times New Roman" panose="02020603050405020304" pitchFamily="18" charset="0"/>
+              </a:rPr>
+              <a:t> 30 минут</a:t>
+            </a:r>
+            <a:r>
+              <a:rPr lang="en-US" dirty="0">
+                <a:latin typeface="Times New Roman" panose="02020603050405020304" pitchFamily="18" charset="0"/>
+                <a:cs typeface="Times New Roman" panose="02020603050405020304" pitchFamily="18" charset="0"/>
+              </a:rPr>
+              <a:t>;</a:t>
+            </a:r>
+            <a:endParaRPr lang="ru-RU" dirty="0">
+              <a:latin typeface="Times New Roman" panose="02020603050405020304" pitchFamily="18" charset="0"/>
+              <a:cs typeface="Times New Roman" panose="02020603050405020304" pitchFamily="18" charset="0"/>
+            </a:endParaRPr>
+          </a:p>
+        </p:txBody>
+      </p:sp>
+      <p:sp>
+        <p:nvSpPr>
+          <p:cNvPr id="7" name="TextBox 6">
+            <a:extLst>
+              <a:ext uri="{FF2B5EF4-FFF2-40B4-BE49-F238E27FC236}">
+                <a16:creationId xmlns:a16="http://schemas.microsoft.com/office/drawing/2014/main" id="{55764591-A864-C706-2CBE-5A01B2EFC76F}"/>
+              </a:ext>
+            </a:extLst>
+          </p:cNvPr>
+          <p:cNvSpPr txBox="1"/>
+          <p:nvPr/>
+        </p:nvSpPr>
+        <p:spPr>
+          <a:xfrm>
+            <a:off x="441614" y="2614672"/>
+            <a:ext cx="3673187" cy="523220"/>
+          </a:xfrm>
+          <a:prstGeom prst="rect">
+            <a:avLst/>
+          </a:prstGeom>
+          <a:noFill/>
+        </p:spPr>
+        <p:txBody>
+          <a:bodyPr wrap="square" rtlCol="0">
+            <a:spAutoFit/>
+          </a:bodyPr>
+          <a:lstStyle/>
+          <a:p>
+            <a:r>
+              <a:rPr lang="ru-RU" dirty="0">
+                <a:latin typeface="Times New Roman" panose="02020603050405020304" pitchFamily="18" charset="0"/>
+                <a:cs typeface="Times New Roman" panose="02020603050405020304" pitchFamily="18" charset="0"/>
+              </a:rPr>
+              <a:t>После этого проверяется возможность открытия новых позиций.</a:t>
+            </a:r>
+          </a:p>
+        </p:txBody>
+      </p:sp>
+      <p:sp>
+        <p:nvSpPr>
+          <p:cNvPr id="8" name="TextBox 7">
+            <a:extLst>
+              <a:ext uri="{FF2B5EF4-FFF2-40B4-BE49-F238E27FC236}">
+                <a16:creationId xmlns:a16="http://schemas.microsoft.com/office/drawing/2014/main" id="{6C9CE6BD-DE74-6BE1-D7FE-39DE76E56073}"/>
+              </a:ext>
+            </a:extLst>
+          </p:cNvPr>
+          <p:cNvSpPr txBox="1"/>
+          <p:nvPr/>
+        </p:nvSpPr>
+        <p:spPr>
+          <a:xfrm>
+            <a:off x="368877" y="3187372"/>
+            <a:ext cx="3745924" cy="1815882"/>
+          </a:xfrm>
+          <a:prstGeom prst="rect">
+            <a:avLst/>
+          </a:prstGeom>
+          <a:noFill/>
+        </p:spPr>
+        <p:txBody>
+          <a:bodyPr wrap="square" rtlCol="0">
+            <a:spAutoFit/>
+          </a:bodyPr>
+          <a:lstStyle/>
+          <a:p>
+            <a:r>
+              <a:rPr lang="ru-RU" dirty="0">
+                <a:latin typeface="Times New Roman" panose="02020603050405020304" pitchFamily="18" charset="0"/>
+                <a:cs typeface="Times New Roman" panose="02020603050405020304" pitchFamily="18" charset="0"/>
+              </a:rPr>
+              <a:t>Покупка выполняется, если выполнены все следующие условия:</a:t>
+            </a:r>
+          </a:p>
+          <a:p>
+            <a:pPr marL="342900" indent="-342900">
+              <a:buFont typeface="+mj-lt"/>
+              <a:buAutoNum type="arabicPeriod"/>
+            </a:pPr>
+            <a:r>
+              <a:rPr lang="ru-RU" dirty="0">
+                <a:latin typeface="Times New Roman" panose="02020603050405020304" pitchFamily="18" charset="0"/>
+                <a:cs typeface="Times New Roman" panose="02020603050405020304" pitchFamily="18" charset="0"/>
+              </a:rPr>
+              <a:t>Прогноз входа выше экспериментально подобранного порога;</a:t>
+            </a:r>
+          </a:p>
+          <a:p>
+            <a:pPr marL="342900" indent="-342900">
+              <a:buFont typeface="+mj-lt"/>
+              <a:buAutoNum type="arabicPeriod"/>
+            </a:pPr>
+            <a:r>
+              <a:rPr lang="ru-RU" dirty="0">
+                <a:latin typeface="Times New Roman" panose="02020603050405020304" pitchFamily="18" charset="0"/>
+                <a:cs typeface="Times New Roman" panose="02020603050405020304" pitchFamily="18" charset="0"/>
+              </a:rPr>
+              <a:t>Ожидаемая чистая доходность после издержек положительная;</a:t>
+            </a:r>
+          </a:p>
+          <a:p>
+            <a:pPr marL="342900" indent="-342900">
+              <a:buFont typeface="+mj-lt"/>
+              <a:buAutoNum type="arabicPeriod"/>
+            </a:pPr>
+            <a:r>
+              <a:rPr lang="ru-RU" dirty="0">
+                <a:latin typeface="Times New Roman" panose="02020603050405020304" pitchFamily="18" charset="0"/>
+                <a:cs typeface="Times New Roman" panose="02020603050405020304" pitchFamily="18" charset="0"/>
+              </a:rPr>
+              <a:t>Не нарушены ограничения по капиталу и числу позиций.</a:t>
+            </a:r>
+          </a:p>
+        </p:txBody>
+      </p:sp>
+      <p:sp>
+        <p:nvSpPr>
+          <p:cNvPr id="2" name="Номер слайда 1">
+            <a:extLst>
+              <a:ext uri="{FF2B5EF4-FFF2-40B4-BE49-F238E27FC236}">
+                <a16:creationId xmlns:a16="http://schemas.microsoft.com/office/drawing/2014/main" id="{BB31E7D5-67C9-3255-2463-94EBCBAB4CCF}"/>
+              </a:ext>
+            </a:extLst>
+          </p:cNvPr>
+          <p:cNvSpPr>
+            <a:spLocks noGrp="1"/>
+          </p:cNvSpPr>
+          <p:nvPr>
+            <p:ph type="sldNum" idx="12"/>
+          </p:nvPr>
+        </p:nvSpPr>
+        <p:spPr/>
+        <p:txBody>
+          <a:bodyPr/>
+          <a:lstStyle/>
+          <a:p>
+            <a:pPr marL="0" lvl="0" indent="0" algn="r" rtl="0">
+              <a:spcBef>
+                <a:spcPts val="0"/>
+              </a:spcBef>
+              <a:spcAft>
+                <a:spcPts val="0"/>
+              </a:spcAft>
+              <a:buNone/>
+            </a:pPr>
+            <a:fld id="{00000000-1234-1234-1234-123412341234}" type="slidenum">
+              <a:rPr lang="ru" smtClean="0">
+                <a:latin typeface="Times New Roman" panose="02020603050405020304" pitchFamily="18" charset="0"/>
+                <a:cs typeface="Times New Roman" panose="02020603050405020304" pitchFamily="18" charset="0"/>
+              </a:rPr>
+              <a:t>9</a:t>
+            </a:fld>
+            <a:endParaRPr lang="ru">
+              <a:latin typeface="Times New Roman" panose="02020603050405020304" pitchFamily="18" charset="0"/>
+              <a:cs typeface="Times New Roman" panose="02020603050405020304" pitchFamily="18" charset="0"/>
+            </a:endParaRPr>
+          </a:p>
+        </p:txBody>
+      </p:sp>
     </p:spTree>
+    <p:extLst>
+      <p:ext uri="{BB962C8B-B14F-4D97-AF65-F5344CB8AC3E}">
+        <p14:creationId xmlns:p14="http://schemas.microsoft.com/office/powerpoint/2010/main" val="1763201188"/>
+      </p:ext>
+    </p:extLst>
   </p:cSld>
   <p:clrMapOvr>
     <a:masterClrMapping/>

--- a/Презентация.pptx
+++ b/Презентация.pptx
@@ -9330,7 +9330,7 @@
                 <a:latin typeface="Times New Roman" panose="02020603050405020304" pitchFamily="18" charset="0"/>
                 <a:cs typeface="Times New Roman" panose="02020603050405020304" pitchFamily="18" charset="0"/>
               </a:rPr>
-              <a:t>Прогноз цены сам по себе недостаточен: необходимо преобразовать прогноз в торговое действие с учётом реальных ограничений рынка, поэтому в работе рассматривается полный контур: прогнозирование и принятие решений.</a:t>
+              <a:t>Прогноз цены сам по себе недостаточен: необходимо преобразовать прогноз в торговое действие с учётом реальных ограничений рынка. Поэтому в работе разделяются прогнозирование и принятие решений.</a:t>
             </a:r>
           </a:p>
         </p:txBody>
@@ -9866,7 +9866,7 @@
                 <a:latin typeface="Times New Roman" panose="02020603050405020304" pitchFamily="18" charset="0"/>
                 <a:cs typeface="Times New Roman" panose="02020603050405020304" pitchFamily="18" charset="0"/>
               </a:rPr>
-              <a:t>потенциально имели более высокую предсказательную силу.</a:t>
+              <a:t>потенциально имеют более высокую предсказательную силу.</a:t>
             </a:r>
           </a:p>
           <a:p>
@@ -11021,10 +11021,10 @@
       </p:sp>
       <p:pic>
         <p:nvPicPr>
-          <p:cNvPr id="5" name="Рисунок 4" descr="PlantUML diagram">
+          <p:cNvPr id="3" name="Рисунок 2" descr="PlantUML diagram">
             <a:extLst>
               <a:ext uri="{FF2B5EF4-FFF2-40B4-BE49-F238E27FC236}">
-                <a16:creationId xmlns:a16="http://schemas.microsoft.com/office/drawing/2014/main" id="{0FB64039-4EC0-CC18-F741-FAED8004046D}"/>
+                <a16:creationId xmlns:a16="http://schemas.microsoft.com/office/drawing/2014/main" id="{35A785DF-B5BD-2F83-B864-1DB5A6E5430E}"/>
               </a:ext>
             </a:extLst>
           </p:cNvPr>
@@ -11041,8 +11041,8 @@
         </p:blipFill>
         <p:spPr>
           <a:xfrm>
-            <a:off x="4571996" y="1148400"/>
-            <a:ext cx="3911759" cy="3995099"/>
+            <a:off x="4571997" y="1148400"/>
+            <a:ext cx="3807512" cy="3995099"/>
           </a:xfrm>
           <a:prstGeom prst="rect">
             <a:avLst/>
@@ -11725,7 +11725,7 @@
                 <a:latin typeface="Times New Roman" panose="02020603050405020304" pitchFamily="18" charset="0"/>
                 <a:cs typeface="Times New Roman" panose="02020603050405020304" pitchFamily="18" charset="0"/>
               </a:rPr>
-              <a:t>Каждую минуту алгоритм проверяет уже открытые позиции</a:t>
+              <a:t>Каждую минуту алгоритм принятия решений проверяет уже открытые позиции.</a:t>
             </a:r>
           </a:p>
           <a:p>
@@ -11747,7 +11747,7 @@
                 <a:latin typeface="Times New Roman" panose="02020603050405020304" pitchFamily="18" charset="0"/>
                 <a:cs typeface="Times New Roman" panose="02020603050405020304" pitchFamily="18" charset="0"/>
               </a:rPr>
-              <a:t>Прогноз удержания недостаточен для продолжения позиции.</a:t>
+              <a:t>Прогноз удержания недостаточен для продолжения позиции;</a:t>
             </a:r>
           </a:p>
           <a:p>
@@ -11780,19 +11780,8 @@
                 <a:latin typeface="Times New Roman" panose="02020603050405020304" pitchFamily="18" charset="0"/>
                 <a:cs typeface="Times New Roman" panose="02020603050405020304" pitchFamily="18" charset="0"/>
               </a:rPr>
-              <a:t> 30 минут</a:t>
+              <a:t> 30 минут.</a:t>
             </a:r>
-            <a:r>
-              <a:rPr lang="en-US" dirty="0">
-                <a:latin typeface="Times New Roman" panose="02020603050405020304" pitchFamily="18" charset="0"/>
-                <a:cs typeface="Times New Roman" panose="02020603050405020304" pitchFamily="18" charset="0"/>
-              </a:rPr>
-              <a:t>;</a:t>
-            </a:r>
-            <a:endParaRPr lang="ru-RU" dirty="0">
-              <a:latin typeface="Times New Roman" panose="02020603050405020304" pitchFamily="18" charset="0"/>
-              <a:cs typeface="Times New Roman" panose="02020603050405020304" pitchFamily="18" charset="0"/>
-            </a:endParaRPr>
           </a:p>
         </p:txBody>
       </p:sp>
